--- a/deliverables/vk-workspace-columns.pptx
+++ b/deliverables/vk-workspace-columns.pptx
@@ -1501,7 +1501,7 @@
           <a:lstStyle/>
           <a:p>
             <a:r>
-              <a:t>Слайд представляет инициативу по внедрению ИИ-помощника во внутренний портал для автоматизации ответов на вопросы сотрудников и сокращения времени поиска инструкций.</a:t>
+              <a:t>Этот слайд представляет инициативу по внедрению ИИ-помощника во внутренний портал для автоматизации ответов на вопросы по регламентам и снижения нагрузки на службу поддержки.</a:t>
             </a:r>
           </a:p>
         </p:txBody>
@@ -1571,7 +1571,7 @@
           <a:lstStyle/>
           <a:p>
             <a:r>
-              <a:t>Сейчас поиск инструкции занимает до 30 минут, а треть обращений дублируется.</a:t>
+              <a:t>Сейчас поиск информации отнимает до 30 минут, а треть обращений дублируются, что создает лишнюю нагрузку на поддержку.</a:t>
             </a:r>
           </a:p>
         </p:txBody>
@@ -1641,7 +1641,7 @@
           <a:lstStyle/>
           <a:p>
             <a:r>
-              <a:t>Пилотный проект затронет 150 сотрудников двух подразделений, которые ежедневно сталкиваются с поиском инструкций.</a:t>
+              <a:t>Сейчас 150 сотрудников двух подразделений тратят до 30 минут на поиск инструкций.</a:t>
             </a:r>
           </a:p>
         </p:txBody>
@@ -1711,7 +1711,7 @@
           <a:lstStyle/>
           <a:p>
             <a:r>
-              <a:t>ИИ-помощник обеспечивает мгновенный доступ к регламентам, предоставляя ссылки на оригинальные документы.</a:t>
+              <a:t>ИИ-помощник автоматически генерирует ответ на основе регламентов и сразу указывает ссылку на документ, сокращая время поиска.</a:t>
             </a:r>
           </a:p>
         </p:txBody>
@@ -1781,7 +1781,7 @@
           <a:lstStyle/>
           <a:p>
             <a:r>
-              <a:t>Система работает исключительно внутри контура компании, гарантируя, что документы не покидают внутреннюю инфраструктуру.</a:t>
+              <a:t>Ключевое преимущество системы — строгая изоляция данных: все запросы обрабатываются внутри контура, а исходные документы никогда не покидают корпоративную сеть.</a:t>
             </a:r>
           </a:p>
         </p:txBody>
@@ -1851,7 +1851,7 @@
           <a:lstStyle/>
           <a:p>
             <a:r>
-              <a:t>Если ИИ не находит подтверждённый ответ, вопрос автоматически передаётся специалисту поддержки вместе с контекстом запроса.</a:t>
+              <a:t>Если ИИ не находит ответ в регламентах, запрос автоматически передаётся специалисту с полным контекстом диалога.</a:t>
             </a:r>
           </a:p>
         </p:txBody>
@@ -1921,7 +1921,7 @@
           <a:lstStyle/>
           <a:p>
             <a:r>
-              <a:t>Пилот фокусируется только на двух подразделениях, чтобы исключить влияние глобальных настроек и внешних CRM.</a:t>
+              <a:t>Этот слайд определяет ключевые метрики успеха пилота: скорость поиска и автономность сотрудников, которые мы будем измерять в течение 6 недель.</a:t>
             </a:r>
           </a:p>
         </p:txBody>
@@ -1991,7 +1991,7 @@
           <a:lstStyle/>
           <a:p>
             <a:r>
-              <a:t>В рамках пилота мы фокусируемся только на базовом функционале ИИ-помощника. Изменения глобальных настроек портала и интеграция с внешними CRM не входят в текущий план.</a:t>
+              <a:t>Пилотный запуск ограничен двумя подразделениями и 150 сотрудниками в течение 6 недель.</a:t>
             </a:r>
           </a:p>
         </p:txBody>
@@ -2061,7 +2061,7 @@
           <a:lstStyle/>
           <a:p>
             <a:r>
-              <a:t>Метрики успеха пилота включают сокращение времени поиска ответа и рост доли обращений, закрытых без участия специалиста.</a:t>
+              <a:t>Для оценки эффективности пилота мы будем отслеживать время поиска ответа и долю обращений, закрытых ИИ без участия специалиста.</a:t>
             </a:r>
           </a:p>
         </p:txBody>
@@ -2131,7 +2131,7 @@
           <a:lstStyle/>
           <a:p>
             <a:r>
-              <a:t>Пилот длится 6 недель с командой из трех человек для проверки гипотезы.</a:t>
+              <a:t>Архитектура системы полностью изолирована внутри контура компании, что исключает риск утечки документов наружу.</a:t>
             </a:r>
           </a:p>
         </p:txBody>
@@ -2201,7 +2201,7 @@
           <a:lstStyle/>
           <a:p>
             <a:r>
-              <a:t>Ключевой риск — низкое качество ответов, который мы снижаем обучением модели на внутренних регламентах.</a:t>
+              <a:t>Для старта пилота необходимо ваше одобрение, выделение команды из трех человек и утверждение бюджета.</a:t>
             </a:r>
           </a:p>
         </p:txBody>
@@ -2271,7 +2271,7 @@
           <a:lstStyle/>
           <a:p>
             <a:r>
-              <a:t>Просим утвердить пилотный запуск и выделить команду из трех специалистов для реализации.</a:t>
+              <a:t>Для старта проекта необходимо утвердить бюджет и выделить команду из трех человек.</a:t>
             </a:r>
           </a:p>
         </p:txBody>
@@ -5408,799 +5408,6 @@
 </p:sldLayout>
 </file>
 
-<file path=ppt/slideLayouts/slideLayout9.xml><?xml version="1.0" encoding="utf-8"?>
-<p:sldLayout xmlns:a="http://schemas.openxmlformats.org/drawingml/2006/main" xmlns:r="http://schemas.openxmlformats.org/officeDocument/2006/relationships" xmlns:mc="http://schemas.openxmlformats.org/markup-compatibility/2006" xmlns:mv="urn:schemas-microsoft-com:mac:vml" xmlns:p="http://schemas.openxmlformats.org/presentationml/2006/main" xmlns:c="http://schemas.openxmlformats.org/drawingml/2006/chart" xmlns:dgm="http://schemas.openxmlformats.org/drawingml/2006/diagram" xmlns:o="urn:schemas-microsoft-com:office:office" xmlns:v="urn:schemas-microsoft-com:vml" xmlns:pvml="urn:schemas-microsoft-com:office:powerpoint" xmlns:com="http://schemas.openxmlformats.org/drawingml/2006/compatibility" xmlns:p14="http://schemas.microsoft.com/office/powerpoint/2010/main" xmlns:p15="http://schemas.microsoft.com/office/powerpoint/2012/main" xmlns:ahyp="http://schemas.microsoft.com/office/drawing/2018/hyperlinkcolor" matchingName="14_Титульный слайд">
-  <p:cSld name="14_Титульный слайд">
-    <p:bg>
-      <p:bgPr>
-        <a:solidFill>
-          <a:schemeClr val="dk1"/>
-        </a:solidFill>
-      </p:bgPr>
-    </p:bg>
-    <p:spTree>
-      <p:nvGrpSpPr>
-        <p:cNvPr id="234" name="Shape 234"/>
-        <p:cNvGrpSpPr/>
-        <p:nvPr/>
-      </p:nvGrpSpPr>
-      <p:grpSpPr>
-        <a:xfrm>
-          <a:off x="0" y="0"/>
-          <a:ext cx="0" cy="0"/>
-          <a:chOff x="0" y="0"/>
-          <a:chExt cx="0" cy="0"/>
-        </a:xfrm>
-      </p:grpSpPr>
-      <p:pic>
-        <p:nvPicPr>
-          <p:cNvPr descr=" " id="235" name="Google Shape;235;p10"/>
-          <p:cNvPicPr preferRelativeResize="0"/>
-          <p:nvPr/>
-        </p:nvPicPr>
-        <p:blipFill rotWithShape="1">
-          <a:blip r:embed="rId2">
-            <a:alphaModFix/>
-          </a:blip>
-          <a:srcRect b="0" l="0" r="0" t="0"/>
-          <a:stretch/>
-        </p:blipFill>
-        <p:spPr>
-          <a:xfrm>
-            <a:off x="6096000" y="5844358"/>
-            <a:ext cx="6096000" cy="1013642"/>
-          </a:xfrm>
-          <a:prstGeom prst="rect">
-            <a:avLst/>
-          </a:prstGeom>
-          <a:noFill/>
-          <a:ln>
-            <a:noFill/>
-          </a:ln>
-        </p:spPr>
-      </p:pic>
-      <p:grpSp>
-        <p:nvGrpSpPr>
-          <p:cNvPr id="236" name="Google Shape;236;p10"/>
-          <p:cNvGrpSpPr/>
-          <p:nvPr/>
-        </p:nvGrpSpPr>
-        <p:grpSpPr>
-          <a:xfrm>
-            <a:off x="224842" y="-74145"/>
-            <a:ext cx="12188171" cy="64326"/>
-            <a:chOff x="-2" y="-2"/>
-            <a:chExt cx="12188169" cy="64324"/>
-          </a:xfrm>
-        </p:grpSpPr>
-        <p:cxnSp>
-          <p:nvCxnSpPr>
-            <p:cNvPr id="237" name="Google Shape;237;p10"/>
-            <p:cNvCxnSpPr/>
-            <p:nvPr/>
-          </p:nvCxnSpPr>
-          <p:spPr>
-            <a:xfrm flipH="1">
-              <a:off x="-2" y="-2"/>
-              <a:ext cx="7" cy="64324"/>
-            </a:xfrm>
-            <a:prstGeom prst="straightConnector1">
-              <a:avLst/>
-            </a:prstGeom>
-            <a:noFill/>
-            <a:ln cap="flat" cmpd="sng" w="9525">
-              <a:solidFill>
-                <a:srgbClr val="808080"/>
-              </a:solidFill>
-              <a:prstDash val="solid"/>
-              <a:miter lim="8000"/>
-              <a:headEnd len="sm" w="sm" type="none"/>
-              <a:tailEnd len="sm" w="sm" type="none"/>
-            </a:ln>
-          </p:spPr>
-        </p:cxnSp>
-        <p:cxnSp>
-          <p:nvCxnSpPr>
-            <p:cNvPr id="238" name="Google Shape;238;p10"/>
-            <p:cNvCxnSpPr/>
-            <p:nvPr/>
-          </p:nvCxnSpPr>
-          <p:spPr>
-            <a:xfrm>
-              <a:off x="677118" y="-2"/>
-              <a:ext cx="7" cy="64324"/>
-            </a:xfrm>
-            <a:prstGeom prst="straightConnector1">
-              <a:avLst/>
-            </a:prstGeom>
-            <a:noFill/>
-            <a:ln cap="flat" cmpd="sng" w="9525">
-              <a:solidFill>
-                <a:srgbClr val="808080"/>
-              </a:solidFill>
-              <a:prstDash val="solid"/>
-              <a:miter lim="8000"/>
-              <a:headEnd len="sm" w="sm" type="none"/>
-              <a:tailEnd len="sm" w="sm" type="none"/>
-            </a:ln>
-          </p:spPr>
-        </p:cxnSp>
-        <p:cxnSp>
-          <p:nvCxnSpPr>
-            <p:cNvPr id="239" name="Google Shape;239;p10"/>
-            <p:cNvCxnSpPr/>
-            <p:nvPr/>
-          </p:nvCxnSpPr>
-          <p:spPr>
-            <a:xfrm>
-              <a:off x="1354241" y="-2"/>
-              <a:ext cx="7" cy="64324"/>
-            </a:xfrm>
-            <a:prstGeom prst="straightConnector1">
-              <a:avLst/>
-            </a:prstGeom>
-            <a:noFill/>
-            <a:ln cap="flat" cmpd="sng" w="9525">
-              <a:solidFill>
-                <a:srgbClr val="808080"/>
-              </a:solidFill>
-              <a:prstDash val="solid"/>
-              <a:miter lim="8000"/>
-              <a:headEnd len="sm" w="sm" type="none"/>
-              <a:tailEnd len="sm" w="sm" type="none"/>
-            </a:ln>
-          </p:spPr>
-        </p:cxnSp>
-        <p:cxnSp>
-          <p:nvCxnSpPr>
-            <p:cNvPr id="240" name="Google Shape;240;p10"/>
-            <p:cNvCxnSpPr/>
-            <p:nvPr/>
-          </p:nvCxnSpPr>
-          <p:spPr>
-            <a:xfrm>
-              <a:off x="2031360" y="-2"/>
-              <a:ext cx="7" cy="64324"/>
-            </a:xfrm>
-            <a:prstGeom prst="straightConnector1">
-              <a:avLst/>
-            </a:prstGeom>
-            <a:noFill/>
-            <a:ln cap="flat" cmpd="sng" w="9525">
-              <a:solidFill>
-                <a:srgbClr val="808080"/>
-              </a:solidFill>
-              <a:prstDash val="solid"/>
-              <a:miter lim="8000"/>
-              <a:headEnd len="sm" w="sm" type="none"/>
-              <a:tailEnd len="sm" w="sm" type="none"/>
-            </a:ln>
-          </p:spPr>
-        </p:cxnSp>
-        <p:cxnSp>
-          <p:nvCxnSpPr>
-            <p:cNvPr id="241" name="Google Shape;241;p10"/>
-            <p:cNvCxnSpPr/>
-            <p:nvPr/>
-          </p:nvCxnSpPr>
-          <p:spPr>
-            <a:xfrm>
-              <a:off x="2708479" y="-2"/>
-              <a:ext cx="7" cy="64324"/>
-            </a:xfrm>
-            <a:prstGeom prst="straightConnector1">
-              <a:avLst/>
-            </a:prstGeom>
-            <a:noFill/>
-            <a:ln cap="flat" cmpd="sng" w="9525">
-              <a:solidFill>
-                <a:srgbClr val="808080"/>
-              </a:solidFill>
-              <a:prstDash val="solid"/>
-              <a:miter lim="8000"/>
-              <a:headEnd len="sm" w="sm" type="none"/>
-              <a:tailEnd len="sm" w="sm" type="none"/>
-            </a:ln>
-          </p:spPr>
-        </p:cxnSp>
-        <p:cxnSp>
-          <p:nvCxnSpPr>
-            <p:cNvPr id="242" name="Google Shape;242;p10"/>
-            <p:cNvCxnSpPr/>
-            <p:nvPr/>
-          </p:nvCxnSpPr>
-          <p:spPr>
-            <a:xfrm>
-              <a:off x="3385598" y="-2"/>
-              <a:ext cx="7" cy="64324"/>
-            </a:xfrm>
-            <a:prstGeom prst="straightConnector1">
-              <a:avLst/>
-            </a:prstGeom>
-            <a:noFill/>
-            <a:ln cap="flat" cmpd="sng" w="9525">
-              <a:solidFill>
-                <a:srgbClr val="808080"/>
-              </a:solidFill>
-              <a:prstDash val="solid"/>
-              <a:miter lim="8000"/>
-              <a:headEnd len="sm" w="sm" type="none"/>
-              <a:tailEnd len="sm" w="sm" type="none"/>
-            </a:ln>
-          </p:spPr>
-        </p:cxnSp>
-        <p:cxnSp>
-          <p:nvCxnSpPr>
-            <p:cNvPr id="243" name="Google Shape;243;p10"/>
-            <p:cNvCxnSpPr/>
-            <p:nvPr/>
-          </p:nvCxnSpPr>
-          <p:spPr>
-            <a:xfrm>
-              <a:off x="4062717" y="-2"/>
-              <a:ext cx="7" cy="64324"/>
-            </a:xfrm>
-            <a:prstGeom prst="straightConnector1">
-              <a:avLst/>
-            </a:prstGeom>
-            <a:noFill/>
-            <a:ln cap="flat" cmpd="sng" w="9525">
-              <a:solidFill>
-                <a:srgbClr val="808080"/>
-              </a:solidFill>
-              <a:prstDash val="solid"/>
-              <a:miter lim="8000"/>
-              <a:headEnd len="sm" w="sm" type="none"/>
-              <a:tailEnd len="sm" w="sm" type="none"/>
-            </a:ln>
-          </p:spPr>
-        </p:cxnSp>
-        <p:cxnSp>
-          <p:nvCxnSpPr>
-            <p:cNvPr id="244" name="Google Shape;244;p10"/>
-            <p:cNvCxnSpPr/>
-            <p:nvPr/>
-          </p:nvCxnSpPr>
-          <p:spPr>
-            <a:xfrm>
-              <a:off x="4739836" y="-2"/>
-              <a:ext cx="7" cy="64324"/>
-            </a:xfrm>
-            <a:prstGeom prst="straightConnector1">
-              <a:avLst/>
-            </a:prstGeom>
-            <a:noFill/>
-            <a:ln cap="flat" cmpd="sng" w="9525">
-              <a:solidFill>
-                <a:srgbClr val="808080"/>
-              </a:solidFill>
-              <a:prstDash val="solid"/>
-              <a:miter lim="8000"/>
-              <a:headEnd len="sm" w="sm" type="none"/>
-              <a:tailEnd len="sm" w="sm" type="none"/>
-            </a:ln>
-          </p:spPr>
-        </p:cxnSp>
-        <p:cxnSp>
-          <p:nvCxnSpPr>
-            <p:cNvPr id="245" name="Google Shape;245;p10"/>
-            <p:cNvCxnSpPr/>
-            <p:nvPr/>
-          </p:nvCxnSpPr>
-          <p:spPr>
-            <a:xfrm>
-              <a:off x="5416955" y="-2"/>
-              <a:ext cx="7" cy="64324"/>
-            </a:xfrm>
-            <a:prstGeom prst="straightConnector1">
-              <a:avLst/>
-            </a:prstGeom>
-            <a:noFill/>
-            <a:ln cap="flat" cmpd="sng" w="9525">
-              <a:solidFill>
-                <a:srgbClr val="808080"/>
-              </a:solidFill>
-              <a:prstDash val="solid"/>
-              <a:miter lim="8000"/>
-              <a:headEnd len="sm" w="sm" type="none"/>
-              <a:tailEnd len="sm" w="sm" type="none"/>
-            </a:ln>
-          </p:spPr>
-        </p:cxnSp>
-        <p:cxnSp>
-          <p:nvCxnSpPr>
-            <p:cNvPr id="246" name="Google Shape;246;p10"/>
-            <p:cNvCxnSpPr/>
-            <p:nvPr/>
-          </p:nvCxnSpPr>
-          <p:spPr>
-            <a:xfrm>
-              <a:off x="6094077" y="-2"/>
-              <a:ext cx="7" cy="64324"/>
-            </a:xfrm>
-            <a:prstGeom prst="straightConnector1">
-              <a:avLst/>
-            </a:prstGeom>
-            <a:noFill/>
-            <a:ln cap="flat" cmpd="sng" w="9525">
-              <a:solidFill>
-                <a:srgbClr val="808080"/>
-              </a:solidFill>
-              <a:prstDash val="solid"/>
-              <a:miter lim="8000"/>
-              <a:headEnd len="sm" w="sm" type="none"/>
-              <a:tailEnd len="sm" w="sm" type="none"/>
-            </a:ln>
-          </p:spPr>
-        </p:cxnSp>
-        <p:cxnSp>
-          <p:nvCxnSpPr>
-            <p:cNvPr id="247" name="Google Shape;247;p10"/>
-            <p:cNvCxnSpPr/>
-            <p:nvPr/>
-          </p:nvCxnSpPr>
-          <p:spPr>
-            <a:xfrm>
-              <a:off x="6771195" y="-2"/>
-              <a:ext cx="7" cy="64324"/>
-            </a:xfrm>
-            <a:prstGeom prst="straightConnector1">
-              <a:avLst/>
-            </a:prstGeom>
-            <a:noFill/>
-            <a:ln cap="flat" cmpd="sng" w="9525">
-              <a:solidFill>
-                <a:srgbClr val="808080"/>
-              </a:solidFill>
-              <a:prstDash val="solid"/>
-              <a:miter lim="8000"/>
-              <a:headEnd len="sm" w="sm" type="none"/>
-              <a:tailEnd len="sm" w="sm" type="none"/>
-            </a:ln>
-          </p:spPr>
-        </p:cxnSp>
-        <p:cxnSp>
-          <p:nvCxnSpPr>
-            <p:cNvPr id="248" name="Google Shape;248;p10"/>
-            <p:cNvCxnSpPr/>
-            <p:nvPr/>
-          </p:nvCxnSpPr>
-          <p:spPr>
-            <a:xfrm>
-              <a:off x="7448315" y="-2"/>
-              <a:ext cx="7" cy="64324"/>
-            </a:xfrm>
-            <a:prstGeom prst="straightConnector1">
-              <a:avLst/>
-            </a:prstGeom>
-            <a:noFill/>
-            <a:ln cap="flat" cmpd="sng" w="9525">
-              <a:solidFill>
-                <a:srgbClr val="808080"/>
-              </a:solidFill>
-              <a:prstDash val="solid"/>
-              <a:miter lim="8000"/>
-              <a:headEnd len="sm" w="sm" type="none"/>
-              <a:tailEnd len="sm" w="sm" type="none"/>
-            </a:ln>
-          </p:spPr>
-        </p:cxnSp>
-        <p:cxnSp>
-          <p:nvCxnSpPr>
-            <p:cNvPr id="249" name="Google Shape;249;p10"/>
-            <p:cNvCxnSpPr/>
-            <p:nvPr/>
-          </p:nvCxnSpPr>
-          <p:spPr>
-            <a:xfrm>
-              <a:off x="8125435" y="-2"/>
-              <a:ext cx="7" cy="64324"/>
-            </a:xfrm>
-            <a:prstGeom prst="straightConnector1">
-              <a:avLst/>
-            </a:prstGeom>
-            <a:noFill/>
-            <a:ln cap="flat" cmpd="sng" w="9525">
-              <a:solidFill>
-                <a:srgbClr val="808080"/>
-              </a:solidFill>
-              <a:prstDash val="solid"/>
-              <a:miter lim="8000"/>
-              <a:headEnd len="sm" w="sm" type="none"/>
-              <a:tailEnd len="sm" w="sm" type="none"/>
-            </a:ln>
-          </p:spPr>
-        </p:cxnSp>
-        <p:cxnSp>
-          <p:nvCxnSpPr>
-            <p:cNvPr id="250" name="Google Shape;250;p10"/>
-            <p:cNvCxnSpPr/>
-            <p:nvPr/>
-          </p:nvCxnSpPr>
-          <p:spPr>
-            <a:xfrm>
-              <a:off x="8802554" y="-2"/>
-              <a:ext cx="7" cy="64324"/>
-            </a:xfrm>
-            <a:prstGeom prst="straightConnector1">
-              <a:avLst/>
-            </a:prstGeom>
-            <a:noFill/>
-            <a:ln cap="flat" cmpd="sng" w="9525">
-              <a:solidFill>
-                <a:srgbClr val="808080"/>
-              </a:solidFill>
-              <a:prstDash val="solid"/>
-              <a:miter lim="8000"/>
-              <a:headEnd len="sm" w="sm" type="none"/>
-              <a:tailEnd len="sm" w="sm" type="none"/>
-            </a:ln>
-          </p:spPr>
-        </p:cxnSp>
-        <p:cxnSp>
-          <p:nvCxnSpPr>
-            <p:cNvPr id="251" name="Google Shape;251;p10"/>
-            <p:cNvCxnSpPr/>
-            <p:nvPr/>
-          </p:nvCxnSpPr>
-          <p:spPr>
-            <a:xfrm>
-              <a:off x="9479673" y="-2"/>
-              <a:ext cx="7" cy="64324"/>
-            </a:xfrm>
-            <a:prstGeom prst="straightConnector1">
-              <a:avLst/>
-            </a:prstGeom>
-            <a:noFill/>
-            <a:ln cap="flat" cmpd="sng" w="9525">
-              <a:solidFill>
-                <a:srgbClr val="808080"/>
-              </a:solidFill>
-              <a:prstDash val="solid"/>
-              <a:miter lim="8000"/>
-              <a:headEnd len="sm" w="sm" type="none"/>
-              <a:tailEnd len="sm" w="sm" type="none"/>
-            </a:ln>
-          </p:spPr>
-        </p:cxnSp>
-        <p:cxnSp>
-          <p:nvCxnSpPr>
-            <p:cNvPr id="252" name="Google Shape;252;p10"/>
-            <p:cNvCxnSpPr/>
-            <p:nvPr/>
-          </p:nvCxnSpPr>
-          <p:spPr>
-            <a:xfrm>
-              <a:off x="10156792" y="-2"/>
-              <a:ext cx="7" cy="64324"/>
-            </a:xfrm>
-            <a:prstGeom prst="straightConnector1">
-              <a:avLst/>
-            </a:prstGeom>
-            <a:noFill/>
-            <a:ln cap="flat" cmpd="sng" w="9525">
-              <a:solidFill>
-                <a:srgbClr val="808080"/>
-              </a:solidFill>
-              <a:prstDash val="solid"/>
-              <a:miter lim="8000"/>
-              <a:headEnd len="sm" w="sm" type="none"/>
-              <a:tailEnd len="sm" w="sm" type="none"/>
-            </a:ln>
-          </p:spPr>
-        </p:cxnSp>
-        <p:cxnSp>
-          <p:nvCxnSpPr>
-            <p:cNvPr id="253" name="Google Shape;253;p10"/>
-            <p:cNvCxnSpPr/>
-            <p:nvPr/>
-          </p:nvCxnSpPr>
-          <p:spPr>
-            <a:xfrm>
-              <a:off x="10833914" y="-2"/>
-              <a:ext cx="7" cy="64324"/>
-            </a:xfrm>
-            <a:prstGeom prst="straightConnector1">
-              <a:avLst/>
-            </a:prstGeom>
-            <a:noFill/>
-            <a:ln cap="flat" cmpd="sng" w="9525">
-              <a:solidFill>
-                <a:srgbClr val="808080"/>
-              </a:solidFill>
-              <a:prstDash val="solid"/>
-              <a:miter lim="8000"/>
-              <a:headEnd len="sm" w="sm" type="none"/>
-              <a:tailEnd len="sm" w="sm" type="none"/>
-            </a:ln>
-          </p:spPr>
-        </p:cxnSp>
-        <p:cxnSp>
-          <p:nvCxnSpPr>
-            <p:cNvPr id="254" name="Google Shape;254;p10"/>
-            <p:cNvCxnSpPr/>
-            <p:nvPr/>
-          </p:nvCxnSpPr>
-          <p:spPr>
-            <a:xfrm>
-              <a:off x="11511034" y="-2"/>
-              <a:ext cx="7" cy="64324"/>
-            </a:xfrm>
-            <a:prstGeom prst="straightConnector1">
-              <a:avLst/>
-            </a:prstGeom>
-            <a:noFill/>
-            <a:ln cap="flat" cmpd="sng" w="9525">
-              <a:solidFill>
-                <a:srgbClr val="808080"/>
-              </a:solidFill>
-              <a:prstDash val="solid"/>
-              <a:miter lim="8000"/>
-              <a:headEnd len="sm" w="sm" type="none"/>
-              <a:tailEnd len="sm" w="sm" type="none"/>
-            </a:ln>
-          </p:spPr>
-        </p:cxnSp>
-        <p:cxnSp>
-          <p:nvCxnSpPr>
-            <p:cNvPr id="255" name="Google Shape;255;p10"/>
-            <p:cNvCxnSpPr/>
-            <p:nvPr/>
-          </p:nvCxnSpPr>
-          <p:spPr>
-            <a:xfrm>
-              <a:off x="12188160" y="-2"/>
-              <a:ext cx="7" cy="64324"/>
-            </a:xfrm>
-            <a:prstGeom prst="straightConnector1">
-              <a:avLst/>
-            </a:prstGeom>
-            <a:noFill/>
-            <a:ln cap="flat" cmpd="sng" w="9525">
-              <a:solidFill>
-                <a:srgbClr val="808080"/>
-              </a:solidFill>
-              <a:prstDash val="solid"/>
-              <a:miter lim="8000"/>
-              <a:headEnd len="sm" w="sm" type="none"/>
-              <a:tailEnd len="sm" w="sm" type="none"/>
-            </a:ln>
-          </p:spPr>
-        </p:cxnSp>
-      </p:grpSp>
-      <p:sp>
-        <p:nvSpPr>
-          <p:cNvPr id="256" name="Google Shape;256;p10"/>
-          <p:cNvSpPr txBox="1"/>
-          <p:nvPr>
-            <p:ph type="title"/>
-          </p:nvPr>
-        </p:nvSpPr>
-        <p:spPr>
-          <a:xfrm>
-            <a:off x="429253" y="424691"/>
-            <a:ext cx="7827311" cy="1167572"/>
-          </a:xfrm>
-          <a:prstGeom prst="rect">
-            <a:avLst/>
-          </a:prstGeom>
-          <a:noFill/>
-          <a:ln>
-            <a:noFill/>
-          </a:ln>
-        </p:spPr>
-        <p:txBody>
-          <a:bodyPr anchorCtr="0" anchor="t" bIns="0" lIns="0" spcFirstLastPara="1" rIns="0" wrap="square" tIns="0">
-            <a:noAutofit/>
-          </a:bodyPr>
-          <a:lstStyle>
-            <a:lvl1pPr lvl="0" algn="l">
-              <a:lnSpc>
-                <a:spcPct val="90000"/>
-              </a:lnSpc>
-              <a:spcBef>
-                <a:spcPts val="0"/>
-              </a:spcBef>
-              <a:spcAft>
-                <a:spcPts val="0"/>
-              </a:spcAft>
-              <a:buClr>
-                <a:schemeClr val="lt1"/>
-              </a:buClr>
-              <a:buSzPts val="3600"/>
-              <a:buFont typeface="Play"/>
-              <a:buNone/>
-              <a:defRPr b="0" i="0" sz="3600">
-                <a:solidFill>
-                  <a:schemeClr val="lt1"/>
-                </a:solidFill>
-                <a:latin typeface="Play"/>
-                <a:ea typeface="Play"/>
-                <a:cs typeface="Play"/>
-                <a:sym typeface="Play"/>
-              </a:defRPr>
-            </a:lvl1pPr>
-            <a:lvl2pPr lvl="1">
-              <a:spcBef>
-                <a:spcPts val="0"/>
-              </a:spcBef>
-              <a:spcAft>
-                <a:spcPts val="0"/>
-              </a:spcAft>
-              <a:buSzPts val="1400"/>
-              <a:buNone/>
-              <a:defRPr/>
-            </a:lvl2pPr>
-            <a:lvl3pPr lvl="2">
-              <a:spcBef>
-                <a:spcPts val="0"/>
-              </a:spcBef>
-              <a:spcAft>
-                <a:spcPts val="0"/>
-              </a:spcAft>
-              <a:buSzPts val="1400"/>
-              <a:buNone/>
-              <a:defRPr/>
-            </a:lvl3pPr>
-            <a:lvl4pPr lvl="3">
-              <a:spcBef>
-                <a:spcPts val="0"/>
-              </a:spcBef>
-              <a:spcAft>
-                <a:spcPts val="0"/>
-              </a:spcAft>
-              <a:buSzPts val="1400"/>
-              <a:buNone/>
-              <a:defRPr/>
-            </a:lvl4pPr>
-            <a:lvl5pPr lvl="4">
-              <a:spcBef>
-                <a:spcPts val="0"/>
-              </a:spcBef>
-              <a:spcAft>
-                <a:spcPts val="0"/>
-              </a:spcAft>
-              <a:buSzPts val="1400"/>
-              <a:buNone/>
-              <a:defRPr/>
-            </a:lvl5pPr>
-            <a:lvl6pPr lvl="5">
-              <a:spcBef>
-                <a:spcPts val="0"/>
-              </a:spcBef>
-              <a:spcAft>
-                <a:spcPts val="0"/>
-              </a:spcAft>
-              <a:buSzPts val="1400"/>
-              <a:buNone/>
-              <a:defRPr/>
-            </a:lvl6pPr>
-            <a:lvl7pPr lvl="6">
-              <a:spcBef>
-                <a:spcPts val="0"/>
-              </a:spcBef>
-              <a:spcAft>
-                <a:spcPts val="0"/>
-              </a:spcAft>
-              <a:buSzPts val="1400"/>
-              <a:buNone/>
-              <a:defRPr/>
-            </a:lvl7pPr>
-            <a:lvl8pPr lvl="7">
-              <a:spcBef>
-                <a:spcPts val="0"/>
-              </a:spcBef>
-              <a:spcAft>
-                <a:spcPts val="0"/>
-              </a:spcAft>
-              <a:buSzPts val="1400"/>
-              <a:buNone/>
-              <a:defRPr/>
-            </a:lvl8pPr>
-            <a:lvl9pPr lvl="8">
-              <a:spcBef>
-                <a:spcPts val="0"/>
-              </a:spcBef>
-              <a:spcAft>
-                <a:spcPts val="0"/>
-              </a:spcAft>
-              <a:buSzPts val="1400"/>
-              <a:buNone/>
-              <a:defRPr/>
-            </a:lvl9pPr>
-          </a:lstStyle>
-          <a:p/>
-        </p:txBody>
-      </p:sp>
-      <p:pic>
-        <p:nvPicPr>
-          <p:cNvPr id="257" name="Google Shape;257;p10"/>
-          <p:cNvPicPr preferRelativeResize="0"/>
-          <p:nvPr/>
-        </p:nvPicPr>
-        <p:blipFill rotWithShape="1">
-          <a:blip r:embed="rId3">
-            <a:alphaModFix/>
-          </a:blip>
-          <a:srcRect b="0" l="0" r="0" t="0"/>
-          <a:stretch/>
-        </p:blipFill>
-        <p:spPr>
-          <a:xfrm>
-            <a:off x="398723" y="6160516"/>
-            <a:ext cx="1857481" cy="292671"/>
-          </a:xfrm>
-          <a:prstGeom prst="rect">
-            <a:avLst/>
-          </a:prstGeom>
-          <a:noFill/>
-          <a:ln>
-            <a:noFill/>
-          </a:ln>
-        </p:spPr>
-      </p:pic>
-      <p:pic>
-        <p:nvPicPr>
-          <p:cNvPr descr=" " id="258" name="Google Shape;258;p10"/>
-          <p:cNvPicPr preferRelativeResize="0"/>
-          <p:nvPr/>
-        </p:nvPicPr>
-        <p:blipFill rotWithShape="1">
-          <a:blip r:embed="rId4">
-            <a:alphaModFix/>
-          </a:blip>
-          <a:srcRect b="0" l="0" r="0" t="0"/>
-          <a:stretch/>
-        </p:blipFill>
-        <p:spPr>
-          <a:xfrm>
-            <a:off x="10866292" y="0"/>
-            <a:ext cx="1325708" cy="3723972"/>
-          </a:xfrm>
-          <a:prstGeom prst="rect">
-            <a:avLst/>
-          </a:prstGeom>
-          <a:noFill/>
-          <a:ln>
-            <a:noFill/>
-          </a:ln>
-        </p:spPr>
-      </p:pic>
-      <p:pic>
-        <p:nvPicPr>
-          <p:cNvPr descr=" " id="259" name="Google Shape;259;p10"/>
-          <p:cNvPicPr preferRelativeResize="0"/>
-          <p:nvPr/>
-        </p:nvPicPr>
-        <p:blipFill rotWithShape="1">
-          <a:blip r:embed="rId5">
-            <a:alphaModFix/>
-          </a:blip>
-          <a:srcRect b="0" l="0" r="0" t="0"/>
-          <a:stretch/>
-        </p:blipFill>
-        <p:spPr>
-          <a:xfrm>
-            <a:off x="11093496" y="6238282"/>
-            <a:ext cx="690517" cy="216000"/>
-          </a:xfrm>
-          <a:prstGeom prst="rect">
-            <a:avLst/>
-          </a:prstGeom>
-          <a:noFill/>
-          <a:ln>
-            <a:noFill/>
-          </a:ln>
-        </p:spPr>
-      </p:pic>
-    </p:spTree>
-  </p:cSld>
-  <p:clrMapOvr>
-    <a:masterClrMapping/>
-  </p:clrMapOvr>
-</p:sldLayout>
-</file>
-
 <file path=ppt/slideMasters/slideMaster1.xml><?xml version="1.0" encoding="utf-8"?>
 <p:sldMaster xmlns:a="http://schemas.openxmlformats.org/drawingml/2006/main" xmlns:r="http://schemas.openxmlformats.org/officeDocument/2006/relationships" xmlns:mc="http://schemas.openxmlformats.org/markup-compatibility/2006" xmlns:mv="urn:schemas-microsoft-com:mac:vml" xmlns:p="http://schemas.openxmlformats.org/presentationml/2006/main" xmlns:c="http://schemas.openxmlformats.org/drawingml/2006/chart" xmlns:dgm="http://schemas.openxmlformats.org/drawingml/2006/diagram" xmlns:o="urn:schemas-microsoft-com:office:office" xmlns:v="urn:schemas-microsoft-com:vml" xmlns:pvml="urn:schemas-microsoft-com:office:powerpoint" xmlns:com="http://schemas.openxmlformats.org/drawingml/2006/compatibility" xmlns:p14="http://schemas.microsoft.com/office/powerpoint/2010/main" xmlns:p15="http://schemas.microsoft.com/office/powerpoint/2012/main" xmlns:ahyp="http://schemas.microsoft.com/office/drawing/2018/hyperlinkcolor">
   <p:cSld>
@@ -7888,7 +7095,6 @@
     <p:sldLayoutId id="2147483652" r:id="rId6"/>
     <p:sldLayoutId id="2147483654" r:id="rId8"/>
     <p:sldLayoutId id="2147483655" r:id="rId9"/>
-    <p:sldLayoutId id="2147483656" r:id="rId10"/>
   </p:sldLayoutIdLst>
   <p:hf dt="0" ftr="0" hdr="0" sldNum="0"/>
   <p:txStyles>
@@ -8700,7 +7906,7 @@
             </a:pPr>
             <a:r>
               <a:rPr sz="3200"/>
-              <a:t>Автоматизация поиска инструкций и ответов поддержки</a:t>
+              <a:t>Автоматизация поиска инструкций и ответов в поддержке</a:t>
             </a:r>
             <a:endParaRPr sz="4800"/>
           </a:p>
@@ -8755,7 +7961,7 @@
                 </a:solidFill>
                 <a:latin typeface="Play"/>
               </a:rPr>
-              <a:t>Инициатива по внедрению ИИ-помощника для снижения нагрузки на поддержку и ускорения поиска информации</a:t>
+              <a:t>Инициатива по внедрению ИИ-помощника для снижения нагрузки на поддержку и ускорения поиска регламентов</a:t>
             </a:r>
             <a:endParaRPr b="0" i="0" sz="1600" u="none" cap="none" strike="noStrike">
               <a:solidFill>
@@ -8789,7 +7995,7 @@
       <p:grpSpPr/>
       <p:sp>
         <p:nvSpPr>
-          <p:cNvPr id="441" name="BrandDeck Text 441"/>
+          <p:cNvPr id="547" name="BrandDeck Text 547"/>
           <p:cNvSpPr txBox="1"/>
           <p:nvPr>
             <p:ph type="title"/>
@@ -8833,7 +8039,7 @@
             </a:pPr>
             <a:r>
               <a:rPr sz="1800"/>
-              <a:t>Пилотный запуск запланирован на 6 недель с командой из 3 человек</a:t>
+              <a:t>Риск утечки данных исключен архитектурой, работающей только внутри контура компании</a:t>
             </a:r>
             <a:endParaRPr/>
           </a:p>
@@ -8841,37 +8047,190 @@
       </p:sp>
       <p:grpSp>
         <p:nvGrpSpPr>
-          <p:cNvPr id="2" name="BrandDeck Diagram cycle" descr="cycle: Подготовка Настройка модели и данных; Запуск 6 недель с 150 сотрудниками; Анализ Измерение времени поиска и закрытия"/>
+          <p:cNvPr id="2" name="BrandDeck Diagram hierarchy" descr="hierarchy: Внутренний контур Документы не покидают периметр безопасности; ИИ-помощник Работает только с внутренними регламентами; Сотрудники Получают ответы без передачи данных наружу"/>
           <p:cNvGrpSpPr/>
           <p:nvPr/>
         </p:nvGrpSpPr>
         <p:grpSpPr>
           <a:xfrm>
-            <a:off x="5531212" y="2728978"/>
-            <a:ext cx="5769858" cy="3519679"/>
-            <a:chOff x="5531212" y="2728978"/>
-            <a:chExt cx="5769858" cy="3519679"/>
+            <a:off x="5383513" y="2844337"/>
+            <a:ext cx="5917557" cy="3204551"/>
+            <a:chOff x="5383513" y="2844337"/>
+            <a:chExt cx="5917557" cy="3204551"/>
           </a:xfrm>
         </p:grpSpPr>
         <p:sp>
           <p:nvSpPr>
-            <p:cNvPr id="454" name="BrandDeck Diagram Ring"/>
+            <p:cNvPr id="560" name="BrandDeck Diagram Root"/>
             <p:cNvSpPr/>
             <p:nvPr/>
           </p:nvSpPr>
           <p:spPr>
             <a:xfrm>
-              <a:off x="5642110" y="3386376"/>
-              <a:ext cx="2204882" cy="2204882"/>
-            </a:xfrm>
-            <a:prstGeom prst="ellipse">
-              <a:avLst/>
-            </a:prstGeom>
-            <a:noFill/>
-            <a:ln w="28575">
+              <a:off x="7099604" y="2844337"/>
+              <a:ext cx="2485374" cy="711251"/>
+            </a:xfrm>
+            <a:prstGeom prst="roundRect">
+              <a:avLst>
+                <a:gd name="adj" fmla="val 18000"/>
+              </a:avLst>
+            </a:prstGeom>
+            <a:solidFill>
+              <a:srgbClr val="006DEB"/>
+            </a:solidFill>
+            <a:ln>
+              <a:noFill/>
+            </a:ln>
+          </p:spPr>
+          <p:txBody>
+            <a:bodyPr rtlCol="0" anchor="ctr" wrap="square" lIns="109728" tIns="36576" rIns="109728" bIns="36576">
+              <a:noAutofit/>
+            </a:bodyPr>
+            <a:lstStyle/>
+            <a:p>
+              <a:pPr algn="ctr">
+                <a:lnSpc>
+                  <a:spcPct val="110000"/>
+                </a:lnSpc>
+              </a:pPr>
+              <a:r>
+                <a:rPr sz="1600" b="1">
+                  <a:solidFill>
+                    <a:srgbClr val="FFFFFF"/>
+                  </a:solidFill>
+                  <a:latin typeface="Play"/>
+                </a:rPr>
+                <a:t>Внутренний контур</a:t>
+              </a:r>
+            </a:p>
+          </p:txBody>
+        </p:sp>
+        <p:cxnSp>
+          <p:nvCxnSpPr>
+            <p:cNvPr id="561" name="BrandDeck Diagram Link Root"/>
+            <p:cNvCxnSpPr/>
+            <p:nvPr/>
+          </p:nvCxnSpPr>
+          <p:spPr>
+            <a:xfrm>
+              <a:off x="8342292" y="3555589"/>
+              <a:ext cx="0" cy="248938"/>
+            </a:xfrm>
+            <a:prstGeom prst="line">
+              <a:avLst/>
+            </a:prstGeom>
+            <a:ln w="19050">
               <a:solidFill>
                 <a:srgbClr val="004DA6"/>
               </a:solidFill>
+            </a:ln>
+          </p:spPr>
+          <p:style>
+            <a:lnRef idx="2">
+              <a:schemeClr val="accent1"/>
+            </a:lnRef>
+            <a:fillRef idx="0">
+              <a:schemeClr val="accent1"/>
+            </a:fillRef>
+            <a:effectRef idx="1">
+              <a:schemeClr val="accent1"/>
+            </a:effectRef>
+            <a:fontRef idx="minor">
+              <a:schemeClr val="tx1"/>
+            </a:fontRef>
+          </p:style>
+        </p:cxnSp>
+        <p:cxnSp>
+          <p:nvCxnSpPr>
+            <p:cNvPr id="562" name="BrandDeck Diagram Link Bus"/>
+            <p:cNvCxnSpPr/>
+            <p:nvPr/>
+          </p:nvCxnSpPr>
+          <p:spPr>
+            <a:xfrm>
+              <a:off x="6330322" y="3804527"/>
+              <a:ext cx="4023939" cy="0"/>
+            </a:xfrm>
+            <a:prstGeom prst="line">
+              <a:avLst/>
+            </a:prstGeom>
+            <a:ln w="19050">
+              <a:solidFill>
+                <a:srgbClr val="004DA6"/>
+              </a:solidFill>
+            </a:ln>
+          </p:spPr>
+          <p:style>
+            <a:lnRef idx="2">
+              <a:schemeClr val="accent1"/>
+            </a:lnRef>
+            <a:fillRef idx="0">
+              <a:schemeClr val="accent1"/>
+            </a:fillRef>
+            <a:effectRef idx="1">
+              <a:schemeClr val="accent1"/>
+            </a:effectRef>
+            <a:fontRef idx="minor">
+              <a:schemeClr val="tx1"/>
+            </a:fontRef>
+          </p:style>
+        </p:cxnSp>
+        <p:cxnSp>
+          <p:nvCxnSpPr>
+            <p:cNvPr id="563" name="BrandDeck Diagram Link 1"/>
+            <p:cNvCxnSpPr/>
+            <p:nvPr/>
+          </p:nvCxnSpPr>
+          <p:spPr>
+            <a:xfrm>
+              <a:off x="6330322" y="3804527"/>
+              <a:ext cx="0" cy="248937"/>
+            </a:xfrm>
+            <a:prstGeom prst="line">
+              <a:avLst/>
+            </a:prstGeom>
+            <a:ln w="19050">
+              <a:solidFill>
+                <a:srgbClr val="004DA6"/>
+              </a:solidFill>
+            </a:ln>
+          </p:spPr>
+          <p:style>
+            <a:lnRef idx="2">
+              <a:schemeClr val="accent1"/>
+            </a:lnRef>
+            <a:fillRef idx="0">
+              <a:schemeClr val="accent1"/>
+            </a:fillRef>
+            <a:effectRef idx="1">
+              <a:schemeClr val="accent1"/>
+            </a:effectRef>
+            <a:fontRef idx="minor">
+              <a:schemeClr val="tx1"/>
+            </a:fontRef>
+          </p:style>
+        </p:cxnSp>
+        <p:sp>
+          <p:nvSpPr>
+            <p:cNvPr id="564" name="BrandDeck Diagram Card 1"/>
+            <p:cNvSpPr/>
+            <p:nvPr/>
+          </p:nvSpPr>
+          <p:spPr>
+            <a:xfrm>
+              <a:off x="5383513" y="4053464"/>
+              <a:ext cx="1893618" cy="1995424"/>
+            </a:xfrm>
+            <a:prstGeom prst="roundRect">
+              <a:avLst>
+                <a:gd name="adj" fmla="val 6000"/>
+              </a:avLst>
+            </a:prstGeom>
+            <a:solidFill>
+              <a:srgbClr val="1A1A1A"/>
+            </a:solidFill>
+            <a:ln>
+              <a:noFill/>
             </a:ln>
           </p:spPr>
           <p:txBody>
@@ -8884,20 +8243,20 @@
         </p:sp>
         <p:sp>
           <p:nvSpPr>
-            <p:cNvPr id="455" name="BrandDeck Diagram Arrow 1"/>
+            <p:cNvPr id="565" name="BrandDeck Diagram Marker 1"/>
             <p:cNvSpPr/>
             <p:nvPr/>
           </p:nvSpPr>
           <p:spPr>
-            <a:xfrm rot="9000000">
-              <a:off x="7606198" y="3844502"/>
-              <a:ext cx="186190" cy="186190"/>
-            </a:xfrm>
-            <a:prstGeom prst="triangle">
+            <a:xfrm>
+              <a:off x="5511529" y="4163192"/>
+              <a:ext cx="548640" cy="45720"/>
+            </a:xfrm>
+            <a:prstGeom prst="rect">
               <a:avLst/>
             </a:prstGeom>
             <a:solidFill>
-              <a:srgbClr val="004DA6"/>
+              <a:srgbClr val="0077FF"/>
             </a:solidFill>
             <a:ln>
               <a:noFill/>
@@ -8913,20 +8272,115 @@
         </p:sp>
         <p:sp>
           <p:nvSpPr>
-            <p:cNvPr id="456" name="BrandDeck Diagram Arrow 2"/>
+            <p:cNvPr id="566" name="BrandDeck Diagram Text 1"/>
+            <p:cNvSpPr txBox="1"/>
+            <p:nvPr/>
+          </p:nvSpPr>
+          <p:spPr>
+            <a:xfrm>
+              <a:off x="5474953" y="4291208"/>
+              <a:ext cx="1710738" cy="1666240"/>
+            </a:xfrm>
+            <a:prstGeom prst="rect">
+              <a:avLst/>
+            </a:prstGeom>
+            <a:noFill/>
+          </p:spPr>
+          <p:txBody>
+            <a:bodyPr wrap="square" anchor="t" lIns="36576" tIns="18288" rIns="36576" bIns="18288">
+              <a:noAutofit/>
+            </a:bodyPr>
+            <a:lstStyle/>
+            <a:p>
+              <a:pPr algn="l">
+                <a:lnSpc>
+                  <a:spcPct val="110000"/>
+                </a:lnSpc>
+              </a:pPr>
+              <a:r>
+                <a:rPr sz="1600" b="1">
+                  <a:solidFill>
+                    <a:srgbClr val="FFFFFF"/>
+                  </a:solidFill>
+                  <a:latin typeface="Play"/>
+                </a:rPr>
+                <a:t>Внутренний контур</a:t>
+              </a:r>
+            </a:p>
+            <a:p>
+              <a:pPr algn="l">
+                <a:lnSpc>
+                  <a:spcPct val="110000"/>
+                </a:lnSpc>
+                <a:spcBef>
+                  <a:spcPts val="400"/>
+                </a:spcBef>
+              </a:pPr>
+              <a:r>
+                <a:rPr sz="1600" b="0">
+                  <a:solidFill>
+                    <a:srgbClr val="FFFFFF"/>
+                  </a:solidFill>
+                  <a:latin typeface="Play"/>
+                </a:rPr>
+                <a:t>Документы не покидают периметр безопасности</a:t>
+              </a:r>
+            </a:p>
+          </p:txBody>
+        </p:sp>
+        <p:cxnSp>
+          <p:nvCxnSpPr>
+            <p:cNvPr id="567" name="BrandDeck Diagram Link 2"/>
+            <p:cNvCxnSpPr/>
+            <p:nvPr/>
+          </p:nvCxnSpPr>
+          <p:spPr>
+            <a:xfrm>
+              <a:off x="8342292" y="3804527"/>
+              <a:ext cx="0" cy="248937"/>
+            </a:xfrm>
+            <a:prstGeom prst="line">
+              <a:avLst/>
+            </a:prstGeom>
+            <a:ln w="19050">
+              <a:solidFill>
+                <a:srgbClr val="004DA6"/>
+              </a:solidFill>
+            </a:ln>
+          </p:spPr>
+          <p:style>
+            <a:lnRef idx="2">
+              <a:schemeClr val="accent1"/>
+            </a:lnRef>
+            <a:fillRef idx="0">
+              <a:schemeClr val="accent1"/>
+            </a:fillRef>
+            <a:effectRef idx="1">
+              <a:schemeClr val="accent1"/>
+            </a:effectRef>
+            <a:fontRef idx="minor">
+              <a:schemeClr val="tx1"/>
+            </a:fontRef>
+          </p:style>
+        </p:cxnSp>
+        <p:sp>
+          <p:nvSpPr>
+            <p:cNvPr id="568" name="BrandDeck Diagram Card 2"/>
             <p:cNvSpPr/>
             <p:nvPr/>
           </p:nvSpPr>
           <p:spPr>
-            <a:xfrm rot="16200000">
-              <a:off x="6651456" y="5498164"/>
-              <a:ext cx="186190" cy="186190"/>
-            </a:xfrm>
-            <a:prstGeom prst="triangle">
-              <a:avLst/>
+            <a:xfrm>
+              <a:off x="7395482" y="4053464"/>
+              <a:ext cx="1893618" cy="1995424"/>
+            </a:xfrm>
+            <a:prstGeom prst="roundRect">
+              <a:avLst>
+                <a:gd name="adj" fmla="val 6000"/>
+              </a:avLst>
             </a:prstGeom>
             <a:solidFill>
-              <a:srgbClr val="004DA6"/>
+              <a:srgbClr val="1A1A1A"/>
             </a:solidFill>
             <a:ln>
               <a:noFill/>
@@ -8942,20 +8396,20 @@
         </p:sp>
         <p:sp>
           <p:nvSpPr>
-            <p:cNvPr id="457" name="BrandDeck Diagram Arrow 3"/>
+            <p:cNvPr id="569" name="BrandDeck Diagram Marker 2"/>
             <p:cNvSpPr/>
             <p:nvPr/>
           </p:nvSpPr>
           <p:spPr>
-            <a:xfrm rot="1800000">
-              <a:off x="5696714" y="3844502"/>
-              <a:ext cx="186190" cy="186190"/>
-            </a:xfrm>
-            <a:prstGeom prst="triangle">
+            <a:xfrm>
+              <a:off x="7523498" y="4163192"/>
+              <a:ext cx="548640" cy="45720"/>
+            </a:xfrm>
+            <a:prstGeom prst="rect">
               <a:avLst/>
             </a:prstGeom>
             <a:solidFill>
-              <a:srgbClr val="004DA6"/>
+              <a:srgbClr val="0077FF"/>
             </a:solidFill>
             <a:ln>
               <a:noFill/>
@@ -8971,198 +8425,22 @@
         </p:sp>
         <p:sp>
           <p:nvSpPr>
-            <p:cNvPr id="458" name="BrandDeck Diagram Node 1 Badge"/>
-            <p:cNvSpPr/>
+            <p:cNvPr id="570" name="BrandDeck Diagram Text 2"/>
+            <p:cNvSpPr txBox="1"/>
             <p:nvPr/>
           </p:nvSpPr>
           <p:spPr>
             <a:xfrm>
-              <a:off x="6485954" y="3127779"/>
-              <a:ext cx="517194" cy="517194"/>
-            </a:xfrm>
-            <a:prstGeom prst="ellipse">
-              <a:avLst/>
-            </a:prstGeom>
-            <a:solidFill>
-              <a:srgbClr val="006DEB"/>
-            </a:solidFill>
-            <a:ln>
-              <a:noFill/>
-            </a:ln>
+              <a:off x="7486922" y="4291208"/>
+              <a:ext cx="1710738" cy="1666240"/>
+            </a:xfrm>
+            <a:prstGeom prst="rect">
+              <a:avLst/>
+            </a:prstGeom>
+            <a:noFill/>
           </p:spPr>
           <p:txBody>
-            <a:bodyPr rtlCol="0" anchor="ctr" wrap="square" lIns="0" tIns="0" rIns="0" bIns="0">
-              <a:noAutofit/>
-            </a:bodyPr>
-            <a:lstStyle/>
-            <a:p>
-              <a:pPr algn="ctr">
-                <a:lnSpc>
-                  <a:spcPct val="110000"/>
-                </a:lnSpc>
-              </a:pPr>
-              <a:r>
-                <a:rPr sz="1400" b="1">
-                  <a:solidFill>
-                    <a:srgbClr val="FFFFFF"/>
-                  </a:solidFill>
-                  <a:latin typeface="Play"/>
-                </a:rPr>
-                <a:t>01</a:t>
-              </a:r>
-            </a:p>
-          </p:txBody>
-        </p:sp>
-        <p:sp>
-          <p:nvSpPr>
-            <p:cNvPr id="459" name="BrandDeck Diagram Node 2 Badge"/>
-            <p:cNvSpPr/>
-            <p:nvPr/>
-          </p:nvSpPr>
-          <p:spPr>
-            <a:xfrm>
-              <a:off x="7440696" y="4781441"/>
-              <a:ext cx="517194" cy="517194"/>
-            </a:xfrm>
-            <a:prstGeom prst="ellipse">
-              <a:avLst/>
-            </a:prstGeom>
-            <a:solidFill>
-              <a:srgbClr val="006DEB"/>
-            </a:solidFill>
-            <a:ln>
-              <a:noFill/>
-            </a:ln>
-          </p:spPr>
-          <p:txBody>
-            <a:bodyPr rtlCol="0" anchor="ctr" wrap="square" lIns="0" tIns="0" rIns="0" bIns="0">
-              <a:noAutofit/>
-            </a:bodyPr>
-            <a:lstStyle/>
-            <a:p>
-              <a:pPr algn="ctr">
-                <a:lnSpc>
-                  <a:spcPct val="110000"/>
-                </a:lnSpc>
-              </a:pPr>
-              <a:r>
-                <a:rPr sz="1400" b="1">
-                  <a:solidFill>
-                    <a:srgbClr val="FFFFFF"/>
-                  </a:solidFill>
-                  <a:latin typeface="Play"/>
-                </a:rPr>
-                <a:t>02</a:t>
-              </a:r>
-            </a:p>
-          </p:txBody>
-        </p:sp>
-        <p:sp>
-          <p:nvSpPr>
-            <p:cNvPr id="460" name="BrandDeck Diagram Node 3 Badge"/>
-            <p:cNvSpPr/>
-            <p:nvPr/>
-          </p:nvSpPr>
-          <p:spPr>
-            <a:xfrm>
-              <a:off x="5531212" y="4781441"/>
-              <a:ext cx="517194" cy="517194"/>
-            </a:xfrm>
-            <a:prstGeom prst="ellipse">
-              <a:avLst/>
-            </a:prstGeom>
-            <a:solidFill>
-              <a:srgbClr val="006DEB"/>
-            </a:solidFill>
-            <a:ln>
-              <a:noFill/>
-            </a:ln>
-          </p:spPr>
-          <p:txBody>
-            <a:bodyPr rtlCol="0" anchor="ctr" wrap="square" lIns="0" tIns="0" rIns="0" bIns="0">
-              <a:noAutofit/>
-            </a:bodyPr>
-            <a:lstStyle/>
-            <a:p>
-              <a:pPr algn="ctr">
-                <a:lnSpc>
-                  <a:spcPct val="110000"/>
-                </a:lnSpc>
-              </a:pPr>
-              <a:r>
-                <a:rPr sz="1400" b="1">
-                  <a:solidFill>
-                    <a:srgbClr val="FFFFFF"/>
-                  </a:solidFill>
-                  <a:latin typeface="Play"/>
-                </a:rPr>
-                <a:t>03</a:t>
-              </a:r>
-            </a:p>
-          </p:txBody>
-        </p:sp>
-        <p:sp>
-          <p:nvSpPr>
-            <p:cNvPr id="461" name="BrandDeck Diagram Legend 1 Badge"/>
-            <p:cNvSpPr/>
-            <p:nvPr/>
-          </p:nvSpPr>
-          <p:spPr>
-            <a:xfrm>
-              <a:off x="8425629" y="3147951"/>
-              <a:ext cx="310896" cy="310896"/>
-            </a:xfrm>
-            <a:prstGeom prst="ellipse">
-              <a:avLst/>
-            </a:prstGeom>
-            <a:solidFill>
-              <a:srgbClr val="006DEB"/>
-            </a:solidFill>
-            <a:ln>
-              <a:noFill/>
-            </a:ln>
-          </p:spPr>
-          <p:txBody>
-            <a:bodyPr rtlCol="0" anchor="ctr" wrap="square" lIns="0" tIns="0" rIns="0" bIns="0">
-              <a:noAutofit/>
-            </a:bodyPr>
-            <a:lstStyle/>
-            <a:p>
-              <a:pPr algn="ctr">
-                <a:lnSpc>
-                  <a:spcPct val="110000"/>
-                </a:lnSpc>
-              </a:pPr>
-              <a:r>
-                <a:rPr sz="1200" b="1">
-                  <a:solidFill>
-                    <a:srgbClr val="FFFFFF"/>
-                  </a:solidFill>
-                  <a:latin typeface="Play"/>
-                </a:rPr>
-                <a:t>01</a:t>
-              </a:r>
-            </a:p>
-          </p:txBody>
-        </p:sp>
-        <p:sp>
-          <p:nvSpPr>
-            <p:cNvPr id="462" name="BrandDeck Diagram Text 1"/>
-            <p:cNvSpPr txBox="1"/>
-            <p:nvPr/>
-          </p:nvSpPr>
-          <p:spPr>
-            <a:xfrm>
-              <a:off x="8882829" y="2728978"/>
-              <a:ext cx="2418241" cy="1148842"/>
-            </a:xfrm>
-            <a:prstGeom prst="rect">
-              <a:avLst/>
-            </a:prstGeom>
-            <a:noFill/>
-          </p:spPr>
-          <p:txBody>
-            <a:bodyPr wrap="square" anchor="ctr" lIns="36576" tIns="18288" rIns="36576" bIns="18288">
+            <a:bodyPr wrap="square" anchor="t" lIns="36576" tIns="18288" rIns="36576" bIns="18288">
               <a:noAutofit/>
             </a:bodyPr>
             <a:lstStyle/>
@@ -9173,13 +8451,13 @@
                 </a:lnSpc>
               </a:pPr>
               <a:r>
-                <a:rPr sz="1400" b="1">
+                <a:rPr sz="1600" b="1">
                   <a:solidFill>
                     <a:srgbClr val="FFFFFF"/>
                   </a:solidFill>
                   <a:latin typeface="Play"/>
                 </a:rPr>
-                <a:t>Подготовка</a:t>
+                <a:t>ИИ-помощник</a:t>
               </a:r>
             </a:p>
             <a:p>
@@ -9188,75 +8466,126 @@
                   <a:spcPct val="110000"/>
                 </a:lnSpc>
                 <a:spcBef>
-                  <a:spcPts val="350"/>
+                  <a:spcPts val="400"/>
                 </a:spcBef>
               </a:pPr>
               <a:r>
-                <a:rPr sz="1400" b="0">
+                <a:rPr sz="1600" b="0">
                   <a:solidFill>
                     <a:srgbClr val="FFFFFF"/>
                   </a:solidFill>
                   <a:latin typeface="Play"/>
                 </a:rPr>
-                <a:t>Настройка модели и данных</a:t>
+                <a:t>Работает только с внутренними регламентами</a:t>
               </a:r>
+            </a:p>
+          </p:txBody>
+        </p:sp>
+        <p:cxnSp>
+          <p:nvCxnSpPr>
+            <p:cNvPr id="571" name="BrandDeck Diagram Link 3"/>
+            <p:cNvCxnSpPr/>
+            <p:nvPr/>
+          </p:nvCxnSpPr>
+          <p:spPr>
+            <a:xfrm>
+              <a:off x="10354261" y="3804527"/>
+              <a:ext cx="0" cy="248937"/>
+            </a:xfrm>
+            <a:prstGeom prst="line">
+              <a:avLst/>
+            </a:prstGeom>
+            <a:ln w="19050">
+              <a:solidFill>
+                <a:srgbClr val="004DA6"/>
+              </a:solidFill>
+            </a:ln>
+          </p:spPr>
+          <p:style>
+            <a:lnRef idx="2">
+              <a:schemeClr val="accent1"/>
+            </a:lnRef>
+            <a:fillRef idx="0">
+              <a:schemeClr val="accent1"/>
+            </a:fillRef>
+            <a:effectRef idx="1">
+              <a:schemeClr val="accent1"/>
+            </a:effectRef>
+            <a:fontRef idx="minor">
+              <a:schemeClr val="tx1"/>
+            </a:fontRef>
+          </p:style>
+        </p:cxnSp>
+        <p:sp>
+          <p:nvSpPr>
+            <p:cNvPr id="572" name="BrandDeck Diagram Card 3"/>
+            <p:cNvSpPr/>
+            <p:nvPr/>
+          </p:nvSpPr>
+          <p:spPr>
+            <a:xfrm>
+              <a:off x="9407452" y="4053464"/>
+              <a:ext cx="1893618" cy="1995424"/>
+            </a:xfrm>
+            <a:prstGeom prst="roundRect">
+              <a:avLst>
+                <a:gd name="adj" fmla="val 6000"/>
+              </a:avLst>
+            </a:prstGeom>
+            <a:solidFill>
+              <a:srgbClr val="1A1A1A"/>
+            </a:solidFill>
+            <a:ln>
+              <a:noFill/>
+            </a:ln>
+          </p:spPr>
+          <p:txBody>
+            <a:bodyPr rtlCol="0" anchor="ctr"/>
+            <a:lstStyle/>
+            <a:p>
+              <a:pPr algn="ctr"/>
             </a:p>
           </p:txBody>
         </p:sp>
         <p:sp>
           <p:nvSpPr>
-            <p:cNvPr id="463" name="BrandDeck Diagram Legend 2 Badge"/>
+            <p:cNvPr id="573" name="BrandDeck Diagram Marker 3"/>
             <p:cNvSpPr/>
             <p:nvPr/>
           </p:nvSpPr>
           <p:spPr>
             <a:xfrm>
-              <a:off x="8425629" y="4333370"/>
-              <a:ext cx="310896" cy="310896"/>
-            </a:xfrm>
-            <a:prstGeom prst="ellipse">
+              <a:off x="9535468" y="4163192"/>
+              <a:ext cx="548640" cy="45720"/>
+            </a:xfrm>
+            <a:prstGeom prst="rect">
               <a:avLst/>
             </a:prstGeom>
             <a:solidFill>
-              <a:srgbClr val="006DEB"/>
+              <a:srgbClr val="0077FF"/>
             </a:solidFill>
             <a:ln>
               <a:noFill/>
             </a:ln>
           </p:spPr>
           <p:txBody>
-            <a:bodyPr rtlCol="0" anchor="ctr" wrap="square" lIns="0" tIns="0" rIns="0" bIns="0">
-              <a:noAutofit/>
-            </a:bodyPr>
+            <a:bodyPr rtlCol="0" anchor="ctr"/>
             <a:lstStyle/>
             <a:p>
-              <a:pPr algn="ctr">
-                <a:lnSpc>
-                  <a:spcPct val="110000"/>
-                </a:lnSpc>
-              </a:pPr>
-              <a:r>
-                <a:rPr sz="1200" b="1">
-                  <a:solidFill>
-                    <a:srgbClr val="FFFFFF"/>
-                  </a:solidFill>
-                  <a:latin typeface="Play"/>
-                </a:rPr>
-                <a:t>02</a:t>
-              </a:r>
+              <a:pPr algn="ctr"/>
             </a:p>
           </p:txBody>
         </p:sp>
         <p:sp>
           <p:nvSpPr>
-            <p:cNvPr id="464" name="BrandDeck Diagram Text 2"/>
+            <p:cNvPr id="574" name="BrandDeck Diagram Text 3"/>
             <p:cNvSpPr txBox="1"/>
             <p:nvPr/>
           </p:nvSpPr>
           <p:spPr>
             <a:xfrm>
-              <a:off x="8882829" y="3914396"/>
-              <a:ext cx="2418241" cy="1148842"/>
+              <a:off x="9498892" y="4291208"/>
+              <a:ext cx="1710738" cy="1666240"/>
             </a:xfrm>
             <a:prstGeom prst="rect">
               <a:avLst/>
@@ -9264,7 +8593,7 @@
             <a:noFill/>
           </p:spPr>
           <p:txBody>
-            <a:bodyPr wrap="square" anchor="ctr" lIns="36576" tIns="18288" rIns="36576" bIns="18288">
+            <a:bodyPr wrap="square" anchor="t" lIns="36576" tIns="18288" rIns="36576" bIns="18288">
               <a:noAutofit/>
             </a:bodyPr>
             <a:lstStyle/>
@@ -9275,13 +8604,13 @@
                 </a:lnSpc>
               </a:pPr>
               <a:r>
-                <a:rPr sz="1400" b="1">
+                <a:rPr sz="1600" b="1">
                   <a:solidFill>
                     <a:srgbClr val="FFFFFF"/>
                   </a:solidFill>
                   <a:latin typeface="Play"/>
                 </a:rPr>
-                <a:t>Запуск</a:t>
+                <a:t>Сотрудники</a:t>
               </a:r>
             </a:p>
             <a:p>
@@ -9290,119 +8619,17 @@
                   <a:spcPct val="110000"/>
                 </a:lnSpc>
                 <a:spcBef>
-                  <a:spcPts val="350"/>
+                  <a:spcPts val="400"/>
                 </a:spcBef>
               </a:pPr>
               <a:r>
-                <a:rPr sz="1400" b="0">
+                <a:rPr sz="1600" b="0">
                   <a:solidFill>
                     <a:srgbClr val="FFFFFF"/>
                   </a:solidFill>
                   <a:latin typeface="Play"/>
                 </a:rPr>
-                <a:t>6 недель с 150 сотрудниками</a:t>
-              </a:r>
-            </a:p>
-          </p:txBody>
-        </p:sp>
-        <p:sp>
-          <p:nvSpPr>
-            <p:cNvPr id="465" name="BrandDeck Diagram Legend 3 Badge"/>
-            <p:cNvSpPr/>
-            <p:nvPr/>
-          </p:nvSpPr>
-          <p:spPr>
-            <a:xfrm>
-              <a:off x="8425629" y="5518788"/>
-              <a:ext cx="310896" cy="310896"/>
-            </a:xfrm>
-            <a:prstGeom prst="ellipse">
-              <a:avLst/>
-            </a:prstGeom>
-            <a:solidFill>
-              <a:srgbClr val="006DEB"/>
-            </a:solidFill>
-            <a:ln>
-              <a:noFill/>
-            </a:ln>
-          </p:spPr>
-          <p:txBody>
-            <a:bodyPr rtlCol="0" anchor="ctr" wrap="square" lIns="0" tIns="0" rIns="0" bIns="0">
-              <a:noAutofit/>
-            </a:bodyPr>
-            <a:lstStyle/>
-            <a:p>
-              <a:pPr algn="ctr">
-                <a:lnSpc>
-                  <a:spcPct val="110000"/>
-                </a:lnSpc>
-              </a:pPr>
-              <a:r>
-                <a:rPr sz="1200" b="1">
-                  <a:solidFill>
-                    <a:srgbClr val="FFFFFF"/>
-                  </a:solidFill>
-                  <a:latin typeface="Play"/>
-                </a:rPr>
-                <a:t>03</a:t>
-              </a:r>
-            </a:p>
-          </p:txBody>
-        </p:sp>
-        <p:sp>
-          <p:nvSpPr>
-            <p:cNvPr id="466" name="BrandDeck Diagram Text 3"/>
-            <p:cNvSpPr txBox="1"/>
-            <p:nvPr/>
-          </p:nvSpPr>
-          <p:spPr>
-            <a:xfrm>
-              <a:off x="8882829" y="5099815"/>
-              <a:ext cx="2418241" cy="1148842"/>
-            </a:xfrm>
-            <a:prstGeom prst="rect">
-              <a:avLst/>
-            </a:prstGeom>
-            <a:noFill/>
-          </p:spPr>
-          <p:txBody>
-            <a:bodyPr wrap="square" anchor="ctr" lIns="36576" tIns="18288" rIns="36576" bIns="18288">
-              <a:noAutofit/>
-            </a:bodyPr>
-            <a:lstStyle/>
-            <a:p>
-              <a:pPr algn="l">
-                <a:lnSpc>
-                  <a:spcPct val="110000"/>
-                </a:lnSpc>
-              </a:pPr>
-              <a:r>
-                <a:rPr sz="1400" b="1">
-                  <a:solidFill>
-                    <a:srgbClr val="FFFFFF"/>
-                  </a:solidFill>
-                  <a:latin typeface="Play"/>
-                </a:rPr>
-                <a:t>Анализ</a:t>
-              </a:r>
-            </a:p>
-            <a:p>
-              <a:pPr algn="l">
-                <a:lnSpc>
-                  <a:spcPct val="110000"/>
-                </a:lnSpc>
-                <a:spcBef>
-                  <a:spcPts val="350"/>
-                </a:spcBef>
-              </a:pPr>
-              <a:r>
-                <a:rPr sz="1400" b="0">
-                  <a:solidFill>
-                    <a:srgbClr val="FFFFFF"/>
-                  </a:solidFill>
-                  <a:latin typeface="Play"/>
-                </a:rPr>
-                <a:t>Измерение времени поиска и закрытия</a:t>
+                <a:t>Получают ответы без передачи данных наружу</a:t>
               </a:r>
             </a:p>
           </p:txBody>
@@ -9428,71 +8655,7 @@
       <p:grpSpPr/>
       <p:sp>
         <p:nvSpPr>
-          <p:cNvPr id="679" name="Google Shape;679;p31"/>
-          <p:cNvSpPr/>
-          <p:nvPr/>
-        </p:nvSpPr>
-        <p:spPr>
-          <a:xfrm>
-            <a:off x="0" y="4748271"/>
-            <a:ext cx="12192000" cy="2109730"/>
-          </a:xfrm>
-          <a:prstGeom prst="rect">
-            <a:avLst/>
-          </a:prstGeom>
-          <a:gradFill>
-            <a:gsLst>
-              <a:gs pos="0">
-                <a:srgbClr val="0077FF">
-                  <a:alpha val="61961"/>
-                </a:srgbClr>
-              </a:gs>
-              <a:gs pos="99000">
-                <a:srgbClr val="00AEE8"/>
-              </a:gs>
-              <a:gs pos="100000">
-                <a:srgbClr val="00AEE8"/>
-              </a:gs>
-            </a:gsLst>
-            <a:lin ang="14400000" scaled="0"/>
-          </a:gradFill>
-          <a:ln>
-            <a:noFill/>
-          </a:ln>
-        </p:spPr>
-        <p:txBody>
-          <a:bodyPr anchorCtr="0" anchor="ctr" bIns="0" lIns="108000" spcFirstLastPara="1" rIns="91425" wrap="square" tIns="0">
-            <a:noAutofit/>
-          </a:bodyPr>
-          <a:lstStyle/>
-          <a:p>
-            <a:pPr indent="0" lvl="0" marL="0" marR="0" rtl="0" algn="l">
-              <a:spcBef>
-                <a:spcPts val="0"/>
-              </a:spcBef>
-              <a:spcAft>
-                <a:spcPts val="0"/>
-              </a:spcAft>
-              <a:buNone/>
-            </a:pPr>
-            <a:r>
-              <a:t/>
-            </a:r>
-            <a:endParaRPr sz="1100">
-              <a:solidFill>
-                <a:schemeClr val="lt1"/>
-              </a:solidFill>
-              <a:latin typeface="Play"/>
-              <a:ea typeface="Play"/>
-              <a:cs typeface="Play"/>
-              <a:sym typeface="Play"/>
-            </a:endParaRPr>
-          </a:p>
-        </p:txBody>
-      </p:sp>
-      <p:sp>
-        <p:nvSpPr>
-          <p:cNvPr id="680" name="BrandDeck Text 680"/>
+          <p:cNvPr id="459" name="BrandDeck Text 459"/>
           <p:cNvSpPr txBox="1"/>
           <p:nvPr>
             <p:ph type="title"/>
@@ -9500,7 +8663,7 @@
         </p:nvSpPr>
         <p:spPr>
           <a:xfrm>
-            <a:off x="427864" y="424691"/>
+            <a:off x="429253" y="424691"/>
             <a:ext cx="7827311" cy="1167572"/>
           </a:xfrm>
           <a:prstGeom prst="rect">
@@ -9525,7 +8688,7 @@
                 <a:spcPts val="0"/>
               </a:spcBef>
               <a:spcAft>
-                <a:spcPts val="300"/>
+                <a:spcPts val="359"/>
               </a:spcAft>
               <a:buClr>
                 <a:schemeClr val="lt1"/>
@@ -9535,8 +8698,8 @@
               <a:buNone/>
             </a:pPr>
             <a:r>
-              <a:rPr sz="2000"/>
-              <a:t>Основной риск — низкое качество ответов, который минимизируется обучением модели на внутренних регламентах</a:t>
+              <a:rPr sz="2400"/>
+              <a:t>Для реализации требуется одобрение пилота и выделение команды из 3 человек</a:t>
             </a:r>
             <a:endParaRPr/>
           </a:p>
@@ -9544,18 +8707,18 @@
       </p:sp>
       <p:sp>
         <p:nvSpPr>
-          <p:cNvPr id="681" name="BrandDeck Text 681"/>
+          <p:cNvPr id="460" name="BrandDeck Text 460"/>
           <p:cNvSpPr/>
           <p:nvPr/>
         </p:nvSpPr>
         <p:spPr>
           <a:xfrm>
-            <a:off x="427864" y="1837067"/>
-            <a:ext cx="3636000" cy="2022006"/>
+            <a:off x="7729481" y="1666499"/>
+            <a:ext cx="3420000" cy="3525002"/>
           </a:xfrm>
           <a:prstGeom prst="roundRect">
             <a:avLst>
-              <a:gd fmla="val 6326" name="adj"/>
+              <a:gd fmla="val 4432" name="adj"/>
             </a:avLst>
           </a:prstGeom>
           <a:solidFill>
@@ -9566,7 +8729,7 @@
           </a:ln>
         </p:spPr>
         <p:txBody>
-          <a:bodyPr anchorCtr="0" anchor="t" bIns="45700" lIns="108000" spcFirstLastPara="1" rIns="91425" wrap="square" tIns="72000">
+          <a:bodyPr anchorCtr="0" anchor="t" bIns="45700" lIns="108000" spcFirstLastPara="1" rIns="91425" wrap="square" tIns="108000">
             <a:normAutofit/>
           </a:bodyPr>
           <a:lstStyle/>
@@ -9579,18 +8742,18 @@
                 <a:spcPts val="0"/>
               </a:spcBef>
               <a:spcAft>
-                <a:spcPts val="270"/>
+                <a:spcPts val="300"/>
               </a:spcAft>
               <a:buNone/>
             </a:pPr>
             <a:r>
-              <a:rPr sz="1800">
+              <a:rPr sz="2000" b="0">
                 <a:solidFill>
                   <a:srgbClr val="FFFFFF"/>
                 </a:solidFill>
                 <a:latin typeface="Play"/>
               </a:rPr>
-              <a:t>Риск: низкое качество ответов ИИ-помощника.</a:t>
+              <a:t>Запуск зависит от утверждения бюджета и формирования команды.</a:t>
             </a:r>
             <a:endParaRPr/>
           </a:p>
@@ -9598,18 +8761,18 @@
       </p:sp>
       <p:sp>
         <p:nvSpPr>
-          <p:cNvPr id="682" name="BrandDeck Text 682"/>
+          <p:cNvPr id="461" name="BrandDeck Text 461"/>
           <p:cNvSpPr/>
           <p:nvPr/>
         </p:nvSpPr>
         <p:spPr>
           <a:xfrm>
-            <a:off x="4217594" y="1837067"/>
-            <a:ext cx="3636000" cy="2022006"/>
+            <a:off x="4056891" y="1666499"/>
+            <a:ext cx="3420000" cy="3525002"/>
           </a:xfrm>
           <a:prstGeom prst="roundRect">
             <a:avLst>
-              <a:gd fmla="val 6871" name="adj"/>
+              <a:gd fmla="val 4027" name="adj"/>
             </a:avLst>
           </a:prstGeom>
           <a:solidFill>
@@ -9620,7 +8783,7 @@
           </a:ln>
         </p:spPr>
         <p:txBody>
-          <a:bodyPr anchorCtr="0" anchor="t" bIns="45700" lIns="108000" spcFirstLastPara="1" rIns="91425" wrap="square" tIns="72000">
+          <a:bodyPr anchorCtr="0" anchor="t" bIns="45700" lIns="108000" spcFirstLastPara="1" rIns="91425" wrap="square" tIns="108000">
             <a:normAutofit/>
           </a:bodyPr>
           <a:lstStyle/>
@@ -9633,18 +8796,18 @@
                 <a:spcPts val="0"/>
               </a:spcBef>
               <a:spcAft>
-                <a:spcPts val="270"/>
+                <a:spcPts val="300"/>
               </a:spcAft>
               <a:buNone/>
             </a:pPr>
             <a:r>
-              <a:rPr sz="1800">
+              <a:rPr sz="2000">
                 <a:solidFill>
                   <a:srgbClr val="FFFFFF"/>
                 </a:solidFill>
                 <a:latin typeface="Play"/>
               </a:rPr>
-              <a:t>Минимизация: обучение модели на внутренних регламентах.</a:t>
+              <a:t>Необходимо выделить команду из 3 человек.</a:t>
             </a:r>
             <a:endParaRPr/>
           </a:p>
@@ -9652,18 +8815,18 @@
       </p:sp>
       <p:sp>
         <p:nvSpPr>
-          <p:cNvPr id="683" name="BrandDeck Text 683"/>
+          <p:cNvPr id="462" name="BrandDeck Text 462"/>
           <p:cNvSpPr/>
           <p:nvPr/>
         </p:nvSpPr>
         <p:spPr>
           <a:xfrm>
-            <a:off x="8007324" y="1837067"/>
-            <a:ext cx="3636000" cy="2022006"/>
+            <a:off x="415687" y="1666499"/>
+            <a:ext cx="3420000" cy="3525002"/>
           </a:xfrm>
           <a:prstGeom prst="roundRect">
             <a:avLst>
-              <a:gd fmla="val 5781" name="adj"/>
+              <a:gd fmla="val 4432" name="adj"/>
             </a:avLst>
           </a:prstGeom>
           <a:solidFill>
@@ -9674,7 +8837,7 @@
           </a:ln>
         </p:spPr>
         <p:txBody>
-          <a:bodyPr anchorCtr="0" anchor="t" bIns="45700" lIns="108000" spcFirstLastPara="1" rIns="91425" wrap="square" tIns="72000">
+          <a:bodyPr anchorCtr="0" anchor="t" bIns="45700" lIns="108000" spcFirstLastPara="1" rIns="91425" wrap="square" tIns="108000">
             <a:normAutofit/>
           </a:bodyPr>
           <a:lstStyle/>
@@ -9687,18 +8850,18 @@
                 <a:spcPts val="0"/>
               </a:spcBef>
               <a:spcAft>
-                <a:spcPts val="270"/>
+                <a:spcPts val="300"/>
               </a:spcAft>
               <a:buNone/>
             </a:pPr>
             <a:r>
-              <a:rPr sz="1800">
+              <a:rPr sz="2000">
                 <a:solidFill>
                   <a:srgbClr val="FFFFFF"/>
                 </a:solidFill>
                 <a:latin typeface="Play"/>
               </a:rPr>
-              <a:t>Цель: точные ответы со ссылкой на документ-источник.</a:t>
+              <a:t>Требуется одобрение пилота для запуска проекта.</a:t>
             </a:r>
             <a:endParaRPr/>
           </a:p>
@@ -9713,6 +8876,522 @@
 </file>
 
 <file path=ppt/slides/slide12.xml><?xml version="1.0" encoding="utf-8"?>
+<p:sld xmlns:a="http://schemas.openxmlformats.org/drawingml/2006/main" xmlns:p="http://schemas.openxmlformats.org/presentationml/2006/main" xmlns:r="http://schemas.openxmlformats.org/officeDocument/2006/relationships">
+  <p:cSld>
+    <p:spTree>
+      <p:nvGrpSpPr>
+        <p:cNvPr id="1" name=""/>
+        <p:cNvGrpSpPr/>
+        <p:nvPr/>
+      </p:nvGrpSpPr>
+      <p:grpSpPr/>
+      <p:sp>
+        <p:nvSpPr>
+          <p:cNvPr id="441" name="BrandDeck Text 441"/>
+          <p:cNvSpPr txBox="1"/>
+          <p:nvPr>
+            <p:ph type="title"/>
+          </p:nvPr>
+        </p:nvSpPr>
+        <p:spPr>
+          <a:xfrm>
+            <a:off x="429253" y="424691"/>
+            <a:ext cx="7827311" cy="626869"/>
+          </a:xfrm>
+          <a:prstGeom prst="rect">
+            <a:avLst/>
+          </a:prstGeom>
+          <a:noFill/>
+          <a:ln>
+            <a:noFill/>
+          </a:ln>
+        </p:spPr>
+        <p:txBody>
+          <a:bodyPr anchorCtr="0" anchor="t" bIns="0" lIns="0" spcFirstLastPara="1" rIns="0" wrap="square" tIns="0">
+            <a:normAutofit/>
+          </a:bodyPr>
+          <a:lstStyle/>
+          <a:p>
+            <a:pPr indent="0" marL="0" rtl="0" algn="l">
+              <a:lnSpc>
+                <a:spcPct val="115000"/>
+              </a:lnSpc>
+              <a:spcBef>
+                <a:spcPts val="0"/>
+              </a:spcBef>
+              <a:spcAft>
+                <a:spcPts val="270"/>
+              </a:spcAft>
+              <a:buClr>
+                <a:schemeClr val="lt1"/>
+              </a:buClr>
+              <a:buSzPts val="3600"/>
+              <a:buFont typeface="Play"/>
+              <a:buNone/>
+            </a:pPr>
+            <a:r>
+              <a:rPr sz="1800"/>
+              <a:t>Запуск пилота зависит от утверждения бюджета и формирования команды из 3 специалистов</a:t>
+            </a:r>
+            <a:endParaRPr/>
+          </a:p>
+        </p:txBody>
+      </p:sp>
+      <p:sp>
+        <p:nvSpPr>
+          <p:cNvPr id="442" name="BrandDeck Text 442"/>
+          <p:cNvSpPr/>
+          <p:nvPr/>
+        </p:nvSpPr>
+        <p:spPr>
+          <a:xfrm>
+            <a:off x="5383513" y="860119"/>
+            <a:ext cx="5917558" cy="1705685"/>
+          </a:xfrm>
+          <a:prstGeom prst="roundRect">
+            <a:avLst>
+              <a:gd fmla="val 9293" name="adj"/>
+            </a:avLst>
+          </a:prstGeom>
+          <a:solidFill>
+            <a:srgbClr val="151515"/>
+          </a:solidFill>
+          <a:ln>
+            <a:noFill/>
+          </a:ln>
+        </p:spPr>
+        <p:txBody>
+          <a:bodyPr anchorCtr="0" anchor="t" bIns="0" lIns="108000" spcFirstLastPara="1" rIns="0" wrap="square" tIns="756000">
+            <a:normAutofit/>
+          </a:bodyPr>
+          <a:lstStyle/>
+          <a:p>
+            <a:pPr indent="0" marL="0" marR="0" rtl="0" algn="l">
+              <a:lnSpc>
+                <a:spcPct val="115000"/>
+              </a:lnSpc>
+              <a:spcBef>
+                <a:spcPts val="0"/>
+              </a:spcBef>
+              <a:spcAft>
+                <a:spcPts val="270"/>
+              </a:spcAft>
+              <a:buNone/>
+            </a:pPr>
+            <a:r>
+              <a:rPr sz="1800" b="0">
+                <a:solidFill>
+                  <a:srgbClr val="FFFFFF"/>
+                </a:solidFill>
+                <a:latin typeface="Play"/>
+              </a:rPr>
+              <a:t>Утвердить бюджет проекта.</a:t>
+            </a:r>
+            <a:endParaRPr/>
+          </a:p>
+        </p:txBody>
+      </p:sp>
+      <p:grpSp>
+        <p:nvGrpSpPr>
+          <p:cNvPr id="443" name="Google Shape;443;p21"/>
+          <p:cNvGrpSpPr/>
+          <p:nvPr/>
+        </p:nvGrpSpPr>
+        <p:grpSpPr>
+          <a:xfrm>
+            <a:off x="5523729" y="996732"/>
+            <a:ext cx="515460" cy="515395"/>
+            <a:chOff x="5166883" y="996732"/>
+            <a:chExt cx="515460" cy="515395"/>
+          </a:xfrm>
+        </p:grpSpPr>
+        <p:sp>
+          <p:nvSpPr>
+            <p:cNvPr id="444" name="Google Shape;444;p21"/>
+            <p:cNvSpPr/>
+            <p:nvPr/>
+          </p:nvSpPr>
+          <p:spPr>
+            <a:xfrm>
+              <a:off x="5166883" y="996732"/>
+              <a:ext cx="515460" cy="515395"/>
+            </a:xfrm>
+            <a:prstGeom prst="roundRect">
+              <a:avLst>
+                <a:gd fmla="val 23586" name="adj"/>
+              </a:avLst>
+            </a:prstGeom>
+            <a:solidFill>
+              <a:srgbClr val="212121"/>
+            </a:solidFill>
+            <a:ln>
+              <a:noFill/>
+            </a:ln>
+          </p:spPr>
+          <p:txBody>
+            <a:bodyPr anchorCtr="0" anchor="ctr" bIns="91425" lIns="91425" spcFirstLastPara="1" rIns="91425" wrap="square" tIns="91425">
+              <a:noAutofit/>
+            </a:bodyPr>
+            <a:lstStyle/>
+            <a:p>
+              <a:pPr indent="0" lvl="0" marL="0" rtl="0" algn="l">
+                <a:spcBef>
+                  <a:spcPts val="0"/>
+                </a:spcBef>
+                <a:spcAft>
+                  <a:spcPts val="0"/>
+                </a:spcAft>
+                <a:buNone/>
+              </a:pPr>
+              <a:r>
+                <a:t/>
+              </a:r>
+              <a:endParaRPr/>
+            </a:p>
+          </p:txBody>
+        </p:sp>
+        <p:pic>
+          <p:nvPicPr>
+            <p:cNvPr id="445" name="Google Shape;445;p21"/>
+            <p:cNvPicPr preferRelativeResize="0"/>
+            <p:nvPr/>
+          </p:nvPicPr>
+          <p:blipFill rotWithShape="1">
+            <a:blip r:embed="rId2">
+              <a:alphaModFix/>
+            </a:blip>
+            <a:srcRect b="0" l="0" r="0" t="0"/>
+            <a:stretch/>
+          </p:blipFill>
+          <p:spPr>
+            <a:xfrm>
+              <a:off x="5291263" y="1117786"/>
+              <a:ext cx="266700" cy="266700"/>
+            </a:xfrm>
+            <a:prstGeom prst="rect">
+              <a:avLst/>
+            </a:prstGeom>
+            <a:noFill/>
+            <a:ln>
+              <a:noFill/>
+            </a:ln>
+          </p:spPr>
+        </p:pic>
+      </p:grpSp>
+      <p:sp>
+        <p:nvSpPr>
+          <p:cNvPr id="446" name="BrandDeck Text 446"/>
+          <p:cNvSpPr/>
+          <p:nvPr/>
+        </p:nvSpPr>
+        <p:spPr>
+          <a:xfrm>
+            <a:off x="5383513" y="2710690"/>
+            <a:ext cx="5917558" cy="1705685"/>
+          </a:xfrm>
+          <a:prstGeom prst="roundRect">
+            <a:avLst>
+              <a:gd fmla="val 9293" name="adj"/>
+            </a:avLst>
+          </a:prstGeom>
+          <a:solidFill>
+            <a:srgbClr val="151515"/>
+          </a:solidFill>
+          <a:ln>
+            <a:noFill/>
+          </a:ln>
+        </p:spPr>
+        <p:txBody>
+          <a:bodyPr anchorCtr="0" anchor="t" bIns="0" lIns="108000" spcFirstLastPara="1" rIns="0" wrap="square" tIns="756000">
+            <a:normAutofit/>
+          </a:bodyPr>
+          <a:lstStyle/>
+          <a:p>
+            <a:pPr indent="0" marL="0" marR="0" rtl="0" algn="l">
+              <a:lnSpc>
+                <a:spcPct val="115000"/>
+              </a:lnSpc>
+              <a:spcBef>
+                <a:spcPts val="0"/>
+              </a:spcBef>
+              <a:spcAft>
+                <a:spcPts val="270"/>
+              </a:spcAft>
+              <a:buNone/>
+            </a:pPr>
+            <a:r>
+              <a:rPr sz="1800" b="0">
+                <a:solidFill>
+                  <a:srgbClr val="FFFFFF"/>
+                </a:solidFill>
+                <a:latin typeface="Play"/>
+              </a:rPr>
+              <a:t>Следующие шаги</a:t>
+            </a:r>
+            <a:endParaRPr/>
+          </a:p>
+        </p:txBody>
+      </p:sp>
+      <p:grpSp>
+        <p:nvGrpSpPr>
+          <p:cNvPr id="447" name="Google Shape;447;p21"/>
+          <p:cNvGrpSpPr/>
+          <p:nvPr/>
+        </p:nvGrpSpPr>
+        <p:grpSpPr>
+          <a:xfrm>
+            <a:off x="5523729" y="2847303"/>
+            <a:ext cx="515460" cy="515395"/>
+            <a:chOff x="5166883" y="996732"/>
+            <a:chExt cx="515460" cy="515395"/>
+          </a:xfrm>
+        </p:grpSpPr>
+        <p:sp>
+          <p:nvSpPr>
+            <p:cNvPr id="448" name="Google Shape;448;p21"/>
+            <p:cNvSpPr/>
+            <p:nvPr/>
+          </p:nvSpPr>
+          <p:spPr>
+            <a:xfrm>
+              <a:off x="5166883" y="996732"/>
+              <a:ext cx="515460" cy="515395"/>
+            </a:xfrm>
+            <a:prstGeom prst="roundRect">
+              <a:avLst>
+                <a:gd fmla="val 23586" name="adj"/>
+              </a:avLst>
+            </a:prstGeom>
+            <a:solidFill>
+              <a:srgbClr val="212121"/>
+            </a:solidFill>
+            <a:ln>
+              <a:noFill/>
+            </a:ln>
+          </p:spPr>
+          <p:txBody>
+            <a:bodyPr anchorCtr="0" anchor="ctr" bIns="91425" lIns="91425" spcFirstLastPara="1" rIns="91425" wrap="square" tIns="91425">
+              <a:noAutofit/>
+            </a:bodyPr>
+            <a:lstStyle/>
+            <a:p>
+              <a:pPr indent="0" lvl="0" marL="0" rtl="0" algn="l">
+                <a:spcBef>
+                  <a:spcPts val="0"/>
+                </a:spcBef>
+                <a:spcAft>
+                  <a:spcPts val="0"/>
+                </a:spcAft>
+                <a:buNone/>
+              </a:pPr>
+              <a:r>
+                <a:t/>
+              </a:r>
+              <a:endParaRPr/>
+            </a:p>
+          </p:txBody>
+        </p:sp>
+        <p:pic>
+          <p:nvPicPr>
+            <p:cNvPr id="449" name="Google Shape;449;p21"/>
+            <p:cNvPicPr preferRelativeResize="0"/>
+            <p:nvPr/>
+          </p:nvPicPr>
+          <p:blipFill rotWithShape="1">
+            <a:blip r:embed="rId2">
+              <a:alphaModFix/>
+            </a:blip>
+            <a:srcRect b="0" l="0" r="0" t="0"/>
+            <a:stretch/>
+          </p:blipFill>
+          <p:spPr>
+            <a:xfrm>
+              <a:off x="5291263" y="1117786"/>
+              <a:ext cx="266700" cy="266700"/>
+            </a:xfrm>
+            <a:prstGeom prst="rect">
+              <a:avLst/>
+            </a:prstGeom>
+            <a:noFill/>
+            <a:ln>
+              <a:noFill/>
+            </a:ln>
+          </p:spPr>
+        </p:pic>
+      </p:grpSp>
+      <p:sp>
+        <p:nvSpPr>
+          <p:cNvPr id="450" name="BrandDeck Text 450"/>
+          <p:cNvSpPr/>
+          <p:nvPr/>
+        </p:nvSpPr>
+        <p:spPr>
+          <a:xfrm>
+            <a:off x="5383513" y="4561261"/>
+            <a:ext cx="5917558" cy="1705685"/>
+          </a:xfrm>
+          <a:prstGeom prst="roundRect">
+            <a:avLst>
+              <a:gd fmla="val 9293" name="adj"/>
+            </a:avLst>
+          </a:prstGeom>
+          <a:solidFill>
+            <a:srgbClr val="151515"/>
+          </a:solidFill>
+          <a:ln>
+            <a:noFill/>
+          </a:ln>
+        </p:spPr>
+        <p:txBody>
+          <a:bodyPr anchorCtr="0" anchor="t" bIns="0" lIns="108000" spcFirstLastPara="1" rIns="0" wrap="square" tIns="756000">
+            <a:normAutofit/>
+          </a:bodyPr>
+          <a:lstStyle/>
+          <a:p>
+            <a:pPr indent="0" marL="0" marR="0" rtl="0" algn="l">
+              <a:lnSpc>
+                <a:spcPct val="115000"/>
+              </a:lnSpc>
+              <a:spcBef>
+                <a:spcPts val="0"/>
+              </a:spcBef>
+              <a:spcAft>
+                <a:spcPts val="270"/>
+              </a:spcAft>
+              <a:buNone/>
+            </a:pPr>
+            <a:r>
+              <a:rPr sz="1800" b="0">
+                <a:solidFill>
+                  <a:srgbClr val="FFFFFF"/>
+                </a:solidFill>
+                <a:latin typeface="Play"/>
+              </a:rPr>
+              <a:t>Сформировать команду из 3 специалистов.</a:t>
+            </a:r>
+            <a:endParaRPr/>
+          </a:p>
+          <a:p>
+            <a:pPr indent="0" marL="0" marR="0" rtl="0" algn="l">
+              <a:lnSpc>
+                <a:spcPct val="115000"/>
+              </a:lnSpc>
+              <a:spcBef>
+                <a:spcPts val="0"/>
+              </a:spcBef>
+              <a:spcAft>
+                <a:spcPts val="270"/>
+              </a:spcAft>
+              <a:buNone/>
+            </a:pPr>
+            <a:r>
+              <a:rPr sz="1800" b="0">
+                <a:solidFill>
+                  <a:srgbClr val="FFFFFF"/>
+                </a:solidFill>
+                <a:latin typeface="Play"/>
+              </a:rPr>
+              <a:t>Начать пилотный запуск.</a:t>
+            </a:r>
+          </a:p>
+        </p:txBody>
+      </p:sp>
+      <p:grpSp>
+        <p:nvGrpSpPr>
+          <p:cNvPr id="451" name="Google Shape;451;p21"/>
+          <p:cNvGrpSpPr/>
+          <p:nvPr/>
+        </p:nvGrpSpPr>
+        <p:grpSpPr>
+          <a:xfrm>
+            <a:off x="5523729" y="4697874"/>
+            <a:ext cx="515460" cy="515395"/>
+            <a:chOff x="5166883" y="996732"/>
+            <a:chExt cx="515460" cy="515395"/>
+          </a:xfrm>
+        </p:grpSpPr>
+        <p:sp>
+          <p:nvSpPr>
+            <p:cNvPr id="452" name="Google Shape;452;p21"/>
+            <p:cNvSpPr/>
+            <p:nvPr/>
+          </p:nvSpPr>
+          <p:spPr>
+            <a:xfrm>
+              <a:off x="5166883" y="996732"/>
+              <a:ext cx="515460" cy="515395"/>
+            </a:xfrm>
+            <a:prstGeom prst="roundRect">
+              <a:avLst>
+                <a:gd fmla="val 23586" name="adj"/>
+              </a:avLst>
+            </a:prstGeom>
+            <a:solidFill>
+              <a:srgbClr val="212121"/>
+            </a:solidFill>
+            <a:ln>
+              <a:noFill/>
+            </a:ln>
+          </p:spPr>
+          <p:txBody>
+            <a:bodyPr anchorCtr="0" anchor="ctr" bIns="91425" lIns="91425" spcFirstLastPara="1" rIns="91425" wrap="square" tIns="91425">
+              <a:noAutofit/>
+            </a:bodyPr>
+            <a:lstStyle/>
+            <a:p>
+              <a:pPr indent="0" lvl="0" marL="0" rtl="0" algn="l">
+                <a:spcBef>
+                  <a:spcPts val="0"/>
+                </a:spcBef>
+                <a:spcAft>
+                  <a:spcPts val="0"/>
+                </a:spcAft>
+                <a:buNone/>
+              </a:pPr>
+              <a:r>
+                <a:t/>
+              </a:r>
+              <a:endParaRPr/>
+            </a:p>
+          </p:txBody>
+        </p:sp>
+        <p:pic>
+          <p:nvPicPr>
+            <p:cNvPr id="453" name="Google Shape;453;p21"/>
+            <p:cNvPicPr preferRelativeResize="0"/>
+            <p:nvPr/>
+          </p:nvPicPr>
+          <p:blipFill rotWithShape="1">
+            <a:blip r:embed="rId2">
+              <a:alphaModFix/>
+            </a:blip>
+            <a:srcRect b="0" l="0" r="0" t="0"/>
+            <a:stretch/>
+          </p:blipFill>
+          <p:spPr>
+            <a:xfrm>
+              <a:off x="5291263" y="1117786"/>
+              <a:ext cx="266700" cy="266700"/>
+            </a:xfrm>
+            <a:prstGeom prst="rect">
+              <a:avLst/>
+            </a:prstGeom>
+            <a:noFill/>
+            <a:ln>
+              <a:noFill/>
+            </a:ln>
+          </p:spPr>
+        </p:pic>
+      </p:grpSp>
+    </p:spTree>
+  </p:cSld>
+  <p:clrMapOvr>
+    <a:masterClrMapping/>
+  </p:clrMapOvr>
+</p:sld>
+</file>
+
+<file path=ppt/slides/slide2.xml><?xml version="1.0" encoding="utf-8"?>
 <p:sld xmlns:a="http://schemas.openxmlformats.org/drawingml/2006/main" xmlns:p="http://schemas.openxmlformats.org/presentationml/2006/main" xmlns:r="http://schemas.openxmlformats.org/officeDocument/2006/relationships">
   <p:cSld>
     <p:spTree>
@@ -9768,7 +9447,7 @@
             </a:pPr>
             <a:r>
               <a:rPr sz="1800"/>
-              <a:t>Одобрить пилот и выделить команду из 3 человек для реализации</a:t>
+              <a:t>Поиск инструкции занимает до 30 минут, а треть обращений дублируются</a:t>
             </a:r>
             <a:endParaRPr/>
           </a:p>
@@ -9824,7 +9503,7 @@
                   <a:schemeClr val="lt1"/>
                 </a:solidFill>
               </a:rPr>
-              <a:t>Одобрить запуск пилота в двух подразделениях на 6 недель.</a:t>
+              <a:t>Сотрудники тратят до 30 минут на поиск нужной инструкции.</a:t>
             </a:r>
             <a:endParaRPr/>
           </a:p>
@@ -9967,7 +9646,7 @@
                   <a:schemeClr val="lt1"/>
                 </a:solidFill>
               </a:rPr>
-              <a:t>Решение о запуске пилота и выделении команды</a:t>
+              <a:t>Треть всех обращений в поддержку — повторяющиеся вопросы.</a:t>
             </a:r>
             <a:endParaRPr/>
           </a:p>
@@ -10099,43 +9778,20 @@
                 <a:spcPts val="0"/>
               </a:spcBef>
               <a:spcAft>
-                <a:spcPts val="210"/>
+                <a:spcPts val="270"/>
               </a:spcAft>
               <a:buNone/>
             </a:pPr>
             <a:r>
-              <a:rPr sz="1400">
+              <a:rPr sz="1800">
                 <a:latin typeface="Play"/>
                 <a:solidFill>
                   <a:schemeClr val="lt1"/>
                 </a:solidFill>
               </a:rPr>
-              <a:t>Выделить команду из 3 человек для реализации проекта.</a:t>
+              <a:t>Текущий ручной процесс перегружает специалистов поддержки.</a:t>
             </a:r>
             <a:endParaRPr/>
-          </a:p>
-          <a:p>
-            <a:pPr indent="0" marL="0" marR="0" rtl="0" algn="l">
-              <a:lnSpc>
-                <a:spcPct val="115000"/>
-              </a:lnSpc>
-              <a:spcBef>
-                <a:spcPts val="0"/>
-              </a:spcBef>
-              <a:spcAft>
-                <a:spcPts val="210"/>
-              </a:spcAft>
-              <a:buNone/>
-            </a:pPr>
-            <a:r>
-              <a:rPr sz="1400">
-                <a:latin typeface="Play"/>
-                <a:solidFill>
-                  <a:schemeClr val="lt1"/>
-                </a:solidFill>
-              </a:rPr>
-              <a:t>Измерить сокращение времени поиска и долю закрытых обращений.</a:t>
-            </a:r>
           </a:p>
         </p:txBody>
       </p:sp>
@@ -10234,7 +9890,7 @@
 </p:sld>
 </file>
 
-<file path=ppt/slides/slide2.xml><?xml version="1.0" encoding="utf-8"?>
+<file path=ppt/slides/slide3.xml><?xml version="1.0" encoding="utf-8"?>
 <p:sld xmlns:a="http://schemas.openxmlformats.org/drawingml/2006/main" xmlns:p="http://schemas.openxmlformats.org/presentationml/2006/main" xmlns:r="http://schemas.openxmlformats.org/officeDocument/2006/relationships">
   <p:cSld>
     <p:spTree>
@@ -10279,7 +9935,7 @@
                 <a:spcPts val="0"/>
               </a:spcBef>
               <a:spcAft>
-                <a:spcPts val="420"/>
+                <a:spcPts val="359"/>
               </a:spcAft>
               <a:buClr>
                 <a:schemeClr val="lt1"/>
@@ -10289,8 +9945,8 @@
               <a:buNone/>
             </a:pPr>
             <a:r>
-              <a:rPr sz="2800"/>
-              <a:t>Поиск инструкции занимает до 30 минут, а треть обращений дублируется</a:t>
+              <a:rPr sz="2400"/>
+              <a:t>Влияет на 150 сотрудников двух подразделений при текущем ручном процессе</a:t>
             </a:r>
             <a:endParaRPr/>
           </a:p>
@@ -10298,423 +9954,28 @@
       </p:sp>
       <p:grpSp>
         <p:nvGrpSpPr>
-          <p:cNvPr id="2" name="BrandDeck Diagram pyramid" descr="pyramid: Время поиска до 30 минут на инструкцию; Дублирование треть обращений повторяется"/>
+          <p:cNvPr id="2" name="BrandDeck Diagram icon_grid" descr="icon_grid: 150 сотрудников Два подразделения; До 30 минут Время поиска инструкции"/>
           <p:cNvGrpSpPr/>
           <p:nvPr/>
         </p:nvGrpSpPr>
         <p:grpSpPr>
           <a:xfrm>
-            <a:off x="432832" y="1921521"/>
-            <a:ext cx="10716649" cy="2871216"/>
-            <a:chOff x="432832" y="1921521"/>
-            <a:chExt cx="10716649" cy="2871216"/>
+            <a:off x="415687" y="1666499"/>
+            <a:ext cx="10733793" cy="3525001"/>
+            <a:chOff x="415687" y="1666499"/>
+            <a:chExt cx="10733793" cy="3525001"/>
           </a:xfrm>
         </p:grpSpPr>
         <p:sp>
           <p:nvSpPr>
-            <p:cNvPr id="468" name="BrandDeck Diagram Level 1"/>
+            <p:cNvPr id="468" name="BrandDeck Diagram Card 1"/>
             <p:cNvSpPr/>
             <p:nvPr/>
           </p:nvSpPr>
           <p:spPr>
             <a:xfrm>
-              <a:off x="1347231" y="1921521"/>
-              <a:ext cx="1794510" cy="1408176"/>
-            </a:xfrm>
-            <a:custGeom>
-              <a:avLst/>
-              <a:gdLst/>
-              <a:ahLst/>
-              <a:cxnLst/>
-              <a:rect l="l" t="t" r="r" b="b"/>
-              <a:pathLst>
-                <a:path w="1963" h="1540" stroke="0">
-                  <a:moveTo>
-                    <a:pt x="956" y="0"/>
-                  </a:moveTo>
-                  <a:lnTo>
-                    <a:pt x="1006" y="0"/>
-                  </a:lnTo>
-                  <a:lnTo>
-                    <a:pt x="1963" y="1540"/>
-                  </a:lnTo>
-                  <a:lnTo>
-                    <a:pt x="0" y="1540"/>
-                  </a:lnTo>
-                  <a:close/>
-                </a:path>
-              </a:pathLst>
-            </a:custGeom>
-            <a:solidFill>
-              <a:srgbClr val="006DEB"/>
-            </a:solidFill>
-            <a:ln w="0">
-              <a:noFill/>
-            </a:ln>
-          </p:spPr>
-          <p:txBody>
-            <a:bodyPr rtlCol="0" anchor="b" wrap="square" lIns="18288" tIns="0" rIns="18288" bIns="73152">
-              <a:noAutofit/>
-            </a:bodyPr>
-            <a:lstStyle/>
-            <a:p>
-              <a:pPr algn="ctr">
-                <a:lnSpc>
-                  <a:spcPct val="110000"/>
-                </a:lnSpc>
-              </a:pPr>
-              <a:r>
-                <a:rPr sz="1400" b="1">
-                  <a:solidFill>
-                    <a:srgbClr val="FFFFFF"/>
-                  </a:solidFill>
-                  <a:latin typeface="Play"/>
-                </a:rPr>
-                <a:t>01</a:t>
-              </a:r>
-            </a:p>
-          </p:txBody>
-        </p:sp>
-        <p:sp>
-          <p:nvSpPr>
-            <p:cNvPr id="469" name="BrandDeck Diagram Text 1"/>
-            <p:cNvSpPr txBox="1"/>
-            <p:nvPr/>
-          </p:nvSpPr>
-          <p:spPr>
-            <a:xfrm>
-              <a:off x="4347607" y="1921521"/>
-              <a:ext cx="6801874" cy="1408176"/>
-            </a:xfrm>
-            <a:prstGeom prst="rect">
-              <a:avLst/>
-            </a:prstGeom>
-            <a:noFill/>
-          </p:spPr>
-          <p:txBody>
-            <a:bodyPr wrap="square" anchor="ctr" lIns="36576" tIns="18288" rIns="36576" bIns="18288">
-              <a:noAutofit/>
-            </a:bodyPr>
-            <a:lstStyle/>
-            <a:p>
-              <a:pPr algn="l">
-                <a:lnSpc>
-                  <a:spcPct val="110000"/>
-                </a:lnSpc>
-              </a:pPr>
-              <a:r>
-                <a:rPr sz="1600" b="1">
-                  <a:solidFill>
-                    <a:srgbClr val="FFFFFF"/>
-                  </a:solidFill>
-                  <a:latin typeface="Play"/>
-                </a:rPr>
-                <a:t>Время поиска</a:t>
-              </a:r>
-            </a:p>
-            <a:p>
-              <a:pPr algn="l">
-                <a:lnSpc>
-                  <a:spcPct val="110000"/>
-                </a:lnSpc>
-                <a:spcBef>
-                  <a:spcPts val="400"/>
-                </a:spcBef>
-              </a:pPr>
-              <a:r>
-                <a:rPr sz="1600" b="0">
-                  <a:solidFill>
-                    <a:srgbClr val="FFFFFF"/>
-                  </a:solidFill>
-                  <a:latin typeface="Play"/>
-                </a:rPr>
-                <a:t>до 30 минут на инструкцию</a:t>
-              </a:r>
-            </a:p>
-          </p:txBody>
-        </p:sp>
-        <p:sp>
-          <p:nvSpPr>
-            <p:cNvPr id="470" name="BrandDeck Diagram Level 2"/>
-            <p:cNvSpPr/>
-            <p:nvPr/>
-          </p:nvSpPr>
-          <p:spPr>
-            <a:xfrm>
-              <a:off x="432832" y="3384561"/>
-              <a:ext cx="3623310" cy="1408176"/>
-            </a:xfrm>
-            <a:custGeom>
-              <a:avLst/>
-              <a:gdLst/>
-              <a:ahLst/>
-              <a:cxnLst/>
-              <a:rect l="l" t="t" r="r" b="b"/>
-              <a:pathLst>
-                <a:path w="3963" h="1540" stroke="0">
-                  <a:moveTo>
-                    <a:pt x="963" y="0"/>
-                  </a:moveTo>
-                  <a:lnTo>
-                    <a:pt x="3000" y="0"/>
-                  </a:lnTo>
-                  <a:lnTo>
-                    <a:pt x="3963" y="1540"/>
-                  </a:lnTo>
-                  <a:lnTo>
-                    <a:pt x="0" y="1540"/>
-                  </a:lnTo>
-                  <a:close/>
-                </a:path>
-              </a:pathLst>
-            </a:custGeom>
-            <a:solidFill>
-              <a:srgbClr val="003676"/>
-            </a:solidFill>
-            <a:ln w="0">
-              <a:noFill/>
-            </a:ln>
-          </p:spPr>
-          <p:txBody>
-            <a:bodyPr rtlCol="0" anchor="ctr" wrap="square" lIns="18288" tIns="0" rIns="18288" bIns="0">
-              <a:noAutofit/>
-            </a:bodyPr>
-            <a:lstStyle/>
-            <a:p>
-              <a:pPr algn="ctr">
-                <a:lnSpc>
-                  <a:spcPct val="110000"/>
-                </a:lnSpc>
-              </a:pPr>
-              <a:r>
-                <a:rPr sz="1400" b="1">
-                  <a:solidFill>
-                    <a:srgbClr val="FFFFFF"/>
-                  </a:solidFill>
-                  <a:latin typeface="Play"/>
-                </a:rPr>
-                <a:t>02</a:t>
-              </a:r>
-            </a:p>
-          </p:txBody>
-        </p:sp>
-        <p:sp>
-          <p:nvSpPr>
-            <p:cNvPr id="471" name="BrandDeck Diagram Text 2"/>
-            <p:cNvSpPr txBox="1"/>
-            <p:nvPr/>
-          </p:nvSpPr>
-          <p:spPr>
-            <a:xfrm>
-              <a:off x="4347607" y="3384561"/>
-              <a:ext cx="6801874" cy="1408176"/>
-            </a:xfrm>
-            <a:prstGeom prst="rect">
-              <a:avLst/>
-            </a:prstGeom>
-            <a:noFill/>
-          </p:spPr>
-          <p:txBody>
-            <a:bodyPr wrap="square" anchor="ctr" lIns="36576" tIns="18288" rIns="36576" bIns="18288">
-              <a:noAutofit/>
-            </a:bodyPr>
-            <a:lstStyle/>
-            <a:p>
-              <a:pPr algn="l">
-                <a:lnSpc>
-                  <a:spcPct val="110000"/>
-                </a:lnSpc>
-              </a:pPr>
-              <a:r>
-                <a:rPr sz="1600" b="1">
-                  <a:solidFill>
-                    <a:srgbClr val="FFFFFF"/>
-                  </a:solidFill>
-                  <a:latin typeface="Play"/>
-                </a:rPr>
-                <a:t>Дублирование</a:t>
-              </a:r>
-            </a:p>
-            <a:p>
-              <a:pPr algn="l">
-                <a:lnSpc>
-                  <a:spcPct val="110000"/>
-                </a:lnSpc>
-                <a:spcBef>
-                  <a:spcPts val="400"/>
-                </a:spcBef>
-              </a:pPr>
-              <a:r>
-                <a:rPr sz="1600" b="0">
-                  <a:solidFill>
-                    <a:srgbClr val="FFFFFF"/>
-                  </a:solidFill>
-                  <a:latin typeface="Play"/>
-                </a:rPr>
-                <a:t>треть обращений повторяется</a:t>
-              </a:r>
-            </a:p>
-          </p:txBody>
-        </p:sp>
-      </p:grpSp>
-    </p:spTree>
-  </p:cSld>
-  <p:clrMapOvr>
-    <a:masterClrMapping/>
-  </p:clrMapOvr>
-</p:sld>
-</file>
-
-<file path=ppt/slides/slide3.xml><?xml version="1.0" encoding="utf-8"?>
-<p:sld xmlns:a="http://schemas.openxmlformats.org/drawingml/2006/main" xmlns:p="http://schemas.openxmlformats.org/presentationml/2006/main" xmlns:r="http://schemas.openxmlformats.org/officeDocument/2006/relationships">
-  <p:cSld>
-    <p:spTree>
-      <p:nvGrpSpPr>
-        <p:cNvPr id="1" name=""/>
-        <p:cNvGrpSpPr/>
-        <p:nvPr/>
-      </p:nvGrpSpPr>
-      <p:grpSpPr/>
-      <p:sp>
-        <p:nvSpPr>
-          <p:cNvPr id="679" name="Google Shape;679;p31"/>
-          <p:cNvSpPr/>
-          <p:nvPr/>
-        </p:nvSpPr>
-        <p:spPr>
-          <a:xfrm>
-            <a:off x="0" y="4748271"/>
-            <a:ext cx="12192000" cy="2109730"/>
-          </a:xfrm>
-          <a:prstGeom prst="rect">
-            <a:avLst/>
-          </a:prstGeom>
-          <a:gradFill>
-            <a:gsLst>
-              <a:gs pos="0">
-                <a:srgbClr val="0077FF">
-                  <a:alpha val="61961"/>
-                </a:srgbClr>
-              </a:gs>
-              <a:gs pos="99000">
-                <a:srgbClr val="00AEE8"/>
-              </a:gs>
-              <a:gs pos="100000">
-                <a:srgbClr val="00AEE8"/>
-              </a:gs>
-            </a:gsLst>
-            <a:lin ang="14400000" scaled="0"/>
-          </a:gradFill>
-          <a:ln>
-            <a:noFill/>
-          </a:ln>
-        </p:spPr>
-        <p:txBody>
-          <a:bodyPr anchorCtr="0" anchor="ctr" bIns="0" lIns="108000" spcFirstLastPara="1" rIns="91425" wrap="square" tIns="0">
-            <a:noAutofit/>
-          </a:bodyPr>
-          <a:lstStyle/>
-          <a:p>
-            <a:pPr indent="0" lvl="0" marL="0" marR="0" rtl="0" algn="l">
-              <a:spcBef>
-                <a:spcPts val="0"/>
-              </a:spcBef>
-              <a:spcAft>
-                <a:spcPts val="0"/>
-              </a:spcAft>
-              <a:buNone/>
-            </a:pPr>
-            <a:r>
-              <a:t/>
-            </a:r>
-            <a:endParaRPr sz="1100">
-              <a:solidFill>
-                <a:schemeClr val="lt1"/>
-              </a:solidFill>
-              <a:latin typeface="Play"/>
-              <a:ea typeface="Play"/>
-              <a:cs typeface="Play"/>
-              <a:sym typeface="Play"/>
-            </a:endParaRPr>
-          </a:p>
-        </p:txBody>
-      </p:sp>
-      <p:sp>
-        <p:nvSpPr>
-          <p:cNvPr id="680" name="BrandDeck Text 680"/>
-          <p:cNvSpPr txBox="1"/>
-          <p:nvPr>
-            <p:ph type="title"/>
-          </p:nvPr>
-        </p:nvSpPr>
-        <p:spPr>
-          <a:xfrm>
-            <a:off x="427864" y="424691"/>
-            <a:ext cx="7827311" cy="1167572"/>
-          </a:xfrm>
-          <a:prstGeom prst="rect">
-            <a:avLst/>
-          </a:prstGeom>
-          <a:noFill/>
-          <a:ln>
-            <a:noFill/>
-          </a:ln>
-        </p:spPr>
-        <p:txBody>
-          <a:bodyPr anchorCtr="0" anchor="t" bIns="0" lIns="0" spcFirstLastPara="1" rIns="0" wrap="square" tIns="0">
-            <a:normAutofit/>
-          </a:bodyPr>
-          <a:lstStyle/>
-          <a:p>
-            <a:pPr indent="0" marL="0" rtl="0" algn="l">
-              <a:lnSpc>
-                <a:spcPct val="115000"/>
-              </a:lnSpc>
-              <a:spcBef>
-                <a:spcPts val="0"/>
-              </a:spcBef>
-              <a:spcAft>
-                <a:spcPts val="359"/>
-              </a:spcAft>
-              <a:buClr>
-                <a:schemeClr val="lt1"/>
-              </a:buClr>
-              <a:buSzPts val="3600"/>
-              <a:buFont typeface="Play"/>
-              <a:buNone/>
-            </a:pPr>
-            <a:r>
-              <a:rPr sz="2400"/>
-              <a:t>Влияет на 150 сотрудников двух подразделений при ежедневном использовании</a:t>
-            </a:r>
-            <a:endParaRPr/>
-          </a:p>
-        </p:txBody>
-      </p:sp>
-      <p:grpSp>
-        <p:nvGrpSpPr>
-          <p:cNvPr id="2" name="BrandDeck Diagram icon_grid" descr="icon_grid: Целевая аудитория 150 сотрудников двух подразделений; Масштаб влияния Ежедневное использование; Объем пилота 2 подразделения"/>
-          <p:cNvGrpSpPr/>
-          <p:nvPr/>
-        </p:nvGrpSpPr>
-        <p:grpSpPr>
-          <a:xfrm>
-            <a:off x="427864" y="2486825"/>
-            <a:ext cx="11215460" cy="2899562"/>
-            <a:chOff x="427864" y="2486825"/>
-            <a:chExt cx="11215460" cy="2899562"/>
-          </a:xfrm>
-        </p:grpSpPr>
-        <p:sp>
-          <p:nvSpPr>
-            <p:cNvPr id="686" name="BrandDeck Diagram Card 1"/>
-            <p:cNvSpPr/>
-            <p:nvPr/>
-          </p:nvSpPr>
-          <p:spPr>
-            <a:xfrm>
-              <a:off x="427864" y="2486825"/>
-              <a:ext cx="5498002" cy="1340053"/>
+              <a:off x="415687" y="1666499"/>
+              <a:ext cx="5259559" cy="3525001"/>
             </a:xfrm>
             <a:prstGeom prst="roundRect">
               <a:avLst>
@@ -10738,13 +9999,13 @@
         </p:sp>
         <p:sp>
           <p:nvSpPr>
-            <p:cNvPr id="687" name="BrandDeck Diagram Icon 1 Badge"/>
+            <p:cNvPr id="469" name="BrandDeck Diagram Icon 1 Badge"/>
             <p:cNvSpPr/>
             <p:nvPr/>
           </p:nvSpPr>
           <p:spPr>
             <a:xfrm>
-              <a:off x="647319" y="2855100"/>
+              <a:off x="635143" y="1885955"/>
               <a:ext cx="603504" cy="603504"/>
             </a:xfrm>
             <a:prstGeom prst="ellipse">
@@ -10767,13 +10028,13 @@
         </p:sp>
         <p:sp>
           <p:nvSpPr>
-            <p:cNvPr id="688" name="BrandDeck Icon users"/>
+            <p:cNvPr id="470" name="BrandDeck Icon users"/>
             <p:cNvSpPr/>
             <p:nvPr/>
           </p:nvSpPr>
           <p:spPr>
             <a:xfrm>
-              <a:off x="780090" y="2987870"/>
+              <a:off x="767913" y="2018725"/>
               <a:ext cx="337962" cy="337962"/>
             </a:xfrm>
             <a:custGeom>
@@ -10881,14 +10142,14 @@
         </p:sp>
         <p:sp>
           <p:nvSpPr>
-            <p:cNvPr id="689" name="BrandDeck Diagram Text 1"/>
+            <p:cNvPr id="471" name="BrandDeck Diagram Text 1"/>
             <p:cNvSpPr txBox="1"/>
             <p:nvPr/>
           </p:nvSpPr>
           <p:spPr>
             <a:xfrm>
-              <a:off x="1382497" y="2618499"/>
-              <a:ext cx="4323912" cy="1076706"/>
+              <a:off x="569306" y="2643078"/>
+              <a:ext cx="4952320" cy="2438694"/>
             </a:xfrm>
             <a:prstGeom prst="rect">
               <a:avLst/>
@@ -10896,7 +10157,7 @@
             <a:noFill/>
           </p:spPr>
           <p:txBody>
-            <a:bodyPr wrap="square" anchor="ctr" lIns="36576" tIns="18288" rIns="36576" bIns="18288">
+            <a:bodyPr wrap="square" anchor="t" lIns="36576" tIns="18288" rIns="36576" bIns="18288">
               <a:noAutofit/>
             </a:bodyPr>
             <a:lstStyle/>
@@ -10913,7 +10174,7 @@
                   </a:solidFill>
                   <a:latin typeface="Play"/>
                 </a:rPr>
-                <a:t>Целевая аудитория</a:t>
+                <a:t>150 сотрудников</a:t>
               </a:r>
             </a:p>
             <a:p>
@@ -10932,21 +10193,21 @@
                   </a:solidFill>
                   <a:latin typeface="Play"/>
                 </a:rPr>
-                <a:t>150 сотрудников двух подразделений</a:t>
+                <a:t>Два подразделения</a:t>
               </a:r>
             </a:p>
           </p:txBody>
         </p:sp>
         <p:sp>
           <p:nvSpPr>
-            <p:cNvPr id="690" name="BrandDeck Diagram Card 2"/>
+            <p:cNvPr id="472" name="BrandDeck Diagram Card 2"/>
             <p:cNvSpPr/>
             <p:nvPr/>
           </p:nvSpPr>
           <p:spPr>
             <a:xfrm>
-              <a:off x="6145322" y="2486825"/>
-              <a:ext cx="5498002" cy="1340053"/>
+              <a:off x="5889921" y="1666499"/>
+              <a:ext cx="5259559" cy="3525001"/>
             </a:xfrm>
             <a:prstGeom prst="roundRect">
               <a:avLst>
@@ -10970,13 +10231,13 @@
         </p:sp>
         <p:sp>
           <p:nvSpPr>
-            <p:cNvPr id="691" name="BrandDeck Diagram Icon 2 Badge"/>
+            <p:cNvPr id="473" name="BrandDeck Diagram Icon 2 Badge"/>
             <p:cNvSpPr/>
             <p:nvPr/>
           </p:nvSpPr>
           <p:spPr>
             <a:xfrm>
-              <a:off x="6364778" y="2855100"/>
+              <a:off x="6109377" y="1885955"/>
               <a:ext cx="603504" cy="603504"/>
             </a:xfrm>
             <a:prstGeom prst="ellipse">
@@ -10999,13 +10260,13 @@
         </p:sp>
         <p:sp>
           <p:nvSpPr>
-            <p:cNvPr id="692" name="BrandDeck Icon trending-up"/>
+            <p:cNvPr id="474" name="BrandDeck Icon clock"/>
             <p:cNvSpPr/>
             <p:nvPr/>
           </p:nvSpPr>
           <p:spPr>
             <a:xfrm>
-              <a:off x="6497548" y="2987870"/>
+              <a:off x="6242148" y="2018725"/>
               <a:ext cx="337962" cy="337962"/>
             </a:xfrm>
             <a:custGeom>
@@ -11017,27 +10278,39 @@
               <a:pathLst>
                 <a:path w="24000" h="24000" fill="none">
                   <a:moveTo>
-                    <a:pt x="22000" y="7000"/>
+                    <a:pt x="22000" y="12000"/>
                   </a:moveTo>
-                  <a:lnTo>
-                    <a:pt x="13500" y="15500"/>
-                  </a:lnTo>
-                  <a:lnTo>
-                    <a:pt x="8500" y="10500"/>
-                  </a:lnTo>
-                  <a:lnTo>
-                    <a:pt x="2000" y="17000"/>
-                  </a:lnTo>
+                  <a:cubicBezTo>
+                    <a:pt x="22000" y="17523"/>
+                    <a:pt x="17523" y="22000"/>
+                    <a:pt x="12000" y="22000"/>
+                  </a:cubicBezTo>
+                  <a:cubicBezTo>
+                    <a:pt x="6477" y="22000"/>
+                    <a:pt x="2000" y="17523"/>
+                    <a:pt x="2000" y="12000"/>
+                  </a:cubicBezTo>
+                  <a:cubicBezTo>
+                    <a:pt x="2000" y="6477"/>
+                    <a:pt x="6477" y="2000"/>
+                    <a:pt x="12000" y="2000"/>
+                  </a:cubicBezTo>
+                  <a:cubicBezTo>
+                    <a:pt x="17523" y="2000"/>
+                    <a:pt x="22000" y="6477"/>
+                    <a:pt x="22000" y="12000"/>
+                  </a:cubicBezTo>
+                  <a:close/>
                 </a:path>
                 <a:path w="24000" h="24000" fill="none">
                   <a:moveTo>
-                    <a:pt x="16000" y="7000"/>
+                    <a:pt x="12000" y="6000"/>
                   </a:moveTo>
                   <a:lnTo>
-                    <a:pt x="22000" y="7000"/>
+                    <a:pt x="12000" y="12000"/>
                   </a:lnTo>
                   <a:lnTo>
-                    <a:pt x="22000" y="13000"/>
+                    <a:pt x="16000" y="14000"/>
                   </a:lnTo>
                 </a:path>
               </a:pathLst>
@@ -11060,14 +10333,14 @@
         </p:sp>
         <p:sp>
           <p:nvSpPr>
-            <p:cNvPr id="693" name="BrandDeck Diagram Text 2"/>
+            <p:cNvPr id="475" name="BrandDeck Diagram Text 2"/>
             <p:cNvSpPr txBox="1"/>
             <p:nvPr/>
           </p:nvSpPr>
           <p:spPr>
             <a:xfrm>
-              <a:off x="7099955" y="2618499"/>
-              <a:ext cx="4323912" cy="1076706"/>
+              <a:off x="6043541" y="2643078"/>
+              <a:ext cx="4952320" cy="2438694"/>
             </a:xfrm>
             <a:prstGeom prst="rect">
               <a:avLst/>
@@ -11075,7 +10348,7 @@
             <a:noFill/>
           </p:spPr>
           <p:txBody>
-            <a:bodyPr wrap="square" anchor="ctr" lIns="36576" tIns="18288" rIns="36576" bIns="18288">
+            <a:bodyPr wrap="square" anchor="t" lIns="36576" tIns="18288" rIns="36576" bIns="18288">
               <a:noAutofit/>
             </a:bodyPr>
             <a:lstStyle/>
@@ -11092,7 +10365,7 @@
                   </a:solidFill>
                   <a:latin typeface="Play"/>
                 </a:rPr>
-                <a:t>Масштаб влияния</a:t>
+                <a:t>До 30 минут</a:t>
               </a:r>
             </a:p>
             <a:p>
@@ -11111,266 +10384,7 @@
                   </a:solidFill>
                   <a:latin typeface="Play"/>
                 </a:rPr>
-                <a:t>Ежедневное использование</a:t>
-              </a:r>
-            </a:p>
-          </p:txBody>
-        </p:sp>
-        <p:sp>
-          <p:nvSpPr>
-            <p:cNvPr id="694" name="BrandDeck Diagram Card 3"/>
-            <p:cNvSpPr/>
-            <p:nvPr/>
-          </p:nvSpPr>
-          <p:spPr>
-            <a:xfrm>
-              <a:off x="427864" y="4046334"/>
-              <a:ext cx="5498002" cy="1340053"/>
-            </a:xfrm>
-            <a:prstGeom prst="roundRect">
-              <a:avLst>
-                <a:gd name="adj" fmla="val 8000"/>
-              </a:avLst>
-            </a:prstGeom>
-            <a:solidFill>
-              <a:srgbClr val="1A1A1A"/>
-            </a:solidFill>
-            <a:ln>
-              <a:noFill/>
-            </a:ln>
-          </p:spPr>
-          <p:txBody>
-            <a:bodyPr rtlCol="0" anchor="ctr"/>
-            <a:lstStyle/>
-            <a:p>
-              <a:pPr algn="ctr"/>
-            </a:p>
-          </p:txBody>
-        </p:sp>
-        <p:sp>
-          <p:nvSpPr>
-            <p:cNvPr id="695" name="BrandDeck Diagram Icon 3 Badge"/>
-            <p:cNvSpPr/>
-            <p:nvPr/>
-          </p:nvSpPr>
-          <p:spPr>
-            <a:xfrm>
-              <a:off x="647319" y="4414609"/>
-              <a:ext cx="603504" cy="603504"/>
-            </a:xfrm>
-            <a:prstGeom prst="ellipse">
-              <a:avLst/>
-            </a:prstGeom>
-            <a:solidFill>
-              <a:srgbClr val="006DEB"/>
-            </a:solidFill>
-            <a:ln>
-              <a:noFill/>
-            </a:ln>
-          </p:spPr>
-          <p:txBody>
-            <a:bodyPr rtlCol="0" anchor="ctr"/>
-            <a:lstStyle/>
-            <a:p>
-              <a:pPr algn="ctr"/>
-            </a:p>
-          </p:txBody>
-        </p:sp>
-        <p:sp>
-          <p:nvSpPr>
-            <p:cNvPr id="696" name="BrandDeck Icon building-2"/>
-            <p:cNvSpPr/>
-            <p:nvPr/>
-          </p:nvSpPr>
-          <p:spPr>
-            <a:xfrm>
-              <a:off x="780090" y="4547380"/>
-              <a:ext cx="337962" cy="337962"/>
-            </a:xfrm>
-            <a:custGeom>
-              <a:avLst/>
-              <a:gdLst/>
-              <a:ahLst/>
-              <a:cxnLst/>
-              <a:rect l="l" t="t" r="r" b="b"/>
-              <a:pathLst>
-                <a:path w="24000" h="24000" fill="none">
-                  <a:moveTo>
-                    <a:pt x="6000" y="22000"/>
-                  </a:moveTo>
-                  <a:lnTo>
-                    <a:pt x="6000" y="4000"/>
-                  </a:lnTo>
-                  <a:cubicBezTo>
-                    <a:pt x="6000" y="2895"/>
-                    <a:pt x="6895" y="2000"/>
-                    <a:pt x="8000" y="2000"/>
-                  </a:cubicBezTo>
-                  <a:lnTo>
-                    <a:pt x="16000" y="2000"/>
-                  </a:lnTo>
-                  <a:cubicBezTo>
-                    <a:pt x="17105" y="2000"/>
-                    <a:pt x="18000" y="2895"/>
-                    <a:pt x="18000" y="4000"/>
-                  </a:cubicBezTo>
-                  <a:lnTo>
-                    <a:pt x="18000" y="22000"/>
-                  </a:lnTo>
-                  <a:close/>
-                </a:path>
-                <a:path w="24000" h="24000" fill="none">
-                  <a:moveTo>
-                    <a:pt x="6000" y="12000"/>
-                  </a:moveTo>
-                  <a:lnTo>
-                    <a:pt x="4000" y="12000"/>
-                  </a:lnTo>
-                  <a:cubicBezTo>
-                    <a:pt x="2895" y="12000"/>
-                    <a:pt x="2000" y="12895"/>
-                    <a:pt x="2000" y="14000"/>
-                  </a:cubicBezTo>
-                  <a:lnTo>
-                    <a:pt x="2000" y="20000"/>
-                  </a:lnTo>
-                  <a:cubicBezTo>
-                    <a:pt x="2000" y="21105"/>
-                    <a:pt x="2895" y="22000"/>
-                    <a:pt x="4000" y="22000"/>
-                  </a:cubicBezTo>
-                  <a:lnTo>
-                    <a:pt x="6000" y="22000"/>
-                  </a:lnTo>
-                </a:path>
-                <a:path w="24000" h="24000" fill="none">
-                  <a:moveTo>
-                    <a:pt x="18000" y="9000"/>
-                  </a:moveTo>
-                  <a:lnTo>
-                    <a:pt x="20000" y="9000"/>
-                  </a:lnTo>
-                  <a:cubicBezTo>
-                    <a:pt x="21105" y="9000"/>
-                    <a:pt x="22000" y="9895"/>
-                    <a:pt x="22000" y="11000"/>
-                  </a:cubicBezTo>
-                  <a:lnTo>
-                    <a:pt x="22000" y="20000"/>
-                  </a:lnTo>
-                  <a:cubicBezTo>
-                    <a:pt x="22000" y="21105"/>
-                    <a:pt x="21105" y="22000"/>
-                    <a:pt x="20000" y="22000"/>
-                  </a:cubicBezTo>
-                  <a:lnTo>
-                    <a:pt x="18000" y="22000"/>
-                  </a:lnTo>
-                </a:path>
-                <a:path w="24000" h="24000" fill="none">
-                  <a:moveTo>
-                    <a:pt x="10000" y="6000"/>
-                  </a:moveTo>
-                  <a:lnTo>
-                    <a:pt x="14000" y="6000"/>
-                  </a:lnTo>
-                </a:path>
-                <a:path w="24000" h="24000" fill="none">
-                  <a:moveTo>
-                    <a:pt x="10000" y="10000"/>
-                  </a:moveTo>
-                  <a:lnTo>
-                    <a:pt x="14000" y="10000"/>
-                  </a:lnTo>
-                </a:path>
-                <a:path w="24000" h="24000" fill="none">
-                  <a:moveTo>
-                    <a:pt x="10000" y="14000"/>
-                  </a:moveTo>
-                  <a:lnTo>
-                    <a:pt x="14000" y="14000"/>
-                  </a:lnTo>
-                </a:path>
-                <a:path w="24000" h="24000" fill="none">
-                  <a:moveTo>
-                    <a:pt x="10000" y="18000"/>
-                  </a:moveTo>
-                  <a:lnTo>
-                    <a:pt x="14000" y="18000"/>
-                  </a:lnTo>
-                </a:path>
-              </a:pathLst>
-            </a:custGeom>
-            <a:noFill/>
-            <a:ln w="28163" cap="rnd">
-              <a:solidFill>
-                <a:srgbClr val="FFFFFF"/>
-              </a:solidFill>
-              <a:round/>
-            </a:ln>
-          </p:spPr>
-          <p:txBody>
-            <a:bodyPr rtlCol="0" anchor="ctr"/>
-            <a:lstStyle/>
-            <a:p>
-              <a:pPr algn="ctr"/>
-            </a:p>
-          </p:txBody>
-        </p:sp>
-        <p:sp>
-          <p:nvSpPr>
-            <p:cNvPr id="697" name="BrandDeck Diagram Text 3"/>
-            <p:cNvSpPr txBox="1"/>
-            <p:nvPr/>
-          </p:nvSpPr>
-          <p:spPr>
-            <a:xfrm>
-              <a:off x="1382497" y="4178008"/>
-              <a:ext cx="4323912" cy="1076706"/>
-            </a:xfrm>
-            <a:prstGeom prst="rect">
-              <a:avLst/>
-            </a:prstGeom>
-            <a:noFill/>
-          </p:spPr>
-          <p:txBody>
-            <a:bodyPr wrap="square" anchor="ctr" lIns="36576" tIns="18288" rIns="36576" bIns="18288">
-              <a:noAutofit/>
-            </a:bodyPr>
-            <a:lstStyle/>
-            <a:p>
-              <a:pPr algn="l">
-                <a:lnSpc>
-                  <a:spcPct val="110000"/>
-                </a:lnSpc>
-              </a:pPr>
-              <a:r>
-                <a:rPr sz="1800" b="1">
-                  <a:solidFill>
-                    <a:srgbClr val="FFFFFF"/>
-                  </a:solidFill>
-                  <a:latin typeface="Play"/>
-                </a:rPr>
-                <a:t>Объем пилота</a:t>
-              </a:r>
-            </a:p>
-            <a:p>
-              <a:pPr algn="l">
-                <a:lnSpc>
-                  <a:spcPct val="110000"/>
-                </a:lnSpc>
-                <a:spcBef>
-                  <a:spcPts val="450"/>
-                </a:spcBef>
-              </a:pPr>
-              <a:r>
-                <a:rPr sz="1800" b="0">
-                  <a:solidFill>
-                    <a:srgbClr val="FFFFFF"/>
-                  </a:solidFill>
-                  <a:latin typeface="Play"/>
-                </a:rPr>
-                <a:t>2 подразделения</a:t>
+                <a:t>Время поиска инструкции</a:t>
               </a:r>
             </a:p>
           </p:txBody>
@@ -11396,7 +10410,71 @@
       <p:grpSpPr/>
       <p:sp>
         <p:nvSpPr>
-          <p:cNvPr id="547" name="BrandDeck Text 547"/>
+          <p:cNvPr id="679" name="Google Shape;679;p31"/>
+          <p:cNvSpPr/>
+          <p:nvPr/>
+        </p:nvSpPr>
+        <p:spPr>
+          <a:xfrm>
+            <a:off x="0" y="4748271"/>
+            <a:ext cx="12192000" cy="2109730"/>
+          </a:xfrm>
+          <a:prstGeom prst="rect">
+            <a:avLst/>
+          </a:prstGeom>
+          <a:gradFill>
+            <a:gsLst>
+              <a:gs pos="0">
+                <a:srgbClr val="0077FF">
+                  <a:alpha val="61961"/>
+                </a:srgbClr>
+              </a:gs>
+              <a:gs pos="99000">
+                <a:srgbClr val="00AEE8"/>
+              </a:gs>
+              <a:gs pos="100000">
+                <a:srgbClr val="00AEE8"/>
+              </a:gs>
+            </a:gsLst>
+            <a:lin ang="14400000" scaled="0"/>
+          </a:gradFill>
+          <a:ln>
+            <a:noFill/>
+          </a:ln>
+        </p:spPr>
+        <p:txBody>
+          <a:bodyPr anchorCtr="0" anchor="ctr" bIns="0" lIns="108000" spcFirstLastPara="1" rIns="91425" wrap="square" tIns="0">
+            <a:noAutofit/>
+          </a:bodyPr>
+          <a:lstStyle/>
+          <a:p>
+            <a:pPr indent="0" lvl="0" marL="0" marR="0" rtl="0" algn="l">
+              <a:spcBef>
+                <a:spcPts val="0"/>
+              </a:spcBef>
+              <a:spcAft>
+                <a:spcPts val="0"/>
+              </a:spcAft>
+              <a:buNone/>
+            </a:pPr>
+            <a:r>
+              <a:t/>
+            </a:r>
+            <a:endParaRPr sz="1100">
+              <a:solidFill>
+                <a:schemeClr val="lt1"/>
+              </a:solidFill>
+              <a:latin typeface="Play"/>
+              <a:ea typeface="Play"/>
+              <a:cs typeface="Play"/>
+              <a:sym typeface="Play"/>
+            </a:endParaRPr>
+          </a:p>
+        </p:txBody>
+      </p:sp>
+      <p:sp>
+        <p:nvSpPr>
+          <p:cNvPr id="680" name="BrandDeck Text 680"/>
           <p:cNvSpPr txBox="1"/>
           <p:nvPr>
             <p:ph type="title"/>
@@ -11404,8 +10482,8 @@
         </p:nvSpPr>
         <p:spPr>
           <a:xfrm>
-            <a:off x="429253" y="424691"/>
-            <a:ext cx="7827311" cy="626869"/>
+            <a:off x="427864" y="424691"/>
+            <a:ext cx="7827311" cy="1167572"/>
           </a:xfrm>
           <a:prstGeom prst="rect">
             <a:avLst/>
@@ -11429,7 +10507,7 @@
                 <a:spcPts val="0"/>
               </a:spcBef>
               <a:spcAft>
-                <a:spcPts val="270"/>
+                <a:spcPts val="300"/>
               </a:spcAft>
               <a:buClr>
                 <a:schemeClr val="lt1"/>
@@ -11439,8 +10517,8 @@
               <a:buNone/>
             </a:pPr>
             <a:r>
-              <a:rPr sz="1800"/>
-              <a:t>ИИ-помощник отвечает на вопросы по регламентам и дает ссылку на документ-источник</a:t>
+              <a:rPr sz="2000"/>
+              <a:t>ИИ-помощник отвечает на вопросы по регламентам и сразу дает ссылку на документ-источник</a:t>
             </a:r>
             <a:endParaRPr/>
           </a:p>
@@ -11448,31 +10526,29 @@
       </p:sp>
       <p:sp>
         <p:nvSpPr>
-          <p:cNvPr id="548" name="BrandDeck Text 548"/>
+          <p:cNvPr id="681" name="BrandDeck Text 681"/>
           <p:cNvSpPr/>
           <p:nvPr/>
         </p:nvSpPr>
         <p:spPr>
           <a:xfrm>
-            <a:off x="5383513" y="860119"/>
-            <a:ext cx="5917558" cy="1705685"/>
+            <a:off x="427864" y="1837067"/>
+            <a:ext cx="3636000" cy="2022006"/>
           </a:xfrm>
           <a:prstGeom prst="roundRect">
             <a:avLst>
-              <a:gd fmla="val 9293" name="adj"/>
+              <a:gd fmla="val 6326" name="adj"/>
             </a:avLst>
           </a:prstGeom>
           <a:solidFill>
-            <a:srgbClr val="0077FF">
-              <a:alpha val="30196"/>
-            </a:srgbClr>
+            <a:srgbClr val="212121"/>
           </a:solidFill>
           <a:ln>
             <a:noFill/>
           </a:ln>
         </p:spPr>
         <p:txBody>
-          <a:bodyPr anchorCtr="0" anchor="t" bIns="0" lIns="108000" spcFirstLastPara="1" rIns="0" wrap="square" tIns="756000">
+          <a:bodyPr anchorCtr="0" anchor="t" bIns="45700" lIns="108000" spcFirstLastPara="1" rIns="91425" wrap="square" tIns="72000">
             <a:normAutofit/>
           </a:bodyPr>
           <a:lstStyle/>
@@ -11491,131 +10567,42 @@
             </a:pPr>
             <a:r>
               <a:rPr sz="1800">
+                <a:solidFill>
+                  <a:srgbClr val="FFFFFF"/>
+                </a:solidFill>
                 <a:latin typeface="Play"/>
-                <a:solidFill>
-                  <a:schemeClr val="lt1"/>
-                </a:solidFill>
               </a:rPr>
-              <a:t>ИИ-помощник отвечает на вопросы по регламентам и инструкциям.</a:t>
+              <a:t>Система отвечает на вопросы по регламентам и инструкциям.</a:t>
             </a:r>
             <a:endParaRPr/>
           </a:p>
         </p:txBody>
       </p:sp>
-      <p:grpSp>
-        <p:nvGrpSpPr>
-          <p:cNvPr id="549" name="Google Shape;549;p26"/>
-          <p:cNvGrpSpPr/>
-          <p:nvPr/>
-        </p:nvGrpSpPr>
-        <p:grpSpPr>
-          <a:xfrm>
-            <a:off x="5523729" y="996732"/>
-            <a:ext cx="515460" cy="515395"/>
-            <a:chOff x="5166883" y="996732"/>
-            <a:chExt cx="515460" cy="515395"/>
-          </a:xfrm>
-        </p:grpSpPr>
-        <p:sp>
-          <p:nvSpPr>
-            <p:cNvPr id="550" name="Google Shape;550;p26"/>
-            <p:cNvSpPr/>
-            <p:nvPr/>
-          </p:nvSpPr>
-          <p:spPr>
-            <a:xfrm>
-              <a:off x="5166883" y="996732"/>
-              <a:ext cx="515460" cy="515395"/>
-            </a:xfrm>
-            <a:prstGeom prst="roundRect">
-              <a:avLst>
-                <a:gd fmla="val 23586" name="adj"/>
-              </a:avLst>
-            </a:prstGeom>
-            <a:solidFill>
-              <a:srgbClr val="000000"/>
-            </a:solidFill>
-            <a:ln>
-              <a:noFill/>
-            </a:ln>
-          </p:spPr>
-          <p:txBody>
-            <a:bodyPr anchorCtr="0" anchor="ctr" bIns="91425" lIns="91425" spcFirstLastPara="1" rIns="91425" wrap="square" tIns="91425">
-              <a:noAutofit/>
-            </a:bodyPr>
-            <a:lstStyle/>
-            <a:p>
-              <a:pPr indent="0" lvl="0" marL="0" rtl="0" algn="l">
-                <a:spcBef>
-                  <a:spcPts val="0"/>
-                </a:spcBef>
-                <a:spcAft>
-                  <a:spcPts val="0"/>
-                </a:spcAft>
-                <a:buNone/>
-              </a:pPr>
-              <a:r>
-                <a:t/>
-              </a:r>
-              <a:endParaRPr/>
-            </a:p>
-          </p:txBody>
-        </p:sp>
-        <p:pic>
-          <p:nvPicPr>
-            <p:cNvPr id="551" name="Google Shape;551;p26"/>
-            <p:cNvPicPr preferRelativeResize="0"/>
-            <p:nvPr/>
-          </p:nvPicPr>
-          <p:blipFill rotWithShape="1">
-            <a:blip r:embed="rId2">
-              <a:alphaModFix/>
-            </a:blip>
-            <a:srcRect b="0" l="0" r="0" t="0"/>
-            <a:stretch/>
-          </p:blipFill>
-          <p:spPr>
-            <a:xfrm>
-              <a:off x="5291263" y="1117786"/>
-              <a:ext cx="266700" cy="266700"/>
-            </a:xfrm>
-            <a:prstGeom prst="rect">
-              <a:avLst/>
-            </a:prstGeom>
-            <a:noFill/>
-            <a:ln>
-              <a:noFill/>
-            </a:ln>
-          </p:spPr>
-        </p:pic>
-      </p:grpSp>
       <p:sp>
         <p:nvSpPr>
-          <p:cNvPr id="552" name="BrandDeck Text 552"/>
+          <p:cNvPr id="682" name="BrandDeck Text 682"/>
           <p:cNvSpPr/>
           <p:nvPr/>
         </p:nvSpPr>
         <p:spPr>
           <a:xfrm>
-            <a:off x="5383513" y="2710690"/>
-            <a:ext cx="5917558" cy="1705685"/>
+            <a:off x="4217594" y="1837067"/>
+            <a:ext cx="3636000" cy="2022006"/>
           </a:xfrm>
           <a:prstGeom prst="roundRect">
             <a:avLst>
-              <a:gd fmla="val 9293" name="adj"/>
+              <a:gd fmla="val 6871" name="adj"/>
             </a:avLst>
           </a:prstGeom>
           <a:solidFill>
-            <a:srgbClr val="0077FF">
-              <a:alpha val="30196"/>
-            </a:srgbClr>
+            <a:srgbClr val="212121"/>
           </a:solidFill>
           <a:ln>
             <a:noFill/>
           </a:ln>
         </p:spPr>
         <p:txBody>
-          <a:bodyPr anchorCtr="0" anchor="t" bIns="0" lIns="108000" spcFirstLastPara="1" rIns="0" wrap="square" tIns="756000">
+          <a:bodyPr anchorCtr="0" anchor="t" bIns="45700" lIns="108000" spcFirstLastPara="1" rIns="91425" wrap="square" tIns="72000">
             <a:normAutofit/>
           </a:bodyPr>
           <a:lstStyle/>
@@ -11634,131 +10621,42 @@
             </a:pPr>
             <a:r>
               <a:rPr sz="1800">
+                <a:solidFill>
+                  <a:srgbClr val="FFFFFF"/>
+                </a:solidFill>
                 <a:latin typeface="Play"/>
-                <a:solidFill>
-                  <a:schemeClr val="lt1"/>
-                </a:solidFill>
               </a:rPr>
-              <a:t>Система автоматически формирует ссылку на документ-источник.</a:t>
+              <a:t>В ответ сразу предоставляется ссылка на документ-источник.</a:t>
             </a:r>
             <a:endParaRPr/>
           </a:p>
         </p:txBody>
       </p:sp>
-      <p:grpSp>
-        <p:nvGrpSpPr>
-          <p:cNvPr id="553" name="Google Shape;553;p26"/>
-          <p:cNvGrpSpPr/>
-          <p:nvPr/>
-        </p:nvGrpSpPr>
-        <p:grpSpPr>
-          <a:xfrm>
-            <a:off x="5523729" y="2847303"/>
-            <a:ext cx="515460" cy="515395"/>
-            <a:chOff x="5166883" y="996732"/>
-            <a:chExt cx="515460" cy="515395"/>
-          </a:xfrm>
-        </p:grpSpPr>
-        <p:sp>
-          <p:nvSpPr>
-            <p:cNvPr id="554" name="Google Shape;554;p26"/>
-            <p:cNvSpPr/>
-            <p:nvPr/>
-          </p:nvSpPr>
-          <p:spPr>
-            <a:xfrm>
-              <a:off x="5166883" y="996732"/>
-              <a:ext cx="515460" cy="515395"/>
-            </a:xfrm>
-            <a:prstGeom prst="roundRect">
-              <a:avLst>
-                <a:gd fmla="val 23586" name="adj"/>
-              </a:avLst>
-            </a:prstGeom>
-            <a:solidFill>
-              <a:srgbClr val="000000"/>
-            </a:solidFill>
-            <a:ln>
-              <a:noFill/>
-            </a:ln>
-          </p:spPr>
-          <p:txBody>
-            <a:bodyPr anchorCtr="0" anchor="ctr" bIns="91425" lIns="91425" spcFirstLastPara="1" rIns="91425" wrap="square" tIns="91425">
-              <a:noAutofit/>
-            </a:bodyPr>
-            <a:lstStyle/>
-            <a:p>
-              <a:pPr indent="0" lvl="0" marL="0" rtl="0" algn="l">
-                <a:spcBef>
-                  <a:spcPts val="0"/>
-                </a:spcBef>
-                <a:spcAft>
-                  <a:spcPts val="0"/>
-                </a:spcAft>
-                <a:buNone/>
-              </a:pPr>
-              <a:r>
-                <a:t/>
-              </a:r>
-              <a:endParaRPr/>
-            </a:p>
-          </p:txBody>
-        </p:sp>
-        <p:pic>
-          <p:nvPicPr>
-            <p:cNvPr id="555" name="Google Shape;555;p26"/>
-            <p:cNvPicPr preferRelativeResize="0"/>
-            <p:nvPr/>
-          </p:nvPicPr>
-          <p:blipFill rotWithShape="1">
-            <a:blip r:embed="rId2">
-              <a:alphaModFix/>
-            </a:blip>
-            <a:srcRect b="0" l="0" r="0" t="0"/>
-            <a:stretch/>
-          </p:blipFill>
-          <p:spPr>
-            <a:xfrm>
-              <a:off x="5291263" y="1117786"/>
-              <a:ext cx="266700" cy="266700"/>
-            </a:xfrm>
-            <a:prstGeom prst="rect">
-              <a:avLst/>
-            </a:prstGeom>
-            <a:noFill/>
-            <a:ln>
-              <a:noFill/>
-            </a:ln>
-          </p:spPr>
-        </p:pic>
-      </p:grpSp>
       <p:sp>
         <p:nvSpPr>
-          <p:cNvPr id="556" name="BrandDeck Text 556"/>
+          <p:cNvPr id="683" name="BrandDeck Text 683"/>
           <p:cNvSpPr/>
           <p:nvPr/>
         </p:nvSpPr>
         <p:spPr>
           <a:xfrm>
-            <a:off x="5383513" y="4561261"/>
-            <a:ext cx="5917558" cy="1705685"/>
+            <a:off x="8007324" y="1837067"/>
+            <a:ext cx="3636000" cy="2022006"/>
           </a:xfrm>
           <a:prstGeom prst="roundRect">
             <a:avLst>
-              <a:gd fmla="val 9293" name="adj"/>
+              <a:gd fmla="val 5781" name="adj"/>
             </a:avLst>
           </a:prstGeom>
           <a:solidFill>
-            <a:srgbClr val="0077FF">
-              <a:alpha val="30196"/>
-            </a:srgbClr>
+            <a:srgbClr val="212121"/>
           </a:solidFill>
           <a:ln>
             <a:noFill/>
           </a:ln>
         </p:spPr>
         <p:txBody>
-          <a:bodyPr anchorCtr="0" anchor="t" bIns="0" lIns="108000" spcFirstLastPara="1" rIns="0" wrap="square" tIns="756000">
+          <a:bodyPr anchorCtr="0" anchor="t" bIns="45700" lIns="108000" spcFirstLastPara="1" rIns="91425" wrap="square" tIns="72000">
             <a:normAutofit/>
           </a:bodyPr>
           <a:lstStyle/>
@@ -11777,104 +10675,17 @@
             </a:pPr>
             <a:r>
               <a:rPr sz="1800">
+                <a:solidFill>
+                  <a:srgbClr val="FFFFFF"/>
+                </a:solidFill>
                 <a:latin typeface="Play"/>
-                <a:solidFill>
-                  <a:schemeClr val="lt1"/>
-                </a:solidFill>
               </a:rPr>
-              <a:t>Ответы генерируются на основе внутренних данных компании.</a:t>
+              <a:t>Сотрудник получает подтверждённый ответ без поиска вручную.</a:t>
             </a:r>
             <a:endParaRPr/>
           </a:p>
         </p:txBody>
       </p:sp>
-      <p:grpSp>
-        <p:nvGrpSpPr>
-          <p:cNvPr id="557" name="Google Shape;557;p26"/>
-          <p:cNvGrpSpPr/>
-          <p:nvPr/>
-        </p:nvGrpSpPr>
-        <p:grpSpPr>
-          <a:xfrm>
-            <a:off x="5523729" y="4697874"/>
-            <a:ext cx="515460" cy="515395"/>
-            <a:chOff x="5166883" y="996732"/>
-            <a:chExt cx="515460" cy="515395"/>
-          </a:xfrm>
-        </p:grpSpPr>
-        <p:sp>
-          <p:nvSpPr>
-            <p:cNvPr id="558" name="Google Shape;558;p26"/>
-            <p:cNvSpPr/>
-            <p:nvPr/>
-          </p:nvSpPr>
-          <p:spPr>
-            <a:xfrm>
-              <a:off x="5166883" y="996732"/>
-              <a:ext cx="515460" cy="515395"/>
-            </a:xfrm>
-            <a:prstGeom prst="roundRect">
-              <a:avLst>
-                <a:gd fmla="val 23586" name="adj"/>
-              </a:avLst>
-            </a:prstGeom>
-            <a:solidFill>
-              <a:srgbClr val="000000"/>
-            </a:solidFill>
-            <a:ln>
-              <a:noFill/>
-            </a:ln>
-          </p:spPr>
-          <p:txBody>
-            <a:bodyPr anchorCtr="0" anchor="ctr" bIns="91425" lIns="91425" spcFirstLastPara="1" rIns="91425" wrap="square" tIns="91425">
-              <a:noAutofit/>
-            </a:bodyPr>
-            <a:lstStyle/>
-            <a:p>
-              <a:pPr indent="0" lvl="0" marL="0" rtl="0" algn="l">
-                <a:spcBef>
-                  <a:spcPts val="0"/>
-                </a:spcBef>
-                <a:spcAft>
-                  <a:spcPts val="0"/>
-                </a:spcAft>
-                <a:buNone/>
-              </a:pPr>
-              <a:r>
-                <a:t/>
-              </a:r>
-              <a:endParaRPr/>
-            </a:p>
-          </p:txBody>
-        </p:sp>
-        <p:pic>
-          <p:nvPicPr>
-            <p:cNvPr id="559" name="Google Shape;559;p26"/>
-            <p:cNvPicPr preferRelativeResize="0"/>
-            <p:nvPr/>
-          </p:nvPicPr>
-          <p:blipFill rotWithShape="1">
-            <a:blip r:embed="rId2">
-              <a:alphaModFix/>
-            </a:blip>
-            <a:srcRect b="0" l="0" r="0" t="0"/>
-            <a:stretch/>
-          </p:blipFill>
-          <p:spPr>
-            <a:xfrm>
-              <a:off x="5291263" y="1117786"/>
-              <a:ext cx="266700" cy="266700"/>
-            </a:xfrm>
-            <a:prstGeom prst="rect">
-              <a:avLst/>
-            </a:prstGeom>
-            <a:noFill/>
-            <a:ln>
-              <a:noFill/>
-            </a:ln>
-          </p:spPr>
-        </p:pic>
-      </p:grpSp>
     </p:spTree>
   </p:cSld>
   <p:clrMapOvr>
@@ -11928,7 +10739,7 @@
                 <a:spcPts val="0"/>
               </a:spcBef>
               <a:spcAft>
-                <a:spcPts val="240"/>
+                <a:spcPts val="210"/>
               </a:spcAft>
               <a:buClr>
                 <a:schemeClr val="lt1"/>
@@ -11938,8 +10749,8 @@
               <a:buNone/>
             </a:pPr>
             <a:r>
-              <a:rPr sz="1600"/>
-              <a:t>Система работает внутри контура компании, не выводя документы наружу</a:t>
+              <a:rPr sz="1400"/>
+              <a:t>Система работает внутри контура компании, документы не покидают периметр безопасности</a:t>
             </a:r>
             <a:endParaRPr/>
           </a:p>
@@ -12010,7 +10821,7 @@
                 </a:solidFill>
                 <a:latin typeface="Play"/>
               </a:rPr>
-              <a:t>• Все данные обрабатываются внутри контура компании.</a:t>
+              <a:t>• Архитектура обеспечивает полную изоляцию данных внутри корпоративного контура.</a:t>
             </a:r>
           </a:p>
           <a:p>
@@ -12032,7 +10843,7 @@
                 </a:solidFill>
                 <a:latin typeface="Play"/>
               </a:rPr>
-              <a:t>• Документы не покидают внутреннюю инфраструктуру.</a:t>
+              <a:t>• Модель с открытыми весами работает исключительно во внутренней сети.</a:t>
             </a:r>
           </a:p>
           <a:p>
@@ -12054,7 +10865,7 @@
                 </a:solidFill>
                 <a:latin typeface="Play"/>
               </a:rPr>
-              <a:t>• Обеспечивается полная локализация обработки запросов.</a:t>
+              <a:t>• Документы инструкций не покидают периметр безопасности компании.</a:t>
             </a:r>
           </a:p>
         </p:txBody>
@@ -12068,6 +10879,519 @@
 </file>
 
 <file path=ppt/slides/slide6.xml><?xml version="1.0" encoding="utf-8"?>
+<p:sld xmlns:a="http://schemas.openxmlformats.org/drawingml/2006/main" xmlns:p="http://schemas.openxmlformats.org/presentationml/2006/main" xmlns:r="http://schemas.openxmlformats.org/officeDocument/2006/relationships">
+  <p:cSld>
+    <p:spTree>
+      <p:nvGrpSpPr>
+        <p:cNvPr id="1" name=""/>
+        <p:cNvGrpSpPr/>
+        <p:nvPr/>
+      </p:nvGrpSpPr>
+      <p:grpSpPr/>
+      <p:sp>
+        <p:nvSpPr>
+          <p:cNvPr id="441" name="BrandDeck Text 441"/>
+          <p:cNvSpPr txBox="1"/>
+          <p:nvPr>
+            <p:ph type="title"/>
+          </p:nvPr>
+        </p:nvSpPr>
+        <p:spPr>
+          <a:xfrm>
+            <a:off x="429253" y="424691"/>
+            <a:ext cx="7827311" cy="626869"/>
+          </a:xfrm>
+          <a:prstGeom prst="rect">
+            <a:avLst/>
+          </a:prstGeom>
+          <a:noFill/>
+          <a:ln>
+            <a:noFill/>
+          </a:ln>
+        </p:spPr>
+        <p:txBody>
+          <a:bodyPr anchorCtr="0" anchor="t" bIns="0" lIns="0" spcFirstLastPara="1" rIns="0" wrap="square" tIns="0">
+            <a:normAutofit/>
+          </a:bodyPr>
+          <a:lstStyle/>
+          <a:p>
+            <a:pPr indent="0" marL="0" rtl="0" algn="l">
+              <a:lnSpc>
+                <a:spcPct val="115000"/>
+              </a:lnSpc>
+              <a:spcBef>
+                <a:spcPts val="0"/>
+              </a:spcBef>
+              <a:spcAft>
+                <a:spcPts val="270"/>
+              </a:spcAft>
+              <a:buClr>
+                <a:schemeClr val="lt1"/>
+              </a:buClr>
+              <a:buSzPts val="3600"/>
+              <a:buFont typeface="Play"/>
+              <a:buNone/>
+            </a:pPr>
+            <a:r>
+              <a:rPr sz="1800"/>
+              <a:t>При отсутствии подтвержденного ответа вопрос автоматически передается специалисту с контекстом</a:t>
+            </a:r>
+            <a:endParaRPr/>
+          </a:p>
+        </p:txBody>
+      </p:sp>
+      <p:grpSp>
+        <p:nvGrpSpPr>
+          <p:cNvPr id="2" name="BrandDeck Diagram process" descr="process: Анализ запроса ИИ проверяет наличие ответа в базе знаний; Отсутствие ответа Система формирует запрос к специалисту; Передача контекста Специалист получает историю и детали вопроса"/>
+          <p:cNvGrpSpPr/>
+          <p:nvPr/>
+        </p:nvGrpSpPr>
+        <p:grpSpPr>
+          <a:xfrm>
+            <a:off x="5383513" y="2738121"/>
+            <a:ext cx="5917558" cy="3501392"/>
+            <a:chOff x="5383513" y="2738121"/>
+            <a:chExt cx="5917558" cy="3501392"/>
+          </a:xfrm>
+        </p:grpSpPr>
+        <p:sp>
+          <p:nvSpPr>
+            <p:cNvPr id="454" name="BrandDeck Diagram Connector"/>
+            <p:cNvSpPr/>
+            <p:nvPr/>
+          </p:nvSpPr>
+          <p:spPr>
+            <a:xfrm>
+              <a:off x="5623085" y="3303399"/>
+              <a:ext cx="32918" cy="2370837"/>
+            </a:xfrm>
+            <a:prstGeom prst="rect">
+              <a:avLst/>
+            </a:prstGeom>
+            <a:solidFill>
+              <a:srgbClr val="004DA6"/>
+            </a:solidFill>
+            <a:ln>
+              <a:noFill/>
+            </a:ln>
+          </p:spPr>
+          <p:txBody>
+            <a:bodyPr rtlCol="0" anchor="ctr"/>
+            <a:lstStyle/>
+            <a:p>
+              <a:pPr algn="ctr"/>
+            </a:p>
+          </p:txBody>
+        </p:sp>
+        <p:sp>
+          <p:nvSpPr>
+            <p:cNvPr id="455" name="BrandDeck Diagram Step 1 Badge"/>
+            <p:cNvSpPr/>
+            <p:nvPr/>
+          </p:nvSpPr>
+          <p:spPr>
+            <a:xfrm>
+              <a:off x="5383513" y="3047367"/>
+              <a:ext cx="512064" cy="512064"/>
+            </a:xfrm>
+            <a:prstGeom prst="ellipse">
+              <a:avLst/>
+            </a:prstGeom>
+            <a:solidFill>
+              <a:srgbClr val="006DEB"/>
+            </a:solidFill>
+            <a:ln>
+              <a:noFill/>
+            </a:ln>
+          </p:spPr>
+          <p:txBody>
+            <a:bodyPr rtlCol="0" anchor="ctr" wrap="square" lIns="0" tIns="0" rIns="0" bIns="0">
+              <a:noAutofit/>
+            </a:bodyPr>
+            <a:lstStyle/>
+            <a:p>
+              <a:pPr algn="ctr">
+                <a:lnSpc>
+                  <a:spcPct val="110000"/>
+                </a:lnSpc>
+              </a:pPr>
+              <a:r>
+                <a:rPr sz="1400" b="1">
+                  <a:solidFill>
+                    <a:srgbClr val="FFFFFF"/>
+                  </a:solidFill>
+                  <a:latin typeface="Play"/>
+                </a:rPr>
+                <a:t>01</a:t>
+              </a:r>
+            </a:p>
+          </p:txBody>
+        </p:sp>
+        <p:sp>
+          <p:nvSpPr>
+            <p:cNvPr id="456" name="BrandDeck Diagram Detail Card 1"/>
+            <p:cNvSpPr/>
+            <p:nvPr/>
+          </p:nvSpPr>
+          <p:spPr>
+            <a:xfrm>
+              <a:off x="6005305" y="2738121"/>
+              <a:ext cx="5295766" cy="1130554"/>
+            </a:xfrm>
+            <a:prstGeom prst="roundRect">
+              <a:avLst>
+                <a:gd name="adj" fmla="val 12000"/>
+              </a:avLst>
+            </a:prstGeom>
+            <a:solidFill>
+              <a:srgbClr val="1A1A1A"/>
+            </a:solidFill>
+            <a:ln>
+              <a:noFill/>
+            </a:ln>
+          </p:spPr>
+          <p:txBody>
+            <a:bodyPr rtlCol="0" anchor="ctr"/>
+            <a:lstStyle/>
+            <a:p>
+              <a:pPr algn="ctr"/>
+            </a:p>
+          </p:txBody>
+        </p:sp>
+        <p:sp>
+          <p:nvSpPr>
+            <p:cNvPr id="457" name="BrandDeck Diagram Text 1"/>
+            <p:cNvSpPr txBox="1"/>
+            <p:nvPr/>
+          </p:nvSpPr>
+          <p:spPr>
+            <a:xfrm>
+              <a:off x="6096745" y="2738121"/>
+              <a:ext cx="5204326" cy="1130554"/>
+            </a:xfrm>
+            <a:prstGeom prst="rect">
+              <a:avLst/>
+            </a:prstGeom>
+            <a:noFill/>
+          </p:spPr>
+          <p:txBody>
+            <a:bodyPr wrap="square" anchor="ctr" lIns="36576" tIns="18288" rIns="36576" bIns="18288">
+              <a:noAutofit/>
+            </a:bodyPr>
+            <a:lstStyle/>
+            <a:p>
+              <a:pPr algn="l">
+                <a:lnSpc>
+                  <a:spcPct val="110000"/>
+                </a:lnSpc>
+              </a:pPr>
+              <a:r>
+                <a:rPr sz="1600" b="1">
+                  <a:solidFill>
+                    <a:srgbClr val="FFFFFF"/>
+                  </a:solidFill>
+                  <a:latin typeface="Play"/>
+                </a:rPr>
+                <a:t>Анализ запроса</a:t>
+              </a:r>
+            </a:p>
+            <a:p>
+              <a:pPr algn="l">
+                <a:lnSpc>
+                  <a:spcPct val="110000"/>
+                </a:lnSpc>
+                <a:spcBef>
+                  <a:spcPts val="400"/>
+                </a:spcBef>
+              </a:pPr>
+              <a:r>
+                <a:rPr sz="1600" b="0">
+                  <a:solidFill>
+                    <a:srgbClr val="FFFFFF"/>
+                  </a:solidFill>
+                  <a:latin typeface="Play"/>
+                </a:rPr>
+                <a:t>ИИ проверяет наличие ответа в базе знаний</a:t>
+              </a:r>
+            </a:p>
+          </p:txBody>
+        </p:sp>
+        <p:sp>
+          <p:nvSpPr>
+            <p:cNvPr id="458" name="BrandDeck Diagram Step 2 Badge"/>
+            <p:cNvSpPr/>
+            <p:nvPr/>
+          </p:nvSpPr>
+          <p:spPr>
+            <a:xfrm>
+              <a:off x="5383513" y="4232785"/>
+              <a:ext cx="512064" cy="512064"/>
+            </a:xfrm>
+            <a:prstGeom prst="ellipse">
+              <a:avLst/>
+            </a:prstGeom>
+            <a:solidFill>
+              <a:srgbClr val="006DEB"/>
+            </a:solidFill>
+            <a:ln>
+              <a:noFill/>
+            </a:ln>
+          </p:spPr>
+          <p:txBody>
+            <a:bodyPr rtlCol="0" anchor="ctr" wrap="square" lIns="0" tIns="0" rIns="0" bIns="0">
+              <a:noAutofit/>
+            </a:bodyPr>
+            <a:lstStyle/>
+            <a:p>
+              <a:pPr algn="ctr">
+                <a:lnSpc>
+                  <a:spcPct val="110000"/>
+                </a:lnSpc>
+              </a:pPr>
+              <a:r>
+                <a:rPr sz="1400" b="1">
+                  <a:solidFill>
+                    <a:srgbClr val="FFFFFF"/>
+                  </a:solidFill>
+                  <a:latin typeface="Play"/>
+                </a:rPr>
+                <a:t>02</a:t>
+              </a:r>
+            </a:p>
+          </p:txBody>
+        </p:sp>
+        <p:sp>
+          <p:nvSpPr>
+            <p:cNvPr id="459" name="BrandDeck Diagram Detail Card 2"/>
+            <p:cNvSpPr/>
+            <p:nvPr/>
+          </p:nvSpPr>
+          <p:spPr>
+            <a:xfrm>
+              <a:off x="6005305" y="3923540"/>
+              <a:ext cx="5295766" cy="1130554"/>
+            </a:xfrm>
+            <a:prstGeom prst="roundRect">
+              <a:avLst>
+                <a:gd name="adj" fmla="val 12000"/>
+              </a:avLst>
+            </a:prstGeom>
+            <a:solidFill>
+              <a:srgbClr val="1A1A1A"/>
+            </a:solidFill>
+            <a:ln>
+              <a:noFill/>
+            </a:ln>
+          </p:spPr>
+          <p:txBody>
+            <a:bodyPr rtlCol="0" anchor="ctr"/>
+            <a:lstStyle/>
+            <a:p>
+              <a:pPr algn="ctr"/>
+            </a:p>
+          </p:txBody>
+        </p:sp>
+        <p:sp>
+          <p:nvSpPr>
+            <p:cNvPr id="460" name="BrandDeck Diagram Text 2"/>
+            <p:cNvSpPr txBox="1"/>
+            <p:nvPr/>
+          </p:nvSpPr>
+          <p:spPr>
+            <a:xfrm>
+              <a:off x="6096745" y="3923540"/>
+              <a:ext cx="5204326" cy="1130554"/>
+            </a:xfrm>
+            <a:prstGeom prst="rect">
+              <a:avLst/>
+            </a:prstGeom>
+            <a:noFill/>
+          </p:spPr>
+          <p:txBody>
+            <a:bodyPr wrap="square" anchor="ctr" lIns="36576" tIns="18288" rIns="36576" bIns="18288">
+              <a:noAutofit/>
+            </a:bodyPr>
+            <a:lstStyle/>
+            <a:p>
+              <a:pPr algn="l">
+                <a:lnSpc>
+                  <a:spcPct val="110000"/>
+                </a:lnSpc>
+              </a:pPr>
+              <a:r>
+                <a:rPr sz="1600" b="1">
+                  <a:solidFill>
+                    <a:srgbClr val="FFFFFF"/>
+                  </a:solidFill>
+                  <a:latin typeface="Play"/>
+                </a:rPr>
+                <a:t>Отсутствие ответа</a:t>
+              </a:r>
+            </a:p>
+            <a:p>
+              <a:pPr algn="l">
+                <a:lnSpc>
+                  <a:spcPct val="110000"/>
+                </a:lnSpc>
+                <a:spcBef>
+                  <a:spcPts val="400"/>
+                </a:spcBef>
+              </a:pPr>
+              <a:r>
+                <a:rPr sz="1600" b="0">
+                  <a:solidFill>
+                    <a:srgbClr val="FFFFFF"/>
+                  </a:solidFill>
+                  <a:latin typeface="Play"/>
+                </a:rPr>
+                <a:t>Система формирует запрос к специалисту</a:t>
+              </a:r>
+            </a:p>
+          </p:txBody>
+        </p:sp>
+        <p:sp>
+          <p:nvSpPr>
+            <p:cNvPr id="461" name="BrandDeck Diagram Step 3 Badge"/>
+            <p:cNvSpPr/>
+            <p:nvPr/>
+          </p:nvSpPr>
+          <p:spPr>
+            <a:xfrm>
+              <a:off x="5383513" y="5418204"/>
+              <a:ext cx="512064" cy="512064"/>
+            </a:xfrm>
+            <a:prstGeom prst="ellipse">
+              <a:avLst/>
+            </a:prstGeom>
+            <a:solidFill>
+              <a:srgbClr val="006DEB"/>
+            </a:solidFill>
+            <a:ln>
+              <a:noFill/>
+            </a:ln>
+          </p:spPr>
+          <p:txBody>
+            <a:bodyPr rtlCol="0" anchor="ctr" wrap="square" lIns="0" tIns="0" rIns="0" bIns="0">
+              <a:noAutofit/>
+            </a:bodyPr>
+            <a:lstStyle/>
+            <a:p>
+              <a:pPr algn="ctr">
+                <a:lnSpc>
+                  <a:spcPct val="110000"/>
+                </a:lnSpc>
+              </a:pPr>
+              <a:r>
+                <a:rPr sz="1400" b="1">
+                  <a:solidFill>
+                    <a:srgbClr val="FFFFFF"/>
+                  </a:solidFill>
+                  <a:latin typeface="Play"/>
+                </a:rPr>
+                <a:t>03</a:t>
+              </a:r>
+            </a:p>
+          </p:txBody>
+        </p:sp>
+        <p:sp>
+          <p:nvSpPr>
+            <p:cNvPr id="462" name="BrandDeck Diagram Detail Card 3"/>
+            <p:cNvSpPr/>
+            <p:nvPr/>
+          </p:nvSpPr>
+          <p:spPr>
+            <a:xfrm>
+              <a:off x="6005305" y="5108959"/>
+              <a:ext cx="5295766" cy="1130554"/>
+            </a:xfrm>
+            <a:prstGeom prst="roundRect">
+              <a:avLst>
+                <a:gd name="adj" fmla="val 12000"/>
+              </a:avLst>
+            </a:prstGeom>
+            <a:solidFill>
+              <a:srgbClr val="1A1A1A"/>
+            </a:solidFill>
+            <a:ln>
+              <a:noFill/>
+            </a:ln>
+          </p:spPr>
+          <p:txBody>
+            <a:bodyPr rtlCol="0" anchor="ctr"/>
+            <a:lstStyle/>
+            <a:p>
+              <a:pPr algn="ctr"/>
+            </a:p>
+          </p:txBody>
+        </p:sp>
+        <p:sp>
+          <p:nvSpPr>
+            <p:cNvPr id="463" name="BrandDeck Diagram Text 3"/>
+            <p:cNvSpPr txBox="1"/>
+            <p:nvPr/>
+          </p:nvSpPr>
+          <p:spPr>
+            <a:xfrm>
+              <a:off x="6096745" y="5108959"/>
+              <a:ext cx="5204326" cy="1130554"/>
+            </a:xfrm>
+            <a:prstGeom prst="rect">
+              <a:avLst/>
+            </a:prstGeom>
+            <a:noFill/>
+          </p:spPr>
+          <p:txBody>
+            <a:bodyPr wrap="square" anchor="ctr" lIns="36576" tIns="18288" rIns="36576" bIns="18288">
+              <a:noAutofit/>
+            </a:bodyPr>
+            <a:lstStyle/>
+            <a:p>
+              <a:pPr algn="l">
+                <a:lnSpc>
+                  <a:spcPct val="110000"/>
+                </a:lnSpc>
+              </a:pPr>
+              <a:r>
+                <a:rPr sz="1600" b="1">
+                  <a:solidFill>
+                    <a:srgbClr val="FFFFFF"/>
+                  </a:solidFill>
+                  <a:latin typeface="Play"/>
+                </a:rPr>
+                <a:t>Передача контекста</a:t>
+              </a:r>
+            </a:p>
+            <a:p>
+              <a:pPr algn="l">
+                <a:lnSpc>
+                  <a:spcPct val="110000"/>
+                </a:lnSpc>
+                <a:spcBef>
+                  <a:spcPts val="400"/>
+                </a:spcBef>
+              </a:pPr>
+              <a:r>
+                <a:rPr sz="1600" b="0">
+                  <a:solidFill>
+                    <a:srgbClr val="FFFFFF"/>
+                  </a:solidFill>
+                  <a:latin typeface="Play"/>
+                </a:rPr>
+                <a:t>Специалист получает историю и детали вопроса</a:t>
+              </a:r>
+            </a:p>
+          </p:txBody>
+        </p:sp>
+      </p:grpSp>
+    </p:spTree>
+  </p:cSld>
+  <p:clrMapOvr>
+    <a:masterClrMapping/>
+  </p:clrMapOvr>
+</p:sld>
+</file>
+
+<file path=ppt/slides/slide7.xml><?xml version="1.0" encoding="utf-8"?>
 <p:sld xmlns:a="http://schemas.openxmlformats.org/drawingml/2006/main" xmlns:p="http://schemas.openxmlformats.org/presentationml/2006/main" xmlns:r="http://schemas.openxmlformats.org/officeDocument/2006/relationships">
   <p:cSld>
     <p:spTree>
@@ -12123,7 +11447,7 @@
             </a:pPr>
             <a:r>
               <a:rPr sz="1300"/>
-              <a:t>При отсутствии подтвержденного ответа вопрос автоматически передается специалисту поддержки с контекстом</a:t>
+              <a:t>Сокращение времени поиска ответа и снижение доли обращений, закрытых без участия специалиста</a:t>
             </a:r>
             <a:endParaRPr/>
           </a:p>
@@ -12194,7 +11518,7 @@
                 </a:solidFill>
                 <a:latin typeface="Play"/>
               </a:rPr>
-              <a:t>• При отсутствии ответа вопрос уходит специалисту с контекстом.</a:t>
+              <a:t>• Сокращаем время поиска ответа и долю обращений, закрытых без участия специалиста.</a:t>
             </a:r>
           </a:p>
           <a:p>
@@ -12216,7 +11540,7 @@
                 </a:solidFill>
                 <a:latin typeface="Play"/>
               </a:rPr>
-              <a:t>• Система не выводит документы наружу контура компании.</a:t>
+              <a:t>• Метрики успеха: время поиска и доля автономных ответов.</a:t>
             </a:r>
           </a:p>
           <a:p>
@@ -12238,7 +11562,7 @@
                 </a:solidFill>
                 <a:latin typeface="Play"/>
               </a:rPr>
-              <a:t>• ИИ-помощник даёт ссылку на документ-источник в ответе.</a:t>
+              <a:t>• Цель пилота: подтвердить эффективность на выборке 150 сотрудников.</a:t>
             </a:r>
           </a:p>
         </p:txBody>
@@ -12251,7 +11575,7 @@
 </p:sld>
 </file>
 
-<file path=ppt/slides/slide7.xml><?xml version="1.0" encoding="utf-8"?>
+<file path=ppt/slides/slide8.xml><?xml version="1.0" encoding="utf-8"?>
 <p:sld xmlns:a="http://schemas.openxmlformats.org/drawingml/2006/main" xmlns:p="http://schemas.openxmlformats.org/presentationml/2006/main" xmlns:r="http://schemas.openxmlformats.org/officeDocument/2006/relationships">
   <p:cSld>
     <p:spTree>
@@ -12296,7 +11620,7 @@
                 <a:spcPts val="0"/>
               </a:spcBef>
               <a:spcAft>
-                <a:spcPts val="420"/>
+                <a:spcPts val="300"/>
               </a:spcAft>
               <a:buClr>
                 <a:schemeClr val="lt1"/>
@@ -12306,8 +11630,8 @@
               <a:buNone/>
             </a:pPr>
             <a:r>
-              <a:rPr sz="2800"/>
-              <a:t>В пилот включены 2 подразделения, исключены остальные отделы</a:t>
+              <a:rPr sz="2000"/>
+              <a:t>Пилотный запуск ограничен двумя подразделениями и 150 сотрудниками в течение 6 недель</a:t>
             </a:r>
             <a:endParaRPr/>
           </a:p>
@@ -12315,16 +11639,16 @@
       </p:sp>
       <p:grpSp>
         <p:nvGrpSpPr>
-          <p:cNvPr id="2" name="BrandDeck Diagram pyramid" descr="pyramid: Включено 2 подразделения, 150 сотрудников; Исключено Остальные отделы и внешние системы"/>
+          <p:cNvPr id="2" name="BrandDeck Diagram funnel" descr="funnel: Всего сотрудников 150 сотрудников из 2 подразделений; Длительность теста 6 недель пилотного запуска; Цель пилота Измерить эффективность ИИ-помощника"/>
           <p:cNvGrpSpPr/>
           <p:nvPr/>
         </p:nvGrpSpPr>
         <p:grpSpPr>
           <a:xfrm>
-            <a:off x="432832" y="1921521"/>
-            <a:ext cx="10716649" cy="2871216"/>
-            <a:chOff x="432832" y="1921521"/>
-            <a:chExt cx="10716649" cy="2871216"/>
+            <a:off x="428183" y="1693931"/>
+            <a:ext cx="10721297" cy="3470137"/>
+            <a:chOff x="428183" y="1693931"/>
+            <a:chExt cx="10721297" cy="3470137"/>
           </a:xfrm>
         </p:grpSpPr>
         <p:sp>
@@ -12335,8 +11659,8 @@
           </p:nvSpPr>
           <p:spPr>
             <a:xfrm>
-              <a:off x="1347231" y="1921521"/>
-              <a:ext cx="1794510" cy="1408176"/>
+              <a:off x="428183" y="1693931"/>
+              <a:ext cx="4697876" cy="1120136"/>
             </a:xfrm>
             <a:custGeom>
               <a:avLst/>
@@ -12345,32 +11669,32 @@
               <a:cxnLst/>
               <a:rect l="l" t="t" r="r" b="b"/>
               <a:pathLst>
-                <a:path w="1963" h="1540" stroke="0">
+                <a:path w="5138" h="1225" stroke="0">
                   <a:moveTo>
-                    <a:pt x="956" y="0"/>
+                    <a:pt x="0" y="0"/>
                   </a:moveTo>
                   <a:lnTo>
-                    <a:pt x="1006" y="0"/>
+                    <a:pt x="5138" y="0"/>
                   </a:lnTo>
                   <a:lnTo>
-                    <a:pt x="1963" y="1540"/>
+                    <a:pt x="4580" y="1225"/>
                   </a:lnTo>
                   <a:lnTo>
-                    <a:pt x="0" y="1540"/>
+                    <a:pt x="558" y="1225"/>
                   </a:lnTo>
                   <a:close/>
                 </a:path>
               </a:pathLst>
             </a:custGeom>
             <a:solidFill>
-              <a:srgbClr val="006DEB"/>
+              <a:srgbClr val="003676"/>
             </a:solidFill>
             <a:ln w="0">
               <a:noFill/>
             </a:ln>
           </p:spPr>
           <p:txBody>
-            <a:bodyPr rtlCol="0" anchor="b" wrap="square" lIns="18288" tIns="0" rIns="18288" bIns="73152">
+            <a:bodyPr rtlCol="0" anchor="ctr" wrap="square" lIns="18288" tIns="0" rIns="18288" bIns="0">
               <a:noAutofit/>
             </a:bodyPr>
             <a:lstStyle/>
@@ -12400,8 +11724,8 @@
           </p:nvSpPr>
           <p:spPr>
             <a:xfrm>
-              <a:off x="4347607" y="1921521"/>
-              <a:ext cx="6801874" cy="1408176"/>
+              <a:off x="5412876" y="1693931"/>
+              <a:ext cx="5736604" cy="1120136"/>
             </a:xfrm>
             <a:prstGeom prst="rect">
               <a:avLst/>
@@ -12426,7 +11750,7 @@
                   </a:solidFill>
                   <a:latin typeface="Play"/>
                 </a:rPr>
-                <a:t>Включено</a:t>
+                <a:t>Всего сотрудников</a:t>
               </a:r>
             </a:p>
             <a:p>
@@ -12445,7 +11769,7 @@
                   </a:solidFill>
                   <a:latin typeface="Play"/>
                 </a:rPr>
-                <a:t>2 подразделения, 150 сотрудников</a:t>
+                <a:t>150 сотрудников из 2 подразделений</a:t>
               </a:r>
             </a:p>
           </p:txBody>
@@ -12458,8 +11782,8 @@
           </p:nvSpPr>
           <p:spPr>
             <a:xfrm>
-              <a:off x="432832" y="3384561"/>
-              <a:ext cx="3623310" cy="1408176"/>
+              <a:off x="963441" y="2868931"/>
+              <a:ext cx="3627359" cy="1120136"/>
             </a:xfrm>
             <a:custGeom>
               <a:avLst/>
@@ -12468,25 +11792,25 @@
               <a:cxnLst/>
               <a:rect l="l" t="t" r="r" b="b"/>
               <a:pathLst>
-                <a:path w="3963" h="1540" stroke="0">
+                <a:path w="3967" h="1225" stroke="0">
                   <a:moveTo>
-                    <a:pt x="963" y="0"/>
+                    <a:pt x="0" y="0"/>
                   </a:moveTo>
                   <a:lnTo>
-                    <a:pt x="3000" y="0"/>
+                    <a:pt x="3967" y="0"/>
                   </a:lnTo>
                   <a:lnTo>
-                    <a:pt x="3963" y="1540"/>
+                    <a:pt x="3409" y="1225"/>
                   </a:lnTo>
                   <a:lnTo>
-                    <a:pt x="0" y="1540"/>
+                    <a:pt x="558" y="1225"/>
                   </a:lnTo>
                   <a:close/>
                 </a:path>
               </a:pathLst>
             </a:custGeom>
             <a:solidFill>
-              <a:srgbClr val="003676"/>
+              <a:srgbClr val="0052B0"/>
             </a:solidFill>
             <a:ln w="0">
               <a:noFill/>
@@ -12523,8 +11847,8 @@
           </p:nvSpPr>
           <p:spPr>
             <a:xfrm>
-              <a:off x="4347607" y="3384561"/>
-              <a:ext cx="6801874" cy="1408176"/>
+              <a:off x="5412876" y="2868931"/>
+              <a:ext cx="5736604" cy="1120136"/>
             </a:xfrm>
             <a:prstGeom prst="rect">
               <a:avLst/>
@@ -12549,7 +11873,7 @@
                   </a:solidFill>
                   <a:latin typeface="Play"/>
                 </a:rPr>
-                <a:t>Исключено</a:t>
+                <a:t>Длительность теста</a:t>
               </a:r>
             </a:p>
             <a:p>
@@ -12568,106 +11892,21 @@
                   </a:solidFill>
                   <a:latin typeface="Play"/>
                 </a:rPr>
-                <a:t>Остальные отделы и внешние системы</a:t>
+                <a:t>6 недель пилотного запуска</a:t>
               </a:r>
             </a:p>
           </p:txBody>
         </p:sp>
-      </p:grpSp>
-    </p:spTree>
-  </p:cSld>
-  <p:clrMapOvr>
-    <a:masterClrMapping/>
-  </p:clrMapOvr>
-</p:sld>
-</file>
-
-<file path=ppt/slides/slide8.xml><?xml version="1.0" encoding="utf-8"?>
-<p:sld xmlns:a="http://schemas.openxmlformats.org/drawingml/2006/main" xmlns:p="http://schemas.openxmlformats.org/presentationml/2006/main" xmlns:r="http://schemas.openxmlformats.org/officeDocument/2006/relationships">
-  <p:cSld>
-    <p:spTree>
-      <p:nvGrpSpPr>
-        <p:cNvPr id="1" name=""/>
-        <p:cNvGrpSpPr/>
-        <p:nvPr/>
-      </p:nvGrpSpPr>
-      <p:grpSpPr/>
-      <p:sp>
-        <p:nvSpPr>
-          <p:cNvPr id="718" name="BrandDeck Text 718"/>
-          <p:cNvSpPr txBox="1"/>
-          <p:nvPr>
-            <p:ph type="title"/>
-          </p:nvPr>
-        </p:nvSpPr>
-        <p:spPr>
-          <a:xfrm>
-            <a:off x="429253" y="424691"/>
-            <a:ext cx="7827311" cy="1167572"/>
-          </a:xfrm>
-          <a:prstGeom prst="rect">
-            <a:avLst/>
-          </a:prstGeom>
-          <a:noFill/>
-          <a:ln>
-            <a:noFill/>
-          </a:ln>
-        </p:spPr>
-        <p:txBody>
-          <a:bodyPr anchorCtr="0" anchor="t" bIns="0" lIns="0" spcFirstLastPara="1" rIns="0" wrap="square" tIns="0">
-            <a:normAutofit/>
-          </a:bodyPr>
-          <a:lstStyle/>
-          <a:p>
-            <a:pPr indent="0" marL="0" rtl="0" algn="l">
-              <a:lnSpc>
-                <a:spcPct val="115000"/>
-              </a:lnSpc>
-              <a:spcBef>
-                <a:spcPts val="0"/>
-              </a:spcBef>
-              <a:spcAft>
-                <a:spcPts val="300"/>
-              </a:spcAft>
-              <a:buClr>
-                <a:schemeClr val="lt1"/>
-              </a:buClr>
-              <a:buSzPts val="3600"/>
-              <a:buFont typeface="Play"/>
-              <a:buNone/>
-            </a:pPr>
-            <a:r>
-              <a:rPr sz="2000"/>
-              <a:t>В пилот не входят изменения глобальных настроек портала или интеграция с внешними CRM</a:t>
-            </a:r>
-            <a:endParaRPr/>
-          </a:p>
-        </p:txBody>
-      </p:sp>
-      <p:grpSp>
-        <p:nvGrpSpPr>
-          <p:cNvPr id="2" name="BrandDeck Diagram pyramid" descr="pyramid: Входит в пилот Ответы по регламентам и ссылки на документы; Не входит в пилот Изменения глобальных настроек портала"/>
-          <p:cNvGrpSpPr/>
-          <p:nvPr/>
-        </p:nvGrpSpPr>
-        <p:grpSpPr>
-          <a:xfrm>
-            <a:off x="446398" y="2126084"/>
-            <a:ext cx="10263166" cy="2871216"/>
-            <a:chOff x="446398" y="2126084"/>
-            <a:chExt cx="10263166" cy="2871216"/>
-          </a:xfrm>
-        </p:grpSpPr>
         <p:sp>
           <p:nvSpPr>
-            <p:cNvPr id="721" name="BrandDeck Diagram Level 1"/>
+            <p:cNvPr id="472" name="BrandDeck Diagram Level 3"/>
             <p:cNvSpPr/>
             <p:nvPr/>
           </p:nvSpPr>
           <p:spPr>
             <a:xfrm>
-              <a:off x="1360798" y="2126084"/>
-              <a:ext cx="1794510" cy="1408176"/>
+              <a:off x="1498700" y="4043932"/>
+              <a:ext cx="2556842" cy="1120136"/>
             </a:xfrm>
             <a:custGeom>
               <a:avLst/>
@@ -12676,18 +11915,18 @@
               <a:cxnLst/>
               <a:rect l="l" t="t" r="r" b="b"/>
               <a:pathLst>
-                <a:path w="1963" h="1540" stroke="0">
+                <a:path w="2796" h="1225" stroke="0">
                   <a:moveTo>
-                    <a:pt x="956" y="0"/>
+                    <a:pt x="0" y="0"/>
                   </a:moveTo>
                   <a:lnTo>
-                    <a:pt x="1006" y="0"/>
+                    <a:pt x="2796" y="0"/>
                   </a:lnTo>
                   <a:lnTo>
-                    <a:pt x="1963" y="1540"/>
+                    <a:pt x="2238" y="1225"/>
                   </a:lnTo>
                   <a:lnTo>
-                    <a:pt x="0" y="1540"/>
+                    <a:pt x="558" y="1225"/>
                   </a:lnTo>
                   <a:close/>
                 </a:path>
@@ -12701,7 +11940,7 @@
             </a:ln>
           </p:spPr>
           <p:txBody>
-            <a:bodyPr rtlCol="0" anchor="b" wrap="square" lIns="18288" tIns="0" rIns="18288" bIns="73152">
+            <a:bodyPr rtlCol="0" anchor="ctr" wrap="square" lIns="18288" tIns="0" rIns="18288" bIns="0">
               <a:noAutofit/>
             </a:bodyPr>
             <a:lstStyle/>
@@ -12718,21 +11957,21 @@
                   </a:solidFill>
                   <a:latin typeface="Play"/>
                 </a:rPr>
-                <a:t>01</a:t>
+                <a:t>03</a:t>
               </a:r>
             </a:p>
           </p:txBody>
         </p:sp>
         <p:sp>
           <p:nvSpPr>
-            <p:cNvPr id="722" name="BrandDeck Diagram Text 1"/>
+            <p:cNvPr id="473" name="BrandDeck Diagram Text 3"/>
             <p:cNvSpPr txBox="1"/>
             <p:nvPr/>
           </p:nvSpPr>
           <p:spPr>
             <a:xfrm>
-              <a:off x="4361173" y="2126084"/>
-              <a:ext cx="6348391" cy="1408176"/>
+              <a:off x="5412876" y="4043932"/>
+              <a:ext cx="5736604" cy="1120136"/>
             </a:xfrm>
             <a:prstGeom prst="rect">
               <a:avLst/>
@@ -12757,7 +11996,7 @@
                   </a:solidFill>
                   <a:latin typeface="Play"/>
                 </a:rPr>
-                <a:t>Входит в пилот</a:t>
+                <a:t>Цель пилота</a:t>
               </a:r>
             </a:p>
             <a:p>
@@ -12776,130 +12015,7 @@
                   </a:solidFill>
                   <a:latin typeface="Play"/>
                 </a:rPr>
-                <a:t>Ответы по регламентам и ссылки на документы</a:t>
-              </a:r>
-            </a:p>
-          </p:txBody>
-        </p:sp>
-        <p:sp>
-          <p:nvSpPr>
-            <p:cNvPr id="723" name="BrandDeck Diagram Level 2"/>
-            <p:cNvSpPr/>
-            <p:nvPr/>
-          </p:nvSpPr>
-          <p:spPr>
-            <a:xfrm>
-              <a:off x="446398" y="3589124"/>
-              <a:ext cx="3623310" cy="1408176"/>
-            </a:xfrm>
-            <a:custGeom>
-              <a:avLst/>
-              <a:gdLst/>
-              <a:ahLst/>
-              <a:cxnLst/>
-              <a:rect l="l" t="t" r="r" b="b"/>
-              <a:pathLst>
-                <a:path w="3963" h="1540" stroke="0">
-                  <a:moveTo>
-                    <a:pt x="963" y="0"/>
-                  </a:moveTo>
-                  <a:lnTo>
-                    <a:pt x="3000" y="0"/>
-                  </a:lnTo>
-                  <a:lnTo>
-                    <a:pt x="3963" y="1540"/>
-                  </a:lnTo>
-                  <a:lnTo>
-                    <a:pt x="0" y="1540"/>
-                  </a:lnTo>
-                  <a:close/>
-                </a:path>
-              </a:pathLst>
-            </a:custGeom>
-            <a:solidFill>
-              <a:srgbClr val="003676"/>
-            </a:solidFill>
-            <a:ln w="0">
-              <a:noFill/>
-            </a:ln>
-          </p:spPr>
-          <p:txBody>
-            <a:bodyPr rtlCol="0" anchor="ctr" wrap="square" lIns="18288" tIns="0" rIns="18288" bIns="0">
-              <a:noAutofit/>
-            </a:bodyPr>
-            <a:lstStyle/>
-            <a:p>
-              <a:pPr algn="ctr">
-                <a:lnSpc>
-                  <a:spcPct val="110000"/>
-                </a:lnSpc>
-              </a:pPr>
-              <a:r>
-                <a:rPr sz="1400" b="1">
-                  <a:solidFill>
-                    <a:srgbClr val="FFFFFF"/>
-                  </a:solidFill>
-                  <a:latin typeface="Play"/>
-                </a:rPr>
-                <a:t>02</a:t>
-              </a:r>
-            </a:p>
-          </p:txBody>
-        </p:sp>
-        <p:sp>
-          <p:nvSpPr>
-            <p:cNvPr id="724" name="BrandDeck Diagram Text 2"/>
-            <p:cNvSpPr txBox="1"/>
-            <p:nvPr/>
-          </p:nvSpPr>
-          <p:spPr>
-            <a:xfrm>
-              <a:off x="4361173" y="3589124"/>
-              <a:ext cx="6348391" cy="1408176"/>
-            </a:xfrm>
-            <a:prstGeom prst="rect">
-              <a:avLst/>
-            </a:prstGeom>
-            <a:noFill/>
-          </p:spPr>
-          <p:txBody>
-            <a:bodyPr wrap="square" anchor="ctr" lIns="36576" tIns="18288" rIns="36576" bIns="18288">
-              <a:noAutofit/>
-            </a:bodyPr>
-            <a:lstStyle/>
-            <a:p>
-              <a:pPr algn="l">
-                <a:lnSpc>
-                  <a:spcPct val="110000"/>
-                </a:lnSpc>
-              </a:pPr>
-              <a:r>
-                <a:rPr sz="1600" b="1">
-                  <a:solidFill>
-                    <a:srgbClr val="FFFFFF"/>
-                  </a:solidFill>
-                  <a:latin typeface="Play"/>
-                </a:rPr>
-                <a:t>Не входит в пилот</a:t>
-              </a:r>
-            </a:p>
-            <a:p>
-              <a:pPr algn="l">
-                <a:lnSpc>
-                  <a:spcPct val="110000"/>
-                </a:lnSpc>
-                <a:spcBef>
-                  <a:spcPts val="400"/>
-                </a:spcBef>
-              </a:pPr>
-              <a:r>
-                <a:rPr sz="1600" b="0">
-                  <a:solidFill>
-                    <a:srgbClr val="FFFFFF"/>
-                  </a:solidFill>
-                  <a:latin typeface="Play"/>
-                </a:rPr>
-                <a:t>Изменения глобальных настроек портала</a:t>
+                <a:t>Измерить эффективность ИИ-помощника</a:t>
               </a:r>
             </a:p>
           </p:txBody>
@@ -12969,7 +12085,7 @@
             </a:pPr>
             <a:r>
               <a:rPr sz="2000"/>
-              <a:t>Успех измеряется сокращением времени поиска ответа и долей обращений, закрытых без участия специалиста</a:t>
+              <a:t>Измерим время поиска ответа и долю обращений, закрытых ИИ без участия специалиста</a:t>
             </a:r>
             <a:endParaRPr/>
           </a:p>
@@ -12985,7 +12101,7 @@
         </p:nvGraphicFramePr>
         <p:xfrm>
           <a:off x="429768" y="1729423"/>
-          <a:ext cx="7827263" cy="4717094"/>
+          <a:ext cx="7827263" cy="4351337"/>
         </p:xfrm>
         <a:graphic>
           <a:graphicData uri="http://schemas.openxmlformats.org/drawingml/2006/table">
@@ -12994,10 +12110,11 @@
                 <a:tableStyleId>{5C22544A-7EE6-4342-B048-85BDC9FD1C3A}</a:tableStyleId>
               </a:tblPr>
               <a:tblGrid>
-                <a:gridCol w="3913631"/>
-                <a:gridCol w="3913632"/>
+                <a:gridCol w="2609087"/>
+                <a:gridCol w="2609087"/>
+                <a:gridCol w="2609089"/>
               </a:tblGrid>
-              <a:tr h="1429278">
+              <a:tr h="1307359">
                 <a:tc>
                   <a:txBody>
                     <a:bodyPr/>
@@ -13011,7 +12128,7 @@
                           </a:solidFill>
                           <a:latin typeface="Play"/>
                         </a:rPr>
-                        <a:t>Метрика</a:t>
+                        <a:t>Показатель</a:t>
                       </a:r>
                     </a:p>
                   </a:txBody>
@@ -13034,7 +12151,30 @@
                           </a:solidFill>
                           <a:latin typeface="Play"/>
                         </a:rPr>
-                        <a:t>Цель измерения</a:t>
+                        <a:t>Метод измерения</a:t>
+                      </a:r>
+                    </a:p>
+                  </a:txBody>
+                  <a:tcPr marL="54864" marR="54864" anchor="ctr">
+                    <a:solidFill>
+                      <a:srgbClr val="006DEB"/>
+                    </a:solidFill>
+                  </a:tcPr>
+                </a:tc>
+                <a:tc>
+                  <a:txBody>
+                    <a:bodyPr/>
+                    <a:lstStyle/>
+                    <a:p>
+                      <a:pPr algn="l"/>
+                      <a:r>
+                        <a:rPr sz="1300" b="1">
+                          <a:solidFill>
+                            <a:srgbClr val="FFFFFF"/>
+                          </a:solidFill>
+                          <a:latin typeface="Play"/>
+                        </a:rPr>
+                        <a:t>Период сбора</a:t>
                       </a:r>
                     </a:p>
                   </a:txBody>
@@ -13045,7 +12185,7 @@
                   </a:tcPr>
                 </a:tc>
               </a:tr>
-              <a:tr h="1643908">
+              <a:tr h="1521989">
                 <a:tc>
                   <a:txBody>
                     <a:bodyPr/>
@@ -13082,32 +12222,7 @@
                           </a:solidFill>
                           <a:latin typeface="Play"/>
                         </a:rPr>
-                        <a:t>Сокращение текущего времени до 30 минут</a:t>
-                      </a:r>
-                    </a:p>
-                  </a:txBody>
-                  <a:tcPr marL="54864" marR="54864" anchor="ctr">
-                    <a:solidFill>
-                      <a:srgbClr val="1A1A1A"/>
-                    </a:solidFill>
-                  </a:tcPr>
-                </a:tc>
-              </a:tr>
-              <a:tr h="1643908">
-                <a:tc>
-                  <a:txBody>
-                    <a:bodyPr/>
-                    <a:lstStyle/>
-                    <a:p>
-                      <a:pPr algn="l"/>
-                      <a:r>
-                        <a:rPr sz="1300" b="0">
-                          <a:solidFill>
-                            <a:srgbClr val="FFFFFF"/>
-                          </a:solidFill>
-                          <a:latin typeface="Play"/>
-                        </a:rPr>
-                        <a:t>Доля закрытых обращений</a:t>
+                        <a:t>Среднее время до получения инструкции</a:t>
                       </a:r>
                     </a:p>
                   </a:txBody>
@@ -13130,7 +12245,78 @@
                           </a:solidFill>
                           <a:latin typeface="Play"/>
                         </a:rPr>
-                        <a:t>Рост процента ответов без участия специалиста</a:t>
+                        <a:t>6 недель пилота</a:t>
+                      </a:r>
+                    </a:p>
+                  </a:txBody>
+                  <a:tcPr marL="54864" marR="54864" anchor="ctr">
+                    <a:solidFill>
+                      <a:srgbClr val="1A1A1A"/>
+                    </a:solidFill>
+                  </a:tcPr>
+                </a:tc>
+              </a:tr>
+              <a:tr h="1521989">
+                <a:tc>
+                  <a:txBody>
+                    <a:bodyPr/>
+                    <a:lstStyle/>
+                    <a:p>
+                      <a:pPr algn="l"/>
+                      <a:r>
+                        <a:rPr sz="1300" b="0">
+                          <a:solidFill>
+                            <a:srgbClr val="FFFFFF"/>
+                          </a:solidFill>
+                          <a:latin typeface="Play"/>
+                        </a:rPr>
+                        <a:t>Доля обращений без специалиста</a:t>
+                      </a:r>
+                    </a:p>
+                  </a:txBody>
+                  <a:tcPr marL="54864" marR="54864" anchor="ctr">
+                    <a:solidFill>
+                      <a:srgbClr val="1A1A1A"/>
+                    </a:solidFill>
+                  </a:tcPr>
+                </a:tc>
+                <a:tc>
+                  <a:txBody>
+                    <a:bodyPr/>
+                    <a:lstStyle/>
+                    <a:p>
+                      <a:pPr algn="l"/>
+                      <a:r>
+                        <a:rPr sz="1300" b="0">
+                          <a:solidFill>
+                            <a:srgbClr val="FFFFFF"/>
+                          </a:solidFill>
+                          <a:latin typeface="Play"/>
+                        </a:rPr>
+                        <a:t>Процент закрытых ИИ вопросов</a:t>
+                      </a:r>
+                    </a:p>
+                  </a:txBody>
+                  <a:tcPr marL="54864" marR="54864" anchor="ctr">
+                    <a:solidFill>
+                      <a:srgbClr val="1A1A1A"/>
+                    </a:solidFill>
+                  </a:tcPr>
+                </a:tc>
+                <a:tc>
+                  <a:txBody>
+                    <a:bodyPr/>
+                    <a:lstStyle/>
+                    <a:p>
+                      <a:pPr algn="l"/>
+                      <a:r>
+                        <a:rPr sz="1300" b="0">
+                          <a:solidFill>
+                            <a:srgbClr val="FFFFFF"/>
+                          </a:solidFill>
+                          <a:latin typeface="Play"/>
+                        </a:rPr>
+                        <a:t>6 недель пилота</a:t>
                       </a:r>
                     </a:p>
                   </a:txBody>

--- a/deliverables/vk-workspace-columns.pptx
+++ b/deliverables/vk-workspace-columns.pptx
@@ -18,8 +18,6 @@
     <p:sldId id="292" r:id="rId45"/>
     <p:sldId id="293" r:id="rId46"/>
     <p:sldId id="294" r:id="rId47"/>
-    <p:sldId id="295" r:id="rId48"/>
-    <p:sldId id="296" r:id="rId49"/>
   </p:sldIdLst>
   <p:sldSz cy="6858000" cx="12192000"/>
   <p:notesSz cx="6858000" cy="9144000"/>
@@ -1501,7 +1499,7 @@
           <a:lstStyle/>
           <a:p>
             <a:r>
-              <a:t>Этот слайд представляет инициативу по внедрению ИИ-помощника во внутренний портал для автоматизации ответов на вопросы по регламентам и снижения нагрузки на службу поддержки.</a:t>
+              <a:t>Этот слайд открывает презентацию и обозначает проблему, с которой мы начинаем работу по внедрению ИИ-помощника.</a:t>
             </a:r>
           </a:p>
         </p:txBody>
@@ -1571,7 +1569,7 @@
           <a:lstStyle/>
           <a:p>
             <a:r>
-              <a:t>Сейчас поиск информации отнимает до 30 минут, а треть обращений дублируются, что создает лишнюю нагрузку на поддержку.</a:t>
+              <a:t>Текущее время поиска инструкции составляет до 30 минут, что создает нагрузку на сотрудников.</a:t>
             </a:r>
           </a:p>
         </p:txBody>
@@ -1641,7 +1639,7 @@
           <a:lstStyle/>
           <a:p>
             <a:r>
-              <a:t>Сейчас 150 сотрудников двух подразделений тратят до 30 минут на поиск инструкций.</a:t>
+              <a:t>Треть всех обращений в поддержку — это повторяющиеся вопросы, которые создают лишнюю нагрузку на специалистов.</a:t>
             </a:r>
           </a:p>
         </p:txBody>
@@ -1711,7 +1709,7 @@
           <a:lstStyle/>
           <a:p>
             <a:r>
-              <a:t>ИИ-помощник автоматически генерирует ответ на основе регламентов и сразу указывает ссылку на документ, сокращая время поиска.</a:t>
+              <a:t>Сценарий использования сфокусирован на поиске документации, где треть обращений — это повторяющиеся вопросы по регламентам.</a:t>
             </a:r>
           </a:p>
         </p:txBody>
@@ -1781,7 +1779,7 @@
           <a:lstStyle/>
           <a:p>
             <a:r>
-              <a:t>Ключевое преимущество системы — строгая изоляция данных: все запросы обрабатываются внутри контура, а исходные документы никогда не покидают корпоративную сеть.</a:t>
+              <a:t>Решение автоматически отвечает сотрудникам на вопросы по регламентам и сразу указывает на источник документа.</a:t>
             </a:r>
           </a:p>
         </p:txBody>
@@ -1851,7 +1849,7 @@
           <a:lstStyle/>
           <a:p>
             <a:r>
-              <a:t>Если ИИ не находит ответ в регламентах, запрос автоматически передаётся специалисту с полным контекстом диалога.</a:t>
+              <a:t>Модель функционирует внутри контура компании, при этом документы не покидают внутреннюю сеть. Если ИИ не может дать подтверждённый ответ, запрос передаётся специалисту поддержки с контекстом.</a:t>
             </a:r>
           </a:p>
         </p:txBody>
@@ -1921,7 +1919,7 @@
           <a:lstStyle/>
           <a:p>
             <a:r>
-              <a:t>Этот слайд определяет ключевые метрики успеха пилота: скорость поиска и автономность сотрудников, которые мы будем измерять в течение 6 недель.</a:t>
+              <a:t>Если ИИ не находит подтверждённый ответ, запрос автоматически передаётся специалисту с полным контекстом диалога.</a:t>
             </a:r>
           </a:p>
         </p:txBody>
@@ -1991,7 +1989,7 @@
           <a:lstStyle/>
           <a:p>
             <a:r>
-              <a:t>Пилотный запуск ограничен двумя подразделениями и 150 сотрудниками в течение 6 недель.</a:t>
+              <a:t>Пилотный запуск охватывает два подразделения с общим числом сотрудников 150 человек и длится шесть недель.</a:t>
             </a:r>
           </a:p>
         </p:txBody>
@@ -2061,7 +2059,7 @@
           <a:lstStyle/>
           <a:p>
             <a:r>
-              <a:t>Для оценки эффективности пилота мы будем отслеживать время поиска ответа и долю обращений, закрытых ИИ без участия специалиста.</a:t>
+              <a:t>Успех пилота оценивается по времени поиска ответа и доле обращений, закрытых без участия специалиста.</a:t>
             </a:r>
           </a:p>
         </p:txBody>
@@ -2131,147 +2129,7 @@
           <a:lstStyle/>
           <a:p>
             <a:r>
-              <a:t>Архитектура системы полностью изолирована внутри контура компании, что исключает риск утечки документов наружу.</a:t>
-            </a:r>
-          </a:p>
-        </p:txBody>
-      </p:sp>
-      <p:sp>
-        <p:nvSpPr>
-          <p:cNvPr id="4" name="Slide Number Placeholder 3"/>
-          <p:cNvSpPr>
-            <a:spLocks noGrp="1"/>
-          </p:cNvSpPr>
-          <p:nvPr>
-            <p:ph type="sldNum" idx="12"/>
-          </p:nvPr>
-        </p:nvSpPr>
-        <p:spPr/>
-      </p:sp>
-    </p:spTree>
-  </p:cSld>
-  <p:clrMapOvr>
-    <a:masterClrMapping/>
-  </p:clrMapOvr>
-</p:notes>
-</file>
-
-<file path=ppt/notesSlides/notesSlide40.xml><?xml version="1.0" encoding="utf-8"?>
-<p:notes xmlns:a="http://schemas.openxmlformats.org/drawingml/2006/main" xmlns:p="http://schemas.openxmlformats.org/presentationml/2006/main" xmlns:r="http://schemas.openxmlformats.org/officeDocument/2006/relationships">
-  <p:cSld>
-    <p:spTree>
-      <p:nvGrpSpPr>
-        <p:cNvPr id="1" name=""/>
-        <p:cNvGrpSpPr/>
-        <p:nvPr/>
-      </p:nvGrpSpPr>
-      <p:grpSpPr>
-        <a:xfrm>
-          <a:off x="0" y="0"/>
-          <a:ext cx="0" cy="0"/>
-          <a:chOff x="0" y="0"/>
-          <a:chExt cx="0" cy="0"/>
-        </a:xfrm>
-      </p:grpSpPr>
-      <p:sp>
-        <p:nvSpPr>
-          <p:cNvPr id="2" name="Slide Image Placeholder 1"/>
-          <p:cNvSpPr>
-            <a:spLocks noGrp="1"/>
-          </p:cNvSpPr>
-          <p:nvPr>
-            <p:ph type="sldImg" idx="3"/>
-          </p:nvPr>
-        </p:nvSpPr>
-        <p:spPr/>
-      </p:sp>
-      <p:sp>
-        <p:nvSpPr>
-          <p:cNvPr id="3" name="Notes Placeholder 2"/>
-          <p:cNvSpPr>
-            <a:spLocks noGrp="1"/>
-          </p:cNvSpPr>
-          <p:nvPr>
-            <p:ph type="body" idx="1"/>
-          </p:nvPr>
-        </p:nvSpPr>
-        <p:spPr/>
-        <p:txBody>
-          <a:bodyPr/>
-          <a:lstStyle/>
-          <a:p>
-            <a:r>
-              <a:t>Для старта пилота необходимо ваше одобрение, выделение команды из трех человек и утверждение бюджета.</a:t>
-            </a:r>
-          </a:p>
-        </p:txBody>
-      </p:sp>
-      <p:sp>
-        <p:nvSpPr>
-          <p:cNvPr id="4" name="Slide Number Placeholder 3"/>
-          <p:cNvSpPr>
-            <a:spLocks noGrp="1"/>
-          </p:cNvSpPr>
-          <p:nvPr>
-            <p:ph type="sldNum" idx="12"/>
-          </p:nvPr>
-        </p:nvSpPr>
-        <p:spPr/>
-      </p:sp>
-    </p:spTree>
-  </p:cSld>
-  <p:clrMapOvr>
-    <a:masterClrMapping/>
-  </p:clrMapOvr>
-</p:notes>
-</file>
-
-<file path=ppt/notesSlides/notesSlide41.xml><?xml version="1.0" encoding="utf-8"?>
-<p:notes xmlns:a="http://schemas.openxmlformats.org/drawingml/2006/main" xmlns:p="http://schemas.openxmlformats.org/presentationml/2006/main" xmlns:r="http://schemas.openxmlformats.org/officeDocument/2006/relationships">
-  <p:cSld>
-    <p:spTree>
-      <p:nvGrpSpPr>
-        <p:cNvPr id="1" name=""/>
-        <p:cNvGrpSpPr/>
-        <p:nvPr/>
-      </p:nvGrpSpPr>
-      <p:grpSpPr>
-        <a:xfrm>
-          <a:off x="0" y="0"/>
-          <a:ext cx="0" cy="0"/>
-          <a:chOff x="0" y="0"/>
-          <a:chExt cx="0" cy="0"/>
-        </a:xfrm>
-      </p:grpSpPr>
-      <p:sp>
-        <p:nvSpPr>
-          <p:cNvPr id="2" name="Slide Image Placeholder 1"/>
-          <p:cNvSpPr>
-            <a:spLocks noGrp="1"/>
-          </p:cNvSpPr>
-          <p:nvPr>
-            <p:ph type="sldImg" idx="3"/>
-          </p:nvPr>
-        </p:nvSpPr>
-        <p:spPr/>
-      </p:sp>
-      <p:sp>
-        <p:nvSpPr>
-          <p:cNvPr id="3" name="Notes Placeholder 2"/>
-          <p:cNvSpPr>
-            <a:spLocks noGrp="1"/>
-          </p:cNvSpPr>
-          <p:nvPr>
-            <p:ph type="body" idx="1"/>
-          </p:nvPr>
-        </p:nvSpPr>
-        <p:spPr/>
-        <p:txBody>
-          <a:bodyPr/>
-          <a:lstStyle/>
-          <a:p>
-            <a:r>
-              <a:t>Для старта проекта необходимо утвердить бюджет и выделить команду из трех человек.</a:t>
+              <a:t>Для реализации пилота просим одобрить проект и выделить команду из трех человек.</a:t>
             </a:r>
           </a:p>
         </p:txBody>
@@ -4259,9 +4117,9 @@
 </p:sldLayout>
 </file>
 
-<file path=ppt/slideLayouts/slideLayout7.xml><?xml version="1.0" encoding="utf-8"?>
-<p:sldLayout xmlns:a="http://schemas.openxmlformats.org/drawingml/2006/main" xmlns:r="http://schemas.openxmlformats.org/officeDocument/2006/relationships" xmlns:mc="http://schemas.openxmlformats.org/markup-compatibility/2006" xmlns:mv="urn:schemas-microsoft-com:mac:vml" xmlns:p="http://schemas.openxmlformats.org/presentationml/2006/main" xmlns:c="http://schemas.openxmlformats.org/drawingml/2006/chart" xmlns:dgm="http://schemas.openxmlformats.org/drawingml/2006/diagram" xmlns:o="urn:schemas-microsoft-com:office:office" xmlns:v="urn:schemas-microsoft-com:vml" xmlns:pvml="urn:schemas-microsoft-com:office:powerpoint" xmlns:com="http://schemas.openxmlformats.org/drawingml/2006/compatibility" xmlns:p14="http://schemas.microsoft.com/office/powerpoint/2010/main" xmlns:p15="http://schemas.microsoft.com/office/powerpoint/2012/main" xmlns:ahyp="http://schemas.microsoft.com/office/drawing/2018/hyperlinkcolor" matchingName="8_Заголовок">
-  <p:cSld name="8_Заголовок">
+<file path=ppt/slideLayouts/slideLayout6.xml><?xml version="1.0" encoding="utf-8"?>
+<p:sldLayout xmlns:a="http://schemas.openxmlformats.org/drawingml/2006/main" xmlns:r="http://schemas.openxmlformats.org/officeDocument/2006/relationships" xmlns:mc="http://schemas.openxmlformats.org/markup-compatibility/2006" xmlns:mv="urn:schemas-microsoft-com:mac:vml" xmlns:p="http://schemas.openxmlformats.org/presentationml/2006/main" xmlns:c="http://schemas.openxmlformats.org/drawingml/2006/chart" xmlns:dgm="http://schemas.openxmlformats.org/drawingml/2006/diagram" xmlns:o="urn:schemas-microsoft-com:office:office" xmlns:v="urn:schemas-microsoft-com:vml" xmlns:pvml="urn:schemas-microsoft-com:office:powerpoint" xmlns:com="http://schemas.openxmlformats.org/drawingml/2006/compatibility" xmlns:p14="http://schemas.microsoft.com/office/powerpoint/2010/main" xmlns:p15="http://schemas.microsoft.com/office/powerpoint/2012/main" xmlns:ahyp="http://schemas.microsoft.com/office/drawing/2018/hyperlinkcolor" matchingName="13_Титульный слайд">
+  <p:cSld name="13_Титульный слайд">
     <p:bg>
       <p:bgPr>
         <a:solidFill>
@@ -4271,7 +4129,7 @@
     </p:bg>
     <p:spTree>
       <p:nvGrpSpPr>
-        <p:cNvPr id="202" name="Shape 202"/>
+        <p:cNvPr id="174" name="Shape 174"/>
         <p:cNvGrpSpPr/>
         <p:nvPr/>
       </p:nvGrpSpPr>
@@ -4283,63 +4141,518 @@
           <a:chExt cx="0" cy="0"/>
         </a:xfrm>
       </p:grpSpPr>
-      <p:pic>
-        <p:nvPicPr>
-          <p:cNvPr id="203" name="Google Shape;203;p8"/>
-          <p:cNvPicPr preferRelativeResize="0"/>
+      <p:grpSp>
+        <p:nvGrpSpPr>
+          <p:cNvPr id="175" name="Google Shape;175;p7"/>
+          <p:cNvGrpSpPr/>
           <p:nvPr/>
-        </p:nvPicPr>
-        <p:blipFill rotWithShape="1">
-          <a:blip r:embed="rId2">
-            <a:alphaModFix/>
-          </a:blip>
-          <a:srcRect b="25668" l="13456" r="0" t="10446"/>
-          <a:stretch/>
-        </p:blipFill>
-        <p:spPr>
-          <a:xfrm flipH="1">
-            <a:off x="2907772" y="-1"/>
-            <a:ext cx="9284228" cy="6858001"/>
+        </p:nvGrpSpPr>
+        <p:grpSpPr>
+          <a:xfrm>
+            <a:off x="224842" y="-74145"/>
+            <a:ext cx="12188171" cy="64326"/>
+            <a:chOff x="-2" y="-2"/>
+            <a:chExt cx="12188169" cy="64324"/>
           </a:xfrm>
-          <a:prstGeom prst="rect">
-            <a:avLst/>
-          </a:prstGeom>
-          <a:noFill/>
-          <a:ln>
-            <a:noFill/>
-          </a:ln>
-        </p:spPr>
-      </p:pic>
-      <p:pic>
-        <p:nvPicPr>
-          <p:cNvPr id="204" name="Google Shape;204;p8"/>
-          <p:cNvPicPr preferRelativeResize="0"/>
-          <p:nvPr/>
-        </p:nvPicPr>
-        <p:blipFill rotWithShape="1">
-          <a:blip r:embed="rId3">
-            <a:alphaModFix/>
-          </a:blip>
-          <a:srcRect b="8691" l="36156" r="0" t="22176"/>
-          <a:stretch/>
-        </p:blipFill>
-        <p:spPr>
-          <a:xfrm flipH="1">
-            <a:off x="5862319" y="-2"/>
-            <a:ext cx="6329681" cy="6863317"/>
-          </a:xfrm>
-          <a:prstGeom prst="rect">
-            <a:avLst/>
-          </a:prstGeom>
-          <a:noFill/>
-          <a:ln>
-            <a:noFill/>
-          </a:ln>
-        </p:spPr>
-      </p:pic>
+        </p:grpSpPr>
+        <p:cxnSp>
+          <p:nvCxnSpPr>
+            <p:cNvPr id="176" name="Google Shape;176;p7"/>
+            <p:cNvCxnSpPr/>
+            <p:nvPr/>
+          </p:nvCxnSpPr>
+          <p:spPr>
+            <a:xfrm flipH="1">
+              <a:off x="-2" y="-2"/>
+              <a:ext cx="7" cy="64324"/>
+            </a:xfrm>
+            <a:prstGeom prst="straightConnector1">
+              <a:avLst/>
+            </a:prstGeom>
+            <a:noFill/>
+            <a:ln cap="flat" cmpd="sng" w="9525">
+              <a:solidFill>
+                <a:srgbClr val="808080"/>
+              </a:solidFill>
+              <a:prstDash val="solid"/>
+              <a:miter lim="8000"/>
+              <a:headEnd len="sm" w="sm" type="none"/>
+              <a:tailEnd len="sm" w="sm" type="none"/>
+            </a:ln>
+          </p:spPr>
+        </p:cxnSp>
+        <p:cxnSp>
+          <p:nvCxnSpPr>
+            <p:cNvPr id="177" name="Google Shape;177;p7"/>
+            <p:cNvCxnSpPr/>
+            <p:nvPr/>
+          </p:nvCxnSpPr>
+          <p:spPr>
+            <a:xfrm>
+              <a:off x="677118" y="-2"/>
+              <a:ext cx="7" cy="64324"/>
+            </a:xfrm>
+            <a:prstGeom prst="straightConnector1">
+              <a:avLst/>
+            </a:prstGeom>
+            <a:noFill/>
+            <a:ln cap="flat" cmpd="sng" w="9525">
+              <a:solidFill>
+                <a:srgbClr val="808080"/>
+              </a:solidFill>
+              <a:prstDash val="solid"/>
+              <a:miter lim="8000"/>
+              <a:headEnd len="sm" w="sm" type="none"/>
+              <a:tailEnd len="sm" w="sm" type="none"/>
+            </a:ln>
+          </p:spPr>
+        </p:cxnSp>
+        <p:cxnSp>
+          <p:nvCxnSpPr>
+            <p:cNvPr id="178" name="Google Shape;178;p7"/>
+            <p:cNvCxnSpPr/>
+            <p:nvPr/>
+          </p:nvCxnSpPr>
+          <p:spPr>
+            <a:xfrm>
+              <a:off x="1354241" y="-2"/>
+              <a:ext cx="7" cy="64324"/>
+            </a:xfrm>
+            <a:prstGeom prst="straightConnector1">
+              <a:avLst/>
+            </a:prstGeom>
+            <a:noFill/>
+            <a:ln cap="flat" cmpd="sng" w="9525">
+              <a:solidFill>
+                <a:srgbClr val="808080"/>
+              </a:solidFill>
+              <a:prstDash val="solid"/>
+              <a:miter lim="8000"/>
+              <a:headEnd len="sm" w="sm" type="none"/>
+              <a:tailEnd len="sm" w="sm" type="none"/>
+            </a:ln>
+          </p:spPr>
+        </p:cxnSp>
+        <p:cxnSp>
+          <p:nvCxnSpPr>
+            <p:cNvPr id="179" name="Google Shape;179;p7"/>
+            <p:cNvCxnSpPr/>
+            <p:nvPr/>
+          </p:nvCxnSpPr>
+          <p:spPr>
+            <a:xfrm>
+              <a:off x="2031360" y="-2"/>
+              <a:ext cx="7" cy="64324"/>
+            </a:xfrm>
+            <a:prstGeom prst="straightConnector1">
+              <a:avLst/>
+            </a:prstGeom>
+            <a:noFill/>
+            <a:ln cap="flat" cmpd="sng" w="9525">
+              <a:solidFill>
+                <a:srgbClr val="808080"/>
+              </a:solidFill>
+              <a:prstDash val="solid"/>
+              <a:miter lim="8000"/>
+              <a:headEnd len="sm" w="sm" type="none"/>
+              <a:tailEnd len="sm" w="sm" type="none"/>
+            </a:ln>
+          </p:spPr>
+        </p:cxnSp>
+        <p:cxnSp>
+          <p:nvCxnSpPr>
+            <p:cNvPr id="180" name="Google Shape;180;p7"/>
+            <p:cNvCxnSpPr/>
+            <p:nvPr/>
+          </p:nvCxnSpPr>
+          <p:spPr>
+            <a:xfrm>
+              <a:off x="2708479" y="-2"/>
+              <a:ext cx="7" cy="64324"/>
+            </a:xfrm>
+            <a:prstGeom prst="straightConnector1">
+              <a:avLst/>
+            </a:prstGeom>
+            <a:noFill/>
+            <a:ln cap="flat" cmpd="sng" w="9525">
+              <a:solidFill>
+                <a:srgbClr val="808080"/>
+              </a:solidFill>
+              <a:prstDash val="solid"/>
+              <a:miter lim="8000"/>
+              <a:headEnd len="sm" w="sm" type="none"/>
+              <a:tailEnd len="sm" w="sm" type="none"/>
+            </a:ln>
+          </p:spPr>
+        </p:cxnSp>
+        <p:cxnSp>
+          <p:nvCxnSpPr>
+            <p:cNvPr id="181" name="Google Shape;181;p7"/>
+            <p:cNvCxnSpPr/>
+            <p:nvPr/>
+          </p:nvCxnSpPr>
+          <p:spPr>
+            <a:xfrm>
+              <a:off x="3385598" y="-2"/>
+              <a:ext cx="7" cy="64324"/>
+            </a:xfrm>
+            <a:prstGeom prst="straightConnector1">
+              <a:avLst/>
+            </a:prstGeom>
+            <a:noFill/>
+            <a:ln cap="flat" cmpd="sng" w="9525">
+              <a:solidFill>
+                <a:srgbClr val="808080"/>
+              </a:solidFill>
+              <a:prstDash val="solid"/>
+              <a:miter lim="8000"/>
+              <a:headEnd len="sm" w="sm" type="none"/>
+              <a:tailEnd len="sm" w="sm" type="none"/>
+            </a:ln>
+          </p:spPr>
+        </p:cxnSp>
+        <p:cxnSp>
+          <p:nvCxnSpPr>
+            <p:cNvPr id="182" name="Google Shape;182;p7"/>
+            <p:cNvCxnSpPr/>
+            <p:nvPr/>
+          </p:nvCxnSpPr>
+          <p:spPr>
+            <a:xfrm>
+              <a:off x="4062717" y="-2"/>
+              <a:ext cx="7" cy="64324"/>
+            </a:xfrm>
+            <a:prstGeom prst="straightConnector1">
+              <a:avLst/>
+            </a:prstGeom>
+            <a:noFill/>
+            <a:ln cap="flat" cmpd="sng" w="9525">
+              <a:solidFill>
+                <a:srgbClr val="808080"/>
+              </a:solidFill>
+              <a:prstDash val="solid"/>
+              <a:miter lim="8000"/>
+              <a:headEnd len="sm" w="sm" type="none"/>
+              <a:tailEnd len="sm" w="sm" type="none"/>
+            </a:ln>
+          </p:spPr>
+        </p:cxnSp>
+        <p:cxnSp>
+          <p:nvCxnSpPr>
+            <p:cNvPr id="183" name="Google Shape;183;p7"/>
+            <p:cNvCxnSpPr/>
+            <p:nvPr/>
+          </p:nvCxnSpPr>
+          <p:spPr>
+            <a:xfrm>
+              <a:off x="4739836" y="-2"/>
+              <a:ext cx="7" cy="64324"/>
+            </a:xfrm>
+            <a:prstGeom prst="straightConnector1">
+              <a:avLst/>
+            </a:prstGeom>
+            <a:noFill/>
+            <a:ln cap="flat" cmpd="sng" w="9525">
+              <a:solidFill>
+                <a:srgbClr val="808080"/>
+              </a:solidFill>
+              <a:prstDash val="solid"/>
+              <a:miter lim="8000"/>
+              <a:headEnd len="sm" w="sm" type="none"/>
+              <a:tailEnd len="sm" w="sm" type="none"/>
+            </a:ln>
+          </p:spPr>
+        </p:cxnSp>
+        <p:cxnSp>
+          <p:nvCxnSpPr>
+            <p:cNvPr id="184" name="Google Shape;184;p7"/>
+            <p:cNvCxnSpPr/>
+            <p:nvPr/>
+          </p:nvCxnSpPr>
+          <p:spPr>
+            <a:xfrm>
+              <a:off x="5416955" y="-2"/>
+              <a:ext cx="7" cy="64324"/>
+            </a:xfrm>
+            <a:prstGeom prst="straightConnector1">
+              <a:avLst/>
+            </a:prstGeom>
+            <a:noFill/>
+            <a:ln cap="flat" cmpd="sng" w="9525">
+              <a:solidFill>
+                <a:srgbClr val="808080"/>
+              </a:solidFill>
+              <a:prstDash val="solid"/>
+              <a:miter lim="8000"/>
+              <a:headEnd len="sm" w="sm" type="none"/>
+              <a:tailEnd len="sm" w="sm" type="none"/>
+            </a:ln>
+          </p:spPr>
+        </p:cxnSp>
+        <p:cxnSp>
+          <p:nvCxnSpPr>
+            <p:cNvPr id="185" name="Google Shape;185;p7"/>
+            <p:cNvCxnSpPr/>
+            <p:nvPr/>
+          </p:nvCxnSpPr>
+          <p:spPr>
+            <a:xfrm>
+              <a:off x="6094077" y="-2"/>
+              <a:ext cx="7" cy="64324"/>
+            </a:xfrm>
+            <a:prstGeom prst="straightConnector1">
+              <a:avLst/>
+            </a:prstGeom>
+            <a:noFill/>
+            <a:ln cap="flat" cmpd="sng" w="9525">
+              <a:solidFill>
+                <a:srgbClr val="808080"/>
+              </a:solidFill>
+              <a:prstDash val="solid"/>
+              <a:miter lim="8000"/>
+              <a:headEnd len="sm" w="sm" type="none"/>
+              <a:tailEnd len="sm" w="sm" type="none"/>
+            </a:ln>
+          </p:spPr>
+        </p:cxnSp>
+        <p:cxnSp>
+          <p:nvCxnSpPr>
+            <p:cNvPr id="186" name="Google Shape;186;p7"/>
+            <p:cNvCxnSpPr/>
+            <p:nvPr/>
+          </p:nvCxnSpPr>
+          <p:spPr>
+            <a:xfrm>
+              <a:off x="6771195" y="-2"/>
+              <a:ext cx="7" cy="64324"/>
+            </a:xfrm>
+            <a:prstGeom prst="straightConnector1">
+              <a:avLst/>
+            </a:prstGeom>
+            <a:noFill/>
+            <a:ln cap="flat" cmpd="sng" w="9525">
+              <a:solidFill>
+                <a:srgbClr val="808080"/>
+              </a:solidFill>
+              <a:prstDash val="solid"/>
+              <a:miter lim="8000"/>
+              <a:headEnd len="sm" w="sm" type="none"/>
+              <a:tailEnd len="sm" w="sm" type="none"/>
+            </a:ln>
+          </p:spPr>
+        </p:cxnSp>
+        <p:cxnSp>
+          <p:nvCxnSpPr>
+            <p:cNvPr id="187" name="Google Shape;187;p7"/>
+            <p:cNvCxnSpPr/>
+            <p:nvPr/>
+          </p:nvCxnSpPr>
+          <p:spPr>
+            <a:xfrm>
+              <a:off x="7448315" y="-2"/>
+              <a:ext cx="7" cy="64324"/>
+            </a:xfrm>
+            <a:prstGeom prst="straightConnector1">
+              <a:avLst/>
+            </a:prstGeom>
+            <a:noFill/>
+            <a:ln cap="flat" cmpd="sng" w="9525">
+              <a:solidFill>
+                <a:srgbClr val="808080"/>
+              </a:solidFill>
+              <a:prstDash val="solid"/>
+              <a:miter lim="8000"/>
+              <a:headEnd len="sm" w="sm" type="none"/>
+              <a:tailEnd len="sm" w="sm" type="none"/>
+            </a:ln>
+          </p:spPr>
+        </p:cxnSp>
+        <p:cxnSp>
+          <p:nvCxnSpPr>
+            <p:cNvPr id="188" name="Google Shape;188;p7"/>
+            <p:cNvCxnSpPr/>
+            <p:nvPr/>
+          </p:nvCxnSpPr>
+          <p:spPr>
+            <a:xfrm>
+              <a:off x="8125435" y="-2"/>
+              <a:ext cx="7" cy="64324"/>
+            </a:xfrm>
+            <a:prstGeom prst="straightConnector1">
+              <a:avLst/>
+            </a:prstGeom>
+            <a:noFill/>
+            <a:ln cap="flat" cmpd="sng" w="9525">
+              <a:solidFill>
+                <a:srgbClr val="808080"/>
+              </a:solidFill>
+              <a:prstDash val="solid"/>
+              <a:miter lim="8000"/>
+              <a:headEnd len="sm" w="sm" type="none"/>
+              <a:tailEnd len="sm" w="sm" type="none"/>
+            </a:ln>
+          </p:spPr>
+        </p:cxnSp>
+        <p:cxnSp>
+          <p:nvCxnSpPr>
+            <p:cNvPr id="189" name="Google Shape;189;p7"/>
+            <p:cNvCxnSpPr/>
+            <p:nvPr/>
+          </p:nvCxnSpPr>
+          <p:spPr>
+            <a:xfrm>
+              <a:off x="8802554" y="-2"/>
+              <a:ext cx="7" cy="64324"/>
+            </a:xfrm>
+            <a:prstGeom prst="straightConnector1">
+              <a:avLst/>
+            </a:prstGeom>
+            <a:noFill/>
+            <a:ln cap="flat" cmpd="sng" w="9525">
+              <a:solidFill>
+                <a:srgbClr val="808080"/>
+              </a:solidFill>
+              <a:prstDash val="solid"/>
+              <a:miter lim="8000"/>
+              <a:headEnd len="sm" w="sm" type="none"/>
+              <a:tailEnd len="sm" w="sm" type="none"/>
+            </a:ln>
+          </p:spPr>
+        </p:cxnSp>
+        <p:cxnSp>
+          <p:nvCxnSpPr>
+            <p:cNvPr id="190" name="Google Shape;190;p7"/>
+            <p:cNvCxnSpPr/>
+            <p:nvPr/>
+          </p:nvCxnSpPr>
+          <p:spPr>
+            <a:xfrm>
+              <a:off x="9479673" y="-2"/>
+              <a:ext cx="7" cy="64324"/>
+            </a:xfrm>
+            <a:prstGeom prst="straightConnector1">
+              <a:avLst/>
+            </a:prstGeom>
+            <a:noFill/>
+            <a:ln cap="flat" cmpd="sng" w="9525">
+              <a:solidFill>
+                <a:srgbClr val="808080"/>
+              </a:solidFill>
+              <a:prstDash val="solid"/>
+              <a:miter lim="8000"/>
+              <a:headEnd len="sm" w="sm" type="none"/>
+              <a:tailEnd len="sm" w="sm" type="none"/>
+            </a:ln>
+          </p:spPr>
+        </p:cxnSp>
+        <p:cxnSp>
+          <p:nvCxnSpPr>
+            <p:cNvPr id="191" name="Google Shape;191;p7"/>
+            <p:cNvCxnSpPr/>
+            <p:nvPr/>
+          </p:nvCxnSpPr>
+          <p:spPr>
+            <a:xfrm>
+              <a:off x="10156792" y="-2"/>
+              <a:ext cx="7" cy="64324"/>
+            </a:xfrm>
+            <a:prstGeom prst="straightConnector1">
+              <a:avLst/>
+            </a:prstGeom>
+            <a:noFill/>
+            <a:ln cap="flat" cmpd="sng" w="9525">
+              <a:solidFill>
+                <a:srgbClr val="808080"/>
+              </a:solidFill>
+              <a:prstDash val="solid"/>
+              <a:miter lim="8000"/>
+              <a:headEnd len="sm" w="sm" type="none"/>
+              <a:tailEnd len="sm" w="sm" type="none"/>
+            </a:ln>
+          </p:spPr>
+        </p:cxnSp>
+        <p:cxnSp>
+          <p:nvCxnSpPr>
+            <p:cNvPr id="192" name="Google Shape;192;p7"/>
+            <p:cNvCxnSpPr/>
+            <p:nvPr/>
+          </p:nvCxnSpPr>
+          <p:spPr>
+            <a:xfrm>
+              <a:off x="10833914" y="-2"/>
+              <a:ext cx="7" cy="64324"/>
+            </a:xfrm>
+            <a:prstGeom prst="straightConnector1">
+              <a:avLst/>
+            </a:prstGeom>
+            <a:noFill/>
+            <a:ln cap="flat" cmpd="sng" w="9525">
+              <a:solidFill>
+                <a:srgbClr val="808080"/>
+              </a:solidFill>
+              <a:prstDash val="solid"/>
+              <a:miter lim="8000"/>
+              <a:headEnd len="sm" w="sm" type="none"/>
+              <a:tailEnd len="sm" w="sm" type="none"/>
+            </a:ln>
+          </p:spPr>
+        </p:cxnSp>
+        <p:cxnSp>
+          <p:nvCxnSpPr>
+            <p:cNvPr id="193" name="Google Shape;193;p7"/>
+            <p:cNvCxnSpPr/>
+            <p:nvPr/>
+          </p:nvCxnSpPr>
+          <p:spPr>
+            <a:xfrm>
+              <a:off x="11511034" y="-2"/>
+              <a:ext cx="7" cy="64324"/>
+            </a:xfrm>
+            <a:prstGeom prst="straightConnector1">
+              <a:avLst/>
+            </a:prstGeom>
+            <a:noFill/>
+            <a:ln cap="flat" cmpd="sng" w="9525">
+              <a:solidFill>
+                <a:srgbClr val="808080"/>
+              </a:solidFill>
+              <a:prstDash val="solid"/>
+              <a:miter lim="8000"/>
+              <a:headEnd len="sm" w="sm" type="none"/>
+              <a:tailEnd len="sm" w="sm" type="none"/>
+            </a:ln>
+          </p:spPr>
+        </p:cxnSp>
+        <p:cxnSp>
+          <p:nvCxnSpPr>
+            <p:cNvPr id="194" name="Google Shape;194;p7"/>
+            <p:cNvCxnSpPr/>
+            <p:nvPr/>
+          </p:nvCxnSpPr>
+          <p:spPr>
+            <a:xfrm>
+              <a:off x="12188160" y="-2"/>
+              <a:ext cx="7" cy="64324"/>
+            </a:xfrm>
+            <a:prstGeom prst="straightConnector1">
+              <a:avLst/>
+            </a:prstGeom>
+            <a:noFill/>
+            <a:ln cap="flat" cmpd="sng" w="9525">
+              <a:solidFill>
+                <a:srgbClr val="808080"/>
+              </a:solidFill>
+              <a:prstDash val="solid"/>
+              <a:miter lim="8000"/>
+              <a:headEnd len="sm" w="sm" type="none"/>
+              <a:tailEnd len="sm" w="sm" type="none"/>
+            </a:ln>
+          </p:spPr>
+        </p:cxnSp>
+      </p:grpSp>
       <p:sp>
         <p:nvSpPr>
-          <p:cNvPr id="205" name="Google Shape;205;p8"/>
+          <p:cNvPr id="195" name="Google Shape;195;p7"/>
           <p:cNvSpPr txBox="1"/>
           <p:nvPr>
             <p:ph type="title"/>
@@ -4483,12 +4796,12 @@
       </p:sp>
       <p:pic>
         <p:nvPicPr>
-          <p:cNvPr id="206" name="Google Shape;206;p8"/>
+          <p:cNvPr id="196" name="Google Shape;196;p7"/>
           <p:cNvPicPr preferRelativeResize="0"/>
           <p:nvPr/>
         </p:nvPicPr>
         <p:blipFill rotWithShape="1">
-          <a:blip r:embed="rId4">
+          <a:blip r:embed="rId2">
             <a:alphaModFix/>
           </a:blip>
           <a:srcRect b="0" l="0" r="0" t="0"/>
@@ -4510,12 +4823,192 @@
       </p:pic>
       <p:pic>
         <p:nvPicPr>
-          <p:cNvPr descr=" " id="207" name="Google Shape;207;p8"/>
+          <p:cNvPr descr=" " id="197" name="Google Shape;197;p7"/>
           <p:cNvPicPr preferRelativeResize="0"/>
           <p:nvPr/>
         </p:nvPicPr>
         <p:blipFill rotWithShape="1">
-          <a:blip r:embed="rId5">
+          <a:blip r:embed="rId3">
+            <a:alphaModFix/>
+          </a:blip>
+          <a:srcRect b="86725" l="0" r="72339" t="0"/>
+          <a:stretch/>
+        </p:blipFill>
+        <p:spPr>
+          <a:xfrm flipH="1">
+            <a:off x="8819540" y="0"/>
+            <a:ext cx="3372437" cy="910269"/>
+          </a:xfrm>
+          <a:prstGeom prst="rect">
+            <a:avLst/>
+          </a:prstGeom>
+          <a:noFill/>
+          <a:ln>
+            <a:noFill/>
+          </a:ln>
+        </p:spPr>
+      </p:pic>
+      <p:sp>
+        <p:nvSpPr>
+          <p:cNvPr id="198" name="Google Shape;198;p7"/>
+          <p:cNvSpPr/>
+          <p:nvPr/>
+        </p:nvSpPr>
+        <p:spPr>
+          <a:xfrm>
+            <a:off x="8613058" y="322621"/>
+            <a:ext cx="1407652" cy="587648"/>
+          </a:xfrm>
+          <a:prstGeom prst="rect">
+            <a:avLst/>
+          </a:prstGeom>
+          <a:solidFill>
+            <a:srgbClr val="000000"/>
+          </a:solidFill>
+          <a:ln>
+            <a:noFill/>
+          </a:ln>
+        </p:spPr>
+        <p:txBody>
+          <a:bodyPr anchorCtr="0" anchor="ctr" bIns="45700" lIns="91425" spcFirstLastPara="1" rIns="91425" wrap="square" tIns="45700">
+            <a:noAutofit/>
+          </a:bodyPr>
+          <a:lstStyle/>
+          <a:p>
+            <a:pPr indent="0" lvl="0" marL="0" marR="0" rtl="0" algn="ctr">
+              <a:spcBef>
+                <a:spcPts val="0"/>
+              </a:spcBef>
+              <a:spcAft>
+                <a:spcPts val="0"/>
+              </a:spcAft>
+              <a:buNone/>
+            </a:pPr>
+            <a:r>
+              <a:t/>
+            </a:r>
+            <a:endParaRPr sz="1800">
+              <a:solidFill>
+                <a:schemeClr val="lt1"/>
+              </a:solidFill>
+              <a:latin typeface="Arial"/>
+              <a:ea typeface="Arial"/>
+              <a:cs typeface="Arial"/>
+              <a:sym typeface="Arial"/>
+            </a:endParaRPr>
+          </a:p>
+        </p:txBody>
+      </p:sp>
+      <p:sp>
+        <p:nvSpPr>
+          <p:cNvPr id="199" name="Google Shape;199;p7"/>
+          <p:cNvSpPr/>
+          <p:nvPr/>
+        </p:nvSpPr>
+        <p:spPr>
+          <a:xfrm>
+            <a:off x="10858521" y="0"/>
+            <a:ext cx="1049981" cy="261340"/>
+          </a:xfrm>
+          <a:prstGeom prst="rect">
+            <a:avLst/>
+          </a:prstGeom>
+          <a:solidFill>
+            <a:srgbClr val="000000"/>
+          </a:solidFill>
+          <a:ln>
+            <a:noFill/>
+          </a:ln>
+        </p:spPr>
+        <p:txBody>
+          <a:bodyPr anchorCtr="0" anchor="ctr" bIns="45700" lIns="91425" spcFirstLastPara="1" rIns="91425" wrap="square" tIns="45700">
+            <a:noAutofit/>
+          </a:bodyPr>
+          <a:lstStyle/>
+          <a:p>
+            <a:pPr indent="0" lvl="0" marL="0" marR="0" rtl="0" algn="ctr">
+              <a:spcBef>
+                <a:spcPts val="0"/>
+              </a:spcBef>
+              <a:spcAft>
+                <a:spcPts val="0"/>
+              </a:spcAft>
+              <a:buNone/>
+            </a:pPr>
+            <a:r>
+              <a:t/>
+            </a:r>
+            <a:endParaRPr sz="1800">
+              <a:solidFill>
+                <a:schemeClr val="lt1"/>
+              </a:solidFill>
+              <a:latin typeface="Arial"/>
+              <a:ea typeface="Arial"/>
+              <a:cs typeface="Arial"/>
+              <a:sym typeface="Arial"/>
+            </a:endParaRPr>
+          </a:p>
+        </p:txBody>
+      </p:sp>
+      <p:sp>
+        <p:nvSpPr>
+          <p:cNvPr id="200" name="Google Shape;200;p7"/>
+          <p:cNvSpPr/>
+          <p:nvPr/>
+        </p:nvSpPr>
+        <p:spPr>
+          <a:xfrm>
+            <a:off x="10760947" y="616445"/>
+            <a:ext cx="582556" cy="338650"/>
+          </a:xfrm>
+          <a:prstGeom prst="rect">
+            <a:avLst/>
+          </a:prstGeom>
+          <a:solidFill>
+            <a:srgbClr val="000000"/>
+          </a:solidFill>
+          <a:ln>
+            <a:noFill/>
+          </a:ln>
+        </p:spPr>
+        <p:txBody>
+          <a:bodyPr anchorCtr="0" anchor="ctr" bIns="45700" lIns="91425" spcFirstLastPara="1" rIns="91425" wrap="square" tIns="45700">
+            <a:noAutofit/>
+          </a:bodyPr>
+          <a:lstStyle/>
+          <a:p>
+            <a:pPr indent="0" lvl="0" marL="0" marR="0" rtl="0" algn="ctr">
+              <a:spcBef>
+                <a:spcPts val="0"/>
+              </a:spcBef>
+              <a:spcAft>
+                <a:spcPts val="0"/>
+              </a:spcAft>
+              <a:buNone/>
+            </a:pPr>
+            <a:r>
+              <a:t/>
+            </a:r>
+            <a:endParaRPr sz="1800">
+              <a:solidFill>
+                <a:schemeClr val="lt1"/>
+              </a:solidFill>
+              <a:latin typeface="Arial"/>
+              <a:ea typeface="Arial"/>
+              <a:cs typeface="Arial"/>
+              <a:sym typeface="Arial"/>
+            </a:endParaRPr>
+          </a:p>
+        </p:txBody>
+      </p:sp>
+      <p:pic>
+        <p:nvPicPr>
+          <p:cNvPr descr=" " id="201" name="Google Shape;201;p7"/>
+          <p:cNvPicPr preferRelativeResize="0"/>
+          <p:nvPr/>
+        </p:nvPicPr>
+        <p:blipFill rotWithShape="1">
+          <a:blip r:embed="rId4">
             <a:alphaModFix/>
           </a:blip>
           <a:srcRect b="0" l="0" r="0" t="0"/>
@@ -5408,6 +5901,799 @@
 </p:sldLayout>
 </file>
 
+<file path=ppt/slideLayouts/slideLayout9.xml><?xml version="1.0" encoding="utf-8"?>
+<p:sldLayout xmlns:a="http://schemas.openxmlformats.org/drawingml/2006/main" xmlns:r="http://schemas.openxmlformats.org/officeDocument/2006/relationships" xmlns:mc="http://schemas.openxmlformats.org/markup-compatibility/2006" xmlns:mv="urn:schemas-microsoft-com:mac:vml" xmlns:p="http://schemas.openxmlformats.org/presentationml/2006/main" xmlns:c="http://schemas.openxmlformats.org/drawingml/2006/chart" xmlns:dgm="http://schemas.openxmlformats.org/drawingml/2006/diagram" xmlns:o="urn:schemas-microsoft-com:office:office" xmlns:v="urn:schemas-microsoft-com:vml" xmlns:pvml="urn:schemas-microsoft-com:office:powerpoint" xmlns:com="http://schemas.openxmlformats.org/drawingml/2006/compatibility" xmlns:p14="http://schemas.microsoft.com/office/powerpoint/2010/main" xmlns:p15="http://schemas.microsoft.com/office/powerpoint/2012/main" xmlns:ahyp="http://schemas.microsoft.com/office/drawing/2018/hyperlinkcolor" matchingName="14_Титульный слайд">
+  <p:cSld name="14_Титульный слайд">
+    <p:bg>
+      <p:bgPr>
+        <a:solidFill>
+          <a:schemeClr val="dk1"/>
+        </a:solidFill>
+      </p:bgPr>
+    </p:bg>
+    <p:spTree>
+      <p:nvGrpSpPr>
+        <p:cNvPr id="234" name="Shape 234"/>
+        <p:cNvGrpSpPr/>
+        <p:nvPr/>
+      </p:nvGrpSpPr>
+      <p:grpSpPr>
+        <a:xfrm>
+          <a:off x="0" y="0"/>
+          <a:ext cx="0" cy="0"/>
+          <a:chOff x="0" y="0"/>
+          <a:chExt cx="0" cy="0"/>
+        </a:xfrm>
+      </p:grpSpPr>
+      <p:pic>
+        <p:nvPicPr>
+          <p:cNvPr descr=" " id="235" name="Google Shape;235;p10"/>
+          <p:cNvPicPr preferRelativeResize="0"/>
+          <p:nvPr/>
+        </p:nvPicPr>
+        <p:blipFill rotWithShape="1">
+          <a:blip r:embed="rId2">
+            <a:alphaModFix/>
+          </a:blip>
+          <a:srcRect b="0" l="0" r="0" t="0"/>
+          <a:stretch/>
+        </p:blipFill>
+        <p:spPr>
+          <a:xfrm>
+            <a:off x="6096000" y="5844358"/>
+            <a:ext cx="6096000" cy="1013642"/>
+          </a:xfrm>
+          <a:prstGeom prst="rect">
+            <a:avLst/>
+          </a:prstGeom>
+          <a:noFill/>
+          <a:ln>
+            <a:noFill/>
+          </a:ln>
+        </p:spPr>
+      </p:pic>
+      <p:grpSp>
+        <p:nvGrpSpPr>
+          <p:cNvPr id="236" name="Google Shape;236;p10"/>
+          <p:cNvGrpSpPr/>
+          <p:nvPr/>
+        </p:nvGrpSpPr>
+        <p:grpSpPr>
+          <a:xfrm>
+            <a:off x="224842" y="-74145"/>
+            <a:ext cx="12188171" cy="64326"/>
+            <a:chOff x="-2" y="-2"/>
+            <a:chExt cx="12188169" cy="64324"/>
+          </a:xfrm>
+        </p:grpSpPr>
+        <p:cxnSp>
+          <p:nvCxnSpPr>
+            <p:cNvPr id="237" name="Google Shape;237;p10"/>
+            <p:cNvCxnSpPr/>
+            <p:nvPr/>
+          </p:nvCxnSpPr>
+          <p:spPr>
+            <a:xfrm flipH="1">
+              <a:off x="-2" y="-2"/>
+              <a:ext cx="7" cy="64324"/>
+            </a:xfrm>
+            <a:prstGeom prst="straightConnector1">
+              <a:avLst/>
+            </a:prstGeom>
+            <a:noFill/>
+            <a:ln cap="flat" cmpd="sng" w="9525">
+              <a:solidFill>
+                <a:srgbClr val="808080"/>
+              </a:solidFill>
+              <a:prstDash val="solid"/>
+              <a:miter lim="8000"/>
+              <a:headEnd len="sm" w="sm" type="none"/>
+              <a:tailEnd len="sm" w="sm" type="none"/>
+            </a:ln>
+          </p:spPr>
+        </p:cxnSp>
+        <p:cxnSp>
+          <p:nvCxnSpPr>
+            <p:cNvPr id="238" name="Google Shape;238;p10"/>
+            <p:cNvCxnSpPr/>
+            <p:nvPr/>
+          </p:nvCxnSpPr>
+          <p:spPr>
+            <a:xfrm>
+              <a:off x="677118" y="-2"/>
+              <a:ext cx="7" cy="64324"/>
+            </a:xfrm>
+            <a:prstGeom prst="straightConnector1">
+              <a:avLst/>
+            </a:prstGeom>
+            <a:noFill/>
+            <a:ln cap="flat" cmpd="sng" w="9525">
+              <a:solidFill>
+                <a:srgbClr val="808080"/>
+              </a:solidFill>
+              <a:prstDash val="solid"/>
+              <a:miter lim="8000"/>
+              <a:headEnd len="sm" w="sm" type="none"/>
+              <a:tailEnd len="sm" w="sm" type="none"/>
+            </a:ln>
+          </p:spPr>
+        </p:cxnSp>
+        <p:cxnSp>
+          <p:nvCxnSpPr>
+            <p:cNvPr id="239" name="Google Shape;239;p10"/>
+            <p:cNvCxnSpPr/>
+            <p:nvPr/>
+          </p:nvCxnSpPr>
+          <p:spPr>
+            <a:xfrm>
+              <a:off x="1354241" y="-2"/>
+              <a:ext cx="7" cy="64324"/>
+            </a:xfrm>
+            <a:prstGeom prst="straightConnector1">
+              <a:avLst/>
+            </a:prstGeom>
+            <a:noFill/>
+            <a:ln cap="flat" cmpd="sng" w="9525">
+              <a:solidFill>
+                <a:srgbClr val="808080"/>
+              </a:solidFill>
+              <a:prstDash val="solid"/>
+              <a:miter lim="8000"/>
+              <a:headEnd len="sm" w="sm" type="none"/>
+              <a:tailEnd len="sm" w="sm" type="none"/>
+            </a:ln>
+          </p:spPr>
+        </p:cxnSp>
+        <p:cxnSp>
+          <p:nvCxnSpPr>
+            <p:cNvPr id="240" name="Google Shape;240;p10"/>
+            <p:cNvCxnSpPr/>
+            <p:nvPr/>
+          </p:nvCxnSpPr>
+          <p:spPr>
+            <a:xfrm>
+              <a:off x="2031360" y="-2"/>
+              <a:ext cx="7" cy="64324"/>
+            </a:xfrm>
+            <a:prstGeom prst="straightConnector1">
+              <a:avLst/>
+            </a:prstGeom>
+            <a:noFill/>
+            <a:ln cap="flat" cmpd="sng" w="9525">
+              <a:solidFill>
+                <a:srgbClr val="808080"/>
+              </a:solidFill>
+              <a:prstDash val="solid"/>
+              <a:miter lim="8000"/>
+              <a:headEnd len="sm" w="sm" type="none"/>
+              <a:tailEnd len="sm" w="sm" type="none"/>
+            </a:ln>
+          </p:spPr>
+        </p:cxnSp>
+        <p:cxnSp>
+          <p:nvCxnSpPr>
+            <p:cNvPr id="241" name="Google Shape;241;p10"/>
+            <p:cNvCxnSpPr/>
+            <p:nvPr/>
+          </p:nvCxnSpPr>
+          <p:spPr>
+            <a:xfrm>
+              <a:off x="2708479" y="-2"/>
+              <a:ext cx="7" cy="64324"/>
+            </a:xfrm>
+            <a:prstGeom prst="straightConnector1">
+              <a:avLst/>
+            </a:prstGeom>
+            <a:noFill/>
+            <a:ln cap="flat" cmpd="sng" w="9525">
+              <a:solidFill>
+                <a:srgbClr val="808080"/>
+              </a:solidFill>
+              <a:prstDash val="solid"/>
+              <a:miter lim="8000"/>
+              <a:headEnd len="sm" w="sm" type="none"/>
+              <a:tailEnd len="sm" w="sm" type="none"/>
+            </a:ln>
+          </p:spPr>
+        </p:cxnSp>
+        <p:cxnSp>
+          <p:nvCxnSpPr>
+            <p:cNvPr id="242" name="Google Shape;242;p10"/>
+            <p:cNvCxnSpPr/>
+            <p:nvPr/>
+          </p:nvCxnSpPr>
+          <p:spPr>
+            <a:xfrm>
+              <a:off x="3385598" y="-2"/>
+              <a:ext cx="7" cy="64324"/>
+            </a:xfrm>
+            <a:prstGeom prst="straightConnector1">
+              <a:avLst/>
+            </a:prstGeom>
+            <a:noFill/>
+            <a:ln cap="flat" cmpd="sng" w="9525">
+              <a:solidFill>
+                <a:srgbClr val="808080"/>
+              </a:solidFill>
+              <a:prstDash val="solid"/>
+              <a:miter lim="8000"/>
+              <a:headEnd len="sm" w="sm" type="none"/>
+              <a:tailEnd len="sm" w="sm" type="none"/>
+            </a:ln>
+          </p:spPr>
+        </p:cxnSp>
+        <p:cxnSp>
+          <p:nvCxnSpPr>
+            <p:cNvPr id="243" name="Google Shape;243;p10"/>
+            <p:cNvCxnSpPr/>
+            <p:nvPr/>
+          </p:nvCxnSpPr>
+          <p:spPr>
+            <a:xfrm>
+              <a:off x="4062717" y="-2"/>
+              <a:ext cx="7" cy="64324"/>
+            </a:xfrm>
+            <a:prstGeom prst="straightConnector1">
+              <a:avLst/>
+            </a:prstGeom>
+            <a:noFill/>
+            <a:ln cap="flat" cmpd="sng" w="9525">
+              <a:solidFill>
+                <a:srgbClr val="808080"/>
+              </a:solidFill>
+              <a:prstDash val="solid"/>
+              <a:miter lim="8000"/>
+              <a:headEnd len="sm" w="sm" type="none"/>
+              <a:tailEnd len="sm" w="sm" type="none"/>
+            </a:ln>
+          </p:spPr>
+        </p:cxnSp>
+        <p:cxnSp>
+          <p:nvCxnSpPr>
+            <p:cNvPr id="244" name="Google Shape;244;p10"/>
+            <p:cNvCxnSpPr/>
+            <p:nvPr/>
+          </p:nvCxnSpPr>
+          <p:spPr>
+            <a:xfrm>
+              <a:off x="4739836" y="-2"/>
+              <a:ext cx="7" cy="64324"/>
+            </a:xfrm>
+            <a:prstGeom prst="straightConnector1">
+              <a:avLst/>
+            </a:prstGeom>
+            <a:noFill/>
+            <a:ln cap="flat" cmpd="sng" w="9525">
+              <a:solidFill>
+                <a:srgbClr val="808080"/>
+              </a:solidFill>
+              <a:prstDash val="solid"/>
+              <a:miter lim="8000"/>
+              <a:headEnd len="sm" w="sm" type="none"/>
+              <a:tailEnd len="sm" w="sm" type="none"/>
+            </a:ln>
+          </p:spPr>
+        </p:cxnSp>
+        <p:cxnSp>
+          <p:nvCxnSpPr>
+            <p:cNvPr id="245" name="Google Shape;245;p10"/>
+            <p:cNvCxnSpPr/>
+            <p:nvPr/>
+          </p:nvCxnSpPr>
+          <p:spPr>
+            <a:xfrm>
+              <a:off x="5416955" y="-2"/>
+              <a:ext cx="7" cy="64324"/>
+            </a:xfrm>
+            <a:prstGeom prst="straightConnector1">
+              <a:avLst/>
+            </a:prstGeom>
+            <a:noFill/>
+            <a:ln cap="flat" cmpd="sng" w="9525">
+              <a:solidFill>
+                <a:srgbClr val="808080"/>
+              </a:solidFill>
+              <a:prstDash val="solid"/>
+              <a:miter lim="8000"/>
+              <a:headEnd len="sm" w="sm" type="none"/>
+              <a:tailEnd len="sm" w="sm" type="none"/>
+            </a:ln>
+          </p:spPr>
+        </p:cxnSp>
+        <p:cxnSp>
+          <p:nvCxnSpPr>
+            <p:cNvPr id="246" name="Google Shape;246;p10"/>
+            <p:cNvCxnSpPr/>
+            <p:nvPr/>
+          </p:nvCxnSpPr>
+          <p:spPr>
+            <a:xfrm>
+              <a:off x="6094077" y="-2"/>
+              <a:ext cx="7" cy="64324"/>
+            </a:xfrm>
+            <a:prstGeom prst="straightConnector1">
+              <a:avLst/>
+            </a:prstGeom>
+            <a:noFill/>
+            <a:ln cap="flat" cmpd="sng" w="9525">
+              <a:solidFill>
+                <a:srgbClr val="808080"/>
+              </a:solidFill>
+              <a:prstDash val="solid"/>
+              <a:miter lim="8000"/>
+              <a:headEnd len="sm" w="sm" type="none"/>
+              <a:tailEnd len="sm" w="sm" type="none"/>
+            </a:ln>
+          </p:spPr>
+        </p:cxnSp>
+        <p:cxnSp>
+          <p:nvCxnSpPr>
+            <p:cNvPr id="247" name="Google Shape;247;p10"/>
+            <p:cNvCxnSpPr/>
+            <p:nvPr/>
+          </p:nvCxnSpPr>
+          <p:spPr>
+            <a:xfrm>
+              <a:off x="6771195" y="-2"/>
+              <a:ext cx="7" cy="64324"/>
+            </a:xfrm>
+            <a:prstGeom prst="straightConnector1">
+              <a:avLst/>
+            </a:prstGeom>
+            <a:noFill/>
+            <a:ln cap="flat" cmpd="sng" w="9525">
+              <a:solidFill>
+                <a:srgbClr val="808080"/>
+              </a:solidFill>
+              <a:prstDash val="solid"/>
+              <a:miter lim="8000"/>
+              <a:headEnd len="sm" w="sm" type="none"/>
+              <a:tailEnd len="sm" w="sm" type="none"/>
+            </a:ln>
+          </p:spPr>
+        </p:cxnSp>
+        <p:cxnSp>
+          <p:nvCxnSpPr>
+            <p:cNvPr id="248" name="Google Shape;248;p10"/>
+            <p:cNvCxnSpPr/>
+            <p:nvPr/>
+          </p:nvCxnSpPr>
+          <p:spPr>
+            <a:xfrm>
+              <a:off x="7448315" y="-2"/>
+              <a:ext cx="7" cy="64324"/>
+            </a:xfrm>
+            <a:prstGeom prst="straightConnector1">
+              <a:avLst/>
+            </a:prstGeom>
+            <a:noFill/>
+            <a:ln cap="flat" cmpd="sng" w="9525">
+              <a:solidFill>
+                <a:srgbClr val="808080"/>
+              </a:solidFill>
+              <a:prstDash val="solid"/>
+              <a:miter lim="8000"/>
+              <a:headEnd len="sm" w="sm" type="none"/>
+              <a:tailEnd len="sm" w="sm" type="none"/>
+            </a:ln>
+          </p:spPr>
+        </p:cxnSp>
+        <p:cxnSp>
+          <p:nvCxnSpPr>
+            <p:cNvPr id="249" name="Google Shape;249;p10"/>
+            <p:cNvCxnSpPr/>
+            <p:nvPr/>
+          </p:nvCxnSpPr>
+          <p:spPr>
+            <a:xfrm>
+              <a:off x="8125435" y="-2"/>
+              <a:ext cx="7" cy="64324"/>
+            </a:xfrm>
+            <a:prstGeom prst="straightConnector1">
+              <a:avLst/>
+            </a:prstGeom>
+            <a:noFill/>
+            <a:ln cap="flat" cmpd="sng" w="9525">
+              <a:solidFill>
+                <a:srgbClr val="808080"/>
+              </a:solidFill>
+              <a:prstDash val="solid"/>
+              <a:miter lim="8000"/>
+              <a:headEnd len="sm" w="sm" type="none"/>
+              <a:tailEnd len="sm" w="sm" type="none"/>
+            </a:ln>
+          </p:spPr>
+        </p:cxnSp>
+        <p:cxnSp>
+          <p:nvCxnSpPr>
+            <p:cNvPr id="250" name="Google Shape;250;p10"/>
+            <p:cNvCxnSpPr/>
+            <p:nvPr/>
+          </p:nvCxnSpPr>
+          <p:spPr>
+            <a:xfrm>
+              <a:off x="8802554" y="-2"/>
+              <a:ext cx="7" cy="64324"/>
+            </a:xfrm>
+            <a:prstGeom prst="straightConnector1">
+              <a:avLst/>
+            </a:prstGeom>
+            <a:noFill/>
+            <a:ln cap="flat" cmpd="sng" w="9525">
+              <a:solidFill>
+                <a:srgbClr val="808080"/>
+              </a:solidFill>
+              <a:prstDash val="solid"/>
+              <a:miter lim="8000"/>
+              <a:headEnd len="sm" w="sm" type="none"/>
+              <a:tailEnd len="sm" w="sm" type="none"/>
+            </a:ln>
+          </p:spPr>
+        </p:cxnSp>
+        <p:cxnSp>
+          <p:nvCxnSpPr>
+            <p:cNvPr id="251" name="Google Shape;251;p10"/>
+            <p:cNvCxnSpPr/>
+            <p:nvPr/>
+          </p:nvCxnSpPr>
+          <p:spPr>
+            <a:xfrm>
+              <a:off x="9479673" y="-2"/>
+              <a:ext cx="7" cy="64324"/>
+            </a:xfrm>
+            <a:prstGeom prst="straightConnector1">
+              <a:avLst/>
+            </a:prstGeom>
+            <a:noFill/>
+            <a:ln cap="flat" cmpd="sng" w="9525">
+              <a:solidFill>
+                <a:srgbClr val="808080"/>
+              </a:solidFill>
+              <a:prstDash val="solid"/>
+              <a:miter lim="8000"/>
+              <a:headEnd len="sm" w="sm" type="none"/>
+              <a:tailEnd len="sm" w="sm" type="none"/>
+            </a:ln>
+          </p:spPr>
+        </p:cxnSp>
+        <p:cxnSp>
+          <p:nvCxnSpPr>
+            <p:cNvPr id="252" name="Google Shape;252;p10"/>
+            <p:cNvCxnSpPr/>
+            <p:nvPr/>
+          </p:nvCxnSpPr>
+          <p:spPr>
+            <a:xfrm>
+              <a:off x="10156792" y="-2"/>
+              <a:ext cx="7" cy="64324"/>
+            </a:xfrm>
+            <a:prstGeom prst="straightConnector1">
+              <a:avLst/>
+            </a:prstGeom>
+            <a:noFill/>
+            <a:ln cap="flat" cmpd="sng" w="9525">
+              <a:solidFill>
+                <a:srgbClr val="808080"/>
+              </a:solidFill>
+              <a:prstDash val="solid"/>
+              <a:miter lim="8000"/>
+              <a:headEnd len="sm" w="sm" type="none"/>
+              <a:tailEnd len="sm" w="sm" type="none"/>
+            </a:ln>
+          </p:spPr>
+        </p:cxnSp>
+        <p:cxnSp>
+          <p:nvCxnSpPr>
+            <p:cNvPr id="253" name="Google Shape;253;p10"/>
+            <p:cNvCxnSpPr/>
+            <p:nvPr/>
+          </p:nvCxnSpPr>
+          <p:spPr>
+            <a:xfrm>
+              <a:off x="10833914" y="-2"/>
+              <a:ext cx="7" cy="64324"/>
+            </a:xfrm>
+            <a:prstGeom prst="straightConnector1">
+              <a:avLst/>
+            </a:prstGeom>
+            <a:noFill/>
+            <a:ln cap="flat" cmpd="sng" w="9525">
+              <a:solidFill>
+                <a:srgbClr val="808080"/>
+              </a:solidFill>
+              <a:prstDash val="solid"/>
+              <a:miter lim="8000"/>
+              <a:headEnd len="sm" w="sm" type="none"/>
+              <a:tailEnd len="sm" w="sm" type="none"/>
+            </a:ln>
+          </p:spPr>
+        </p:cxnSp>
+        <p:cxnSp>
+          <p:nvCxnSpPr>
+            <p:cNvPr id="254" name="Google Shape;254;p10"/>
+            <p:cNvCxnSpPr/>
+            <p:nvPr/>
+          </p:nvCxnSpPr>
+          <p:spPr>
+            <a:xfrm>
+              <a:off x="11511034" y="-2"/>
+              <a:ext cx="7" cy="64324"/>
+            </a:xfrm>
+            <a:prstGeom prst="straightConnector1">
+              <a:avLst/>
+            </a:prstGeom>
+            <a:noFill/>
+            <a:ln cap="flat" cmpd="sng" w="9525">
+              <a:solidFill>
+                <a:srgbClr val="808080"/>
+              </a:solidFill>
+              <a:prstDash val="solid"/>
+              <a:miter lim="8000"/>
+              <a:headEnd len="sm" w="sm" type="none"/>
+              <a:tailEnd len="sm" w="sm" type="none"/>
+            </a:ln>
+          </p:spPr>
+        </p:cxnSp>
+        <p:cxnSp>
+          <p:nvCxnSpPr>
+            <p:cNvPr id="255" name="Google Shape;255;p10"/>
+            <p:cNvCxnSpPr/>
+            <p:nvPr/>
+          </p:nvCxnSpPr>
+          <p:spPr>
+            <a:xfrm>
+              <a:off x="12188160" y="-2"/>
+              <a:ext cx="7" cy="64324"/>
+            </a:xfrm>
+            <a:prstGeom prst="straightConnector1">
+              <a:avLst/>
+            </a:prstGeom>
+            <a:noFill/>
+            <a:ln cap="flat" cmpd="sng" w="9525">
+              <a:solidFill>
+                <a:srgbClr val="808080"/>
+              </a:solidFill>
+              <a:prstDash val="solid"/>
+              <a:miter lim="8000"/>
+              <a:headEnd len="sm" w="sm" type="none"/>
+              <a:tailEnd len="sm" w="sm" type="none"/>
+            </a:ln>
+          </p:spPr>
+        </p:cxnSp>
+      </p:grpSp>
+      <p:sp>
+        <p:nvSpPr>
+          <p:cNvPr id="256" name="Google Shape;256;p10"/>
+          <p:cNvSpPr txBox="1"/>
+          <p:nvPr>
+            <p:ph type="title"/>
+          </p:nvPr>
+        </p:nvSpPr>
+        <p:spPr>
+          <a:xfrm>
+            <a:off x="429253" y="424691"/>
+            <a:ext cx="7827311" cy="1167572"/>
+          </a:xfrm>
+          <a:prstGeom prst="rect">
+            <a:avLst/>
+          </a:prstGeom>
+          <a:noFill/>
+          <a:ln>
+            <a:noFill/>
+          </a:ln>
+        </p:spPr>
+        <p:txBody>
+          <a:bodyPr anchorCtr="0" anchor="t" bIns="0" lIns="0" spcFirstLastPara="1" rIns="0" wrap="square" tIns="0">
+            <a:noAutofit/>
+          </a:bodyPr>
+          <a:lstStyle>
+            <a:lvl1pPr lvl="0" algn="l">
+              <a:lnSpc>
+                <a:spcPct val="90000"/>
+              </a:lnSpc>
+              <a:spcBef>
+                <a:spcPts val="0"/>
+              </a:spcBef>
+              <a:spcAft>
+                <a:spcPts val="0"/>
+              </a:spcAft>
+              <a:buClr>
+                <a:schemeClr val="lt1"/>
+              </a:buClr>
+              <a:buSzPts val="3600"/>
+              <a:buFont typeface="Play"/>
+              <a:buNone/>
+              <a:defRPr b="0" i="0" sz="3600">
+                <a:solidFill>
+                  <a:schemeClr val="lt1"/>
+                </a:solidFill>
+                <a:latin typeface="Play"/>
+                <a:ea typeface="Play"/>
+                <a:cs typeface="Play"/>
+                <a:sym typeface="Play"/>
+              </a:defRPr>
+            </a:lvl1pPr>
+            <a:lvl2pPr lvl="1">
+              <a:spcBef>
+                <a:spcPts val="0"/>
+              </a:spcBef>
+              <a:spcAft>
+                <a:spcPts val="0"/>
+              </a:spcAft>
+              <a:buSzPts val="1400"/>
+              <a:buNone/>
+              <a:defRPr/>
+            </a:lvl2pPr>
+            <a:lvl3pPr lvl="2">
+              <a:spcBef>
+                <a:spcPts val="0"/>
+              </a:spcBef>
+              <a:spcAft>
+                <a:spcPts val="0"/>
+              </a:spcAft>
+              <a:buSzPts val="1400"/>
+              <a:buNone/>
+              <a:defRPr/>
+            </a:lvl3pPr>
+            <a:lvl4pPr lvl="3">
+              <a:spcBef>
+                <a:spcPts val="0"/>
+              </a:spcBef>
+              <a:spcAft>
+                <a:spcPts val="0"/>
+              </a:spcAft>
+              <a:buSzPts val="1400"/>
+              <a:buNone/>
+              <a:defRPr/>
+            </a:lvl4pPr>
+            <a:lvl5pPr lvl="4">
+              <a:spcBef>
+                <a:spcPts val="0"/>
+              </a:spcBef>
+              <a:spcAft>
+                <a:spcPts val="0"/>
+              </a:spcAft>
+              <a:buSzPts val="1400"/>
+              <a:buNone/>
+              <a:defRPr/>
+            </a:lvl5pPr>
+            <a:lvl6pPr lvl="5">
+              <a:spcBef>
+                <a:spcPts val="0"/>
+              </a:spcBef>
+              <a:spcAft>
+                <a:spcPts val="0"/>
+              </a:spcAft>
+              <a:buSzPts val="1400"/>
+              <a:buNone/>
+              <a:defRPr/>
+            </a:lvl6pPr>
+            <a:lvl7pPr lvl="6">
+              <a:spcBef>
+                <a:spcPts val="0"/>
+              </a:spcBef>
+              <a:spcAft>
+                <a:spcPts val="0"/>
+              </a:spcAft>
+              <a:buSzPts val="1400"/>
+              <a:buNone/>
+              <a:defRPr/>
+            </a:lvl7pPr>
+            <a:lvl8pPr lvl="7">
+              <a:spcBef>
+                <a:spcPts val="0"/>
+              </a:spcBef>
+              <a:spcAft>
+                <a:spcPts val="0"/>
+              </a:spcAft>
+              <a:buSzPts val="1400"/>
+              <a:buNone/>
+              <a:defRPr/>
+            </a:lvl8pPr>
+            <a:lvl9pPr lvl="8">
+              <a:spcBef>
+                <a:spcPts val="0"/>
+              </a:spcBef>
+              <a:spcAft>
+                <a:spcPts val="0"/>
+              </a:spcAft>
+              <a:buSzPts val="1400"/>
+              <a:buNone/>
+              <a:defRPr/>
+            </a:lvl9pPr>
+          </a:lstStyle>
+          <a:p/>
+        </p:txBody>
+      </p:sp>
+      <p:pic>
+        <p:nvPicPr>
+          <p:cNvPr id="257" name="Google Shape;257;p10"/>
+          <p:cNvPicPr preferRelativeResize="0"/>
+          <p:nvPr/>
+        </p:nvPicPr>
+        <p:blipFill rotWithShape="1">
+          <a:blip r:embed="rId3">
+            <a:alphaModFix/>
+          </a:blip>
+          <a:srcRect b="0" l="0" r="0" t="0"/>
+          <a:stretch/>
+        </p:blipFill>
+        <p:spPr>
+          <a:xfrm>
+            <a:off x="398723" y="6160516"/>
+            <a:ext cx="1857481" cy="292671"/>
+          </a:xfrm>
+          <a:prstGeom prst="rect">
+            <a:avLst/>
+          </a:prstGeom>
+          <a:noFill/>
+          <a:ln>
+            <a:noFill/>
+          </a:ln>
+        </p:spPr>
+      </p:pic>
+      <p:pic>
+        <p:nvPicPr>
+          <p:cNvPr descr=" " id="258" name="Google Shape;258;p10"/>
+          <p:cNvPicPr preferRelativeResize="0"/>
+          <p:nvPr/>
+        </p:nvPicPr>
+        <p:blipFill rotWithShape="1">
+          <a:blip r:embed="rId4">
+            <a:alphaModFix/>
+          </a:blip>
+          <a:srcRect b="0" l="0" r="0" t="0"/>
+          <a:stretch/>
+        </p:blipFill>
+        <p:spPr>
+          <a:xfrm>
+            <a:off x="10866292" y="0"/>
+            <a:ext cx="1325708" cy="3723972"/>
+          </a:xfrm>
+          <a:prstGeom prst="rect">
+            <a:avLst/>
+          </a:prstGeom>
+          <a:noFill/>
+          <a:ln>
+            <a:noFill/>
+          </a:ln>
+        </p:spPr>
+      </p:pic>
+      <p:pic>
+        <p:nvPicPr>
+          <p:cNvPr descr=" " id="259" name="Google Shape;259;p10"/>
+          <p:cNvPicPr preferRelativeResize="0"/>
+          <p:nvPr/>
+        </p:nvPicPr>
+        <p:blipFill rotWithShape="1">
+          <a:blip r:embed="rId5">
+            <a:alphaModFix/>
+          </a:blip>
+          <a:srcRect b="0" l="0" r="0" t="0"/>
+          <a:stretch/>
+        </p:blipFill>
+        <p:spPr>
+          <a:xfrm>
+            <a:off x="11093496" y="6238282"/>
+            <a:ext cx="690517" cy="216000"/>
+          </a:xfrm>
+          <a:prstGeom prst="rect">
+            <a:avLst/>
+          </a:prstGeom>
+          <a:noFill/>
+          <a:ln>
+            <a:noFill/>
+          </a:ln>
+        </p:spPr>
+      </p:pic>
+    </p:spTree>
+  </p:cSld>
+  <p:clrMapOvr>
+    <a:masterClrMapping/>
+  </p:clrMapOvr>
+</p:sldLayout>
+</file>
+
 <file path=ppt/slideMasters/slideMaster1.xml><?xml version="1.0" encoding="utf-8"?>
 <p:sldMaster xmlns:a="http://schemas.openxmlformats.org/drawingml/2006/main" xmlns:r="http://schemas.openxmlformats.org/officeDocument/2006/relationships" xmlns:mc="http://schemas.openxmlformats.org/markup-compatibility/2006" xmlns:mv="urn:schemas-microsoft-com:mac:vml" xmlns:p="http://schemas.openxmlformats.org/presentationml/2006/main" xmlns:c="http://schemas.openxmlformats.org/drawingml/2006/chart" xmlns:dgm="http://schemas.openxmlformats.org/drawingml/2006/diagram" xmlns:o="urn:schemas-microsoft-com:office:office" xmlns:v="urn:schemas-microsoft-com:vml" xmlns:pvml="urn:schemas-microsoft-com:office:powerpoint" xmlns:com="http://schemas.openxmlformats.org/drawingml/2006/compatibility" xmlns:p14="http://schemas.microsoft.com/office/powerpoint/2010/main" xmlns:p15="http://schemas.microsoft.com/office/powerpoint/2012/main" xmlns:ahyp="http://schemas.microsoft.com/office/drawing/2018/hyperlinkcolor">
   <p:cSld>
@@ -7093,8 +8379,9 @@
     <p:sldLayoutId id="2147483648" r:id="rId2"/>
     <p:sldLayoutId id="2147483650" r:id="rId4"/>
     <p:sldLayoutId id="2147483652" r:id="rId6"/>
-    <p:sldLayoutId id="2147483654" r:id="rId8"/>
+    <p:sldLayoutId id="2147483653" r:id="rId7"/>
     <p:sldLayoutId id="2147483655" r:id="rId9"/>
+    <p:sldLayoutId id="2147483656" r:id="rId10"/>
   </p:sldLayoutIdLst>
   <p:hf dt="0" ftr="0" hdr="0" sldNum="0"/>
   <p:txStyles>
@@ -7882,7 +9169,7 @@
           </a:ln>
         </p:spPr>
         <p:txBody>
-          <a:bodyPr anchorCtr="0" anchor="t" bIns="0" lIns="0" spcFirstLastPara="1" rIns="0" wrap="square" tIns="0">
+          <a:bodyPr anchorCtr="0" anchor="t" bIns="0" lIns="0" spcFirstLastPara="1" rIns="0" wrap="square" tIns="0" vert="horz">
             <a:normAutofit/>
           </a:bodyPr>
           <a:lstStyle/>
@@ -7895,7 +9182,7 @@
                 <a:spcPts val="0"/>
               </a:spcBef>
               <a:spcAft>
-                <a:spcPts val="480"/>
+                <a:spcPts val="600"/>
               </a:spcAft>
               <a:buClr>
                 <a:schemeClr val="lt1"/>
@@ -7905,73 +9192,10 @@
               <a:buNone/>
             </a:pPr>
             <a:r>
-              <a:rPr sz="3200"/>
-              <a:t>Автоматизация поиска инструкций и ответов в поддержке</a:t>
+              <a:rPr sz="4000"/>
+              <a:t>Поиск инструкции занимает до 30 минут</a:t>
             </a:r>
             <a:endParaRPr sz="4800"/>
-          </a:p>
-        </p:txBody>
-      </p:sp>
-      <p:sp>
-        <p:nvSpPr>
-          <p:cNvPr id="383" name="BrandDeck Text 383"/>
-          <p:cNvSpPr txBox="1"/>
-          <p:nvPr/>
-        </p:nvSpPr>
-        <p:spPr>
-          <a:xfrm>
-            <a:off x="1510259" y="4682209"/>
-            <a:ext cx="2213844" cy="834283"/>
-          </a:xfrm>
-          <a:prstGeom prst="rect">
-            <a:avLst/>
-          </a:prstGeom>
-          <a:noFill/>
-          <a:ln>
-            <a:noFill/>
-          </a:ln>
-        </p:spPr>
-        <p:txBody>
-          <a:bodyPr anchorCtr="0" anchor="t" bIns="0" lIns="0" spcFirstLastPara="1" rIns="0" wrap="square" tIns="0">
-            <a:normAutofit/>
-          </a:bodyPr>
-          <a:lstStyle/>
-          <a:p>
-            <a:pPr indent="0" marL="0" marR="0" rtl="0" algn="l">
-              <a:lnSpc>
-                <a:spcPct val="115000"/>
-              </a:lnSpc>
-              <a:spcBef>
-                <a:spcPts val="0"/>
-              </a:spcBef>
-              <a:spcAft>
-                <a:spcPts val="179"/>
-              </a:spcAft>
-              <a:buClr>
-                <a:srgbClr val="AFB8C2"/>
-              </a:buClr>
-              <a:buSzPts val="1600"/>
-              <a:buFont typeface="Play"/>
-              <a:buNone/>
-            </a:pPr>
-            <a:r>
-              <a:rPr sz="1200" b="0">
-                <a:solidFill>
-                  <a:srgbClr val="AFB8C2"/>
-                </a:solidFill>
-                <a:latin typeface="Play"/>
-              </a:rPr>
-              <a:t>Инициатива по внедрению ИИ-помощника для снижения нагрузки на поддержку и ускорения поиска регламентов</a:t>
-            </a:r>
-            <a:endParaRPr b="0" i="0" sz="1600" u="none" cap="none" strike="noStrike">
-              <a:solidFill>
-                <a:srgbClr val="AFB8C2"/>
-              </a:solidFill>
-              <a:latin typeface="Play"/>
-              <a:ea typeface="Play"/>
-              <a:cs typeface="Play"/>
-              <a:sym typeface="Play"/>
-            </a:endParaRPr>
           </a:p>
         </p:txBody>
       </p:sp>
@@ -7995,7 +9219,71 @@
       <p:grpSpPr/>
       <p:sp>
         <p:nvSpPr>
-          <p:cNvPr id="547" name="BrandDeck Text 547"/>
+          <p:cNvPr id="679" name="Google Shape;679;p31"/>
+          <p:cNvSpPr/>
+          <p:nvPr/>
+        </p:nvSpPr>
+        <p:spPr>
+          <a:xfrm>
+            <a:off x="0" y="4748271"/>
+            <a:ext cx="12192000" cy="2109730"/>
+          </a:xfrm>
+          <a:prstGeom prst="rect">
+            <a:avLst/>
+          </a:prstGeom>
+          <a:gradFill>
+            <a:gsLst>
+              <a:gs pos="0">
+                <a:srgbClr val="0077FF">
+                  <a:alpha val="61961"/>
+                </a:srgbClr>
+              </a:gs>
+              <a:gs pos="99000">
+                <a:srgbClr val="00AEE8"/>
+              </a:gs>
+              <a:gs pos="100000">
+                <a:srgbClr val="00AEE8"/>
+              </a:gs>
+            </a:gsLst>
+            <a:lin ang="14400000" scaled="0"/>
+          </a:gradFill>
+          <a:ln>
+            <a:noFill/>
+          </a:ln>
+        </p:spPr>
+        <p:txBody>
+          <a:bodyPr anchorCtr="0" anchor="ctr" bIns="0" lIns="108000" spcFirstLastPara="1" rIns="91425" wrap="square" tIns="0">
+            <a:noAutofit/>
+          </a:bodyPr>
+          <a:lstStyle/>
+          <a:p>
+            <a:pPr indent="0" lvl="0" marL="0" marR="0" rtl="0" algn="l">
+              <a:spcBef>
+                <a:spcPts val="0"/>
+              </a:spcBef>
+              <a:spcAft>
+                <a:spcPts val="0"/>
+              </a:spcAft>
+              <a:buNone/>
+            </a:pPr>
+            <a:r>
+              <a:t/>
+            </a:r>
+            <a:endParaRPr sz="1100">
+              <a:solidFill>
+                <a:schemeClr val="lt1"/>
+              </a:solidFill>
+              <a:latin typeface="Play"/>
+              <a:ea typeface="Play"/>
+              <a:cs typeface="Play"/>
+              <a:sym typeface="Play"/>
+            </a:endParaRPr>
+          </a:p>
+        </p:txBody>
+      </p:sp>
+      <p:sp>
+        <p:nvSpPr>
+          <p:cNvPr id="680" name="BrandDeck Text 680"/>
           <p:cNvSpPr txBox="1"/>
           <p:nvPr>
             <p:ph type="title"/>
@@ -8003,8 +9291,8 @@
         </p:nvSpPr>
         <p:spPr>
           <a:xfrm>
-            <a:off x="429253" y="424691"/>
-            <a:ext cx="7827311" cy="626869"/>
+            <a:off x="427864" y="424691"/>
+            <a:ext cx="7827311" cy="1167572"/>
           </a:xfrm>
           <a:prstGeom prst="rect">
             <a:avLst/>
@@ -8015,7 +9303,7 @@
           </a:ln>
         </p:spPr>
         <p:txBody>
-          <a:bodyPr anchorCtr="0" anchor="t" bIns="0" lIns="0" spcFirstLastPara="1" rIns="0" wrap="square" tIns="0">
+          <a:bodyPr anchorCtr="0" anchor="t" bIns="0" lIns="0" spcFirstLastPara="1" rIns="0" wrap="square" tIns="0" vert="horz">
             <a:normAutofit/>
           </a:bodyPr>
           <a:lstStyle/>
@@ -8028,7 +9316,7 @@
                 <a:spcPts val="0"/>
               </a:spcBef>
               <a:spcAft>
-                <a:spcPts val="270"/>
+                <a:spcPts val="480"/>
               </a:spcAft>
               <a:buClr>
                 <a:schemeClr val="lt1"/>
@@ -8038,668 +9326,8 @@
               <a:buNone/>
             </a:pPr>
             <a:r>
-              <a:rPr sz="1800"/>
-              <a:t>Риск утечки данных исключен архитектурой, работающей только внутри контура компании</a:t>
-            </a:r>
-            <a:endParaRPr/>
-          </a:p>
-        </p:txBody>
-      </p:sp>
-      <p:grpSp>
-        <p:nvGrpSpPr>
-          <p:cNvPr id="2" name="BrandDeck Diagram hierarchy" descr="hierarchy: Внутренний контур Документы не покидают периметр безопасности; ИИ-помощник Работает только с внутренними регламентами; Сотрудники Получают ответы без передачи данных наружу"/>
-          <p:cNvGrpSpPr/>
-          <p:nvPr/>
-        </p:nvGrpSpPr>
-        <p:grpSpPr>
-          <a:xfrm>
-            <a:off x="5383513" y="2844337"/>
-            <a:ext cx="5917557" cy="3204551"/>
-            <a:chOff x="5383513" y="2844337"/>
-            <a:chExt cx="5917557" cy="3204551"/>
-          </a:xfrm>
-        </p:grpSpPr>
-        <p:sp>
-          <p:nvSpPr>
-            <p:cNvPr id="560" name="BrandDeck Diagram Root"/>
-            <p:cNvSpPr/>
-            <p:nvPr/>
-          </p:nvSpPr>
-          <p:spPr>
-            <a:xfrm>
-              <a:off x="7099604" y="2844337"/>
-              <a:ext cx="2485374" cy="711251"/>
-            </a:xfrm>
-            <a:prstGeom prst="roundRect">
-              <a:avLst>
-                <a:gd name="adj" fmla="val 18000"/>
-              </a:avLst>
-            </a:prstGeom>
-            <a:solidFill>
-              <a:srgbClr val="006DEB"/>
-            </a:solidFill>
-            <a:ln>
-              <a:noFill/>
-            </a:ln>
-          </p:spPr>
-          <p:txBody>
-            <a:bodyPr rtlCol="0" anchor="ctr" wrap="square" lIns="109728" tIns="36576" rIns="109728" bIns="36576">
-              <a:noAutofit/>
-            </a:bodyPr>
-            <a:lstStyle/>
-            <a:p>
-              <a:pPr algn="ctr">
-                <a:lnSpc>
-                  <a:spcPct val="110000"/>
-                </a:lnSpc>
-              </a:pPr>
-              <a:r>
-                <a:rPr sz="1600" b="1">
-                  <a:solidFill>
-                    <a:srgbClr val="FFFFFF"/>
-                  </a:solidFill>
-                  <a:latin typeface="Play"/>
-                </a:rPr>
-                <a:t>Внутренний контур</a:t>
-              </a:r>
-            </a:p>
-          </p:txBody>
-        </p:sp>
-        <p:cxnSp>
-          <p:nvCxnSpPr>
-            <p:cNvPr id="561" name="BrandDeck Diagram Link Root"/>
-            <p:cNvCxnSpPr/>
-            <p:nvPr/>
-          </p:nvCxnSpPr>
-          <p:spPr>
-            <a:xfrm>
-              <a:off x="8342292" y="3555589"/>
-              <a:ext cx="0" cy="248938"/>
-            </a:xfrm>
-            <a:prstGeom prst="line">
-              <a:avLst/>
-            </a:prstGeom>
-            <a:ln w="19050">
-              <a:solidFill>
-                <a:srgbClr val="004DA6"/>
-              </a:solidFill>
-            </a:ln>
-          </p:spPr>
-          <p:style>
-            <a:lnRef idx="2">
-              <a:schemeClr val="accent1"/>
-            </a:lnRef>
-            <a:fillRef idx="0">
-              <a:schemeClr val="accent1"/>
-            </a:fillRef>
-            <a:effectRef idx="1">
-              <a:schemeClr val="accent1"/>
-            </a:effectRef>
-            <a:fontRef idx="minor">
-              <a:schemeClr val="tx1"/>
-            </a:fontRef>
-          </p:style>
-        </p:cxnSp>
-        <p:cxnSp>
-          <p:nvCxnSpPr>
-            <p:cNvPr id="562" name="BrandDeck Diagram Link Bus"/>
-            <p:cNvCxnSpPr/>
-            <p:nvPr/>
-          </p:nvCxnSpPr>
-          <p:spPr>
-            <a:xfrm>
-              <a:off x="6330322" y="3804527"/>
-              <a:ext cx="4023939" cy="0"/>
-            </a:xfrm>
-            <a:prstGeom prst="line">
-              <a:avLst/>
-            </a:prstGeom>
-            <a:ln w="19050">
-              <a:solidFill>
-                <a:srgbClr val="004DA6"/>
-              </a:solidFill>
-            </a:ln>
-          </p:spPr>
-          <p:style>
-            <a:lnRef idx="2">
-              <a:schemeClr val="accent1"/>
-            </a:lnRef>
-            <a:fillRef idx="0">
-              <a:schemeClr val="accent1"/>
-            </a:fillRef>
-            <a:effectRef idx="1">
-              <a:schemeClr val="accent1"/>
-            </a:effectRef>
-            <a:fontRef idx="minor">
-              <a:schemeClr val="tx1"/>
-            </a:fontRef>
-          </p:style>
-        </p:cxnSp>
-        <p:cxnSp>
-          <p:nvCxnSpPr>
-            <p:cNvPr id="563" name="BrandDeck Diagram Link 1"/>
-            <p:cNvCxnSpPr/>
-            <p:nvPr/>
-          </p:nvCxnSpPr>
-          <p:spPr>
-            <a:xfrm>
-              <a:off x="6330322" y="3804527"/>
-              <a:ext cx="0" cy="248937"/>
-            </a:xfrm>
-            <a:prstGeom prst="line">
-              <a:avLst/>
-            </a:prstGeom>
-            <a:ln w="19050">
-              <a:solidFill>
-                <a:srgbClr val="004DA6"/>
-              </a:solidFill>
-            </a:ln>
-          </p:spPr>
-          <p:style>
-            <a:lnRef idx="2">
-              <a:schemeClr val="accent1"/>
-            </a:lnRef>
-            <a:fillRef idx="0">
-              <a:schemeClr val="accent1"/>
-            </a:fillRef>
-            <a:effectRef idx="1">
-              <a:schemeClr val="accent1"/>
-            </a:effectRef>
-            <a:fontRef idx="minor">
-              <a:schemeClr val="tx1"/>
-            </a:fontRef>
-          </p:style>
-        </p:cxnSp>
-        <p:sp>
-          <p:nvSpPr>
-            <p:cNvPr id="564" name="BrandDeck Diagram Card 1"/>
-            <p:cNvSpPr/>
-            <p:nvPr/>
-          </p:nvSpPr>
-          <p:spPr>
-            <a:xfrm>
-              <a:off x="5383513" y="4053464"/>
-              <a:ext cx="1893618" cy="1995424"/>
-            </a:xfrm>
-            <a:prstGeom prst="roundRect">
-              <a:avLst>
-                <a:gd name="adj" fmla="val 6000"/>
-              </a:avLst>
-            </a:prstGeom>
-            <a:solidFill>
-              <a:srgbClr val="1A1A1A"/>
-            </a:solidFill>
-            <a:ln>
-              <a:noFill/>
-            </a:ln>
-          </p:spPr>
-          <p:txBody>
-            <a:bodyPr rtlCol="0" anchor="ctr"/>
-            <a:lstStyle/>
-            <a:p>
-              <a:pPr algn="ctr"/>
-            </a:p>
-          </p:txBody>
-        </p:sp>
-        <p:sp>
-          <p:nvSpPr>
-            <p:cNvPr id="565" name="BrandDeck Diagram Marker 1"/>
-            <p:cNvSpPr/>
-            <p:nvPr/>
-          </p:nvSpPr>
-          <p:spPr>
-            <a:xfrm>
-              <a:off x="5511529" y="4163192"/>
-              <a:ext cx="548640" cy="45720"/>
-            </a:xfrm>
-            <a:prstGeom prst="rect">
-              <a:avLst/>
-            </a:prstGeom>
-            <a:solidFill>
-              <a:srgbClr val="0077FF"/>
-            </a:solidFill>
-            <a:ln>
-              <a:noFill/>
-            </a:ln>
-          </p:spPr>
-          <p:txBody>
-            <a:bodyPr rtlCol="0" anchor="ctr"/>
-            <a:lstStyle/>
-            <a:p>
-              <a:pPr algn="ctr"/>
-            </a:p>
-          </p:txBody>
-        </p:sp>
-        <p:sp>
-          <p:nvSpPr>
-            <p:cNvPr id="566" name="BrandDeck Diagram Text 1"/>
-            <p:cNvSpPr txBox="1"/>
-            <p:nvPr/>
-          </p:nvSpPr>
-          <p:spPr>
-            <a:xfrm>
-              <a:off x="5474953" y="4291208"/>
-              <a:ext cx="1710738" cy="1666240"/>
-            </a:xfrm>
-            <a:prstGeom prst="rect">
-              <a:avLst/>
-            </a:prstGeom>
-            <a:noFill/>
-          </p:spPr>
-          <p:txBody>
-            <a:bodyPr wrap="square" anchor="t" lIns="36576" tIns="18288" rIns="36576" bIns="18288">
-              <a:noAutofit/>
-            </a:bodyPr>
-            <a:lstStyle/>
-            <a:p>
-              <a:pPr algn="l">
-                <a:lnSpc>
-                  <a:spcPct val="110000"/>
-                </a:lnSpc>
-              </a:pPr>
-              <a:r>
-                <a:rPr sz="1600" b="1">
-                  <a:solidFill>
-                    <a:srgbClr val="FFFFFF"/>
-                  </a:solidFill>
-                  <a:latin typeface="Play"/>
-                </a:rPr>
-                <a:t>Внутренний контур</a:t>
-              </a:r>
-            </a:p>
-            <a:p>
-              <a:pPr algn="l">
-                <a:lnSpc>
-                  <a:spcPct val="110000"/>
-                </a:lnSpc>
-                <a:spcBef>
-                  <a:spcPts val="400"/>
-                </a:spcBef>
-              </a:pPr>
-              <a:r>
-                <a:rPr sz="1600" b="0">
-                  <a:solidFill>
-                    <a:srgbClr val="FFFFFF"/>
-                  </a:solidFill>
-                  <a:latin typeface="Play"/>
-                </a:rPr>
-                <a:t>Документы не покидают периметр безопасности</a:t>
-              </a:r>
-            </a:p>
-          </p:txBody>
-        </p:sp>
-        <p:cxnSp>
-          <p:nvCxnSpPr>
-            <p:cNvPr id="567" name="BrandDeck Diagram Link 2"/>
-            <p:cNvCxnSpPr/>
-            <p:nvPr/>
-          </p:nvCxnSpPr>
-          <p:spPr>
-            <a:xfrm>
-              <a:off x="8342292" y="3804527"/>
-              <a:ext cx="0" cy="248937"/>
-            </a:xfrm>
-            <a:prstGeom prst="line">
-              <a:avLst/>
-            </a:prstGeom>
-            <a:ln w="19050">
-              <a:solidFill>
-                <a:srgbClr val="004DA6"/>
-              </a:solidFill>
-            </a:ln>
-          </p:spPr>
-          <p:style>
-            <a:lnRef idx="2">
-              <a:schemeClr val="accent1"/>
-            </a:lnRef>
-            <a:fillRef idx="0">
-              <a:schemeClr val="accent1"/>
-            </a:fillRef>
-            <a:effectRef idx="1">
-              <a:schemeClr val="accent1"/>
-            </a:effectRef>
-            <a:fontRef idx="minor">
-              <a:schemeClr val="tx1"/>
-            </a:fontRef>
-          </p:style>
-        </p:cxnSp>
-        <p:sp>
-          <p:nvSpPr>
-            <p:cNvPr id="568" name="BrandDeck Diagram Card 2"/>
-            <p:cNvSpPr/>
-            <p:nvPr/>
-          </p:nvSpPr>
-          <p:spPr>
-            <a:xfrm>
-              <a:off x="7395482" y="4053464"/>
-              <a:ext cx="1893618" cy="1995424"/>
-            </a:xfrm>
-            <a:prstGeom prst="roundRect">
-              <a:avLst>
-                <a:gd name="adj" fmla="val 6000"/>
-              </a:avLst>
-            </a:prstGeom>
-            <a:solidFill>
-              <a:srgbClr val="1A1A1A"/>
-            </a:solidFill>
-            <a:ln>
-              <a:noFill/>
-            </a:ln>
-          </p:spPr>
-          <p:txBody>
-            <a:bodyPr rtlCol="0" anchor="ctr"/>
-            <a:lstStyle/>
-            <a:p>
-              <a:pPr algn="ctr"/>
-            </a:p>
-          </p:txBody>
-        </p:sp>
-        <p:sp>
-          <p:nvSpPr>
-            <p:cNvPr id="569" name="BrandDeck Diagram Marker 2"/>
-            <p:cNvSpPr/>
-            <p:nvPr/>
-          </p:nvSpPr>
-          <p:spPr>
-            <a:xfrm>
-              <a:off x="7523498" y="4163192"/>
-              <a:ext cx="548640" cy="45720"/>
-            </a:xfrm>
-            <a:prstGeom prst="rect">
-              <a:avLst/>
-            </a:prstGeom>
-            <a:solidFill>
-              <a:srgbClr val="0077FF"/>
-            </a:solidFill>
-            <a:ln>
-              <a:noFill/>
-            </a:ln>
-          </p:spPr>
-          <p:txBody>
-            <a:bodyPr rtlCol="0" anchor="ctr"/>
-            <a:lstStyle/>
-            <a:p>
-              <a:pPr algn="ctr"/>
-            </a:p>
-          </p:txBody>
-        </p:sp>
-        <p:sp>
-          <p:nvSpPr>
-            <p:cNvPr id="570" name="BrandDeck Diagram Text 2"/>
-            <p:cNvSpPr txBox="1"/>
-            <p:nvPr/>
-          </p:nvSpPr>
-          <p:spPr>
-            <a:xfrm>
-              <a:off x="7486922" y="4291208"/>
-              <a:ext cx="1710738" cy="1666240"/>
-            </a:xfrm>
-            <a:prstGeom prst="rect">
-              <a:avLst/>
-            </a:prstGeom>
-            <a:noFill/>
-          </p:spPr>
-          <p:txBody>
-            <a:bodyPr wrap="square" anchor="t" lIns="36576" tIns="18288" rIns="36576" bIns="18288">
-              <a:noAutofit/>
-            </a:bodyPr>
-            <a:lstStyle/>
-            <a:p>
-              <a:pPr algn="l">
-                <a:lnSpc>
-                  <a:spcPct val="110000"/>
-                </a:lnSpc>
-              </a:pPr>
-              <a:r>
-                <a:rPr sz="1600" b="1">
-                  <a:solidFill>
-                    <a:srgbClr val="FFFFFF"/>
-                  </a:solidFill>
-                  <a:latin typeface="Play"/>
-                </a:rPr>
-                <a:t>ИИ-помощник</a:t>
-              </a:r>
-            </a:p>
-            <a:p>
-              <a:pPr algn="l">
-                <a:lnSpc>
-                  <a:spcPct val="110000"/>
-                </a:lnSpc>
-                <a:spcBef>
-                  <a:spcPts val="400"/>
-                </a:spcBef>
-              </a:pPr>
-              <a:r>
-                <a:rPr sz="1600" b="0">
-                  <a:solidFill>
-                    <a:srgbClr val="FFFFFF"/>
-                  </a:solidFill>
-                  <a:latin typeface="Play"/>
-                </a:rPr>
-                <a:t>Работает только с внутренними регламентами</a:t>
-              </a:r>
-            </a:p>
-          </p:txBody>
-        </p:sp>
-        <p:cxnSp>
-          <p:nvCxnSpPr>
-            <p:cNvPr id="571" name="BrandDeck Diagram Link 3"/>
-            <p:cNvCxnSpPr/>
-            <p:nvPr/>
-          </p:nvCxnSpPr>
-          <p:spPr>
-            <a:xfrm>
-              <a:off x="10354261" y="3804527"/>
-              <a:ext cx="0" cy="248937"/>
-            </a:xfrm>
-            <a:prstGeom prst="line">
-              <a:avLst/>
-            </a:prstGeom>
-            <a:ln w="19050">
-              <a:solidFill>
-                <a:srgbClr val="004DA6"/>
-              </a:solidFill>
-            </a:ln>
-          </p:spPr>
-          <p:style>
-            <a:lnRef idx="2">
-              <a:schemeClr val="accent1"/>
-            </a:lnRef>
-            <a:fillRef idx="0">
-              <a:schemeClr val="accent1"/>
-            </a:fillRef>
-            <a:effectRef idx="1">
-              <a:schemeClr val="accent1"/>
-            </a:effectRef>
-            <a:fontRef idx="minor">
-              <a:schemeClr val="tx1"/>
-            </a:fontRef>
-          </p:style>
-        </p:cxnSp>
-        <p:sp>
-          <p:nvSpPr>
-            <p:cNvPr id="572" name="BrandDeck Diagram Card 3"/>
-            <p:cNvSpPr/>
-            <p:nvPr/>
-          </p:nvSpPr>
-          <p:spPr>
-            <a:xfrm>
-              <a:off x="9407452" y="4053464"/>
-              <a:ext cx="1893618" cy="1995424"/>
-            </a:xfrm>
-            <a:prstGeom prst="roundRect">
-              <a:avLst>
-                <a:gd name="adj" fmla="val 6000"/>
-              </a:avLst>
-            </a:prstGeom>
-            <a:solidFill>
-              <a:srgbClr val="1A1A1A"/>
-            </a:solidFill>
-            <a:ln>
-              <a:noFill/>
-            </a:ln>
-          </p:spPr>
-          <p:txBody>
-            <a:bodyPr rtlCol="0" anchor="ctr"/>
-            <a:lstStyle/>
-            <a:p>
-              <a:pPr algn="ctr"/>
-            </a:p>
-          </p:txBody>
-        </p:sp>
-        <p:sp>
-          <p:nvSpPr>
-            <p:cNvPr id="573" name="BrandDeck Diagram Marker 3"/>
-            <p:cNvSpPr/>
-            <p:nvPr/>
-          </p:nvSpPr>
-          <p:spPr>
-            <a:xfrm>
-              <a:off x="9535468" y="4163192"/>
-              <a:ext cx="548640" cy="45720"/>
-            </a:xfrm>
-            <a:prstGeom prst="rect">
-              <a:avLst/>
-            </a:prstGeom>
-            <a:solidFill>
-              <a:srgbClr val="0077FF"/>
-            </a:solidFill>
-            <a:ln>
-              <a:noFill/>
-            </a:ln>
-          </p:spPr>
-          <p:txBody>
-            <a:bodyPr rtlCol="0" anchor="ctr"/>
-            <a:lstStyle/>
-            <a:p>
-              <a:pPr algn="ctr"/>
-            </a:p>
-          </p:txBody>
-        </p:sp>
-        <p:sp>
-          <p:nvSpPr>
-            <p:cNvPr id="574" name="BrandDeck Diagram Text 3"/>
-            <p:cNvSpPr txBox="1"/>
-            <p:nvPr/>
-          </p:nvSpPr>
-          <p:spPr>
-            <a:xfrm>
-              <a:off x="9498892" y="4291208"/>
-              <a:ext cx="1710738" cy="1666240"/>
-            </a:xfrm>
-            <a:prstGeom prst="rect">
-              <a:avLst/>
-            </a:prstGeom>
-            <a:noFill/>
-          </p:spPr>
-          <p:txBody>
-            <a:bodyPr wrap="square" anchor="t" lIns="36576" tIns="18288" rIns="36576" bIns="18288">
-              <a:noAutofit/>
-            </a:bodyPr>
-            <a:lstStyle/>
-            <a:p>
-              <a:pPr algn="l">
-                <a:lnSpc>
-                  <a:spcPct val="110000"/>
-                </a:lnSpc>
-              </a:pPr>
-              <a:r>
-                <a:rPr sz="1600" b="1">
-                  <a:solidFill>
-                    <a:srgbClr val="FFFFFF"/>
-                  </a:solidFill>
-                  <a:latin typeface="Play"/>
-                </a:rPr>
-                <a:t>Сотрудники</a:t>
-              </a:r>
-            </a:p>
-            <a:p>
-              <a:pPr algn="l">
-                <a:lnSpc>
-                  <a:spcPct val="110000"/>
-                </a:lnSpc>
-                <a:spcBef>
-                  <a:spcPts val="400"/>
-                </a:spcBef>
-              </a:pPr>
-              <a:r>
-                <a:rPr sz="1600" b="0">
-                  <a:solidFill>
-                    <a:srgbClr val="FFFFFF"/>
-                  </a:solidFill>
-                  <a:latin typeface="Play"/>
-                </a:rPr>
-                <a:t>Получают ответы без передачи данных наружу</a:t>
-              </a:r>
-            </a:p>
-          </p:txBody>
-        </p:sp>
-      </p:grpSp>
-    </p:spTree>
-  </p:cSld>
-  <p:clrMapOvr>
-    <a:masterClrMapping/>
-  </p:clrMapOvr>
-</p:sld>
-</file>
-
-<file path=ppt/slides/slide11.xml><?xml version="1.0" encoding="utf-8"?>
-<p:sld xmlns:a="http://schemas.openxmlformats.org/drawingml/2006/main" xmlns:p="http://schemas.openxmlformats.org/presentationml/2006/main" xmlns:r="http://schemas.openxmlformats.org/officeDocument/2006/relationships">
-  <p:cSld>
-    <p:spTree>
-      <p:nvGrpSpPr>
-        <p:cNvPr id="1" name=""/>
-        <p:cNvGrpSpPr/>
-        <p:nvPr/>
-      </p:nvGrpSpPr>
-      <p:grpSpPr/>
-      <p:sp>
-        <p:nvSpPr>
-          <p:cNvPr id="459" name="BrandDeck Text 459"/>
-          <p:cNvSpPr txBox="1"/>
-          <p:nvPr>
-            <p:ph type="title"/>
-          </p:nvPr>
-        </p:nvSpPr>
-        <p:spPr>
-          <a:xfrm>
-            <a:off x="429253" y="424691"/>
-            <a:ext cx="7827311" cy="1167572"/>
-          </a:xfrm>
-          <a:prstGeom prst="rect">
-            <a:avLst/>
-          </a:prstGeom>
-          <a:noFill/>
-          <a:ln>
-            <a:noFill/>
-          </a:ln>
-        </p:spPr>
-        <p:txBody>
-          <a:bodyPr anchorCtr="0" anchor="t" bIns="0" lIns="0" spcFirstLastPara="1" rIns="0" wrap="square" tIns="0">
-            <a:normAutofit/>
-          </a:bodyPr>
-          <a:lstStyle/>
-          <a:p>
-            <a:pPr indent="0" marL="0" rtl="0" algn="l">
-              <a:lnSpc>
-                <a:spcPct val="115000"/>
-              </a:lnSpc>
-              <a:spcBef>
-                <a:spcPts val="0"/>
-              </a:spcBef>
-              <a:spcAft>
-                <a:spcPts val="359"/>
-              </a:spcAft>
-              <a:buClr>
-                <a:schemeClr val="lt1"/>
-              </a:buClr>
-              <a:buSzPts val="3600"/>
-              <a:buFont typeface="Play"/>
-              <a:buNone/>
-            </a:pPr>
-            <a:r>
-              <a:rPr sz="2400"/>
-              <a:t>Для реализации требуется одобрение пилота и выделение команды из 3 человек</a:t>
+              <a:rPr sz="3200"/>
+              <a:t>Просим одобрить пилот и выделить команду из 3 человек</a:t>
             </a:r>
             <a:endParaRPr/>
           </a:p>
@@ -8707,18 +9335,18 @@
       </p:sp>
       <p:sp>
         <p:nvSpPr>
-          <p:cNvPr id="460" name="BrandDeck Text 460"/>
+          <p:cNvPr id="681" name="BrandDeck Text 681"/>
           <p:cNvSpPr/>
           <p:nvPr/>
         </p:nvSpPr>
         <p:spPr>
           <a:xfrm>
-            <a:off x="7729481" y="1666499"/>
-            <a:ext cx="3420000" cy="3525002"/>
+            <a:off x="427864" y="1837067"/>
+            <a:ext cx="3636000" cy="2022006"/>
           </a:xfrm>
           <a:prstGeom prst="roundRect">
             <a:avLst>
-              <a:gd fmla="val 4432" name="adj"/>
+              <a:gd fmla="val 6326" name="adj"/>
             </a:avLst>
           </a:prstGeom>
           <a:solidFill>
@@ -8729,7 +9357,7 @@
           </a:ln>
         </p:spPr>
         <p:txBody>
-          <a:bodyPr anchorCtr="0" anchor="t" bIns="45700" lIns="108000" spcFirstLastPara="1" rIns="91425" wrap="square" tIns="108000">
+          <a:bodyPr anchorCtr="0" anchor="t" bIns="45700" lIns="108000" spcFirstLastPara="1" rIns="91425" wrap="square" tIns="72000" vert="horz">
             <a:normAutofit/>
           </a:bodyPr>
           <a:lstStyle/>
@@ -8742,18 +9370,18 @@
                 <a:spcPts val="0"/>
               </a:spcBef>
               <a:spcAft>
-                <a:spcPts val="300"/>
+                <a:spcPts val="270"/>
               </a:spcAft>
               <a:buNone/>
             </a:pPr>
             <a:r>
-              <a:rPr sz="2000" b="0">
+              <a:rPr sz="1800">
                 <a:solidFill>
                   <a:srgbClr val="FFFFFF"/>
                 </a:solidFill>
                 <a:latin typeface="Play"/>
               </a:rPr>
-              <a:t>Запуск зависит от утверждения бюджета и формирования команды.</a:t>
+              <a:t>Запрос на одобрение пилота и выделение команды</a:t>
             </a:r>
             <a:endParaRPr/>
           </a:p>
@@ -8761,18 +9389,18 @@
       </p:sp>
       <p:sp>
         <p:nvSpPr>
-          <p:cNvPr id="461" name="BrandDeck Text 461"/>
+          <p:cNvPr id="682" name="BrandDeck Text 682"/>
           <p:cNvSpPr/>
           <p:nvPr/>
         </p:nvSpPr>
         <p:spPr>
           <a:xfrm>
-            <a:off x="4056891" y="1666499"/>
-            <a:ext cx="3420000" cy="3525002"/>
+            <a:off x="4217594" y="1837067"/>
+            <a:ext cx="3636000" cy="2022006"/>
           </a:xfrm>
           <a:prstGeom prst="roundRect">
             <a:avLst>
-              <a:gd fmla="val 4027" name="adj"/>
+              <a:gd fmla="val 6871" name="adj"/>
             </a:avLst>
           </a:prstGeom>
           <a:solidFill>
@@ -8783,7 +9411,7 @@
           </a:ln>
         </p:spPr>
         <p:txBody>
-          <a:bodyPr anchorCtr="0" anchor="t" bIns="45700" lIns="108000" spcFirstLastPara="1" rIns="91425" wrap="square" tIns="108000">
+          <a:bodyPr anchorCtr="0" anchor="t" bIns="45700" lIns="108000" spcFirstLastPara="1" rIns="91425" wrap="square" tIns="72000" vert="horz">
             <a:normAutofit/>
           </a:bodyPr>
           <a:lstStyle/>
@@ -8796,12 +9424,36 @@
                 <a:spcPts val="0"/>
               </a:spcBef>
               <a:spcAft>
-                <a:spcPts val="300"/>
+                <a:spcPts val="270"/>
               </a:spcAft>
               <a:buNone/>
             </a:pPr>
             <a:r>
-              <a:rPr sz="2000">
+              <a:rPr sz="1800">
+                <a:solidFill>
+                  <a:srgbClr val="FFFFFF"/>
+                </a:solidFill>
+                <a:latin typeface="Play"/>
+              </a:rPr>
+              <a:t>Просим одобрить запуск пилота.</a:t>
+            </a:r>
+            <a:endParaRPr/>
+          </a:p>
+          <a:p>
+            <a:pPr indent="0" marL="0" marR="0" rtl="0" algn="l">
+              <a:lnSpc>
+                <a:spcPct val="115000"/>
+              </a:lnSpc>
+              <a:spcBef>
+                <a:spcPts val="0"/>
+              </a:spcBef>
+              <a:spcAft>
+                <a:spcPts val="270"/>
+              </a:spcAft>
+              <a:buNone/>
+            </a:pPr>
+            <a:r>
+              <a:rPr sz="1800">
                 <a:solidFill>
                   <a:srgbClr val="FFFFFF"/>
                 </a:solidFill>
@@ -8809,24 +9461,23 @@
               </a:rPr>
               <a:t>Необходимо выделить команду из 3 человек.</a:t>
             </a:r>
-            <a:endParaRPr/>
           </a:p>
         </p:txBody>
       </p:sp>
       <p:sp>
         <p:nvSpPr>
-          <p:cNvPr id="462" name="BrandDeck Text 462"/>
+          <p:cNvPr id="683" name="BrandDeck Text 683"/>
           <p:cNvSpPr/>
           <p:nvPr/>
         </p:nvSpPr>
         <p:spPr>
           <a:xfrm>
-            <a:off x="415687" y="1666499"/>
-            <a:ext cx="3420000" cy="3525002"/>
+            <a:off x="8007324" y="1837067"/>
+            <a:ext cx="3636000" cy="2022006"/>
           </a:xfrm>
           <a:prstGeom prst="roundRect">
             <a:avLst>
-              <a:gd fmla="val 4432" name="adj"/>
+              <a:gd fmla="val 5781" name="adj"/>
             </a:avLst>
           </a:prstGeom>
           <a:solidFill>
@@ -8837,7 +9488,7 @@
           </a:ln>
         </p:spPr>
         <p:txBody>
-          <a:bodyPr anchorCtr="0" anchor="t" bIns="45700" lIns="108000" spcFirstLastPara="1" rIns="91425" wrap="square" tIns="108000">
+          <a:bodyPr anchorCtr="0" anchor="t" bIns="45700" lIns="108000" spcFirstLastPara="1" rIns="91425" wrap="square" tIns="72000" vert="horz">
             <a:normAutofit/>
           </a:bodyPr>
           <a:lstStyle/>
@@ -8850,539 +9501,23 @@
                 <a:spcPts val="0"/>
               </a:spcBef>
               <a:spcAft>
-                <a:spcPts val="300"/>
+                <a:spcPts val="270"/>
               </a:spcAft>
               <a:buNone/>
             </a:pPr>
             <a:r>
-              <a:rPr sz="2000">
+              <a:rPr sz="1800">
                 <a:solidFill>
                   <a:srgbClr val="FFFFFF"/>
                 </a:solidFill>
                 <a:latin typeface="Play"/>
               </a:rPr>
-              <a:t>Требуется одобрение пилота для запуска проекта.</a:t>
+              <a:t>Пилот охватит 2 подразделения и 150 сотрудников.</a:t>
             </a:r>
             <a:endParaRPr/>
           </a:p>
         </p:txBody>
       </p:sp>
-    </p:spTree>
-  </p:cSld>
-  <p:clrMapOvr>
-    <a:masterClrMapping/>
-  </p:clrMapOvr>
-</p:sld>
-</file>
-
-<file path=ppt/slides/slide12.xml><?xml version="1.0" encoding="utf-8"?>
-<p:sld xmlns:a="http://schemas.openxmlformats.org/drawingml/2006/main" xmlns:p="http://schemas.openxmlformats.org/presentationml/2006/main" xmlns:r="http://schemas.openxmlformats.org/officeDocument/2006/relationships">
-  <p:cSld>
-    <p:spTree>
-      <p:nvGrpSpPr>
-        <p:cNvPr id="1" name=""/>
-        <p:cNvGrpSpPr/>
-        <p:nvPr/>
-      </p:nvGrpSpPr>
-      <p:grpSpPr/>
-      <p:sp>
-        <p:nvSpPr>
-          <p:cNvPr id="441" name="BrandDeck Text 441"/>
-          <p:cNvSpPr txBox="1"/>
-          <p:nvPr>
-            <p:ph type="title"/>
-          </p:nvPr>
-        </p:nvSpPr>
-        <p:spPr>
-          <a:xfrm>
-            <a:off x="429253" y="424691"/>
-            <a:ext cx="7827311" cy="626869"/>
-          </a:xfrm>
-          <a:prstGeom prst="rect">
-            <a:avLst/>
-          </a:prstGeom>
-          <a:noFill/>
-          <a:ln>
-            <a:noFill/>
-          </a:ln>
-        </p:spPr>
-        <p:txBody>
-          <a:bodyPr anchorCtr="0" anchor="t" bIns="0" lIns="0" spcFirstLastPara="1" rIns="0" wrap="square" tIns="0">
-            <a:normAutofit/>
-          </a:bodyPr>
-          <a:lstStyle/>
-          <a:p>
-            <a:pPr indent="0" marL="0" rtl="0" algn="l">
-              <a:lnSpc>
-                <a:spcPct val="115000"/>
-              </a:lnSpc>
-              <a:spcBef>
-                <a:spcPts val="0"/>
-              </a:spcBef>
-              <a:spcAft>
-                <a:spcPts val="270"/>
-              </a:spcAft>
-              <a:buClr>
-                <a:schemeClr val="lt1"/>
-              </a:buClr>
-              <a:buSzPts val="3600"/>
-              <a:buFont typeface="Play"/>
-              <a:buNone/>
-            </a:pPr>
-            <a:r>
-              <a:rPr sz="1800"/>
-              <a:t>Запуск пилота зависит от утверждения бюджета и формирования команды из 3 специалистов</a:t>
-            </a:r>
-            <a:endParaRPr/>
-          </a:p>
-        </p:txBody>
-      </p:sp>
-      <p:sp>
-        <p:nvSpPr>
-          <p:cNvPr id="442" name="BrandDeck Text 442"/>
-          <p:cNvSpPr/>
-          <p:nvPr/>
-        </p:nvSpPr>
-        <p:spPr>
-          <a:xfrm>
-            <a:off x="5383513" y="860119"/>
-            <a:ext cx="5917558" cy="1705685"/>
-          </a:xfrm>
-          <a:prstGeom prst="roundRect">
-            <a:avLst>
-              <a:gd fmla="val 9293" name="adj"/>
-            </a:avLst>
-          </a:prstGeom>
-          <a:solidFill>
-            <a:srgbClr val="151515"/>
-          </a:solidFill>
-          <a:ln>
-            <a:noFill/>
-          </a:ln>
-        </p:spPr>
-        <p:txBody>
-          <a:bodyPr anchorCtr="0" anchor="t" bIns="0" lIns="108000" spcFirstLastPara="1" rIns="0" wrap="square" tIns="756000">
-            <a:normAutofit/>
-          </a:bodyPr>
-          <a:lstStyle/>
-          <a:p>
-            <a:pPr indent="0" marL="0" marR="0" rtl="0" algn="l">
-              <a:lnSpc>
-                <a:spcPct val="115000"/>
-              </a:lnSpc>
-              <a:spcBef>
-                <a:spcPts val="0"/>
-              </a:spcBef>
-              <a:spcAft>
-                <a:spcPts val="270"/>
-              </a:spcAft>
-              <a:buNone/>
-            </a:pPr>
-            <a:r>
-              <a:rPr sz="1800" b="0">
-                <a:solidFill>
-                  <a:srgbClr val="FFFFFF"/>
-                </a:solidFill>
-                <a:latin typeface="Play"/>
-              </a:rPr>
-              <a:t>Утвердить бюджет проекта.</a:t>
-            </a:r>
-            <a:endParaRPr/>
-          </a:p>
-        </p:txBody>
-      </p:sp>
-      <p:grpSp>
-        <p:nvGrpSpPr>
-          <p:cNvPr id="443" name="Google Shape;443;p21"/>
-          <p:cNvGrpSpPr/>
-          <p:nvPr/>
-        </p:nvGrpSpPr>
-        <p:grpSpPr>
-          <a:xfrm>
-            <a:off x="5523729" y="996732"/>
-            <a:ext cx="515460" cy="515395"/>
-            <a:chOff x="5166883" y="996732"/>
-            <a:chExt cx="515460" cy="515395"/>
-          </a:xfrm>
-        </p:grpSpPr>
-        <p:sp>
-          <p:nvSpPr>
-            <p:cNvPr id="444" name="Google Shape;444;p21"/>
-            <p:cNvSpPr/>
-            <p:nvPr/>
-          </p:nvSpPr>
-          <p:spPr>
-            <a:xfrm>
-              <a:off x="5166883" y="996732"/>
-              <a:ext cx="515460" cy="515395"/>
-            </a:xfrm>
-            <a:prstGeom prst="roundRect">
-              <a:avLst>
-                <a:gd fmla="val 23586" name="adj"/>
-              </a:avLst>
-            </a:prstGeom>
-            <a:solidFill>
-              <a:srgbClr val="212121"/>
-            </a:solidFill>
-            <a:ln>
-              <a:noFill/>
-            </a:ln>
-          </p:spPr>
-          <p:txBody>
-            <a:bodyPr anchorCtr="0" anchor="ctr" bIns="91425" lIns="91425" spcFirstLastPara="1" rIns="91425" wrap="square" tIns="91425">
-              <a:noAutofit/>
-            </a:bodyPr>
-            <a:lstStyle/>
-            <a:p>
-              <a:pPr indent="0" lvl="0" marL="0" rtl="0" algn="l">
-                <a:spcBef>
-                  <a:spcPts val="0"/>
-                </a:spcBef>
-                <a:spcAft>
-                  <a:spcPts val="0"/>
-                </a:spcAft>
-                <a:buNone/>
-              </a:pPr>
-              <a:r>
-                <a:t/>
-              </a:r>
-              <a:endParaRPr/>
-            </a:p>
-          </p:txBody>
-        </p:sp>
-        <p:pic>
-          <p:nvPicPr>
-            <p:cNvPr id="445" name="Google Shape;445;p21"/>
-            <p:cNvPicPr preferRelativeResize="0"/>
-            <p:nvPr/>
-          </p:nvPicPr>
-          <p:blipFill rotWithShape="1">
-            <a:blip r:embed="rId2">
-              <a:alphaModFix/>
-            </a:blip>
-            <a:srcRect b="0" l="0" r="0" t="0"/>
-            <a:stretch/>
-          </p:blipFill>
-          <p:spPr>
-            <a:xfrm>
-              <a:off x="5291263" y="1117786"/>
-              <a:ext cx="266700" cy="266700"/>
-            </a:xfrm>
-            <a:prstGeom prst="rect">
-              <a:avLst/>
-            </a:prstGeom>
-            <a:noFill/>
-            <a:ln>
-              <a:noFill/>
-            </a:ln>
-          </p:spPr>
-        </p:pic>
-      </p:grpSp>
-      <p:sp>
-        <p:nvSpPr>
-          <p:cNvPr id="446" name="BrandDeck Text 446"/>
-          <p:cNvSpPr/>
-          <p:nvPr/>
-        </p:nvSpPr>
-        <p:spPr>
-          <a:xfrm>
-            <a:off x="5383513" y="2710690"/>
-            <a:ext cx="5917558" cy="1705685"/>
-          </a:xfrm>
-          <a:prstGeom prst="roundRect">
-            <a:avLst>
-              <a:gd fmla="val 9293" name="adj"/>
-            </a:avLst>
-          </a:prstGeom>
-          <a:solidFill>
-            <a:srgbClr val="151515"/>
-          </a:solidFill>
-          <a:ln>
-            <a:noFill/>
-          </a:ln>
-        </p:spPr>
-        <p:txBody>
-          <a:bodyPr anchorCtr="0" anchor="t" bIns="0" lIns="108000" spcFirstLastPara="1" rIns="0" wrap="square" tIns="756000">
-            <a:normAutofit/>
-          </a:bodyPr>
-          <a:lstStyle/>
-          <a:p>
-            <a:pPr indent="0" marL="0" marR="0" rtl="0" algn="l">
-              <a:lnSpc>
-                <a:spcPct val="115000"/>
-              </a:lnSpc>
-              <a:spcBef>
-                <a:spcPts val="0"/>
-              </a:spcBef>
-              <a:spcAft>
-                <a:spcPts val="270"/>
-              </a:spcAft>
-              <a:buNone/>
-            </a:pPr>
-            <a:r>
-              <a:rPr sz="1800" b="0">
-                <a:solidFill>
-                  <a:srgbClr val="FFFFFF"/>
-                </a:solidFill>
-                <a:latin typeface="Play"/>
-              </a:rPr>
-              <a:t>Следующие шаги</a:t>
-            </a:r>
-            <a:endParaRPr/>
-          </a:p>
-        </p:txBody>
-      </p:sp>
-      <p:grpSp>
-        <p:nvGrpSpPr>
-          <p:cNvPr id="447" name="Google Shape;447;p21"/>
-          <p:cNvGrpSpPr/>
-          <p:nvPr/>
-        </p:nvGrpSpPr>
-        <p:grpSpPr>
-          <a:xfrm>
-            <a:off x="5523729" y="2847303"/>
-            <a:ext cx="515460" cy="515395"/>
-            <a:chOff x="5166883" y="996732"/>
-            <a:chExt cx="515460" cy="515395"/>
-          </a:xfrm>
-        </p:grpSpPr>
-        <p:sp>
-          <p:nvSpPr>
-            <p:cNvPr id="448" name="Google Shape;448;p21"/>
-            <p:cNvSpPr/>
-            <p:nvPr/>
-          </p:nvSpPr>
-          <p:spPr>
-            <a:xfrm>
-              <a:off x="5166883" y="996732"/>
-              <a:ext cx="515460" cy="515395"/>
-            </a:xfrm>
-            <a:prstGeom prst="roundRect">
-              <a:avLst>
-                <a:gd fmla="val 23586" name="adj"/>
-              </a:avLst>
-            </a:prstGeom>
-            <a:solidFill>
-              <a:srgbClr val="212121"/>
-            </a:solidFill>
-            <a:ln>
-              <a:noFill/>
-            </a:ln>
-          </p:spPr>
-          <p:txBody>
-            <a:bodyPr anchorCtr="0" anchor="ctr" bIns="91425" lIns="91425" spcFirstLastPara="1" rIns="91425" wrap="square" tIns="91425">
-              <a:noAutofit/>
-            </a:bodyPr>
-            <a:lstStyle/>
-            <a:p>
-              <a:pPr indent="0" lvl="0" marL="0" rtl="0" algn="l">
-                <a:spcBef>
-                  <a:spcPts val="0"/>
-                </a:spcBef>
-                <a:spcAft>
-                  <a:spcPts val="0"/>
-                </a:spcAft>
-                <a:buNone/>
-              </a:pPr>
-              <a:r>
-                <a:t/>
-              </a:r>
-              <a:endParaRPr/>
-            </a:p>
-          </p:txBody>
-        </p:sp>
-        <p:pic>
-          <p:nvPicPr>
-            <p:cNvPr id="449" name="Google Shape;449;p21"/>
-            <p:cNvPicPr preferRelativeResize="0"/>
-            <p:nvPr/>
-          </p:nvPicPr>
-          <p:blipFill rotWithShape="1">
-            <a:blip r:embed="rId2">
-              <a:alphaModFix/>
-            </a:blip>
-            <a:srcRect b="0" l="0" r="0" t="0"/>
-            <a:stretch/>
-          </p:blipFill>
-          <p:spPr>
-            <a:xfrm>
-              <a:off x="5291263" y="1117786"/>
-              <a:ext cx="266700" cy="266700"/>
-            </a:xfrm>
-            <a:prstGeom prst="rect">
-              <a:avLst/>
-            </a:prstGeom>
-            <a:noFill/>
-            <a:ln>
-              <a:noFill/>
-            </a:ln>
-          </p:spPr>
-        </p:pic>
-      </p:grpSp>
-      <p:sp>
-        <p:nvSpPr>
-          <p:cNvPr id="450" name="BrandDeck Text 450"/>
-          <p:cNvSpPr/>
-          <p:nvPr/>
-        </p:nvSpPr>
-        <p:spPr>
-          <a:xfrm>
-            <a:off x="5383513" y="4561261"/>
-            <a:ext cx="5917558" cy="1705685"/>
-          </a:xfrm>
-          <a:prstGeom prst="roundRect">
-            <a:avLst>
-              <a:gd fmla="val 9293" name="adj"/>
-            </a:avLst>
-          </a:prstGeom>
-          <a:solidFill>
-            <a:srgbClr val="151515"/>
-          </a:solidFill>
-          <a:ln>
-            <a:noFill/>
-          </a:ln>
-        </p:spPr>
-        <p:txBody>
-          <a:bodyPr anchorCtr="0" anchor="t" bIns="0" lIns="108000" spcFirstLastPara="1" rIns="0" wrap="square" tIns="756000">
-            <a:normAutofit/>
-          </a:bodyPr>
-          <a:lstStyle/>
-          <a:p>
-            <a:pPr indent="0" marL="0" marR="0" rtl="0" algn="l">
-              <a:lnSpc>
-                <a:spcPct val="115000"/>
-              </a:lnSpc>
-              <a:spcBef>
-                <a:spcPts val="0"/>
-              </a:spcBef>
-              <a:spcAft>
-                <a:spcPts val="270"/>
-              </a:spcAft>
-              <a:buNone/>
-            </a:pPr>
-            <a:r>
-              <a:rPr sz="1800" b="0">
-                <a:solidFill>
-                  <a:srgbClr val="FFFFFF"/>
-                </a:solidFill>
-                <a:latin typeface="Play"/>
-              </a:rPr>
-              <a:t>Сформировать команду из 3 специалистов.</a:t>
-            </a:r>
-            <a:endParaRPr/>
-          </a:p>
-          <a:p>
-            <a:pPr indent="0" marL="0" marR="0" rtl="0" algn="l">
-              <a:lnSpc>
-                <a:spcPct val="115000"/>
-              </a:lnSpc>
-              <a:spcBef>
-                <a:spcPts val="0"/>
-              </a:spcBef>
-              <a:spcAft>
-                <a:spcPts val="270"/>
-              </a:spcAft>
-              <a:buNone/>
-            </a:pPr>
-            <a:r>
-              <a:rPr sz="1800" b="0">
-                <a:solidFill>
-                  <a:srgbClr val="FFFFFF"/>
-                </a:solidFill>
-                <a:latin typeface="Play"/>
-              </a:rPr>
-              <a:t>Начать пилотный запуск.</a:t>
-            </a:r>
-          </a:p>
-        </p:txBody>
-      </p:sp>
-      <p:grpSp>
-        <p:nvGrpSpPr>
-          <p:cNvPr id="451" name="Google Shape;451;p21"/>
-          <p:cNvGrpSpPr/>
-          <p:nvPr/>
-        </p:nvGrpSpPr>
-        <p:grpSpPr>
-          <a:xfrm>
-            <a:off x="5523729" y="4697874"/>
-            <a:ext cx="515460" cy="515395"/>
-            <a:chOff x="5166883" y="996732"/>
-            <a:chExt cx="515460" cy="515395"/>
-          </a:xfrm>
-        </p:grpSpPr>
-        <p:sp>
-          <p:nvSpPr>
-            <p:cNvPr id="452" name="Google Shape;452;p21"/>
-            <p:cNvSpPr/>
-            <p:nvPr/>
-          </p:nvSpPr>
-          <p:spPr>
-            <a:xfrm>
-              <a:off x="5166883" y="996732"/>
-              <a:ext cx="515460" cy="515395"/>
-            </a:xfrm>
-            <a:prstGeom prst="roundRect">
-              <a:avLst>
-                <a:gd fmla="val 23586" name="adj"/>
-              </a:avLst>
-            </a:prstGeom>
-            <a:solidFill>
-              <a:srgbClr val="212121"/>
-            </a:solidFill>
-            <a:ln>
-              <a:noFill/>
-            </a:ln>
-          </p:spPr>
-          <p:txBody>
-            <a:bodyPr anchorCtr="0" anchor="ctr" bIns="91425" lIns="91425" spcFirstLastPara="1" rIns="91425" wrap="square" tIns="91425">
-              <a:noAutofit/>
-            </a:bodyPr>
-            <a:lstStyle/>
-            <a:p>
-              <a:pPr indent="0" lvl="0" marL="0" rtl="0" algn="l">
-                <a:spcBef>
-                  <a:spcPts val="0"/>
-                </a:spcBef>
-                <a:spcAft>
-                  <a:spcPts val="0"/>
-                </a:spcAft>
-                <a:buNone/>
-              </a:pPr>
-              <a:r>
-                <a:t/>
-              </a:r>
-              <a:endParaRPr/>
-            </a:p>
-          </p:txBody>
-        </p:sp>
-        <p:pic>
-          <p:nvPicPr>
-            <p:cNvPr id="453" name="Google Shape;453;p21"/>
-            <p:cNvPicPr preferRelativeResize="0"/>
-            <p:nvPr/>
-          </p:nvPicPr>
-          <p:blipFill rotWithShape="1">
-            <a:blip r:embed="rId2">
-              <a:alphaModFix/>
-            </a:blip>
-            <a:srcRect b="0" l="0" r="0" t="0"/>
-            <a:stretch/>
-          </p:blipFill>
-          <p:spPr>
-            <a:xfrm>
-              <a:off x="5291263" y="1117786"/>
-              <a:ext cx="266700" cy="266700"/>
-            </a:xfrm>
-            <a:prstGeom prst="rect">
-              <a:avLst/>
-            </a:prstGeom>
-            <a:noFill/>
-            <a:ln>
-              <a:noFill/>
-            </a:ln>
-          </p:spPr>
-        </p:pic>
-      </p:grpSp>
     </p:spTree>
   </p:cSld>
   <p:clrMapOvr>
@@ -9423,7 +9558,7 @@
           </a:ln>
         </p:spPr>
         <p:txBody>
-          <a:bodyPr anchorCtr="0" anchor="t" bIns="0" lIns="0" spcFirstLastPara="1" rIns="0" wrap="square" tIns="0">
+          <a:bodyPr anchorCtr="0" anchor="t" bIns="0" lIns="0" spcFirstLastPara="1" rIns="0" wrap="square" tIns="0" vert="horz">
             <a:normAutofit/>
           </a:bodyPr>
           <a:lstStyle/>
@@ -9447,7 +9582,7 @@
             </a:pPr>
             <a:r>
               <a:rPr sz="1800"/>
-              <a:t>Поиск инструкции занимает до 30 минут, а треть обращений дублируются</a:t>
+              <a:t>Сотрудники тратят до 30 минут на поиск нужной инструкции</a:t>
             </a:r>
             <a:endParaRPr/>
           </a:p>
@@ -9479,7 +9614,7 @@
           </a:ln>
         </p:spPr>
         <p:txBody>
-          <a:bodyPr anchorCtr="0" anchor="t" bIns="0" lIns="108000" spcFirstLastPara="1" rIns="0" wrap="square" tIns="756000">
+          <a:bodyPr anchorCtr="0" anchor="t" bIns="0" lIns="108000" spcFirstLastPara="1" rIns="0" wrap="square" tIns="756000" vert="horz">
             <a:normAutofit/>
           </a:bodyPr>
           <a:lstStyle/>
@@ -9622,7 +9757,7 @@
           </a:ln>
         </p:spPr>
         <p:txBody>
-          <a:bodyPr anchorCtr="0" anchor="t" bIns="0" lIns="108000" spcFirstLastPara="1" rIns="0" wrap="square" tIns="756000">
+          <a:bodyPr anchorCtr="0" anchor="t" bIns="0" lIns="108000" spcFirstLastPara="1" rIns="0" wrap="square" tIns="756000" vert="horz">
             <a:normAutofit/>
           </a:bodyPr>
           <a:lstStyle/>
@@ -9646,7 +9781,7 @@
                   <a:schemeClr val="lt1"/>
                 </a:solidFill>
               </a:rPr>
-              <a:t>Треть всех обращений в поддержку — повторяющиеся вопросы.</a:t>
+              <a:t>Это время тратится сотрудниками на поиск информации.</a:t>
             </a:r>
             <a:endParaRPr/>
           </a:p>
@@ -9765,7 +9900,7 @@
           </a:ln>
         </p:spPr>
         <p:txBody>
-          <a:bodyPr anchorCtr="0" anchor="t" bIns="0" lIns="108000" spcFirstLastPara="1" rIns="0" wrap="square" tIns="756000">
+          <a:bodyPr anchorCtr="0" anchor="t" bIns="0" lIns="108000" spcFirstLastPara="1" rIns="0" wrap="square" tIns="756000" vert="horz">
             <a:normAutofit/>
           </a:bodyPr>
           <a:lstStyle/>
@@ -9789,7 +9924,7 @@
                   <a:schemeClr val="lt1"/>
                 </a:solidFill>
               </a:rPr>
-              <a:t>Текущий ручной процесс перегружает специалистов поддержки.</a:t>
+              <a:t>Актуальность задачи обусловлена длительным поиском инструкций.</a:t>
             </a:r>
             <a:endParaRPr/>
           </a:p>
@@ -9891,6 +10026,1095 @@
 </file>
 
 <file path=ppt/slides/slide3.xml><?xml version="1.0" encoding="utf-8"?>
+<p:sld xmlns:a="http://schemas.openxmlformats.org/drawingml/2006/main" xmlns:p="http://schemas.openxmlformats.org/presentationml/2006/main" xmlns:r="http://schemas.openxmlformats.org/officeDocument/2006/relationships">
+  <p:cSld>
+    <p:spTree>
+      <p:nvGrpSpPr>
+        <p:cNvPr id="1" name=""/>
+        <p:cNvGrpSpPr/>
+        <p:nvPr/>
+      </p:nvGrpSpPr>
+      <p:grpSpPr/>
+      <p:sp>
+        <p:nvSpPr>
+          <p:cNvPr id="718" name="BrandDeck Text 718"/>
+          <p:cNvSpPr txBox="1"/>
+          <p:nvPr>
+            <p:ph type="title"/>
+          </p:nvPr>
+        </p:nvSpPr>
+        <p:spPr>
+          <a:xfrm>
+            <a:off x="429253" y="424691"/>
+            <a:ext cx="7827311" cy="1167572"/>
+          </a:xfrm>
+          <a:prstGeom prst="rect">
+            <a:avLst/>
+          </a:prstGeom>
+          <a:noFill/>
+          <a:ln>
+            <a:noFill/>
+          </a:ln>
+        </p:spPr>
+        <p:txBody>
+          <a:bodyPr anchorCtr="0" anchor="t" bIns="0" lIns="0" spcFirstLastPara="1" rIns="0" wrap="square" tIns="0" vert="horz">
+            <a:normAutofit/>
+          </a:bodyPr>
+          <a:lstStyle/>
+          <a:p>
+            <a:pPr indent="0" marL="0" rtl="0" algn="l">
+              <a:lnSpc>
+                <a:spcPct val="115000"/>
+              </a:lnSpc>
+              <a:spcBef>
+                <a:spcPts val="0"/>
+              </a:spcBef>
+              <a:spcAft>
+                <a:spcPts val="480"/>
+              </a:spcAft>
+              <a:buClr>
+                <a:schemeClr val="lt1"/>
+              </a:buClr>
+              <a:buSzPts val="3600"/>
+              <a:buFont typeface="Play"/>
+              <a:buNone/>
+            </a:pPr>
+            <a:r>
+              <a:rPr sz="3200"/>
+              <a:t>Треть обращений в поддержку — повторяющиеся вопросы</a:t>
+            </a:r>
+            <a:endParaRPr/>
+          </a:p>
+        </p:txBody>
+      </p:sp>
+      <p:grpSp>
+        <p:nvGrpSpPr>
+          <p:cNvPr id="2" name="BrandDeck Diagram icon_grid" descr="icon_grid: Доля Треть обращений — повторяющиеся вопросы; Причина Отсутствие быстрого доступа к инструкциям; Результат Лишняя работа специалистов поддержки"/>
+          <p:cNvGrpSpPr/>
+          <p:nvPr/>
+        </p:nvGrpSpPr>
+        <p:grpSpPr>
+          <a:xfrm>
+            <a:off x="429253" y="1773238"/>
+            <a:ext cx="10280311" cy="3782434"/>
+            <a:chOff x="429253" y="1773238"/>
+            <a:chExt cx="10280311" cy="3782434"/>
+          </a:xfrm>
+        </p:grpSpPr>
+        <p:sp>
+          <p:nvSpPr>
+            <p:cNvPr id="721" name="BrandDeck Diagram Card 1"/>
+            <p:cNvSpPr/>
+            <p:nvPr/>
+          </p:nvSpPr>
+          <p:spPr>
+            <a:xfrm>
+              <a:off x="429253" y="1773238"/>
+              <a:ext cx="10280311" cy="1123740"/>
+            </a:xfrm>
+            <a:prstGeom prst="roundRect">
+              <a:avLst>
+                <a:gd name="adj" fmla="val 8000"/>
+              </a:avLst>
+            </a:prstGeom>
+            <a:solidFill>
+              <a:srgbClr val="1A1A1A"/>
+            </a:solidFill>
+            <a:ln>
+              <a:noFill/>
+            </a:ln>
+          </p:spPr>
+          <p:txBody>
+            <a:bodyPr rtlCol="0" anchor="ctr"/>
+            <a:lstStyle/>
+            <a:p>
+              <a:pPr algn="ctr"/>
+            </a:p>
+          </p:txBody>
+        </p:sp>
+        <p:sp>
+          <p:nvSpPr>
+            <p:cNvPr id="722" name="BrandDeck Diagram Icon 1 Badge"/>
+            <p:cNvSpPr/>
+            <p:nvPr/>
+          </p:nvSpPr>
+          <p:spPr>
+            <a:xfrm>
+              <a:off x="648708" y="2152228"/>
+              <a:ext cx="365760" cy="365760"/>
+            </a:xfrm>
+            <a:prstGeom prst="ellipse">
+              <a:avLst/>
+            </a:prstGeom>
+            <a:solidFill>
+              <a:srgbClr val="006DEB"/>
+            </a:solidFill>
+            <a:ln>
+              <a:noFill/>
+            </a:ln>
+          </p:spPr>
+          <p:txBody>
+            <a:bodyPr rtlCol="0" anchor="ctr"/>
+            <a:lstStyle/>
+            <a:p>
+              <a:pPr algn="ctr"/>
+            </a:p>
+          </p:txBody>
+        </p:sp>
+        <p:sp>
+          <p:nvSpPr>
+            <p:cNvPr id="723" name="BrandDeck Icon headset"/>
+            <p:cNvSpPr/>
+            <p:nvPr/>
+          </p:nvSpPr>
+          <p:spPr>
+            <a:xfrm>
+              <a:off x="729176" y="2232695"/>
+              <a:ext cx="204825" cy="204825"/>
+            </a:xfrm>
+            <a:custGeom>
+              <a:avLst/>
+              <a:gdLst/>
+              <a:ahLst/>
+              <a:cxnLst/>
+              <a:rect l="l" t="t" r="r" b="b"/>
+              <a:pathLst>
+                <a:path w="24000" h="24000" fill="none">
+                  <a:moveTo>
+                    <a:pt x="3000" y="11000"/>
+                  </a:moveTo>
+                  <a:lnTo>
+                    <a:pt x="6000" y="11000"/>
+                  </a:lnTo>
+                  <a:cubicBezTo>
+                    <a:pt x="7105" y="11000"/>
+                    <a:pt x="8000" y="11895"/>
+                    <a:pt x="8000" y="13000"/>
+                  </a:cubicBezTo>
+                  <a:lnTo>
+                    <a:pt x="8000" y="16000"/>
+                  </a:lnTo>
+                  <a:cubicBezTo>
+                    <a:pt x="8000" y="17105"/>
+                    <a:pt x="7105" y="18000"/>
+                    <a:pt x="6000" y="18000"/>
+                  </a:cubicBezTo>
+                  <a:lnTo>
+                    <a:pt x="5000" y="18000"/>
+                  </a:lnTo>
+                  <a:cubicBezTo>
+                    <a:pt x="3895" y="18000"/>
+                    <a:pt x="3000" y="17105"/>
+                    <a:pt x="3000" y="16000"/>
+                  </a:cubicBezTo>
+                  <a:lnTo>
+                    <a:pt x="3000" y="11000"/>
+                  </a:lnTo>
+                  <a:close/>
+                  <a:moveTo>
+                    <a:pt x="3000" y="11000"/>
+                  </a:moveTo>
+                  <a:cubicBezTo>
+                    <a:pt x="3000" y="6029"/>
+                    <a:pt x="7029" y="2000"/>
+                    <a:pt x="12000" y="2000"/>
+                  </a:cubicBezTo>
+                  <a:cubicBezTo>
+                    <a:pt x="16971" y="2000"/>
+                    <a:pt x="21000" y="6029"/>
+                    <a:pt x="21000" y="11000"/>
+                  </a:cubicBezTo>
+                  <a:moveTo>
+                    <a:pt x="21000" y="11000"/>
+                  </a:moveTo>
+                  <a:lnTo>
+                    <a:pt x="21000" y="16000"/>
+                  </a:lnTo>
+                  <a:cubicBezTo>
+                    <a:pt x="21000" y="17105"/>
+                    <a:pt x="20105" y="18000"/>
+                    <a:pt x="19000" y="18000"/>
+                  </a:cubicBezTo>
+                  <a:lnTo>
+                    <a:pt x="18000" y="18000"/>
+                  </a:lnTo>
+                  <a:cubicBezTo>
+                    <a:pt x="16895" y="18000"/>
+                    <a:pt x="16000" y="17105"/>
+                    <a:pt x="16000" y="16000"/>
+                  </a:cubicBezTo>
+                  <a:lnTo>
+                    <a:pt x="16000" y="13000"/>
+                  </a:lnTo>
+                  <a:cubicBezTo>
+                    <a:pt x="16000" y="11895"/>
+                    <a:pt x="16895" y="11000"/>
+                    <a:pt x="18000" y="11000"/>
+                  </a:cubicBezTo>
+                  <a:lnTo>
+                    <a:pt x="21000" y="11000"/>
+                  </a:lnTo>
+                  <a:close/>
+                </a:path>
+                <a:path w="24000" h="24000" fill="none">
+                  <a:moveTo>
+                    <a:pt x="21000" y="16000"/>
+                  </a:moveTo>
+                  <a:lnTo>
+                    <a:pt x="21000" y="18000"/>
+                  </a:lnTo>
+                  <a:cubicBezTo>
+                    <a:pt x="21000" y="20209"/>
+                    <a:pt x="19209" y="22000"/>
+                    <a:pt x="17000" y="22000"/>
+                  </a:cubicBezTo>
+                  <a:lnTo>
+                    <a:pt x="12000" y="22000"/>
+                  </a:lnTo>
+                </a:path>
+              </a:pathLst>
+            </a:custGeom>
+            <a:noFill/>
+            <a:ln w="17068" cap="rnd">
+              <a:solidFill>
+                <a:srgbClr val="FFFFFF"/>
+              </a:solidFill>
+              <a:round/>
+            </a:ln>
+          </p:spPr>
+          <p:txBody>
+            <a:bodyPr rtlCol="0" anchor="ctr"/>
+            <a:lstStyle/>
+            <a:p>
+              <a:pPr algn="ctr"/>
+            </a:p>
+          </p:txBody>
+        </p:sp>
+        <p:sp>
+          <p:nvSpPr>
+            <p:cNvPr id="724" name="BrandDeck Diagram Text 1"/>
+            <p:cNvSpPr txBox="1"/>
+            <p:nvPr/>
+          </p:nvSpPr>
+          <p:spPr>
+            <a:xfrm>
+              <a:off x="1146142" y="1904911"/>
+              <a:ext cx="9343965" cy="860393"/>
+            </a:xfrm>
+            <a:prstGeom prst="rect">
+              <a:avLst/>
+            </a:prstGeom>
+            <a:noFill/>
+          </p:spPr>
+          <p:txBody>
+            <a:bodyPr wrap="square" anchor="ctr" lIns="36576" tIns="18288" rIns="36576" bIns="18288">
+              <a:noAutofit/>
+            </a:bodyPr>
+            <a:lstStyle/>
+            <a:p>
+              <a:pPr algn="l">
+                <a:lnSpc>
+                  <a:spcPct val="110000"/>
+                </a:lnSpc>
+              </a:pPr>
+              <a:r>
+                <a:rPr sz="1800" b="1">
+                  <a:solidFill>
+                    <a:srgbClr val="FFFFFF"/>
+                  </a:solidFill>
+                  <a:latin typeface="Play"/>
+                </a:rPr>
+                <a:t>Доля</a:t>
+              </a:r>
+            </a:p>
+            <a:p>
+              <a:pPr algn="l">
+                <a:lnSpc>
+                  <a:spcPct val="110000"/>
+                </a:lnSpc>
+                <a:spcBef>
+                  <a:spcPts val="450"/>
+                </a:spcBef>
+              </a:pPr>
+              <a:r>
+                <a:rPr sz="1800" b="0">
+                  <a:solidFill>
+                    <a:srgbClr val="FFFFFF"/>
+                  </a:solidFill>
+                  <a:latin typeface="Play"/>
+                </a:rPr>
+                <a:t>Треть обращений — повторяющиеся вопросы</a:t>
+              </a:r>
+            </a:p>
+          </p:txBody>
+        </p:sp>
+        <p:sp>
+          <p:nvSpPr>
+            <p:cNvPr id="725" name="BrandDeck Diagram Card 2"/>
+            <p:cNvSpPr/>
+            <p:nvPr/>
+          </p:nvSpPr>
+          <p:spPr>
+            <a:xfrm>
+              <a:off x="429253" y="3102585"/>
+              <a:ext cx="10280311" cy="1123740"/>
+            </a:xfrm>
+            <a:prstGeom prst="roundRect">
+              <a:avLst>
+                <a:gd name="adj" fmla="val 8000"/>
+              </a:avLst>
+            </a:prstGeom>
+            <a:solidFill>
+              <a:srgbClr val="1A1A1A"/>
+            </a:solidFill>
+            <a:ln>
+              <a:noFill/>
+            </a:ln>
+          </p:spPr>
+          <p:txBody>
+            <a:bodyPr rtlCol="0" anchor="ctr"/>
+            <a:lstStyle/>
+            <a:p>
+              <a:pPr algn="ctr"/>
+            </a:p>
+          </p:txBody>
+        </p:sp>
+        <p:sp>
+          <p:nvSpPr>
+            <p:cNvPr id="726" name="BrandDeck Diagram Icon 2 Badge"/>
+            <p:cNvSpPr/>
+            <p:nvPr/>
+          </p:nvSpPr>
+          <p:spPr>
+            <a:xfrm>
+              <a:off x="648708" y="3481575"/>
+              <a:ext cx="365760" cy="365760"/>
+            </a:xfrm>
+            <a:prstGeom prst="ellipse">
+              <a:avLst/>
+            </a:prstGeom>
+            <a:solidFill>
+              <a:srgbClr val="006DEB"/>
+            </a:solidFill>
+            <a:ln>
+              <a:noFill/>
+            </a:ln>
+          </p:spPr>
+          <p:txBody>
+            <a:bodyPr rtlCol="0" anchor="ctr"/>
+            <a:lstStyle/>
+            <a:p>
+              <a:pPr algn="ctr"/>
+            </a:p>
+          </p:txBody>
+        </p:sp>
+        <p:sp>
+          <p:nvSpPr>
+            <p:cNvPr id="727" name="BrandDeck Icon timer"/>
+            <p:cNvSpPr/>
+            <p:nvPr/>
+          </p:nvSpPr>
+          <p:spPr>
+            <a:xfrm>
+              <a:off x="729176" y="3562042"/>
+              <a:ext cx="204825" cy="204825"/>
+            </a:xfrm>
+            <a:custGeom>
+              <a:avLst/>
+              <a:gdLst/>
+              <a:ahLst/>
+              <a:cxnLst/>
+              <a:rect l="l" t="t" r="r" b="b"/>
+              <a:pathLst>
+                <a:path w="24000" h="24000" fill="none">
+                  <a:moveTo>
+                    <a:pt x="10000" y="2000"/>
+                  </a:moveTo>
+                  <a:lnTo>
+                    <a:pt x="14000" y="2000"/>
+                  </a:lnTo>
+                </a:path>
+                <a:path w="24000" h="24000" fill="none">
+                  <a:moveTo>
+                    <a:pt x="12000" y="14000"/>
+                  </a:moveTo>
+                  <a:lnTo>
+                    <a:pt x="15000" y="11000"/>
+                  </a:lnTo>
+                </a:path>
+                <a:path w="24000" h="24000" fill="none">
+                  <a:moveTo>
+                    <a:pt x="20000" y="14000"/>
+                  </a:moveTo>
+                  <a:cubicBezTo>
+                    <a:pt x="20000" y="18418"/>
+                    <a:pt x="16418" y="22000"/>
+                    <a:pt x="12000" y="22000"/>
+                  </a:cubicBezTo>
+                  <a:cubicBezTo>
+                    <a:pt x="7582" y="22000"/>
+                    <a:pt x="4000" y="18418"/>
+                    <a:pt x="4000" y="14000"/>
+                  </a:cubicBezTo>
+                  <a:cubicBezTo>
+                    <a:pt x="4000" y="9582"/>
+                    <a:pt x="7582" y="6000"/>
+                    <a:pt x="12000" y="6000"/>
+                  </a:cubicBezTo>
+                  <a:cubicBezTo>
+                    <a:pt x="16418" y="6000"/>
+                    <a:pt x="20000" y="9582"/>
+                    <a:pt x="20000" y="14000"/>
+                  </a:cubicBezTo>
+                  <a:close/>
+                </a:path>
+              </a:pathLst>
+            </a:custGeom>
+            <a:noFill/>
+            <a:ln w="17068" cap="rnd">
+              <a:solidFill>
+                <a:srgbClr val="FFFFFF"/>
+              </a:solidFill>
+              <a:round/>
+            </a:ln>
+          </p:spPr>
+          <p:txBody>
+            <a:bodyPr rtlCol="0" anchor="ctr"/>
+            <a:lstStyle/>
+            <a:p>
+              <a:pPr algn="ctr"/>
+            </a:p>
+          </p:txBody>
+        </p:sp>
+        <p:sp>
+          <p:nvSpPr>
+            <p:cNvPr id="728" name="BrandDeck Diagram Text 2"/>
+            <p:cNvSpPr txBox="1"/>
+            <p:nvPr/>
+          </p:nvSpPr>
+          <p:spPr>
+            <a:xfrm>
+              <a:off x="1146142" y="3234258"/>
+              <a:ext cx="9343965" cy="860393"/>
+            </a:xfrm>
+            <a:prstGeom prst="rect">
+              <a:avLst/>
+            </a:prstGeom>
+            <a:noFill/>
+          </p:spPr>
+          <p:txBody>
+            <a:bodyPr wrap="square" anchor="ctr" lIns="36576" tIns="18288" rIns="36576" bIns="18288">
+              <a:noAutofit/>
+            </a:bodyPr>
+            <a:lstStyle/>
+            <a:p>
+              <a:pPr algn="l">
+                <a:lnSpc>
+                  <a:spcPct val="110000"/>
+                </a:lnSpc>
+              </a:pPr>
+              <a:r>
+                <a:rPr sz="1800" b="1">
+                  <a:solidFill>
+                    <a:srgbClr val="FFFFFF"/>
+                  </a:solidFill>
+                  <a:latin typeface="Play"/>
+                </a:rPr>
+                <a:t>Причина</a:t>
+              </a:r>
+            </a:p>
+            <a:p>
+              <a:pPr algn="l">
+                <a:lnSpc>
+                  <a:spcPct val="110000"/>
+                </a:lnSpc>
+                <a:spcBef>
+                  <a:spcPts val="450"/>
+                </a:spcBef>
+              </a:pPr>
+              <a:r>
+                <a:rPr sz="1800" b="0">
+                  <a:solidFill>
+                    <a:srgbClr val="FFFFFF"/>
+                  </a:solidFill>
+                  <a:latin typeface="Play"/>
+                </a:rPr>
+                <a:t>Отсутствие быстрого доступа к инструкциям</a:t>
+              </a:r>
+            </a:p>
+          </p:txBody>
+        </p:sp>
+        <p:sp>
+          <p:nvSpPr>
+            <p:cNvPr id="729" name="BrandDeck Diagram Card 3"/>
+            <p:cNvSpPr/>
+            <p:nvPr/>
+          </p:nvSpPr>
+          <p:spPr>
+            <a:xfrm>
+              <a:off x="429253" y="4431932"/>
+              <a:ext cx="10280311" cy="1123740"/>
+            </a:xfrm>
+            <a:prstGeom prst="roundRect">
+              <a:avLst>
+                <a:gd name="adj" fmla="val 8000"/>
+              </a:avLst>
+            </a:prstGeom>
+            <a:solidFill>
+              <a:srgbClr val="1A1A1A"/>
+            </a:solidFill>
+            <a:ln>
+              <a:noFill/>
+            </a:ln>
+          </p:spPr>
+          <p:txBody>
+            <a:bodyPr rtlCol="0" anchor="ctr"/>
+            <a:lstStyle/>
+            <a:p>
+              <a:pPr algn="ctr"/>
+            </a:p>
+          </p:txBody>
+        </p:sp>
+        <p:sp>
+          <p:nvSpPr>
+            <p:cNvPr id="730" name="BrandDeck Diagram Icon 3 Badge"/>
+            <p:cNvSpPr/>
+            <p:nvPr/>
+          </p:nvSpPr>
+          <p:spPr>
+            <a:xfrm>
+              <a:off x="648708" y="4810922"/>
+              <a:ext cx="365760" cy="365760"/>
+            </a:xfrm>
+            <a:prstGeom prst="ellipse">
+              <a:avLst/>
+            </a:prstGeom>
+            <a:solidFill>
+              <a:srgbClr val="006DEB"/>
+            </a:solidFill>
+            <a:ln>
+              <a:noFill/>
+            </a:ln>
+          </p:spPr>
+          <p:txBody>
+            <a:bodyPr rtlCol="0" anchor="ctr"/>
+            <a:lstStyle/>
+            <a:p>
+              <a:pPr algn="ctr"/>
+            </a:p>
+          </p:txBody>
+        </p:sp>
+        <p:sp>
+          <p:nvSpPr>
+            <p:cNvPr id="731" name="BrandDeck Icon trophy"/>
+            <p:cNvSpPr/>
+            <p:nvPr/>
+          </p:nvSpPr>
+          <p:spPr>
+            <a:xfrm>
+              <a:off x="729176" y="4891389"/>
+              <a:ext cx="204825" cy="204825"/>
+            </a:xfrm>
+            <a:custGeom>
+              <a:avLst/>
+              <a:gdLst/>
+              <a:ahLst/>
+              <a:cxnLst/>
+              <a:rect l="l" t="t" r="r" b="b"/>
+              <a:pathLst>
+                <a:path w="24000" h="24000" fill="none">
+                  <a:moveTo>
+                    <a:pt x="6000" y="9000"/>
+                  </a:moveTo>
+                  <a:lnTo>
+                    <a:pt x="4500" y="9000"/>
+                  </a:lnTo>
+                  <a:cubicBezTo>
+                    <a:pt x="3119" y="9000"/>
+                    <a:pt x="2000" y="7881"/>
+                    <a:pt x="2000" y="6500"/>
+                  </a:cubicBezTo>
+                  <a:cubicBezTo>
+                    <a:pt x="2000" y="5119"/>
+                    <a:pt x="3119" y="4000"/>
+                    <a:pt x="4500" y="4000"/>
+                  </a:cubicBezTo>
+                  <a:lnTo>
+                    <a:pt x="6000" y="4000"/>
+                  </a:lnTo>
+                </a:path>
+                <a:path w="24000" h="24000" fill="none">
+                  <a:moveTo>
+                    <a:pt x="18000" y="9000"/>
+                  </a:moveTo>
+                  <a:lnTo>
+                    <a:pt x="19500" y="9000"/>
+                  </a:lnTo>
+                  <a:cubicBezTo>
+                    <a:pt x="20881" y="9000"/>
+                    <a:pt x="22000" y="7881"/>
+                    <a:pt x="22000" y="6500"/>
+                  </a:cubicBezTo>
+                  <a:cubicBezTo>
+                    <a:pt x="22000" y="5119"/>
+                    <a:pt x="20881" y="4000"/>
+                    <a:pt x="19500" y="4000"/>
+                  </a:cubicBezTo>
+                  <a:lnTo>
+                    <a:pt x="18000" y="4000"/>
+                  </a:lnTo>
+                </a:path>
+                <a:path w="24000" h="24000" fill="none">
+                  <a:moveTo>
+                    <a:pt x="4000" y="22000"/>
+                  </a:moveTo>
+                  <a:lnTo>
+                    <a:pt x="20000" y="22000"/>
+                  </a:lnTo>
+                </a:path>
+                <a:path w="24000" h="24000" fill="none">
+                  <a:moveTo>
+                    <a:pt x="10000" y="14660"/>
+                  </a:moveTo>
+                  <a:lnTo>
+                    <a:pt x="10000" y="17000"/>
+                  </a:lnTo>
+                  <a:cubicBezTo>
+                    <a:pt x="10000" y="17550"/>
+                    <a:pt x="9530" y="17980"/>
+                    <a:pt x="9030" y="18210"/>
+                  </a:cubicBezTo>
+                  <a:cubicBezTo>
+                    <a:pt x="7850" y="18750"/>
+                    <a:pt x="7000" y="20240"/>
+                    <a:pt x="7000" y="22000"/>
+                  </a:cubicBezTo>
+                </a:path>
+                <a:path w="24000" h="24000" fill="none">
+                  <a:moveTo>
+                    <a:pt x="14000" y="14660"/>
+                  </a:moveTo>
+                  <a:lnTo>
+                    <a:pt x="14000" y="17000"/>
+                  </a:lnTo>
+                  <a:cubicBezTo>
+                    <a:pt x="14000" y="17550"/>
+                    <a:pt x="14470" y="17980"/>
+                    <a:pt x="14970" y="18210"/>
+                  </a:cubicBezTo>
+                  <a:cubicBezTo>
+                    <a:pt x="16150" y="18750"/>
+                    <a:pt x="17000" y="20240"/>
+                    <a:pt x="17000" y="22000"/>
+                  </a:cubicBezTo>
+                </a:path>
+                <a:path w="24000" h="24000" fill="none">
+                  <a:moveTo>
+                    <a:pt x="18000" y="2000"/>
+                  </a:moveTo>
+                  <a:lnTo>
+                    <a:pt x="6000" y="2000"/>
+                  </a:lnTo>
+                  <a:lnTo>
+                    <a:pt x="6000" y="9000"/>
+                  </a:lnTo>
+                  <a:cubicBezTo>
+                    <a:pt x="6000" y="12314"/>
+                    <a:pt x="8686" y="15000"/>
+                    <a:pt x="12000" y="15000"/>
+                  </a:cubicBezTo>
+                  <a:cubicBezTo>
+                    <a:pt x="15314" y="15000"/>
+                    <a:pt x="18000" y="12314"/>
+                    <a:pt x="18000" y="9000"/>
+                  </a:cubicBezTo>
+                  <a:lnTo>
+                    <a:pt x="18000" y="2000"/>
+                  </a:lnTo>
+                  <a:close/>
+                </a:path>
+              </a:pathLst>
+            </a:custGeom>
+            <a:noFill/>
+            <a:ln w="17068" cap="rnd">
+              <a:solidFill>
+                <a:srgbClr val="FFFFFF"/>
+              </a:solidFill>
+              <a:round/>
+            </a:ln>
+          </p:spPr>
+          <p:txBody>
+            <a:bodyPr rtlCol="0" anchor="ctr"/>
+            <a:lstStyle/>
+            <a:p>
+              <a:pPr algn="ctr"/>
+            </a:p>
+          </p:txBody>
+        </p:sp>
+        <p:sp>
+          <p:nvSpPr>
+            <p:cNvPr id="732" name="BrandDeck Diagram Text 3"/>
+            <p:cNvSpPr txBox="1"/>
+            <p:nvPr/>
+          </p:nvSpPr>
+          <p:spPr>
+            <a:xfrm>
+              <a:off x="1146142" y="4563605"/>
+              <a:ext cx="9343965" cy="860393"/>
+            </a:xfrm>
+            <a:prstGeom prst="rect">
+              <a:avLst/>
+            </a:prstGeom>
+            <a:noFill/>
+          </p:spPr>
+          <p:txBody>
+            <a:bodyPr wrap="square" anchor="ctr" lIns="36576" tIns="18288" rIns="36576" bIns="18288">
+              <a:noAutofit/>
+            </a:bodyPr>
+            <a:lstStyle/>
+            <a:p>
+              <a:pPr algn="l">
+                <a:lnSpc>
+                  <a:spcPct val="110000"/>
+                </a:lnSpc>
+              </a:pPr>
+              <a:r>
+                <a:rPr sz="1800" b="1">
+                  <a:solidFill>
+                    <a:srgbClr val="FFFFFF"/>
+                  </a:solidFill>
+                  <a:latin typeface="Play"/>
+                </a:rPr>
+                <a:t>Результат</a:t>
+              </a:r>
+            </a:p>
+            <a:p>
+              <a:pPr algn="l">
+                <a:lnSpc>
+                  <a:spcPct val="110000"/>
+                </a:lnSpc>
+                <a:spcBef>
+                  <a:spcPts val="450"/>
+                </a:spcBef>
+              </a:pPr>
+              <a:r>
+                <a:rPr sz="1800" b="0">
+                  <a:solidFill>
+                    <a:srgbClr val="FFFFFF"/>
+                  </a:solidFill>
+                  <a:latin typeface="Play"/>
+                </a:rPr>
+                <a:t>Лишняя работа специалистов поддержки</a:t>
+              </a:r>
+            </a:p>
+          </p:txBody>
+        </p:sp>
+      </p:grpSp>
+    </p:spTree>
+  </p:cSld>
+  <p:clrMapOvr>
+    <a:masterClrMapping/>
+  </p:clrMapOvr>
+</p:sld>
+</file>
+
+<file path=ppt/slides/slide4.xml><?xml version="1.0" encoding="utf-8"?>
+<p:sld xmlns:a="http://schemas.openxmlformats.org/drawingml/2006/main" xmlns:p="http://schemas.openxmlformats.org/presentationml/2006/main" xmlns:r="http://schemas.openxmlformats.org/officeDocument/2006/relationships">
+  <p:cSld>
+    <p:spTree>
+      <p:nvGrpSpPr>
+        <p:cNvPr id="1" name=""/>
+        <p:cNvGrpSpPr/>
+        <p:nvPr/>
+      </p:nvGrpSpPr>
+      <p:grpSpPr/>
+      <p:sp>
+        <p:nvSpPr>
+          <p:cNvPr id="679" name="Google Shape;679;p31"/>
+          <p:cNvSpPr/>
+          <p:nvPr/>
+        </p:nvSpPr>
+        <p:spPr>
+          <a:xfrm>
+            <a:off x="0" y="4748271"/>
+            <a:ext cx="12192000" cy="2109730"/>
+          </a:xfrm>
+          <a:prstGeom prst="rect">
+            <a:avLst/>
+          </a:prstGeom>
+          <a:gradFill>
+            <a:gsLst>
+              <a:gs pos="0">
+                <a:srgbClr val="0077FF">
+                  <a:alpha val="61961"/>
+                </a:srgbClr>
+              </a:gs>
+              <a:gs pos="99000">
+                <a:srgbClr val="00AEE8"/>
+              </a:gs>
+              <a:gs pos="100000">
+                <a:srgbClr val="00AEE8"/>
+              </a:gs>
+            </a:gsLst>
+            <a:lin ang="14400000" scaled="0"/>
+          </a:gradFill>
+          <a:ln>
+            <a:noFill/>
+          </a:ln>
+        </p:spPr>
+        <p:txBody>
+          <a:bodyPr anchorCtr="0" anchor="ctr" bIns="0" lIns="108000" spcFirstLastPara="1" rIns="91425" wrap="square" tIns="0">
+            <a:noAutofit/>
+          </a:bodyPr>
+          <a:lstStyle/>
+          <a:p>
+            <a:pPr indent="0" lvl="0" marL="0" marR="0" rtl="0" algn="l">
+              <a:spcBef>
+                <a:spcPts val="0"/>
+              </a:spcBef>
+              <a:spcAft>
+                <a:spcPts val="0"/>
+              </a:spcAft>
+              <a:buNone/>
+            </a:pPr>
+            <a:r>
+              <a:t/>
+            </a:r>
+            <a:endParaRPr sz="1100">
+              <a:solidFill>
+                <a:schemeClr val="lt1"/>
+              </a:solidFill>
+              <a:latin typeface="Play"/>
+              <a:ea typeface="Play"/>
+              <a:cs typeface="Play"/>
+              <a:sym typeface="Play"/>
+            </a:endParaRPr>
+          </a:p>
+        </p:txBody>
+      </p:sp>
+      <p:sp>
+        <p:nvSpPr>
+          <p:cNvPr id="680" name="BrandDeck Text 680"/>
+          <p:cNvSpPr txBox="1"/>
+          <p:nvPr>
+            <p:ph type="title"/>
+          </p:nvPr>
+        </p:nvSpPr>
+        <p:spPr>
+          <a:xfrm>
+            <a:off x="427864" y="424691"/>
+            <a:ext cx="7827311" cy="1167572"/>
+          </a:xfrm>
+          <a:prstGeom prst="rect">
+            <a:avLst/>
+          </a:prstGeom>
+          <a:noFill/>
+          <a:ln>
+            <a:noFill/>
+          </a:ln>
+        </p:spPr>
+        <p:txBody>
+          <a:bodyPr anchorCtr="0" anchor="t" bIns="0" lIns="0" spcFirstLastPara="1" rIns="0" wrap="square" tIns="0" vert="horz">
+            <a:normAutofit/>
+          </a:bodyPr>
+          <a:lstStyle/>
+          <a:p>
+            <a:pPr indent="0" marL="0" rtl="0" algn="l">
+              <a:lnSpc>
+                <a:spcPct val="115000"/>
+              </a:lnSpc>
+              <a:spcBef>
+                <a:spcPts val="0"/>
+              </a:spcBef>
+              <a:spcAft>
+                <a:spcPts val="480"/>
+              </a:spcAft>
+              <a:buClr>
+                <a:schemeClr val="lt1"/>
+              </a:buClr>
+              <a:buSzPts val="3600"/>
+              <a:buFont typeface="Play"/>
+              <a:buNone/>
+            </a:pPr>
+            <a:r>
+              <a:rPr sz="3200"/>
+              <a:t>Вопросы касаются регламентов и инструкций</a:t>
+            </a:r>
+            <a:endParaRPr/>
+          </a:p>
+        </p:txBody>
+      </p:sp>
+      <p:sp>
+        <p:nvSpPr>
+          <p:cNvPr id="681" name="BrandDeck Text 681"/>
+          <p:cNvSpPr/>
+          <p:nvPr/>
+        </p:nvSpPr>
+        <p:spPr>
+          <a:xfrm>
+            <a:off x="427864" y="1837067"/>
+            <a:ext cx="3636000" cy="2022006"/>
+          </a:xfrm>
+          <a:prstGeom prst="roundRect">
+            <a:avLst>
+              <a:gd fmla="val 6326" name="adj"/>
+            </a:avLst>
+          </a:prstGeom>
+          <a:solidFill>
+            <a:srgbClr val="212121"/>
+          </a:solidFill>
+          <a:ln>
+            <a:noFill/>
+          </a:ln>
+        </p:spPr>
+        <p:txBody>
+          <a:bodyPr anchorCtr="0" anchor="t" bIns="45700" lIns="108000" spcFirstLastPara="1" rIns="91425" wrap="square" tIns="72000" vert="horz">
+            <a:normAutofit/>
+          </a:bodyPr>
+          <a:lstStyle/>
+          <a:p>
+            <a:pPr indent="0" marL="0" marR="0" rtl="0" algn="l">
+              <a:lnSpc>
+                <a:spcPct val="115000"/>
+              </a:lnSpc>
+              <a:spcBef>
+                <a:spcPts val="0"/>
+              </a:spcBef>
+              <a:spcAft>
+                <a:spcPts val="270"/>
+              </a:spcAft>
+              <a:buNone/>
+            </a:pPr>
+            <a:r>
+              <a:rPr sz="1800">
+                <a:solidFill>
+                  <a:srgbClr val="FFFFFF"/>
+                </a:solidFill>
+                <a:latin typeface="Play"/>
+              </a:rPr>
+              <a:t>Сотрудники ищут ответы в регламентах и инструкциях.</a:t>
+            </a:r>
+            <a:endParaRPr/>
+          </a:p>
+        </p:txBody>
+      </p:sp>
+      <p:sp>
+        <p:nvSpPr>
+          <p:cNvPr id="682" name="BrandDeck Text 682"/>
+          <p:cNvSpPr/>
+          <p:nvPr/>
+        </p:nvSpPr>
+        <p:spPr>
+          <a:xfrm>
+            <a:off x="4217594" y="1837067"/>
+            <a:ext cx="3636000" cy="2022006"/>
+          </a:xfrm>
+          <a:prstGeom prst="roundRect">
+            <a:avLst>
+              <a:gd fmla="val 6871" name="adj"/>
+            </a:avLst>
+          </a:prstGeom>
+          <a:solidFill>
+            <a:srgbClr val="212121"/>
+          </a:solidFill>
+          <a:ln>
+            <a:noFill/>
+          </a:ln>
+        </p:spPr>
+        <p:txBody>
+          <a:bodyPr anchorCtr="0" anchor="t" bIns="45700" lIns="108000" spcFirstLastPara="1" rIns="91425" wrap="square" tIns="72000" vert="horz">
+            <a:normAutofit/>
+          </a:bodyPr>
+          <a:lstStyle/>
+          <a:p>
+            <a:pPr indent="0" marL="0" marR="0" rtl="0" algn="l">
+              <a:lnSpc>
+                <a:spcPct val="115000"/>
+              </a:lnSpc>
+              <a:spcBef>
+                <a:spcPts val="0"/>
+              </a:spcBef>
+              <a:spcAft>
+                <a:spcPts val="270"/>
+              </a:spcAft>
+              <a:buNone/>
+            </a:pPr>
+            <a:r>
+              <a:rPr sz="1800">
+                <a:solidFill>
+                  <a:srgbClr val="FFFFFF"/>
+                </a:solidFill>
+                <a:latin typeface="Play"/>
+              </a:rPr>
+              <a:t>Частые запросы требуют точных ссылок на документы.</a:t>
+            </a:r>
+            <a:endParaRPr/>
+          </a:p>
+        </p:txBody>
+      </p:sp>
+      <p:sp>
+        <p:nvSpPr>
+          <p:cNvPr id="683" name="BrandDeck Text 683"/>
+          <p:cNvSpPr/>
+          <p:nvPr/>
+        </p:nvSpPr>
+        <p:spPr>
+          <a:xfrm>
+            <a:off x="8007324" y="1837067"/>
+            <a:ext cx="3636000" cy="2022006"/>
+          </a:xfrm>
+          <a:prstGeom prst="roundRect">
+            <a:avLst>
+              <a:gd fmla="val 5781" name="adj"/>
+            </a:avLst>
+          </a:prstGeom>
+          <a:solidFill>
+            <a:srgbClr val="212121"/>
+          </a:solidFill>
+          <a:ln>
+            <a:noFill/>
+          </a:ln>
+        </p:spPr>
+        <p:txBody>
+          <a:bodyPr anchorCtr="0" anchor="t" bIns="45700" lIns="108000" spcFirstLastPara="1" rIns="91425" wrap="square" tIns="72000" vert="horz">
+            <a:normAutofit/>
+          </a:bodyPr>
+          <a:lstStyle/>
+          <a:p>
+            <a:pPr indent="0" marL="0" marR="0" rtl="0" algn="l">
+              <a:lnSpc>
+                <a:spcPct val="115000"/>
+              </a:lnSpc>
+              <a:spcBef>
+                <a:spcPts val="0"/>
+              </a:spcBef>
+              <a:spcAft>
+                <a:spcPts val="270"/>
+              </a:spcAft>
+              <a:buNone/>
+            </a:pPr>
+            <a:r>
+              <a:rPr sz="1800">
+                <a:solidFill>
+                  <a:srgbClr val="FFFFFF"/>
+                </a:solidFill>
+                <a:latin typeface="Play"/>
+              </a:rPr>
+              <a:t>Повторяющиеся вопросы занимают время поддержки.</a:t>
+            </a:r>
+            <a:endParaRPr/>
+          </a:p>
+        </p:txBody>
+      </p:sp>
+    </p:spTree>
+  </p:cSld>
+  <p:clrMapOvr>
+    <a:masterClrMapping/>
+  </p:clrMapOvr>
+</p:sld>
+</file>
+
+<file path=ppt/slides/slide5.xml><?xml version="1.0" encoding="utf-8"?>
 <p:sld xmlns:a="http://schemas.openxmlformats.org/drawingml/2006/main" xmlns:p="http://schemas.openxmlformats.org/presentationml/2006/main" xmlns:r="http://schemas.openxmlformats.org/officeDocument/2006/relationships">
   <p:cSld>
     <p:spTree>
@@ -9922,7 +11146,7 @@
           </a:ln>
         </p:spPr>
         <p:txBody>
-          <a:bodyPr anchorCtr="0" anchor="t" bIns="0" lIns="0" spcFirstLastPara="1" rIns="0" wrap="square" tIns="0">
+          <a:bodyPr anchorCtr="0" anchor="t" bIns="0" lIns="0" spcFirstLastPara="1" rIns="0" wrap="square" tIns="0" vert="horz">
             <a:normAutofit/>
           </a:bodyPr>
           <a:lstStyle/>
@@ -9935,7 +11159,7 @@
                 <a:spcPts val="0"/>
               </a:spcBef>
               <a:spcAft>
-                <a:spcPts val="359"/>
+                <a:spcPts val="420"/>
               </a:spcAft>
               <a:buClr>
                 <a:schemeClr val="lt1"/>
@@ -9945,8 +11169,532 @@
               <a:buNone/>
             </a:pPr>
             <a:r>
+              <a:rPr sz="2800"/>
+              <a:t>ИИ-помощник отвечает на вопросы и даёт ссылку на документ-источник</a:t>
+            </a:r>
+            <a:endParaRPr/>
+          </a:p>
+        </p:txBody>
+      </p:sp>
+      <p:sp>
+        <p:nvSpPr>
+          <p:cNvPr id="461" name="BrandDeck Text 461"/>
+          <p:cNvSpPr/>
+          <p:nvPr/>
+        </p:nvSpPr>
+        <p:spPr>
+          <a:xfrm>
+            <a:off x="4056891" y="1666499"/>
+            <a:ext cx="3420000" cy="3525002"/>
+          </a:xfrm>
+          <a:prstGeom prst="roundRect">
+            <a:avLst>
+              <a:gd fmla="val 4027" name="adj"/>
+            </a:avLst>
+          </a:prstGeom>
+          <a:solidFill>
+            <a:srgbClr val="212121"/>
+          </a:solidFill>
+          <a:ln>
+            <a:noFill/>
+          </a:ln>
+        </p:spPr>
+        <p:txBody>
+          <a:bodyPr anchorCtr="0" anchor="t" bIns="45700" lIns="108000" spcFirstLastPara="1" rIns="91425" wrap="square" tIns="108000" vert="horz">
+            <a:normAutofit/>
+          </a:bodyPr>
+          <a:lstStyle/>
+          <a:p>
+            <a:pPr indent="0" marL="0" marR="0" rtl="0" algn="l">
+              <a:lnSpc>
+                <a:spcPct val="115000"/>
+              </a:lnSpc>
+              <a:spcBef>
+                <a:spcPts val="0"/>
+              </a:spcBef>
+              <a:spcAft>
+                <a:spcPts val="300"/>
+              </a:spcAft>
+              <a:buNone/>
+            </a:pPr>
+            <a:r>
+              <a:rPr sz="2000">
+                <a:solidFill>
+                  <a:srgbClr val="FFFFFF"/>
+                </a:solidFill>
+                <a:latin typeface="Play"/>
+              </a:rPr>
+              <a:t>Система автоматически предоставляет ссылку на документ-источник.</a:t>
+            </a:r>
+            <a:endParaRPr/>
+          </a:p>
+        </p:txBody>
+      </p:sp>
+      <p:sp>
+        <p:nvSpPr>
+          <p:cNvPr id="462" name="BrandDeck Text 462"/>
+          <p:cNvSpPr/>
+          <p:nvPr/>
+        </p:nvSpPr>
+        <p:spPr>
+          <a:xfrm>
+            <a:off x="415687" y="1666499"/>
+            <a:ext cx="3420000" cy="3525002"/>
+          </a:xfrm>
+          <a:prstGeom prst="roundRect">
+            <a:avLst>
+              <a:gd fmla="val 4432" name="adj"/>
+            </a:avLst>
+          </a:prstGeom>
+          <a:solidFill>
+            <a:srgbClr val="212121"/>
+          </a:solidFill>
+          <a:ln>
+            <a:noFill/>
+          </a:ln>
+        </p:spPr>
+        <p:txBody>
+          <a:bodyPr anchorCtr="0" anchor="t" bIns="45700" lIns="108000" spcFirstLastPara="1" rIns="91425" wrap="square" tIns="108000" vert="horz">
+            <a:normAutofit/>
+          </a:bodyPr>
+          <a:lstStyle/>
+          <a:p>
+            <a:pPr indent="0" marL="0" marR="0" rtl="0" algn="l">
+              <a:lnSpc>
+                <a:spcPct val="115000"/>
+              </a:lnSpc>
+              <a:spcBef>
+                <a:spcPts val="0"/>
+              </a:spcBef>
+              <a:spcAft>
+                <a:spcPts val="300"/>
+              </a:spcAft>
+              <a:buNone/>
+            </a:pPr>
+            <a:r>
+              <a:rPr sz="2000">
+                <a:solidFill>
+                  <a:srgbClr val="FFFFFF"/>
+                </a:solidFill>
+                <a:latin typeface="Play"/>
+              </a:rPr>
+              <a:t>ИИ-помощник отвечает на вопросы по регламентам и инструкциям.</a:t>
+            </a:r>
+            <a:endParaRPr/>
+          </a:p>
+        </p:txBody>
+      </p:sp>
+    </p:spTree>
+  </p:cSld>
+  <p:clrMapOvr>
+    <a:masterClrMapping/>
+  </p:clrMapOvr>
+</p:sld>
+</file>
+
+<file path=ppt/slides/slide6.xml><?xml version="1.0" encoding="utf-8"?>
+<p:sld xmlns:a="http://schemas.openxmlformats.org/drawingml/2006/main" xmlns:p="http://schemas.openxmlformats.org/presentationml/2006/main" xmlns:r="http://schemas.openxmlformats.org/officeDocument/2006/relationships">
+  <p:cSld>
+    <p:spTree>
+      <p:nvGrpSpPr>
+        <p:cNvPr id="1" name=""/>
+        <p:cNvGrpSpPr/>
+        <p:nvPr/>
+      </p:nvGrpSpPr>
+      <p:grpSpPr/>
+      <p:sp>
+        <p:nvSpPr>
+          <p:cNvPr id="404" name="BrandDeck Text 404"/>
+          <p:cNvSpPr txBox="1"/>
+          <p:nvPr>
+            <p:ph type="title"/>
+          </p:nvPr>
+        </p:nvSpPr>
+        <p:spPr>
+          <a:xfrm>
+            <a:off x="429253" y="1460299"/>
+            <a:ext cx="3865161" cy="1167572"/>
+          </a:xfrm>
+          <a:prstGeom prst="rect">
+            <a:avLst/>
+          </a:prstGeom>
+          <a:noFill/>
+          <a:ln>
+            <a:noFill/>
+          </a:ln>
+        </p:spPr>
+        <p:txBody>
+          <a:bodyPr anchorCtr="0" anchor="t" bIns="0" lIns="0" spcFirstLastPara="1" rIns="0" wrap="square" tIns="0" vert="horz">
+            <a:normAutofit/>
+          </a:bodyPr>
+          <a:lstStyle/>
+          <a:p>
+            <a:pPr indent="0" marL="0" rtl="0" algn="l">
+              <a:lnSpc>
+                <a:spcPct val="115000"/>
+              </a:lnSpc>
+              <a:spcBef>
+                <a:spcPts val="0"/>
+              </a:spcBef>
+              <a:spcAft>
+                <a:spcPts val="270"/>
+              </a:spcAft>
+              <a:buClr>
+                <a:schemeClr val="lt1"/>
+              </a:buClr>
+              <a:buSzPts val="3600"/>
+              <a:buFont typeface="Play"/>
+              <a:buNone/>
+            </a:pPr>
+            <a:r>
+              <a:rPr sz="1800"/>
+              <a:t>Модель работает внутри контура компании, документы не уходят наружу</a:t>
+            </a:r>
+            <a:endParaRPr/>
+          </a:p>
+        </p:txBody>
+      </p:sp>
+      <p:sp>
+        <p:nvSpPr>
+          <p:cNvPr id="418" name="BrandDeck Body"/>
+          <p:cNvSpPr txBox="1"/>
+          <p:nvPr/>
+        </p:nvSpPr>
+        <p:spPr>
+          <a:xfrm>
+            <a:off x="5808913" y="1657446"/>
+            <a:ext cx="2265869" cy="4624084"/>
+          </a:xfrm>
+          <a:prstGeom prst="rect">
+            <a:avLst/>
+          </a:prstGeom>
+          <a:noFill/>
+        </p:spPr>
+        <p:txBody>
+          <a:bodyPr wrap="square" vert="horz" anchor="t" lIns="36576" rIns="36576" tIns="18288" bIns="18288">
+            <a:normAutofit/>
+          </a:bodyPr>
+          <a:lstStyle/>
+          <a:p>
+            <a:pPr algn="l">
+              <a:lnSpc>
+                <a:spcPct val="115000"/>
+              </a:lnSpc>
+              <a:spcBef>
+                <a:spcPts val="0"/>
+              </a:spcBef>
+              <a:spcAft>
+                <a:spcPts val="240"/>
+              </a:spcAft>
+            </a:pPr>
+            <a:r>
+              <a:rPr sz="1600">
+                <a:solidFill>
+                  <a:srgbClr val="FFFFFF"/>
+                </a:solidFill>
+                <a:latin typeface="Play"/>
+              </a:rPr>
+              <a:t>• Модель работает внутри контура компании.</a:t>
+            </a:r>
+          </a:p>
+          <a:p>
+            <a:pPr algn="l">
+              <a:lnSpc>
+                <a:spcPct val="115000"/>
+              </a:lnSpc>
+              <a:spcBef>
+                <a:spcPts val="0"/>
+              </a:spcBef>
+              <a:spcAft>
+                <a:spcPts val="240"/>
+              </a:spcAft>
+            </a:pPr>
+            <a:r>
+              <a:rPr sz="1600">
+                <a:solidFill>
+                  <a:srgbClr val="FFFFFF"/>
+                </a:solidFill>
+                <a:latin typeface="Play"/>
+              </a:rPr>
+              <a:t>• Документы не покидают внутреннюю сеть.</a:t>
+            </a:r>
+          </a:p>
+          <a:p>
+            <a:pPr algn="l">
+              <a:lnSpc>
+                <a:spcPct val="115000"/>
+              </a:lnSpc>
+              <a:spcBef>
+                <a:spcPts val="0"/>
+              </a:spcBef>
+              <a:spcAft>
+                <a:spcPts val="240"/>
+              </a:spcAft>
+            </a:pPr>
+            <a:r>
+              <a:rPr sz="1600">
+                <a:solidFill>
+                  <a:srgbClr val="FFFFFF"/>
+                </a:solidFill>
+                <a:latin typeface="Play"/>
+              </a:rPr>
+              <a:t>• При отсутствии ответа вопрос уходит специалисту.</a:t>
+            </a:r>
+          </a:p>
+        </p:txBody>
+      </p:sp>
+      <p:pic>
+        <p:nvPicPr>
+          <p:cNvPr id="419" name="BrandDeck Image" descr="внутренний контур серверная"/>
+          <p:cNvPicPr>
+            <a:picLocks noChangeAspect="1"/>
+          </p:cNvPicPr>
+          <p:nvPr/>
+        </p:nvPicPr>
+        <p:blipFill>
+          <a:blip r:embed="rId4"/>
+          <a:srcRect l="23238" r="41238"/>
+          <a:stretch>
+            <a:fillRect/>
+          </a:stretch>
+        </p:blipFill>
+        <p:spPr>
+          <a:xfrm>
+            <a:off x="8330814" y="1657446"/>
+            <a:ext cx="2918746" cy="4624084"/>
+          </a:xfrm>
+          <a:prstGeom prst="rect">
+            <a:avLst/>
+          </a:prstGeom>
+        </p:spPr>
+      </p:pic>
+    </p:spTree>
+  </p:cSld>
+  <p:clrMapOvr>
+    <a:masterClrMapping/>
+  </p:clrMapOvr>
+</p:sld>
+</file>
+
+<file path=ppt/slides/slide7.xml><?xml version="1.0" encoding="utf-8"?>
+<p:sld xmlns:a="http://schemas.openxmlformats.org/drawingml/2006/main" xmlns:p="http://schemas.openxmlformats.org/presentationml/2006/main" xmlns:r="http://schemas.openxmlformats.org/officeDocument/2006/relationships">
+  <p:cSld>
+    <p:spTree>
+      <p:nvGrpSpPr>
+        <p:cNvPr id="1" name=""/>
+        <p:cNvGrpSpPr/>
+        <p:nvPr/>
+      </p:nvGrpSpPr>
+      <p:grpSpPr/>
+      <p:sp>
+        <p:nvSpPr>
+          <p:cNvPr id="486" name="BrandDeck Text 486"/>
+          <p:cNvSpPr txBox="1"/>
+          <p:nvPr>
+            <p:ph type="title"/>
+          </p:nvPr>
+        </p:nvSpPr>
+        <p:spPr>
+          <a:xfrm>
+            <a:off x="429253" y="424691"/>
+            <a:ext cx="7827311" cy="1167572"/>
+          </a:xfrm>
+          <a:prstGeom prst="rect">
+            <a:avLst/>
+          </a:prstGeom>
+          <a:noFill/>
+          <a:ln>
+            <a:noFill/>
+          </a:ln>
+        </p:spPr>
+        <p:txBody>
+          <a:bodyPr anchorCtr="0" anchor="t" bIns="0" lIns="0" spcFirstLastPara="1" rIns="0" wrap="square" tIns="0" vert="horz">
+            <a:normAutofit/>
+          </a:bodyPr>
+          <a:lstStyle/>
+          <a:p>
+            <a:pPr indent="0" marL="0" rtl="0" algn="l">
+              <a:lnSpc>
+                <a:spcPct val="115000"/>
+              </a:lnSpc>
+              <a:spcBef>
+                <a:spcPts val="0"/>
+              </a:spcBef>
+              <a:spcAft>
+                <a:spcPts val="359"/>
+              </a:spcAft>
+              <a:buClr>
+                <a:schemeClr val="lt1"/>
+              </a:buClr>
+              <a:buSzPts val="3600"/>
+              <a:buFont typeface="Play"/>
+              <a:buNone/>
+            </a:pPr>
+            <a:r>
               <a:rPr sz="2400"/>
-              <a:t>Влияет на 150 сотрудников двух подразделений при текущем ручном процессе</a:t>
+              <a:t>Если подтверждённого ответа нет, вопрос уходит специалисту с контекстом</a:t>
+            </a:r>
+            <a:endParaRPr/>
+          </a:p>
+        </p:txBody>
+      </p:sp>
+      <p:sp>
+        <p:nvSpPr>
+          <p:cNvPr id="505" name="BrandDeck Body"/>
+          <p:cNvSpPr txBox="1"/>
+          <p:nvPr/>
+        </p:nvSpPr>
+        <p:spPr>
+          <a:xfrm>
+            <a:off x="437111" y="2883834"/>
+            <a:ext cx="4845355" cy="2889807"/>
+          </a:xfrm>
+          <a:prstGeom prst="rect">
+            <a:avLst/>
+          </a:prstGeom>
+          <a:noFill/>
+        </p:spPr>
+        <p:txBody>
+          <a:bodyPr wrap="square" vert="horz" anchor="t" lIns="36576" rIns="36576" tIns="18288" bIns="18288">
+            <a:normAutofit/>
+          </a:bodyPr>
+          <a:lstStyle/>
+          <a:p>
+            <a:pPr algn="l">
+              <a:lnSpc>
+                <a:spcPct val="115000"/>
+              </a:lnSpc>
+              <a:spcBef>
+                <a:spcPts val="0"/>
+              </a:spcBef>
+              <a:spcAft>
+                <a:spcPts val="240"/>
+              </a:spcAft>
+            </a:pPr>
+            <a:r>
+              <a:rPr sz="1600">
+                <a:solidFill>
+                  <a:srgbClr val="E4E7EA"/>
+                </a:solidFill>
+                <a:latin typeface="Play"/>
+              </a:rPr>
+              <a:t>• Вопрос уходит специалисту поддержки вместе с контекстом.</a:t>
+            </a:r>
+          </a:p>
+          <a:p>
+            <a:pPr algn="l">
+              <a:lnSpc>
+                <a:spcPct val="115000"/>
+              </a:lnSpc>
+              <a:spcBef>
+                <a:spcPts val="0"/>
+              </a:spcBef>
+              <a:spcAft>
+                <a:spcPts val="240"/>
+              </a:spcAft>
+            </a:pPr>
+            <a:r>
+              <a:rPr sz="1600">
+                <a:solidFill>
+                  <a:srgbClr val="E4E7EA"/>
+                </a:solidFill>
+                <a:latin typeface="Play"/>
+              </a:rPr>
+              <a:t>• Это происходит, если подтверждённого ответа нет в системе.</a:t>
+            </a:r>
+          </a:p>
+        </p:txBody>
+      </p:sp>
+      <p:pic>
+        <p:nvPicPr>
+          <p:cNvPr id="506" name="BrandDeck Image" descr="сотрудник специалист поддержки"/>
+          <p:cNvPicPr>
+            <a:picLocks noChangeAspect="1"/>
+          </p:cNvPicPr>
+          <p:nvPr/>
+        </p:nvPicPr>
+        <p:blipFill>
+          <a:blip r:embed="rId2"/>
+          <a:srcRect t="6022" b="11183"/>
+          <a:stretch>
+            <a:fillRect/>
+          </a:stretch>
+        </p:blipFill>
+        <p:spPr>
+          <a:xfrm>
+            <a:off x="5538498" y="2883834"/>
+            <a:ext cx="6201730" cy="2889807"/>
+          </a:xfrm>
+          <a:prstGeom prst="rect">
+            <a:avLst/>
+          </a:prstGeom>
+        </p:spPr>
+      </p:pic>
+    </p:spTree>
+  </p:cSld>
+  <p:clrMapOvr>
+    <a:masterClrMapping/>
+  </p:clrMapOvr>
+</p:sld>
+</file>
+
+<file path=ppt/slides/slide8.xml><?xml version="1.0" encoding="utf-8"?>
+<p:sld xmlns:a="http://schemas.openxmlformats.org/drawingml/2006/main" xmlns:p="http://schemas.openxmlformats.org/presentationml/2006/main" xmlns:r="http://schemas.openxmlformats.org/officeDocument/2006/relationships">
+  <p:cSld>
+    <p:spTree>
+      <p:nvGrpSpPr>
+        <p:cNvPr id="1" name=""/>
+        <p:cNvGrpSpPr/>
+        <p:nvPr/>
+      </p:nvGrpSpPr>
+      <p:grpSpPr/>
+      <p:sp>
+        <p:nvSpPr>
+          <p:cNvPr id="441" name="BrandDeck Text 441"/>
+          <p:cNvSpPr txBox="1"/>
+          <p:nvPr>
+            <p:ph type="title"/>
+          </p:nvPr>
+        </p:nvSpPr>
+        <p:spPr>
+          <a:xfrm>
+            <a:off x="429253" y="424691"/>
+            <a:ext cx="7827311" cy="626869"/>
+          </a:xfrm>
+          <a:prstGeom prst="rect">
+            <a:avLst/>
+          </a:prstGeom>
+          <a:noFill/>
+          <a:ln>
+            <a:noFill/>
+          </a:ln>
+        </p:spPr>
+        <p:txBody>
+          <a:bodyPr anchorCtr="0" anchor="t" bIns="0" lIns="0" spcFirstLastPara="1" rIns="0" wrap="square" tIns="0" vert="horz">
+            <a:normAutofit/>
+          </a:bodyPr>
+          <a:lstStyle/>
+          <a:p>
+            <a:pPr indent="0" marL="0" rtl="0" algn="l">
+              <a:lnSpc>
+                <a:spcPct val="115000"/>
+              </a:lnSpc>
+              <a:spcBef>
+                <a:spcPts val="0"/>
+              </a:spcBef>
+              <a:spcAft>
+                <a:spcPts val="270"/>
+              </a:spcAft>
+              <a:buClr>
+                <a:schemeClr val="lt1"/>
+              </a:buClr>
+              <a:buSzPts val="3600"/>
+              <a:buFont typeface="Play"/>
+              <a:buNone/>
+            </a:pPr>
+            <a:r>
+              <a:rPr sz="1800"/>
+              <a:t>Пилот охватывает 2 подразделения и 150 сотрудников в течение 6 недель</a:t>
             </a:r>
             <a:endParaRPr/>
           </a:p>
@@ -9954,28 +11702,28 @@
       </p:sp>
       <p:grpSp>
         <p:nvGrpSpPr>
-          <p:cNvPr id="2" name="BrandDeck Diagram icon_grid" descr="icon_grid: 150 сотрудников Два подразделения; До 30 минут Время поиска инструкции"/>
+          <p:cNvPr id="2" name="BrandDeck Diagram icon_grid" descr="icon_grid: Длительность 6 недель; Охват 2 подразделения; Команда 150 сотрудников"/>
           <p:cNvGrpSpPr/>
           <p:nvPr/>
         </p:nvGrpSpPr>
         <p:grpSpPr>
           <a:xfrm>
-            <a:off x="415687" y="1666499"/>
-            <a:ext cx="10733793" cy="3525001"/>
-            <a:chOff x="415687" y="1666499"/>
-            <a:chExt cx="10733793" cy="3525001"/>
+            <a:off x="5383513" y="2710690"/>
+            <a:ext cx="5917558" cy="3556255"/>
+            <a:chOff x="5383513" y="2710690"/>
+            <a:chExt cx="5917558" cy="3556255"/>
           </a:xfrm>
         </p:grpSpPr>
         <p:sp>
           <p:nvSpPr>
-            <p:cNvPr id="468" name="BrandDeck Diagram Card 1"/>
+            <p:cNvPr id="454" name="BrandDeck Diagram Card 1"/>
             <p:cNvSpPr/>
             <p:nvPr/>
           </p:nvSpPr>
           <p:spPr>
             <a:xfrm>
-              <a:off x="415687" y="1666499"/>
-              <a:ext cx="5259559" cy="3525001"/>
+              <a:off x="5383513" y="2710690"/>
+              <a:ext cx="5917558" cy="1106517"/>
             </a:xfrm>
             <a:prstGeom prst="roundRect">
               <a:avLst>
@@ -9999,14 +11747,14 @@
         </p:sp>
         <p:sp>
           <p:nvSpPr>
-            <p:cNvPr id="469" name="BrandDeck Diagram Icon 1 Badge"/>
+            <p:cNvPr id="455" name="BrandDeck Diagram Icon 1 Badge"/>
             <p:cNvSpPr/>
             <p:nvPr/>
           </p:nvSpPr>
           <p:spPr>
             <a:xfrm>
-              <a:off x="635143" y="1885955"/>
-              <a:ext cx="603504" cy="603504"/>
+              <a:off x="5602969" y="3081068"/>
+              <a:ext cx="365760" cy="365760"/>
             </a:xfrm>
             <a:prstGeom prst="ellipse">
               <a:avLst/>
@@ -10028,14 +11776,497 @@
         </p:sp>
         <p:sp>
           <p:nvSpPr>
-            <p:cNvPr id="470" name="BrandDeck Icon users"/>
+            <p:cNvPr id="456" name="BrandDeck Icon hourglass"/>
             <p:cNvSpPr/>
             <p:nvPr/>
           </p:nvSpPr>
           <p:spPr>
             <a:xfrm>
-              <a:off x="767913" y="2018725"/>
-              <a:ext cx="337962" cy="337962"/>
+              <a:off x="5683436" y="3161536"/>
+              <a:ext cx="204825" cy="204825"/>
+            </a:xfrm>
+            <a:custGeom>
+              <a:avLst/>
+              <a:gdLst/>
+              <a:ahLst/>
+              <a:cxnLst/>
+              <a:rect l="l" t="t" r="r" b="b"/>
+              <a:pathLst>
+                <a:path w="24000" h="24000" fill="none">
+                  <a:moveTo>
+                    <a:pt x="5000" y="22000"/>
+                  </a:moveTo>
+                  <a:lnTo>
+                    <a:pt x="19000" y="22000"/>
+                  </a:lnTo>
+                </a:path>
+                <a:path w="24000" h="24000" fill="none">
+                  <a:moveTo>
+                    <a:pt x="5000" y="2000"/>
+                  </a:moveTo>
+                  <a:lnTo>
+                    <a:pt x="19000" y="2000"/>
+                  </a:lnTo>
+                </a:path>
+                <a:path w="24000" h="24000" fill="none">
+                  <a:moveTo>
+                    <a:pt x="17000" y="22000"/>
+                  </a:moveTo>
+                  <a:lnTo>
+                    <a:pt x="17000" y="17828"/>
+                  </a:lnTo>
+                  <a:cubicBezTo>
+                    <a:pt x="17000" y="17298"/>
+                    <a:pt x="16789" y="16789"/>
+                    <a:pt x="16414" y="16414"/>
+                  </a:cubicBezTo>
+                  <a:lnTo>
+                    <a:pt x="12000" y="12000"/>
+                  </a:lnTo>
+                  <a:lnTo>
+                    <a:pt x="7586" y="16414"/>
+                  </a:lnTo>
+                  <a:cubicBezTo>
+                    <a:pt x="7211" y="16789"/>
+                    <a:pt x="7000" y="17298"/>
+                    <a:pt x="7000" y="17828"/>
+                  </a:cubicBezTo>
+                  <a:lnTo>
+                    <a:pt x="7000" y="22000"/>
+                  </a:lnTo>
+                </a:path>
+                <a:path w="24000" h="24000" fill="none">
+                  <a:moveTo>
+                    <a:pt x="7000" y="2000"/>
+                  </a:moveTo>
+                  <a:lnTo>
+                    <a:pt x="7000" y="6172"/>
+                  </a:lnTo>
+                  <a:cubicBezTo>
+                    <a:pt x="7000" y="6702"/>
+                    <a:pt x="7211" y="7211"/>
+                    <a:pt x="7586" y="7586"/>
+                  </a:cubicBezTo>
+                  <a:lnTo>
+                    <a:pt x="12000" y="12000"/>
+                  </a:lnTo>
+                  <a:lnTo>
+                    <a:pt x="16414" y="7586"/>
+                  </a:lnTo>
+                  <a:cubicBezTo>
+                    <a:pt x="16789" y="7211"/>
+                    <a:pt x="17000" y="6702"/>
+                    <a:pt x="17000" y="6172"/>
+                  </a:cubicBezTo>
+                  <a:lnTo>
+                    <a:pt x="17000" y="2000"/>
+                  </a:lnTo>
+                </a:path>
+              </a:pathLst>
+            </a:custGeom>
+            <a:noFill/>
+            <a:ln w="17068" cap="rnd">
+              <a:solidFill>
+                <a:srgbClr val="FFFFFF"/>
+              </a:solidFill>
+              <a:round/>
+            </a:ln>
+          </p:spPr>
+          <p:txBody>
+            <a:bodyPr rtlCol="0" anchor="ctr"/>
+            <a:lstStyle/>
+            <a:p>
+              <a:pPr algn="ctr"/>
+            </a:p>
+          </p:txBody>
+        </p:sp>
+        <p:sp>
+          <p:nvSpPr>
+            <p:cNvPr id="457" name="BrandDeck Diagram Text 1"/>
+            <p:cNvSpPr txBox="1"/>
+            <p:nvPr/>
+          </p:nvSpPr>
+          <p:spPr>
+            <a:xfrm>
+              <a:off x="6100402" y="2842363"/>
+              <a:ext cx="4981212" cy="843170"/>
+            </a:xfrm>
+            <a:prstGeom prst="rect">
+              <a:avLst/>
+            </a:prstGeom>
+            <a:noFill/>
+          </p:spPr>
+          <p:txBody>
+            <a:bodyPr wrap="square" anchor="ctr" lIns="36576" tIns="18288" rIns="36576" bIns="18288">
+              <a:noAutofit/>
+            </a:bodyPr>
+            <a:lstStyle/>
+            <a:p>
+              <a:pPr algn="l">
+                <a:lnSpc>
+                  <a:spcPct val="110000"/>
+                </a:lnSpc>
+              </a:pPr>
+              <a:r>
+                <a:rPr sz="1800" b="1">
+                  <a:solidFill>
+                    <a:srgbClr val="FFFFFF"/>
+                  </a:solidFill>
+                  <a:latin typeface="Play"/>
+                </a:rPr>
+                <a:t>Длительность</a:t>
+              </a:r>
+            </a:p>
+            <a:p>
+              <a:pPr algn="l">
+                <a:lnSpc>
+                  <a:spcPct val="110000"/>
+                </a:lnSpc>
+                <a:spcBef>
+                  <a:spcPts val="450"/>
+                </a:spcBef>
+              </a:pPr>
+              <a:r>
+                <a:rPr sz="1800" b="0">
+                  <a:solidFill>
+                    <a:srgbClr val="FFFFFF"/>
+                  </a:solidFill>
+                  <a:latin typeface="Play"/>
+                </a:rPr>
+                <a:t>6 недель</a:t>
+              </a:r>
+            </a:p>
+          </p:txBody>
+        </p:sp>
+        <p:sp>
+          <p:nvSpPr>
+            <p:cNvPr id="458" name="BrandDeck Diagram Card 2"/>
+            <p:cNvSpPr/>
+            <p:nvPr/>
+          </p:nvSpPr>
+          <p:spPr>
+            <a:xfrm>
+              <a:off x="5383513" y="3935559"/>
+              <a:ext cx="5917558" cy="1106517"/>
+            </a:xfrm>
+            <a:prstGeom prst="roundRect">
+              <a:avLst>
+                <a:gd name="adj" fmla="val 8000"/>
+              </a:avLst>
+            </a:prstGeom>
+            <a:solidFill>
+              <a:srgbClr val="1A1A1A"/>
+            </a:solidFill>
+            <a:ln>
+              <a:noFill/>
+            </a:ln>
+          </p:spPr>
+          <p:txBody>
+            <a:bodyPr rtlCol="0" anchor="ctr"/>
+            <a:lstStyle/>
+            <a:p>
+              <a:pPr algn="ctr"/>
+            </a:p>
+          </p:txBody>
+        </p:sp>
+        <p:sp>
+          <p:nvSpPr>
+            <p:cNvPr id="459" name="BrandDeck Diagram Icon 2 Badge"/>
+            <p:cNvSpPr/>
+            <p:nvPr/>
+          </p:nvSpPr>
+          <p:spPr>
+            <a:xfrm>
+              <a:off x="5602969" y="4305938"/>
+              <a:ext cx="365760" cy="365760"/>
+            </a:xfrm>
+            <a:prstGeom prst="ellipse">
+              <a:avLst/>
+            </a:prstGeom>
+            <a:solidFill>
+              <a:srgbClr val="006DEB"/>
+            </a:solidFill>
+            <a:ln>
+              <a:noFill/>
+            </a:ln>
+          </p:spPr>
+          <p:txBody>
+            <a:bodyPr rtlCol="0" anchor="ctr"/>
+            <a:lstStyle/>
+            <a:p>
+              <a:pPr algn="ctr"/>
+            </a:p>
+          </p:txBody>
+        </p:sp>
+        <p:sp>
+          <p:nvSpPr>
+            <p:cNvPr id="460" name="BrandDeck Icon building-2"/>
+            <p:cNvSpPr/>
+            <p:nvPr/>
+          </p:nvSpPr>
+          <p:spPr>
+            <a:xfrm>
+              <a:off x="5683436" y="4386405"/>
+              <a:ext cx="204825" cy="204825"/>
+            </a:xfrm>
+            <a:custGeom>
+              <a:avLst/>
+              <a:gdLst/>
+              <a:ahLst/>
+              <a:cxnLst/>
+              <a:rect l="l" t="t" r="r" b="b"/>
+              <a:pathLst>
+                <a:path w="24000" h="24000" fill="none">
+                  <a:moveTo>
+                    <a:pt x="6000" y="22000"/>
+                  </a:moveTo>
+                  <a:lnTo>
+                    <a:pt x="6000" y="4000"/>
+                  </a:lnTo>
+                  <a:cubicBezTo>
+                    <a:pt x="6000" y="2895"/>
+                    <a:pt x="6895" y="2000"/>
+                    <a:pt x="8000" y="2000"/>
+                  </a:cubicBezTo>
+                  <a:lnTo>
+                    <a:pt x="16000" y="2000"/>
+                  </a:lnTo>
+                  <a:cubicBezTo>
+                    <a:pt x="17105" y="2000"/>
+                    <a:pt x="18000" y="2895"/>
+                    <a:pt x="18000" y="4000"/>
+                  </a:cubicBezTo>
+                  <a:lnTo>
+                    <a:pt x="18000" y="22000"/>
+                  </a:lnTo>
+                  <a:close/>
+                </a:path>
+                <a:path w="24000" h="24000" fill="none">
+                  <a:moveTo>
+                    <a:pt x="6000" y="12000"/>
+                  </a:moveTo>
+                  <a:lnTo>
+                    <a:pt x="4000" y="12000"/>
+                  </a:lnTo>
+                  <a:cubicBezTo>
+                    <a:pt x="2895" y="12000"/>
+                    <a:pt x="2000" y="12895"/>
+                    <a:pt x="2000" y="14000"/>
+                  </a:cubicBezTo>
+                  <a:lnTo>
+                    <a:pt x="2000" y="20000"/>
+                  </a:lnTo>
+                  <a:cubicBezTo>
+                    <a:pt x="2000" y="21105"/>
+                    <a:pt x="2895" y="22000"/>
+                    <a:pt x="4000" y="22000"/>
+                  </a:cubicBezTo>
+                  <a:lnTo>
+                    <a:pt x="6000" y="22000"/>
+                  </a:lnTo>
+                </a:path>
+                <a:path w="24000" h="24000" fill="none">
+                  <a:moveTo>
+                    <a:pt x="18000" y="9000"/>
+                  </a:moveTo>
+                  <a:lnTo>
+                    <a:pt x="20000" y="9000"/>
+                  </a:lnTo>
+                  <a:cubicBezTo>
+                    <a:pt x="21105" y="9000"/>
+                    <a:pt x="22000" y="9895"/>
+                    <a:pt x="22000" y="11000"/>
+                  </a:cubicBezTo>
+                  <a:lnTo>
+                    <a:pt x="22000" y="20000"/>
+                  </a:lnTo>
+                  <a:cubicBezTo>
+                    <a:pt x="22000" y="21105"/>
+                    <a:pt x="21105" y="22000"/>
+                    <a:pt x="20000" y="22000"/>
+                  </a:cubicBezTo>
+                  <a:lnTo>
+                    <a:pt x="18000" y="22000"/>
+                  </a:lnTo>
+                </a:path>
+                <a:path w="24000" h="24000" fill="none">
+                  <a:moveTo>
+                    <a:pt x="10000" y="6000"/>
+                  </a:moveTo>
+                  <a:lnTo>
+                    <a:pt x="14000" y="6000"/>
+                  </a:lnTo>
+                </a:path>
+                <a:path w="24000" h="24000" fill="none">
+                  <a:moveTo>
+                    <a:pt x="10000" y="10000"/>
+                  </a:moveTo>
+                  <a:lnTo>
+                    <a:pt x="14000" y="10000"/>
+                  </a:lnTo>
+                </a:path>
+                <a:path w="24000" h="24000" fill="none">
+                  <a:moveTo>
+                    <a:pt x="10000" y="14000"/>
+                  </a:moveTo>
+                  <a:lnTo>
+                    <a:pt x="14000" y="14000"/>
+                  </a:lnTo>
+                </a:path>
+                <a:path w="24000" h="24000" fill="none">
+                  <a:moveTo>
+                    <a:pt x="10000" y="18000"/>
+                  </a:moveTo>
+                  <a:lnTo>
+                    <a:pt x="14000" y="18000"/>
+                  </a:lnTo>
+                </a:path>
+              </a:pathLst>
+            </a:custGeom>
+            <a:noFill/>
+            <a:ln w="17068" cap="rnd">
+              <a:solidFill>
+                <a:srgbClr val="FFFFFF"/>
+              </a:solidFill>
+              <a:round/>
+            </a:ln>
+          </p:spPr>
+          <p:txBody>
+            <a:bodyPr rtlCol="0" anchor="ctr"/>
+            <a:lstStyle/>
+            <a:p>
+              <a:pPr algn="ctr"/>
+            </a:p>
+          </p:txBody>
+        </p:sp>
+        <p:sp>
+          <p:nvSpPr>
+            <p:cNvPr id="461" name="BrandDeck Diagram Text 2"/>
+            <p:cNvSpPr txBox="1"/>
+            <p:nvPr/>
+          </p:nvSpPr>
+          <p:spPr>
+            <a:xfrm>
+              <a:off x="6100402" y="4067232"/>
+              <a:ext cx="4981212" cy="843170"/>
+            </a:xfrm>
+            <a:prstGeom prst="rect">
+              <a:avLst/>
+            </a:prstGeom>
+            <a:noFill/>
+          </p:spPr>
+          <p:txBody>
+            <a:bodyPr wrap="square" anchor="ctr" lIns="36576" tIns="18288" rIns="36576" bIns="18288">
+              <a:noAutofit/>
+            </a:bodyPr>
+            <a:lstStyle/>
+            <a:p>
+              <a:pPr algn="l">
+                <a:lnSpc>
+                  <a:spcPct val="110000"/>
+                </a:lnSpc>
+              </a:pPr>
+              <a:r>
+                <a:rPr sz="1800" b="1">
+                  <a:solidFill>
+                    <a:srgbClr val="FFFFFF"/>
+                  </a:solidFill>
+                  <a:latin typeface="Play"/>
+                </a:rPr>
+                <a:t>Охват</a:t>
+              </a:r>
+            </a:p>
+            <a:p>
+              <a:pPr algn="l">
+                <a:lnSpc>
+                  <a:spcPct val="110000"/>
+                </a:lnSpc>
+                <a:spcBef>
+                  <a:spcPts val="450"/>
+                </a:spcBef>
+              </a:pPr>
+              <a:r>
+                <a:rPr sz="1800" b="0">
+                  <a:solidFill>
+                    <a:srgbClr val="FFFFFF"/>
+                  </a:solidFill>
+                  <a:latin typeface="Play"/>
+                </a:rPr>
+                <a:t>2 подразделения</a:t>
+              </a:r>
+            </a:p>
+          </p:txBody>
+        </p:sp>
+        <p:sp>
+          <p:nvSpPr>
+            <p:cNvPr id="462" name="BrandDeck Diagram Card 3"/>
+            <p:cNvSpPr/>
+            <p:nvPr/>
+          </p:nvSpPr>
+          <p:spPr>
+            <a:xfrm>
+              <a:off x="5383513" y="5160428"/>
+              <a:ext cx="5917558" cy="1106517"/>
+            </a:xfrm>
+            <a:prstGeom prst="roundRect">
+              <a:avLst>
+                <a:gd name="adj" fmla="val 8000"/>
+              </a:avLst>
+            </a:prstGeom>
+            <a:solidFill>
+              <a:srgbClr val="1A1A1A"/>
+            </a:solidFill>
+            <a:ln>
+              <a:noFill/>
+            </a:ln>
+          </p:spPr>
+          <p:txBody>
+            <a:bodyPr rtlCol="0" anchor="ctr"/>
+            <a:lstStyle/>
+            <a:p>
+              <a:pPr algn="ctr"/>
+            </a:p>
+          </p:txBody>
+        </p:sp>
+        <p:sp>
+          <p:nvSpPr>
+            <p:cNvPr id="463" name="BrandDeck Diagram Icon 3 Badge"/>
+            <p:cNvSpPr/>
+            <p:nvPr/>
+          </p:nvSpPr>
+          <p:spPr>
+            <a:xfrm>
+              <a:off x="5602969" y="5530807"/>
+              <a:ext cx="365760" cy="365760"/>
+            </a:xfrm>
+            <a:prstGeom prst="ellipse">
+              <a:avLst/>
+            </a:prstGeom>
+            <a:solidFill>
+              <a:srgbClr val="006DEB"/>
+            </a:solidFill>
+            <a:ln>
+              <a:noFill/>
+            </a:ln>
+          </p:spPr>
+          <p:txBody>
+            <a:bodyPr rtlCol="0" anchor="ctr"/>
+            <a:lstStyle/>
+            <a:p>
+              <a:pPr algn="ctr"/>
+            </a:p>
+          </p:txBody>
+        </p:sp>
+        <p:sp>
+          <p:nvSpPr>
+            <p:cNvPr id="464" name="BrandDeck Icon users"/>
+            <p:cNvSpPr/>
+            <p:nvPr/>
+          </p:nvSpPr>
+          <p:spPr>
+            <a:xfrm>
+              <a:off x="5683436" y="5611274"/>
+              <a:ext cx="204825" cy="204825"/>
             </a:xfrm>
             <a:custGeom>
               <a:avLst/>
@@ -10125,7 +12356,7 @@
               </a:pathLst>
             </a:custGeom>
             <a:noFill/>
-            <a:ln w="28163" cap="rnd">
+            <a:ln w="17068" cap="rnd">
               <a:solidFill>
                 <a:srgbClr val="FFFFFF"/>
               </a:solidFill>
@@ -10142,14 +12373,14 @@
         </p:sp>
         <p:sp>
           <p:nvSpPr>
-            <p:cNvPr id="471" name="BrandDeck Diagram Text 1"/>
+            <p:cNvPr id="465" name="BrandDeck Diagram Text 3"/>
             <p:cNvSpPr txBox="1"/>
             <p:nvPr/>
           </p:nvSpPr>
           <p:spPr>
             <a:xfrm>
-              <a:off x="569306" y="2643078"/>
-              <a:ext cx="4952320" cy="2438694"/>
+              <a:off x="6100402" y="5292101"/>
+              <a:ext cx="4981212" cy="843170"/>
             </a:xfrm>
             <a:prstGeom prst="rect">
               <a:avLst/>
@@ -10157,7 +12388,7 @@
             <a:noFill/>
           </p:spPr>
           <p:txBody>
-            <a:bodyPr wrap="square" anchor="t" lIns="36576" tIns="18288" rIns="36576" bIns="18288">
+            <a:bodyPr wrap="square" anchor="ctr" lIns="36576" tIns="18288" rIns="36576" bIns="18288">
               <a:noAutofit/>
             </a:bodyPr>
             <a:lstStyle/>
@@ -10174,7 +12405,7 @@
                   </a:solidFill>
                   <a:latin typeface="Play"/>
                 </a:rPr>
-                <a:t>150 сотрудников</a:t>
+                <a:t>Команда</a:t>
               </a:r>
             </a:p>
             <a:p>
@@ -10193,1829 +12424,7 @@
                   </a:solidFill>
                   <a:latin typeface="Play"/>
                 </a:rPr>
-                <a:t>Два подразделения</a:t>
-              </a:r>
-            </a:p>
-          </p:txBody>
-        </p:sp>
-        <p:sp>
-          <p:nvSpPr>
-            <p:cNvPr id="472" name="BrandDeck Diagram Card 2"/>
-            <p:cNvSpPr/>
-            <p:nvPr/>
-          </p:nvSpPr>
-          <p:spPr>
-            <a:xfrm>
-              <a:off x="5889921" y="1666499"/>
-              <a:ext cx="5259559" cy="3525001"/>
-            </a:xfrm>
-            <a:prstGeom prst="roundRect">
-              <a:avLst>
-                <a:gd name="adj" fmla="val 8000"/>
-              </a:avLst>
-            </a:prstGeom>
-            <a:solidFill>
-              <a:srgbClr val="1A1A1A"/>
-            </a:solidFill>
-            <a:ln>
-              <a:noFill/>
-            </a:ln>
-          </p:spPr>
-          <p:txBody>
-            <a:bodyPr rtlCol="0" anchor="ctr"/>
-            <a:lstStyle/>
-            <a:p>
-              <a:pPr algn="ctr"/>
-            </a:p>
-          </p:txBody>
-        </p:sp>
-        <p:sp>
-          <p:nvSpPr>
-            <p:cNvPr id="473" name="BrandDeck Diagram Icon 2 Badge"/>
-            <p:cNvSpPr/>
-            <p:nvPr/>
-          </p:nvSpPr>
-          <p:spPr>
-            <a:xfrm>
-              <a:off x="6109377" y="1885955"/>
-              <a:ext cx="603504" cy="603504"/>
-            </a:xfrm>
-            <a:prstGeom prst="ellipse">
-              <a:avLst/>
-            </a:prstGeom>
-            <a:solidFill>
-              <a:srgbClr val="006DEB"/>
-            </a:solidFill>
-            <a:ln>
-              <a:noFill/>
-            </a:ln>
-          </p:spPr>
-          <p:txBody>
-            <a:bodyPr rtlCol="0" anchor="ctr"/>
-            <a:lstStyle/>
-            <a:p>
-              <a:pPr algn="ctr"/>
-            </a:p>
-          </p:txBody>
-        </p:sp>
-        <p:sp>
-          <p:nvSpPr>
-            <p:cNvPr id="474" name="BrandDeck Icon clock"/>
-            <p:cNvSpPr/>
-            <p:nvPr/>
-          </p:nvSpPr>
-          <p:spPr>
-            <a:xfrm>
-              <a:off x="6242148" y="2018725"/>
-              <a:ext cx="337962" cy="337962"/>
-            </a:xfrm>
-            <a:custGeom>
-              <a:avLst/>
-              <a:gdLst/>
-              <a:ahLst/>
-              <a:cxnLst/>
-              <a:rect l="l" t="t" r="r" b="b"/>
-              <a:pathLst>
-                <a:path w="24000" h="24000" fill="none">
-                  <a:moveTo>
-                    <a:pt x="22000" y="12000"/>
-                  </a:moveTo>
-                  <a:cubicBezTo>
-                    <a:pt x="22000" y="17523"/>
-                    <a:pt x="17523" y="22000"/>
-                    <a:pt x="12000" y="22000"/>
-                  </a:cubicBezTo>
-                  <a:cubicBezTo>
-                    <a:pt x="6477" y="22000"/>
-                    <a:pt x="2000" y="17523"/>
-                    <a:pt x="2000" y="12000"/>
-                  </a:cubicBezTo>
-                  <a:cubicBezTo>
-                    <a:pt x="2000" y="6477"/>
-                    <a:pt x="6477" y="2000"/>
-                    <a:pt x="12000" y="2000"/>
-                  </a:cubicBezTo>
-                  <a:cubicBezTo>
-                    <a:pt x="17523" y="2000"/>
-                    <a:pt x="22000" y="6477"/>
-                    <a:pt x="22000" y="12000"/>
-                  </a:cubicBezTo>
-                  <a:close/>
-                </a:path>
-                <a:path w="24000" h="24000" fill="none">
-                  <a:moveTo>
-                    <a:pt x="12000" y="6000"/>
-                  </a:moveTo>
-                  <a:lnTo>
-                    <a:pt x="12000" y="12000"/>
-                  </a:lnTo>
-                  <a:lnTo>
-                    <a:pt x="16000" y="14000"/>
-                  </a:lnTo>
-                </a:path>
-              </a:pathLst>
-            </a:custGeom>
-            <a:noFill/>
-            <a:ln w="28163" cap="rnd">
-              <a:solidFill>
-                <a:srgbClr val="FFFFFF"/>
-              </a:solidFill>
-              <a:round/>
-            </a:ln>
-          </p:spPr>
-          <p:txBody>
-            <a:bodyPr rtlCol="0" anchor="ctr"/>
-            <a:lstStyle/>
-            <a:p>
-              <a:pPr algn="ctr"/>
-            </a:p>
-          </p:txBody>
-        </p:sp>
-        <p:sp>
-          <p:nvSpPr>
-            <p:cNvPr id="475" name="BrandDeck Diagram Text 2"/>
-            <p:cNvSpPr txBox="1"/>
-            <p:nvPr/>
-          </p:nvSpPr>
-          <p:spPr>
-            <a:xfrm>
-              <a:off x="6043541" y="2643078"/>
-              <a:ext cx="4952320" cy="2438694"/>
-            </a:xfrm>
-            <a:prstGeom prst="rect">
-              <a:avLst/>
-            </a:prstGeom>
-            <a:noFill/>
-          </p:spPr>
-          <p:txBody>
-            <a:bodyPr wrap="square" anchor="t" lIns="36576" tIns="18288" rIns="36576" bIns="18288">
-              <a:noAutofit/>
-            </a:bodyPr>
-            <a:lstStyle/>
-            <a:p>
-              <a:pPr algn="l">
-                <a:lnSpc>
-                  <a:spcPct val="110000"/>
-                </a:lnSpc>
-              </a:pPr>
-              <a:r>
-                <a:rPr sz="1800" b="1">
-                  <a:solidFill>
-                    <a:srgbClr val="FFFFFF"/>
-                  </a:solidFill>
-                  <a:latin typeface="Play"/>
-                </a:rPr>
-                <a:t>До 30 минут</a:t>
-              </a:r>
-            </a:p>
-            <a:p>
-              <a:pPr algn="l">
-                <a:lnSpc>
-                  <a:spcPct val="110000"/>
-                </a:lnSpc>
-                <a:spcBef>
-                  <a:spcPts val="450"/>
-                </a:spcBef>
-              </a:pPr>
-              <a:r>
-                <a:rPr sz="1800" b="0">
-                  <a:solidFill>
-                    <a:srgbClr val="FFFFFF"/>
-                  </a:solidFill>
-                  <a:latin typeface="Play"/>
-                </a:rPr>
-                <a:t>Время поиска инструкции</a:t>
-              </a:r>
-            </a:p>
-          </p:txBody>
-        </p:sp>
-      </p:grpSp>
-    </p:spTree>
-  </p:cSld>
-  <p:clrMapOvr>
-    <a:masterClrMapping/>
-  </p:clrMapOvr>
-</p:sld>
-</file>
-
-<file path=ppt/slides/slide4.xml><?xml version="1.0" encoding="utf-8"?>
-<p:sld xmlns:a="http://schemas.openxmlformats.org/drawingml/2006/main" xmlns:p="http://schemas.openxmlformats.org/presentationml/2006/main" xmlns:r="http://schemas.openxmlformats.org/officeDocument/2006/relationships">
-  <p:cSld>
-    <p:spTree>
-      <p:nvGrpSpPr>
-        <p:cNvPr id="1" name=""/>
-        <p:cNvGrpSpPr/>
-        <p:nvPr/>
-      </p:nvGrpSpPr>
-      <p:grpSpPr/>
-      <p:sp>
-        <p:nvSpPr>
-          <p:cNvPr id="679" name="Google Shape;679;p31"/>
-          <p:cNvSpPr/>
-          <p:nvPr/>
-        </p:nvSpPr>
-        <p:spPr>
-          <a:xfrm>
-            <a:off x="0" y="4748271"/>
-            <a:ext cx="12192000" cy="2109730"/>
-          </a:xfrm>
-          <a:prstGeom prst="rect">
-            <a:avLst/>
-          </a:prstGeom>
-          <a:gradFill>
-            <a:gsLst>
-              <a:gs pos="0">
-                <a:srgbClr val="0077FF">
-                  <a:alpha val="61961"/>
-                </a:srgbClr>
-              </a:gs>
-              <a:gs pos="99000">
-                <a:srgbClr val="00AEE8"/>
-              </a:gs>
-              <a:gs pos="100000">
-                <a:srgbClr val="00AEE8"/>
-              </a:gs>
-            </a:gsLst>
-            <a:lin ang="14400000" scaled="0"/>
-          </a:gradFill>
-          <a:ln>
-            <a:noFill/>
-          </a:ln>
-        </p:spPr>
-        <p:txBody>
-          <a:bodyPr anchorCtr="0" anchor="ctr" bIns="0" lIns="108000" spcFirstLastPara="1" rIns="91425" wrap="square" tIns="0">
-            <a:noAutofit/>
-          </a:bodyPr>
-          <a:lstStyle/>
-          <a:p>
-            <a:pPr indent="0" lvl="0" marL="0" marR="0" rtl="0" algn="l">
-              <a:spcBef>
-                <a:spcPts val="0"/>
-              </a:spcBef>
-              <a:spcAft>
-                <a:spcPts val="0"/>
-              </a:spcAft>
-              <a:buNone/>
-            </a:pPr>
-            <a:r>
-              <a:t/>
-            </a:r>
-            <a:endParaRPr sz="1100">
-              <a:solidFill>
-                <a:schemeClr val="lt1"/>
-              </a:solidFill>
-              <a:latin typeface="Play"/>
-              <a:ea typeface="Play"/>
-              <a:cs typeface="Play"/>
-              <a:sym typeface="Play"/>
-            </a:endParaRPr>
-          </a:p>
-        </p:txBody>
-      </p:sp>
-      <p:sp>
-        <p:nvSpPr>
-          <p:cNvPr id="680" name="BrandDeck Text 680"/>
-          <p:cNvSpPr txBox="1"/>
-          <p:nvPr>
-            <p:ph type="title"/>
-          </p:nvPr>
-        </p:nvSpPr>
-        <p:spPr>
-          <a:xfrm>
-            <a:off x="427864" y="424691"/>
-            <a:ext cx="7827311" cy="1167572"/>
-          </a:xfrm>
-          <a:prstGeom prst="rect">
-            <a:avLst/>
-          </a:prstGeom>
-          <a:noFill/>
-          <a:ln>
-            <a:noFill/>
-          </a:ln>
-        </p:spPr>
-        <p:txBody>
-          <a:bodyPr anchorCtr="0" anchor="t" bIns="0" lIns="0" spcFirstLastPara="1" rIns="0" wrap="square" tIns="0">
-            <a:normAutofit/>
-          </a:bodyPr>
-          <a:lstStyle/>
-          <a:p>
-            <a:pPr indent="0" marL="0" rtl="0" algn="l">
-              <a:lnSpc>
-                <a:spcPct val="115000"/>
-              </a:lnSpc>
-              <a:spcBef>
-                <a:spcPts val="0"/>
-              </a:spcBef>
-              <a:spcAft>
-                <a:spcPts val="300"/>
-              </a:spcAft>
-              <a:buClr>
-                <a:schemeClr val="lt1"/>
-              </a:buClr>
-              <a:buSzPts val="3600"/>
-              <a:buFont typeface="Play"/>
-              <a:buNone/>
-            </a:pPr>
-            <a:r>
-              <a:rPr sz="2000"/>
-              <a:t>ИИ-помощник отвечает на вопросы по регламентам и сразу дает ссылку на документ-источник</a:t>
-            </a:r>
-            <a:endParaRPr/>
-          </a:p>
-        </p:txBody>
-      </p:sp>
-      <p:sp>
-        <p:nvSpPr>
-          <p:cNvPr id="681" name="BrandDeck Text 681"/>
-          <p:cNvSpPr/>
-          <p:nvPr/>
-        </p:nvSpPr>
-        <p:spPr>
-          <a:xfrm>
-            <a:off x="427864" y="1837067"/>
-            <a:ext cx="3636000" cy="2022006"/>
-          </a:xfrm>
-          <a:prstGeom prst="roundRect">
-            <a:avLst>
-              <a:gd fmla="val 6326" name="adj"/>
-            </a:avLst>
-          </a:prstGeom>
-          <a:solidFill>
-            <a:srgbClr val="212121"/>
-          </a:solidFill>
-          <a:ln>
-            <a:noFill/>
-          </a:ln>
-        </p:spPr>
-        <p:txBody>
-          <a:bodyPr anchorCtr="0" anchor="t" bIns="45700" lIns="108000" spcFirstLastPara="1" rIns="91425" wrap="square" tIns="72000">
-            <a:normAutofit/>
-          </a:bodyPr>
-          <a:lstStyle/>
-          <a:p>
-            <a:pPr indent="0" marL="0" marR="0" rtl="0" algn="l">
-              <a:lnSpc>
-                <a:spcPct val="115000"/>
-              </a:lnSpc>
-              <a:spcBef>
-                <a:spcPts val="0"/>
-              </a:spcBef>
-              <a:spcAft>
-                <a:spcPts val="270"/>
-              </a:spcAft>
-              <a:buNone/>
-            </a:pPr>
-            <a:r>
-              <a:rPr sz="1800">
-                <a:solidFill>
-                  <a:srgbClr val="FFFFFF"/>
-                </a:solidFill>
-                <a:latin typeface="Play"/>
-              </a:rPr>
-              <a:t>Система отвечает на вопросы по регламентам и инструкциям.</a:t>
-            </a:r>
-            <a:endParaRPr/>
-          </a:p>
-        </p:txBody>
-      </p:sp>
-      <p:sp>
-        <p:nvSpPr>
-          <p:cNvPr id="682" name="BrandDeck Text 682"/>
-          <p:cNvSpPr/>
-          <p:nvPr/>
-        </p:nvSpPr>
-        <p:spPr>
-          <a:xfrm>
-            <a:off x="4217594" y="1837067"/>
-            <a:ext cx="3636000" cy="2022006"/>
-          </a:xfrm>
-          <a:prstGeom prst="roundRect">
-            <a:avLst>
-              <a:gd fmla="val 6871" name="adj"/>
-            </a:avLst>
-          </a:prstGeom>
-          <a:solidFill>
-            <a:srgbClr val="212121"/>
-          </a:solidFill>
-          <a:ln>
-            <a:noFill/>
-          </a:ln>
-        </p:spPr>
-        <p:txBody>
-          <a:bodyPr anchorCtr="0" anchor="t" bIns="45700" lIns="108000" spcFirstLastPara="1" rIns="91425" wrap="square" tIns="72000">
-            <a:normAutofit/>
-          </a:bodyPr>
-          <a:lstStyle/>
-          <a:p>
-            <a:pPr indent="0" marL="0" marR="0" rtl="0" algn="l">
-              <a:lnSpc>
-                <a:spcPct val="115000"/>
-              </a:lnSpc>
-              <a:spcBef>
-                <a:spcPts val="0"/>
-              </a:spcBef>
-              <a:spcAft>
-                <a:spcPts val="270"/>
-              </a:spcAft>
-              <a:buNone/>
-            </a:pPr>
-            <a:r>
-              <a:rPr sz="1800">
-                <a:solidFill>
-                  <a:srgbClr val="FFFFFF"/>
-                </a:solidFill>
-                <a:latin typeface="Play"/>
-              </a:rPr>
-              <a:t>В ответ сразу предоставляется ссылка на документ-источник.</a:t>
-            </a:r>
-            <a:endParaRPr/>
-          </a:p>
-        </p:txBody>
-      </p:sp>
-      <p:sp>
-        <p:nvSpPr>
-          <p:cNvPr id="683" name="BrandDeck Text 683"/>
-          <p:cNvSpPr/>
-          <p:nvPr/>
-        </p:nvSpPr>
-        <p:spPr>
-          <a:xfrm>
-            <a:off x="8007324" y="1837067"/>
-            <a:ext cx="3636000" cy="2022006"/>
-          </a:xfrm>
-          <a:prstGeom prst="roundRect">
-            <a:avLst>
-              <a:gd fmla="val 5781" name="adj"/>
-            </a:avLst>
-          </a:prstGeom>
-          <a:solidFill>
-            <a:srgbClr val="212121"/>
-          </a:solidFill>
-          <a:ln>
-            <a:noFill/>
-          </a:ln>
-        </p:spPr>
-        <p:txBody>
-          <a:bodyPr anchorCtr="0" anchor="t" bIns="45700" lIns="108000" spcFirstLastPara="1" rIns="91425" wrap="square" tIns="72000">
-            <a:normAutofit/>
-          </a:bodyPr>
-          <a:lstStyle/>
-          <a:p>
-            <a:pPr indent="0" marL="0" marR="0" rtl="0" algn="l">
-              <a:lnSpc>
-                <a:spcPct val="115000"/>
-              </a:lnSpc>
-              <a:spcBef>
-                <a:spcPts val="0"/>
-              </a:spcBef>
-              <a:spcAft>
-                <a:spcPts val="270"/>
-              </a:spcAft>
-              <a:buNone/>
-            </a:pPr>
-            <a:r>
-              <a:rPr sz="1800">
-                <a:solidFill>
-                  <a:srgbClr val="FFFFFF"/>
-                </a:solidFill>
-                <a:latin typeface="Play"/>
-              </a:rPr>
-              <a:t>Сотрудник получает подтверждённый ответ без поиска вручную.</a:t>
-            </a:r>
-            <a:endParaRPr/>
-          </a:p>
-        </p:txBody>
-      </p:sp>
-    </p:spTree>
-  </p:cSld>
-  <p:clrMapOvr>
-    <a:masterClrMapping/>
-  </p:clrMapOvr>
-</p:sld>
-</file>
-
-<file path=ppt/slides/slide5.xml><?xml version="1.0" encoding="utf-8"?>
-<p:sld xmlns:a="http://schemas.openxmlformats.org/drawingml/2006/main" xmlns:p="http://schemas.openxmlformats.org/presentationml/2006/main" xmlns:r="http://schemas.openxmlformats.org/officeDocument/2006/relationships">
-  <p:cSld>
-    <p:spTree>
-      <p:nvGrpSpPr>
-        <p:cNvPr id="1" name=""/>
-        <p:cNvGrpSpPr/>
-        <p:nvPr/>
-      </p:nvGrpSpPr>
-      <p:grpSpPr/>
-      <p:sp>
-        <p:nvSpPr>
-          <p:cNvPr id="812" name="BrandDeck Text 812"/>
-          <p:cNvSpPr txBox="1"/>
-          <p:nvPr>
-            <p:ph type="title"/>
-          </p:nvPr>
-        </p:nvSpPr>
-        <p:spPr>
-          <a:xfrm>
-            <a:off x="429253" y="424691"/>
-            <a:ext cx="2341359" cy="1167572"/>
-          </a:xfrm>
-          <a:prstGeom prst="rect">
-            <a:avLst/>
-          </a:prstGeom>
-          <a:noFill/>
-          <a:ln>
-            <a:noFill/>
-          </a:ln>
-        </p:spPr>
-        <p:txBody>
-          <a:bodyPr anchorCtr="0" anchor="t" bIns="0" lIns="0" spcFirstLastPara="1" rIns="0" wrap="square" tIns="0">
-            <a:normAutofit/>
-          </a:bodyPr>
-          <a:lstStyle/>
-          <a:p>
-            <a:pPr indent="0" marL="0" rtl="0" algn="l">
-              <a:lnSpc>
-                <a:spcPct val="115000"/>
-              </a:lnSpc>
-              <a:spcBef>
-                <a:spcPts val="0"/>
-              </a:spcBef>
-              <a:spcAft>
-                <a:spcPts val="210"/>
-              </a:spcAft>
-              <a:buClr>
-                <a:schemeClr val="lt1"/>
-              </a:buClr>
-              <a:buSzPts val="3600"/>
-              <a:buFont typeface="Play"/>
-              <a:buNone/>
-            </a:pPr>
-            <a:r>
-              <a:rPr sz="1400"/>
-              <a:t>Система работает внутри контура компании, документы не покидают периметр безопасности</a:t>
-            </a:r>
-            <a:endParaRPr/>
-          </a:p>
-        </p:txBody>
-      </p:sp>
-      <p:pic>
-        <p:nvPicPr>
-          <p:cNvPr id="835" name="BrandDeck Image" descr="внутренний контур серверная"/>
-          <p:cNvPicPr>
-            <a:picLocks noChangeAspect="1"/>
-          </p:cNvPicPr>
-          <p:nvPr/>
-        </p:nvPicPr>
-        <p:blipFill>
-          <a:blip r:embed="rId4"/>
-          <a:srcRect l="20599" r="20599"/>
-          <a:stretch>
-            <a:fillRect/>
-          </a:stretch>
-        </p:blipFill>
-        <p:spPr>
-          <a:xfrm>
-            <a:off x="5362697" y="324571"/>
-            <a:ext cx="6826255" cy="6533429"/>
-          </a:xfrm>
-          <a:prstGeom prst="rect">
-            <a:avLst/>
-          </a:prstGeom>
-        </p:spPr>
-      </p:pic>
-      <p:sp>
-        <p:nvSpPr>
-          <p:cNvPr id="834" name="BrandDeck Body"/>
-          <p:cNvSpPr txBox="1"/>
-          <p:nvPr/>
-        </p:nvSpPr>
-        <p:spPr>
-          <a:xfrm>
-            <a:off x="1036774" y="1729423"/>
-            <a:ext cx="4143042" cy="4717097"/>
-          </a:xfrm>
-          <a:prstGeom prst="rect">
-            <a:avLst/>
-          </a:prstGeom>
-          <a:noFill/>
-        </p:spPr>
-        <p:txBody>
-          <a:bodyPr wrap="square" anchor="t" lIns="36576" rIns="36576" tIns="18288" bIns="18288">
-            <a:normAutofit/>
-          </a:bodyPr>
-          <a:lstStyle/>
-          <a:p>
-            <a:pPr algn="l">
-              <a:lnSpc>
-                <a:spcPct val="115000"/>
-              </a:lnSpc>
-              <a:spcBef>
-                <a:spcPts val="0"/>
-              </a:spcBef>
-              <a:spcAft>
-                <a:spcPts val="240"/>
-              </a:spcAft>
-            </a:pPr>
-            <a:r>
-              <a:rPr sz="1600">
-                <a:solidFill>
-                  <a:srgbClr val="FFFFFF"/>
-                </a:solidFill>
-                <a:latin typeface="Play"/>
-              </a:rPr>
-              <a:t>• Архитектура обеспечивает полную изоляцию данных внутри корпоративного контура.</a:t>
-            </a:r>
-          </a:p>
-          <a:p>
-            <a:pPr algn="l">
-              <a:lnSpc>
-                <a:spcPct val="115000"/>
-              </a:lnSpc>
-              <a:spcBef>
-                <a:spcPts val="0"/>
-              </a:spcBef>
-              <a:spcAft>
-                <a:spcPts val="240"/>
-              </a:spcAft>
-            </a:pPr>
-            <a:r>
-              <a:rPr sz="1600">
-                <a:solidFill>
-                  <a:srgbClr val="FFFFFF"/>
-                </a:solidFill>
-                <a:latin typeface="Play"/>
-              </a:rPr>
-              <a:t>• Модель с открытыми весами работает исключительно во внутренней сети.</a:t>
-            </a:r>
-          </a:p>
-          <a:p>
-            <a:pPr algn="l">
-              <a:lnSpc>
-                <a:spcPct val="115000"/>
-              </a:lnSpc>
-              <a:spcBef>
-                <a:spcPts val="0"/>
-              </a:spcBef>
-              <a:spcAft>
-                <a:spcPts val="240"/>
-              </a:spcAft>
-            </a:pPr>
-            <a:r>
-              <a:rPr sz="1600">
-                <a:solidFill>
-                  <a:srgbClr val="FFFFFF"/>
-                </a:solidFill>
-                <a:latin typeface="Play"/>
-              </a:rPr>
-              <a:t>• Документы инструкций не покидают периметр безопасности компании.</a:t>
-            </a:r>
-          </a:p>
-        </p:txBody>
-      </p:sp>
-    </p:spTree>
-  </p:cSld>
-  <p:clrMapOvr>
-    <a:masterClrMapping/>
-  </p:clrMapOvr>
-</p:sld>
-</file>
-
-<file path=ppt/slides/slide6.xml><?xml version="1.0" encoding="utf-8"?>
-<p:sld xmlns:a="http://schemas.openxmlformats.org/drawingml/2006/main" xmlns:p="http://schemas.openxmlformats.org/presentationml/2006/main" xmlns:r="http://schemas.openxmlformats.org/officeDocument/2006/relationships">
-  <p:cSld>
-    <p:spTree>
-      <p:nvGrpSpPr>
-        <p:cNvPr id="1" name=""/>
-        <p:cNvGrpSpPr/>
-        <p:nvPr/>
-      </p:nvGrpSpPr>
-      <p:grpSpPr/>
-      <p:sp>
-        <p:nvSpPr>
-          <p:cNvPr id="441" name="BrandDeck Text 441"/>
-          <p:cNvSpPr txBox="1"/>
-          <p:nvPr>
-            <p:ph type="title"/>
-          </p:nvPr>
-        </p:nvSpPr>
-        <p:spPr>
-          <a:xfrm>
-            <a:off x="429253" y="424691"/>
-            <a:ext cx="7827311" cy="626869"/>
-          </a:xfrm>
-          <a:prstGeom prst="rect">
-            <a:avLst/>
-          </a:prstGeom>
-          <a:noFill/>
-          <a:ln>
-            <a:noFill/>
-          </a:ln>
-        </p:spPr>
-        <p:txBody>
-          <a:bodyPr anchorCtr="0" anchor="t" bIns="0" lIns="0" spcFirstLastPara="1" rIns="0" wrap="square" tIns="0">
-            <a:normAutofit/>
-          </a:bodyPr>
-          <a:lstStyle/>
-          <a:p>
-            <a:pPr indent="0" marL="0" rtl="0" algn="l">
-              <a:lnSpc>
-                <a:spcPct val="115000"/>
-              </a:lnSpc>
-              <a:spcBef>
-                <a:spcPts val="0"/>
-              </a:spcBef>
-              <a:spcAft>
-                <a:spcPts val="270"/>
-              </a:spcAft>
-              <a:buClr>
-                <a:schemeClr val="lt1"/>
-              </a:buClr>
-              <a:buSzPts val="3600"/>
-              <a:buFont typeface="Play"/>
-              <a:buNone/>
-            </a:pPr>
-            <a:r>
-              <a:rPr sz="1800"/>
-              <a:t>При отсутствии подтвержденного ответа вопрос автоматически передается специалисту с контекстом</a:t>
-            </a:r>
-            <a:endParaRPr/>
-          </a:p>
-        </p:txBody>
-      </p:sp>
-      <p:grpSp>
-        <p:nvGrpSpPr>
-          <p:cNvPr id="2" name="BrandDeck Diagram process" descr="process: Анализ запроса ИИ проверяет наличие ответа в базе знаний; Отсутствие ответа Система формирует запрос к специалисту; Передача контекста Специалист получает историю и детали вопроса"/>
-          <p:cNvGrpSpPr/>
-          <p:nvPr/>
-        </p:nvGrpSpPr>
-        <p:grpSpPr>
-          <a:xfrm>
-            <a:off x="5383513" y="2738121"/>
-            <a:ext cx="5917558" cy="3501392"/>
-            <a:chOff x="5383513" y="2738121"/>
-            <a:chExt cx="5917558" cy="3501392"/>
-          </a:xfrm>
-        </p:grpSpPr>
-        <p:sp>
-          <p:nvSpPr>
-            <p:cNvPr id="454" name="BrandDeck Diagram Connector"/>
-            <p:cNvSpPr/>
-            <p:nvPr/>
-          </p:nvSpPr>
-          <p:spPr>
-            <a:xfrm>
-              <a:off x="5623085" y="3303399"/>
-              <a:ext cx="32918" cy="2370837"/>
-            </a:xfrm>
-            <a:prstGeom prst="rect">
-              <a:avLst/>
-            </a:prstGeom>
-            <a:solidFill>
-              <a:srgbClr val="004DA6"/>
-            </a:solidFill>
-            <a:ln>
-              <a:noFill/>
-            </a:ln>
-          </p:spPr>
-          <p:txBody>
-            <a:bodyPr rtlCol="0" anchor="ctr"/>
-            <a:lstStyle/>
-            <a:p>
-              <a:pPr algn="ctr"/>
-            </a:p>
-          </p:txBody>
-        </p:sp>
-        <p:sp>
-          <p:nvSpPr>
-            <p:cNvPr id="455" name="BrandDeck Diagram Step 1 Badge"/>
-            <p:cNvSpPr/>
-            <p:nvPr/>
-          </p:nvSpPr>
-          <p:spPr>
-            <a:xfrm>
-              <a:off x="5383513" y="3047367"/>
-              <a:ext cx="512064" cy="512064"/>
-            </a:xfrm>
-            <a:prstGeom prst="ellipse">
-              <a:avLst/>
-            </a:prstGeom>
-            <a:solidFill>
-              <a:srgbClr val="006DEB"/>
-            </a:solidFill>
-            <a:ln>
-              <a:noFill/>
-            </a:ln>
-          </p:spPr>
-          <p:txBody>
-            <a:bodyPr rtlCol="0" anchor="ctr" wrap="square" lIns="0" tIns="0" rIns="0" bIns="0">
-              <a:noAutofit/>
-            </a:bodyPr>
-            <a:lstStyle/>
-            <a:p>
-              <a:pPr algn="ctr">
-                <a:lnSpc>
-                  <a:spcPct val="110000"/>
-                </a:lnSpc>
-              </a:pPr>
-              <a:r>
-                <a:rPr sz="1400" b="1">
-                  <a:solidFill>
-                    <a:srgbClr val="FFFFFF"/>
-                  </a:solidFill>
-                  <a:latin typeface="Play"/>
-                </a:rPr>
-                <a:t>01</a:t>
-              </a:r>
-            </a:p>
-          </p:txBody>
-        </p:sp>
-        <p:sp>
-          <p:nvSpPr>
-            <p:cNvPr id="456" name="BrandDeck Diagram Detail Card 1"/>
-            <p:cNvSpPr/>
-            <p:nvPr/>
-          </p:nvSpPr>
-          <p:spPr>
-            <a:xfrm>
-              <a:off x="6005305" y="2738121"/>
-              <a:ext cx="5295766" cy="1130554"/>
-            </a:xfrm>
-            <a:prstGeom prst="roundRect">
-              <a:avLst>
-                <a:gd name="adj" fmla="val 12000"/>
-              </a:avLst>
-            </a:prstGeom>
-            <a:solidFill>
-              <a:srgbClr val="1A1A1A"/>
-            </a:solidFill>
-            <a:ln>
-              <a:noFill/>
-            </a:ln>
-          </p:spPr>
-          <p:txBody>
-            <a:bodyPr rtlCol="0" anchor="ctr"/>
-            <a:lstStyle/>
-            <a:p>
-              <a:pPr algn="ctr"/>
-            </a:p>
-          </p:txBody>
-        </p:sp>
-        <p:sp>
-          <p:nvSpPr>
-            <p:cNvPr id="457" name="BrandDeck Diagram Text 1"/>
-            <p:cNvSpPr txBox="1"/>
-            <p:nvPr/>
-          </p:nvSpPr>
-          <p:spPr>
-            <a:xfrm>
-              <a:off x="6096745" y="2738121"/>
-              <a:ext cx="5204326" cy="1130554"/>
-            </a:xfrm>
-            <a:prstGeom prst="rect">
-              <a:avLst/>
-            </a:prstGeom>
-            <a:noFill/>
-          </p:spPr>
-          <p:txBody>
-            <a:bodyPr wrap="square" anchor="ctr" lIns="36576" tIns="18288" rIns="36576" bIns="18288">
-              <a:noAutofit/>
-            </a:bodyPr>
-            <a:lstStyle/>
-            <a:p>
-              <a:pPr algn="l">
-                <a:lnSpc>
-                  <a:spcPct val="110000"/>
-                </a:lnSpc>
-              </a:pPr>
-              <a:r>
-                <a:rPr sz="1600" b="1">
-                  <a:solidFill>
-                    <a:srgbClr val="FFFFFF"/>
-                  </a:solidFill>
-                  <a:latin typeface="Play"/>
-                </a:rPr>
-                <a:t>Анализ запроса</a:t>
-              </a:r>
-            </a:p>
-            <a:p>
-              <a:pPr algn="l">
-                <a:lnSpc>
-                  <a:spcPct val="110000"/>
-                </a:lnSpc>
-                <a:spcBef>
-                  <a:spcPts val="400"/>
-                </a:spcBef>
-              </a:pPr>
-              <a:r>
-                <a:rPr sz="1600" b="0">
-                  <a:solidFill>
-                    <a:srgbClr val="FFFFFF"/>
-                  </a:solidFill>
-                  <a:latin typeface="Play"/>
-                </a:rPr>
-                <a:t>ИИ проверяет наличие ответа в базе знаний</a:t>
-              </a:r>
-            </a:p>
-          </p:txBody>
-        </p:sp>
-        <p:sp>
-          <p:nvSpPr>
-            <p:cNvPr id="458" name="BrandDeck Diagram Step 2 Badge"/>
-            <p:cNvSpPr/>
-            <p:nvPr/>
-          </p:nvSpPr>
-          <p:spPr>
-            <a:xfrm>
-              <a:off x="5383513" y="4232785"/>
-              <a:ext cx="512064" cy="512064"/>
-            </a:xfrm>
-            <a:prstGeom prst="ellipse">
-              <a:avLst/>
-            </a:prstGeom>
-            <a:solidFill>
-              <a:srgbClr val="006DEB"/>
-            </a:solidFill>
-            <a:ln>
-              <a:noFill/>
-            </a:ln>
-          </p:spPr>
-          <p:txBody>
-            <a:bodyPr rtlCol="0" anchor="ctr" wrap="square" lIns="0" tIns="0" rIns="0" bIns="0">
-              <a:noAutofit/>
-            </a:bodyPr>
-            <a:lstStyle/>
-            <a:p>
-              <a:pPr algn="ctr">
-                <a:lnSpc>
-                  <a:spcPct val="110000"/>
-                </a:lnSpc>
-              </a:pPr>
-              <a:r>
-                <a:rPr sz="1400" b="1">
-                  <a:solidFill>
-                    <a:srgbClr val="FFFFFF"/>
-                  </a:solidFill>
-                  <a:latin typeface="Play"/>
-                </a:rPr>
-                <a:t>02</a:t>
-              </a:r>
-            </a:p>
-          </p:txBody>
-        </p:sp>
-        <p:sp>
-          <p:nvSpPr>
-            <p:cNvPr id="459" name="BrandDeck Diagram Detail Card 2"/>
-            <p:cNvSpPr/>
-            <p:nvPr/>
-          </p:nvSpPr>
-          <p:spPr>
-            <a:xfrm>
-              <a:off x="6005305" y="3923540"/>
-              <a:ext cx="5295766" cy="1130554"/>
-            </a:xfrm>
-            <a:prstGeom prst="roundRect">
-              <a:avLst>
-                <a:gd name="adj" fmla="val 12000"/>
-              </a:avLst>
-            </a:prstGeom>
-            <a:solidFill>
-              <a:srgbClr val="1A1A1A"/>
-            </a:solidFill>
-            <a:ln>
-              <a:noFill/>
-            </a:ln>
-          </p:spPr>
-          <p:txBody>
-            <a:bodyPr rtlCol="0" anchor="ctr"/>
-            <a:lstStyle/>
-            <a:p>
-              <a:pPr algn="ctr"/>
-            </a:p>
-          </p:txBody>
-        </p:sp>
-        <p:sp>
-          <p:nvSpPr>
-            <p:cNvPr id="460" name="BrandDeck Diagram Text 2"/>
-            <p:cNvSpPr txBox="1"/>
-            <p:nvPr/>
-          </p:nvSpPr>
-          <p:spPr>
-            <a:xfrm>
-              <a:off x="6096745" y="3923540"/>
-              <a:ext cx="5204326" cy="1130554"/>
-            </a:xfrm>
-            <a:prstGeom prst="rect">
-              <a:avLst/>
-            </a:prstGeom>
-            <a:noFill/>
-          </p:spPr>
-          <p:txBody>
-            <a:bodyPr wrap="square" anchor="ctr" lIns="36576" tIns="18288" rIns="36576" bIns="18288">
-              <a:noAutofit/>
-            </a:bodyPr>
-            <a:lstStyle/>
-            <a:p>
-              <a:pPr algn="l">
-                <a:lnSpc>
-                  <a:spcPct val="110000"/>
-                </a:lnSpc>
-              </a:pPr>
-              <a:r>
-                <a:rPr sz="1600" b="1">
-                  <a:solidFill>
-                    <a:srgbClr val="FFFFFF"/>
-                  </a:solidFill>
-                  <a:latin typeface="Play"/>
-                </a:rPr>
-                <a:t>Отсутствие ответа</a:t>
-              </a:r>
-            </a:p>
-            <a:p>
-              <a:pPr algn="l">
-                <a:lnSpc>
-                  <a:spcPct val="110000"/>
-                </a:lnSpc>
-                <a:spcBef>
-                  <a:spcPts val="400"/>
-                </a:spcBef>
-              </a:pPr>
-              <a:r>
-                <a:rPr sz="1600" b="0">
-                  <a:solidFill>
-                    <a:srgbClr val="FFFFFF"/>
-                  </a:solidFill>
-                  <a:latin typeface="Play"/>
-                </a:rPr>
-                <a:t>Система формирует запрос к специалисту</a:t>
-              </a:r>
-            </a:p>
-          </p:txBody>
-        </p:sp>
-        <p:sp>
-          <p:nvSpPr>
-            <p:cNvPr id="461" name="BrandDeck Diagram Step 3 Badge"/>
-            <p:cNvSpPr/>
-            <p:nvPr/>
-          </p:nvSpPr>
-          <p:spPr>
-            <a:xfrm>
-              <a:off x="5383513" y="5418204"/>
-              <a:ext cx="512064" cy="512064"/>
-            </a:xfrm>
-            <a:prstGeom prst="ellipse">
-              <a:avLst/>
-            </a:prstGeom>
-            <a:solidFill>
-              <a:srgbClr val="006DEB"/>
-            </a:solidFill>
-            <a:ln>
-              <a:noFill/>
-            </a:ln>
-          </p:spPr>
-          <p:txBody>
-            <a:bodyPr rtlCol="0" anchor="ctr" wrap="square" lIns="0" tIns="0" rIns="0" bIns="0">
-              <a:noAutofit/>
-            </a:bodyPr>
-            <a:lstStyle/>
-            <a:p>
-              <a:pPr algn="ctr">
-                <a:lnSpc>
-                  <a:spcPct val="110000"/>
-                </a:lnSpc>
-              </a:pPr>
-              <a:r>
-                <a:rPr sz="1400" b="1">
-                  <a:solidFill>
-                    <a:srgbClr val="FFFFFF"/>
-                  </a:solidFill>
-                  <a:latin typeface="Play"/>
-                </a:rPr>
-                <a:t>03</a:t>
-              </a:r>
-            </a:p>
-          </p:txBody>
-        </p:sp>
-        <p:sp>
-          <p:nvSpPr>
-            <p:cNvPr id="462" name="BrandDeck Diagram Detail Card 3"/>
-            <p:cNvSpPr/>
-            <p:nvPr/>
-          </p:nvSpPr>
-          <p:spPr>
-            <a:xfrm>
-              <a:off x="6005305" y="5108959"/>
-              <a:ext cx="5295766" cy="1130554"/>
-            </a:xfrm>
-            <a:prstGeom prst="roundRect">
-              <a:avLst>
-                <a:gd name="adj" fmla="val 12000"/>
-              </a:avLst>
-            </a:prstGeom>
-            <a:solidFill>
-              <a:srgbClr val="1A1A1A"/>
-            </a:solidFill>
-            <a:ln>
-              <a:noFill/>
-            </a:ln>
-          </p:spPr>
-          <p:txBody>
-            <a:bodyPr rtlCol="0" anchor="ctr"/>
-            <a:lstStyle/>
-            <a:p>
-              <a:pPr algn="ctr"/>
-            </a:p>
-          </p:txBody>
-        </p:sp>
-        <p:sp>
-          <p:nvSpPr>
-            <p:cNvPr id="463" name="BrandDeck Diagram Text 3"/>
-            <p:cNvSpPr txBox="1"/>
-            <p:nvPr/>
-          </p:nvSpPr>
-          <p:spPr>
-            <a:xfrm>
-              <a:off x="6096745" y="5108959"/>
-              <a:ext cx="5204326" cy="1130554"/>
-            </a:xfrm>
-            <a:prstGeom prst="rect">
-              <a:avLst/>
-            </a:prstGeom>
-            <a:noFill/>
-          </p:spPr>
-          <p:txBody>
-            <a:bodyPr wrap="square" anchor="ctr" lIns="36576" tIns="18288" rIns="36576" bIns="18288">
-              <a:noAutofit/>
-            </a:bodyPr>
-            <a:lstStyle/>
-            <a:p>
-              <a:pPr algn="l">
-                <a:lnSpc>
-                  <a:spcPct val="110000"/>
-                </a:lnSpc>
-              </a:pPr>
-              <a:r>
-                <a:rPr sz="1600" b="1">
-                  <a:solidFill>
-                    <a:srgbClr val="FFFFFF"/>
-                  </a:solidFill>
-                  <a:latin typeface="Play"/>
-                </a:rPr>
-                <a:t>Передача контекста</a:t>
-              </a:r>
-            </a:p>
-            <a:p>
-              <a:pPr algn="l">
-                <a:lnSpc>
-                  <a:spcPct val="110000"/>
-                </a:lnSpc>
-                <a:spcBef>
-                  <a:spcPts val="400"/>
-                </a:spcBef>
-              </a:pPr>
-              <a:r>
-                <a:rPr sz="1600" b="0">
-                  <a:solidFill>
-                    <a:srgbClr val="FFFFFF"/>
-                  </a:solidFill>
-                  <a:latin typeface="Play"/>
-                </a:rPr>
-                <a:t>Специалист получает историю и детали вопроса</a:t>
-              </a:r>
-            </a:p>
-          </p:txBody>
-        </p:sp>
-      </p:grpSp>
-    </p:spTree>
-  </p:cSld>
-  <p:clrMapOvr>
-    <a:masterClrMapping/>
-  </p:clrMapOvr>
-</p:sld>
-</file>
-
-<file path=ppt/slides/slide7.xml><?xml version="1.0" encoding="utf-8"?>
-<p:sld xmlns:a="http://schemas.openxmlformats.org/drawingml/2006/main" xmlns:p="http://schemas.openxmlformats.org/presentationml/2006/main" xmlns:r="http://schemas.openxmlformats.org/officeDocument/2006/relationships">
-  <p:cSld>
-    <p:spTree>
-      <p:nvGrpSpPr>
-        <p:cNvPr id="1" name=""/>
-        <p:cNvGrpSpPr/>
-        <p:nvPr/>
-      </p:nvGrpSpPr>
-      <p:grpSpPr/>
-      <p:sp>
-        <p:nvSpPr>
-          <p:cNvPr id="812" name="BrandDeck Text 812"/>
-          <p:cNvSpPr txBox="1"/>
-          <p:nvPr>
-            <p:ph type="title"/>
-          </p:nvPr>
-        </p:nvSpPr>
-        <p:spPr>
-          <a:xfrm>
-            <a:off x="429253" y="424691"/>
-            <a:ext cx="2341359" cy="1167572"/>
-          </a:xfrm>
-          <a:prstGeom prst="rect">
-            <a:avLst/>
-          </a:prstGeom>
-          <a:noFill/>
-          <a:ln>
-            <a:noFill/>
-          </a:ln>
-        </p:spPr>
-        <p:txBody>
-          <a:bodyPr anchorCtr="0" anchor="t" bIns="0" lIns="0" spcFirstLastPara="1" rIns="0" wrap="square" tIns="0">
-            <a:normAutofit/>
-          </a:bodyPr>
-          <a:lstStyle/>
-          <a:p>
-            <a:pPr indent="0" marL="0" rtl="0" algn="l">
-              <a:lnSpc>
-                <a:spcPct val="115000"/>
-              </a:lnSpc>
-              <a:spcBef>
-                <a:spcPts val="0"/>
-              </a:spcBef>
-              <a:spcAft>
-                <a:spcPts val="195"/>
-              </a:spcAft>
-              <a:buClr>
-                <a:schemeClr val="lt1"/>
-              </a:buClr>
-              <a:buSzPts val="3600"/>
-              <a:buFont typeface="Play"/>
-              <a:buNone/>
-            </a:pPr>
-            <a:r>
-              <a:rPr sz="1300"/>
-              <a:t>Сокращение времени поиска ответа и снижение доли обращений, закрытых без участия специалиста</a:t>
-            </a:r>
-            <a:endParaRPr/>
-          </a:p>
-        </p:txBody>
-      </p:sp>
-      <p:pic>
-        <p:nvPicPr>
-          <p:cNvPr id="835" name="BrandDeck Image" descr="сотрудник специалист поддержки"/>
-          <p:cNvPicPr>
-            <a:picLocks noChangeAspect="1"/>
-          </p:cNvPicPr>
-          <p:nvPr/>
-        </p:nvPicPr>
-        <p:blipFill>
-          <a:blip r:embed="rId4"/>
-          <a:srcRect l="20599" r="20599"/>
-          <a:stretch>
-            <a:fillRect/>
-          </a:stretch>
-        </p:blipFill>
-        <p:spPr>
-          <a:xfrm>
-            <a:off x="5362697" y="324571"/>
-            <a:ext cx="6826255" cy="6533429"/>
-          </a:xfrm>
-          <a:prstGeom prst="rect">
-            <a:avLst/>
-          </a:prstGeom>
-        </p:spPr>
-      </p:pic>
-      <p:sp>
-        <p:nvSpPr>
-          <p:cNvPr id="834" name="BrandDeck Body"/>
-          <p:cNvSpPr txBox="1"/>
-          <p:nvPr/>
-        </p:nvSpPr>
-        <p:spPr>
-          <a:xfrm>
-            <a:off x="1036774" y="1729423"/>
-            <a:ext cx="4143042" cy="4717097"/>
-          </a:xfrm>
-          <a:prstGeom prst="rect">
-            <a:avLst/>
-          </a:prstGeom>
-          <a:noFill/>
-        </p:spPr>
-        <p:txBody>
-          <a:bodyPr wrap="square" anchor="t" lIns="36576" rIns="36576" tIns="18288" bIns="18288">
-            <a:normAutofit/>
-          </a:bodyPr>
-          <a:lstStyle/>
-          <a:p>
-            <a:pPr algn="l">
-              <a:lnSpc>
-                <a:spcPct val="115000"/>
-              </a:lnSpc>
-              <a:spcBef>
-                <a:spcPts val="0"/>
-              </a:spcBef>
-              <a:spcAft>
-                <a:spcPts val="240"/>
-              </a:spcAft>
-            </a:pPr>
-            <a:r>
-              <a:rPr sz="1600">
-                <a:solidFill>
-                  <a:srgbClr val="FFFFFF"/>
-                </a:solidFill>
-                <a:latin typeface="Play"/>
-              </a:rPr>
-              <a:t>• Сокращаем время поиска ответа и долю обращений, закрытых без участия специалиста.</a:t>
-            </a:r>
-          </a:p>
-          <a:p>
-            <a:pPr algn="l">
-              <a:lnSpc>
-                <a:spcPct val="115000"/>
-              </a:lnSpc>
-              <a:spcBef>
-                <a:spcPts val="0"/>
-              </a:spcBef>
-              <a:spcAft>
-                <a:spcPts val="240"/>
-              </a:spcAft>
-            </a:pPr>
-            <a:r>
-              <a:rPr sz="1600">
-                <a:solidFill>
-                  <a:srgbClr val="FFFFFF"/>
-                </a:solidFill>
-                <a:latin typeface="Play"/>
-              </a:rPr>
-              <a:t>• Метрики успеха: время поиска и доля автономных ответов.</a:t>
-            </a:r>
-          </a:p>
-          <a:p>
-            <a:pPr algn="l">
-              <a:lnSpc>
-                <a:spcPct val="115000"/>
-              </a:lnSpc>
-              <a:spcBef>
-                <a:spcPts val="0"/>
-              </a:spcBef>
-              <a:spcAft>
-                <a:spcPts val="240"/>
-              </a:spcAft>
-            </a:pPr>
-            <a:r>
-              <a:rPr sz="1600">
-                <a:solidFill>
-                  <a:srgbClr val="FFFFFF"/>
-                </a:solidFill>
-                <a:latin typeface="Play"/>
-              </a:rPr>
-              <a:t>• Цель пилота: подтвердить эффективность на выборке 150 сотрудников.</a:t>
-            </a:r>
-          </a:p>
-        </p:txBody>
-      </p:sp>
-    </p:spTree>
-  </p:cSld>
-  <p:clrMapOvr>
-    <a:masterClrMapping/>
-  </p:clrMapOvr>
-</p:sld>
-</file>
-
-<file path=ppt/slides/slide8.xml><?xml version="1.0" encoding="utf-8"?>
-<p:sld xmlns:a="http://schemas.openxmlformats.org/drawingml/2006/main" xmlns:p="http://schemas.openxmlformats.org/presentationml/2006/main" xmlns:r="http://schemas.openxmlformats.org/officeDocument/2006/relationships">
-  <p:cSld>
-    <p:spTree>
-      <p:nvGrpSpPr>
-        <p:cNvPr id="1" name=""/>
-        <p:cNvGrpSpPr/>
-        <p:nvPr/>
-      </p:nvGrpSpPr>
-      <p:grpSpPr/>
-      <p:sp>
-        <p:nvSpPr>
-          <p:cNvPr id="459" name="BrandDeck Text 459"/>
-          <p:cNvSpPr txBox="1"/>
-          <p:nvPr>
-            <p:ph type="title"/>
-          </p:nvPr>
-        </p:nvSpPr>
-        <p:spPr>
-          <a:xfrm>
-            <a:off x="429253" y="424691"/>
-            <a:ext cx="7827311" cy="1167572"/>
-          </a:xfrm>
-          <a:prstGeom prst="rect">
-            <a:avLst/>
-          </a:prstGeom>
-          <a:noFill/>
-          <a:ln>
-            <a:noFill/>
-          </a:ln>
-        </p:spPr>
-        <p:txBody>
-          <a:bodyPr anchorCtr="0" anchor="t" bIns="0" lIns="0" spcFirstLastPara="1" rIns="0" wrap="square" tIns="0">
-            <a:normAutofit/>
-          </a:bodyPr>
-          <a:lstStyle/>
-          <a:p>
-            <a:pPr indent="0" marL="0" rtl="0" algn="l">
-              <a:lnSpc>
-                <a:spcPct val="115000"/>
-              </a:lnSpc>
-              <a:spcBef>
-                <a:spcPts val="0"/>
-              </a:spcBef>
-              <a:spcAft>
-                <a:spcPts val="300"/>
-              </a:spcAft>
-              <a:buClr>
-                <a:schemeClr val="lt1"/>
-              </a:buClr>
-              <a:buSzPts val="3600"/>
-              <a:buFont typeface="Play"/>
-              <a:buNone/>
-            </a:pPr>
-            <a:r>
-              <a:rPr sz="2000"/>
-              <a:t>Пилотный запуск ограничен двумя подразделениями и 150 сотрудниками в течение 6 недель</a:t>
-            </a:r>
-            <a:endParaRPr/>
-          </a:p>
-        </p:txBody>
-      </p:sp>
-      <p:grpSp>
-        <p:nvGrpSpPr>
-          <p:cNvPr id="2" name="BrandDeck Diagram funnel" descr="funnel: Всего сотрудников 150 сотрудников из 2 подразделений; Длительность теста 6 недель пилотного запуска; Цель пилота Измерить эффективность ИИ-помощника"/>
-          <p:cNvGrpSpPr/>
-          <p:nvPr/>
-        </p:nvGrpSpPr>
-        <p:grpSpPr>
-          <a:xfrm>
-            <a:off x="428183" y="1693931"/>
-            <a:ext cx="10721297" cy="3470137"/>
-            <a:chOff x="428183" y="1693931"/>
-            <a:chExt cx="10721297" cy="3470137"/>
-          </a:xfrm>
-        </p:grpSpPr>
-        <p:sp>
-          <p:nvSpPr>
-            <p:cNvPr id="468" name="BrandDeck Diagram Level 1"/>
-            <p:cNvSpPr/>
-            <p:nvPr/>
-          </p:nvSpPr>
-          <p:spPr>
-            <a:xfrm>
-              <a:off x="428183" y="1693931"/>
-              <a:ext cx="4697876" cy="1120136"/>
-            </a:xfrm>
-            <a:custGeom>
-              <a:avLst/>
-              <a:gdLst/>
-              <a:ahLst/>
-              <a:cxnLst/>
-              <a:rect l="l" t="t" r="r" b="b"/>
-              <a:pathLst>
-                <a:path w="5138" h="1225" stroke="0">
-                  <a:moveTo>
-                    <a:pt x="0" y="0"/>
-                  </a:moveTo>
-                  <a:lnTo>
-                    <a:pt x="5138" y="0"/>
-                  </a:lnTo>
-                  <a:lnTo>
-                    <a:pt x="4580" y="1225"/>
-                  </a:lnTo>
-                  <a:lnTo>
-                    <a:pt x="558" y="1225"/>
-                  </a:lnTo>
-                  <a:close/>
-                </a:path>
-              </a:pathLst>
-            </a:custGeom>
-            <a:solidFill>
-              <a:srgbClr val="003676"/>
-            </a:solidFill>
-            <a:ln w="0">
-              <a:noFill/>
-            </a:ln>
-          </p:spPr>
-          <p:txBody>
-            <a:bodyPr rtlCol="0" anchor="ctr" wrap="square" lIns="18288" tIns="0" rIns="18288" bIns="0">
-              <a:noAutofit/>
-            </a:bodyPr>
-            <a:lstStyle/>
-            <a:p>
-              <a:pPr algn="ctr">
-                <a:lnSpc>
-                  <a:spcPct val="110000"/>
-                </a:lnSpc>
-              </a:pPr>
-              <a:r>
-                <a:rPr sz="1400" b="1">
-                  <a:solidFill>
-                    <a:srgbClr val="FFFFFF"/>
-                  </a:solidFill>
-                  <a:latin typeface="Play"/>
-                </a:rPr>
-                <a:t>01</a:t>
-              </a:r>
-            </a:p>
-          </p:txBody>
-        </p:sp>
-        <p:sp>
-          <p:nvSpPr>
-            <p:cNvPr id="469" name="BrandDeck Diagram Text 1"/>
-            <p:cNvSpPr txBox="1"/>
-            <p:nvPr/>
-          </p:nvSpPr>
-          <p:spPr>
-            <a:xfrm>
-              <a:off x="5412876" y="1693931"/>
-              <a:ext cx="5736604" cy="1120136"/>
-            </a:xfrm>
-            <a:prstGeom prst="rect">
-              <a:avLst/>
-            </a:prstGeom>
-            <a:noFill/>
-          </p:spPr>
-          <p:txBody>
-            <a:bodyPr wrap="square" anchor="ctr" lIns="36576" tIns="18288" rIns="36576" bIns="18288">
-              <a:noAutofit/>
-            </a:bodyPr>
-            <a:lstStyle/>
-            <a:p>
-              <a:pPr algn="l">
-                <a:lnSpc>
-                  <a:spcPct val="110000"/>
-                </a:lnSpc>
-              </a:pPr>
-              <a:r>
-                <a:rPr sz="1600" b="1">
-                  <a:solidFill>
-                    <a:srgbClr val="FFFFFF"/>
-                  </a:solidFill>
-                  <a:latin typeface="Play"/>
-                </a:rPr>
-                <a:t>Всего сотрудников</a:t>
-              </a:r>
-            </a:p>
-            <a:p>
-              <a:pPr algn="l">
-                <a:lnSpc>
-                  <a:spcPct val="110000"/>
-                </a:lnSpc>
-                <a:spcBef>
-                  <a:spcPts val="400"/>
-                </a:spcBef>
-              </a:pPr>
-              <a:r>
-                <a:rPr sz="1600" b="0">
-                  <a:solidFill>
-                    <a:srgbClr val="FFFFFF"/>
-                  </a:solidFill>
-                  <a:latin typeface="Play"/>
-                </a:rPr>
-                <a:t>150 сотрудников из 2 подразделений</a:t>
-              </a:r>
-            </a:p>
-          </p:txBody>
-        </p:sp>
-        <p:sp>
-          <p:nvSpPr>
-            <p:cNvPr id="470" name="BrandDeck Diagram Level 2"/>
-            <p:cNvSpPr/>
-            <p:nvPr/>
-          </p:nvSpPr>
-          <p:spPr>
-            <a:xfrm>
-              <a:off x="963441" y="2868931"/>
-              <a:ext cx="3627359" cy="1120136"/>
-            </a:xfrm>
-            <a:custGeom>
-              <a:avLst/>
-              <a:gdLst/>
-              <a:ahLst/>
-              <a:cxnLst/>
-              <a:rect l="l" t="t" r="r" b="b"/>
-              <a:pathLst>
-                <a:path w="3967" h="1225" stroke="0">
-                  <a:moveTo>
-                    <a:pt x="0" y="0"/>
-                  </a:moveTo>
-                  <a:lnTo>
-                    <a:pt x="3967" y="0"/>
-                  </a:lnTo>
-                  <a:lnTo>
-                    <a:pt x="3409" y="1225"/>
-                  </a:lnTo>
-                  <a:lnTo>
-                    <a:pt x="558" y="1225"/>
-                  </a:lnTo>
-                  <a:close/>
-                </a:path>
-              </a:pathLst>
-            </a:custGeom>
-            <a:solidFill>
-              <a:srgbClr val="0052B0"/>
-            </a:solidFill>
-            <a:ln w="0">
-              <a:noFill/>
-            </a:ln>
-          </p:spPr>
-          <p:txBody>
-            <a:bodyPr rtlCol="0" anchor="ctr" wrap="square" lIns="18288" tIns="0" rIns="18288" bIns="0">
-              <a:noAutofit/>
-            </a:bodyPr>
-            <a:lstStyle/>
-            <a:p>
-              <a:pPr algn="ctr">
-                <a:lnSpc>
-                  <a:spcPct val="110000"/>
-                </a:lnSpc>
-              </a:pPr>
-              <a:r>
-                <a:rPr sz="1400" b="1">
-                  <a:solidFill>
-                    <a:srgbClr val="FFFFFF"/>
-                  </a:solidFill>
-                  <a:latin typeface="Play"/>
-                </a:rPr>
-                <a:t>02</a:t>
-              </a:r>
-            </a:p>
-          </p:txBody>
-        </p:sp>
-        <p:sp>
-          <p:nvSpPr>
-            <p:cNvPr id="471" name="BrandDeck Diagram Text 2"/>
-            <p:cNvSpPr txBox="1"/>
-            <p:nvPr/>
-          </p:nvSpPr>
-          <p:spPr>
-            <a:xfrm>
-              <a:off x="5412876" y="2868931"/>
-              <a:ext cx="5736604" cy="1120136"/>
-            </a:xfrm>
-            <a:prstGeom prst="rect">
-              <a:avLst/>
-            </a:prstGeom>
-            <a:noFill/>
-          </p:spPr>
-          <p:txBody>
-            <a:bodyPr wrap="square" anchor="ctr" lIns="36576" tIns="18288" rIns="36576" bIns="18288">
-              <a:noAutofit/>
-            </a:bodyPr>
-            <a:lstStyle/>
-            <a:p>
-              <a:pPr algn="l">
-                <a:lnSpc>
-                  <a:spcPct val="110000"/>
-                </a:lnSpc>
-              </a:pPr>
-              <a:r>
-                <a:rPr sz="1600" b="1">
-                  <a:solidFill>
-                    <a:srgbClr val="FFFFFF"/>
-                  </a:solidFill>
-                  <a:latin typeface="Play"/>
-                </a:rPr>
-                <a:t>Длительность теста</a:t>
-              </a:r>
-            </a:p>
-            <a:p>
-              <a:pPr algn="l">
-                <a:lnSpc>
-                  <a:spcPct val="110000"/>
-                </a:lnSpc>
-                <a:spcBef>
-                  <a:spcPts val="400"/>
-                </a:spcBef>
-              </a:pPr>
-              <a:r>
-                <a:rPr sz="1600" b="0">
-                  <a:solidFill>
-                    <a:srgbClr val="FFFFFF"/>
-                  </a:solidFill>
-                  <a:latin typeface="Play"/>
-                </a:rPr>
-                <a:t>6 недель пилотного запуска</a:t>
-              </a:r>
-            </a:p>
-          </p:txBody>
-        </p:sp>
-        <p:sp>
-          <p:nvSpPr>
-            <p:cNvPr id="472" name="BrandDeck Diagram Level 3"/>
-            <p:cNvSpPr/>
-            <p:nvPr/>
-          </p:nvSpPr>
-          <p:spPr>
-            <a:xfrm>
-              <a:off x="1498700" y="4043932"/>
-              <a:ext cx="2556842" cy="1120136"/>
-            </a:xfrm>
-            <a:custGeom>
-              <a:avLst/>
-              <a:gdLst/>
-              <a:ahLst/>
-              <a:cxnLst/>
-              <a:rect l="l" t="t" r="r" b="b"/>
-              <a:pathLst>
-                <a:path w="2796" h="1225" stroke="0">
-                  <a:moveTo>
-                    <a:pt x="0" y="0"/>
-                  </a:moveTo>
-                  <a:lnTo>
-                    <a:pt x="2796" y="0"/>
-                  </a:lnTo>
-                  <a:lnTo>
-                    <a:pt x="2238" y="1225"/>
-                  </a:lnTo>
-                  <a:lnTo>
-                    <a:pt x="558" y="1225"/>
-                  </a:lnTo>
-                  <a:close/>
-                </a:path>
-              </a:pathLst>
-            </a:custGeom>
-            <a:solidFill>
-              <a:srgbClr val="006DEB"/>
-            </a:solidFill>
-            <a:ln w="0">
-              <a:noFill/>
-            </a:ln>
-          </p:spPr>
-          <p:txBody>
-            <a:bodyPr rtlCol="0" anchor="ctr" wrap="square" lIns="18288" tIns="0" rIns="18288" bIns="0">
-              <a:noAutofit/>
-            </a:bodyPr>
-            <a:lstStyle/>
-            <a:p>
-              <a:pPr algn="ctr">
-                <a:lnSpc>
-                  <a:spcPct val="110000"/>
-                </a:lnSpc>
-              </a:pPr>
-              <a:r>
-                <a:rPr sz="1400" b="1">
-                  <a:solidFill>
-                    <a:srgbClr val="FFFFFF"/>
-                  </a:solidFill>
-                  <a:latin typeface="Play"/>
-                </a:rPr>
-                <a:t>03</a:t>
-              </a:r>
-            </a:p>
-          </p:txBody>
-        </p:sp>
-        <p:sp>
-          <p:nvSpPr>
-            <p:cNvPr id="473" name="BrandDeck Diagram Text 3"/>
-            <p:cNvSpPr txBox="1"/>
-            <p:nvPr/>
-          </p:nvSpPr>
-          <p:spPr>
-            <a:xfrm>
-              <a:off x="5412876" y="4043932"/>
-              <a:ext cx="5736604" cy="1120136"/>
-            </a:xfrm>
-            <a:prstGeom prst="rect">
-              <a:avLst/>
-            </a:prstGeom>
-            <a:noFill/>
-          </p:spPr>
-          <p:txBody>
-            <a:bodyPr wrap="square" anchor="ctr" lIns="36576" tIns="18288" rIns="36576" bIns="18288">
-              <a:noAutofit/>
-            </a:bodyPr>
-            <a:lstStyle/>
-            <a:p>
-              <a:pPr algn="l">
-                <a:lnSpc>
-                  <a:spcPct val="110000"/>
-                </a:lnSpc>
-              </a:pPr>
-              <a:r>
-                <a:rPr sz="1600" b="1">
-                  <a:solidFill>
-                    <a:srgbClr val="FFFFFF"/>
-                  </a:solidFill>
-                  <a:latin typeface="Play"/>
-                </a:rPr>
-                <a:t>Цель пилота</a:t>
-              </a:r>
-            </a:p>
-            <a:p>
-              <a:pPr algn="l">
-                <a:lnSpc>
-                  <a:spcPct val="110000"/>
-                </a:lnSpc>
-                <a:spcBef>
-                  <a:spcPts val="400"/>
-                </a:spcBef>
-              </a:pPr>
-              <a:r>
-                <a:rPr sz="1600" b="0">
-                  <a:solidFill>
-                    <a:srgbClr val="FFFFFF"/>
-                  </a:solidFill>
-                  <a:latin typeface="Play"/>
-                </a:rPr>
-                <a:t>Измерить эффективность ИИ-помощника</a:t>
+                <a:t>150 сотрудников</a:t>
               </a:r>
             </a:p>
           </p:txBody>
@@ -12041,7 +12450,7 @@
       <p:grpSpPr/>
       <p:sp>
         <p:nvSpPr>
-          <p:cNvPr id="703" name="BrandDeck Text 703"/>
+          <p:cNvPr id="486" name="BrandDeck Text 486"/>
           <p:cNvSpPr txBox="1"/>
           <p:nvPr>
             <p:ph type="title"/>
@@ -12061,7 +12470,7 @@
           </a:ln>
         </p:spPr>
         <p:txBody>
-          <a:bodyPr anchorCtr="0" anchor="t" bIns="0" lIns="0" spcFirstLastPara="1" rIns="0" wrap="square" tIns="0">
+          <a:bodyPr anchorCtr="0" anchor="t" bIns="0" lIns="0" spcFirstLastPara="1" rIns="0" wrap="square" tIns="0" vert="horz">
             <a:normAutofit/>
           </a:bodyPr>
           <a:lstStyle/>
@@ -12074,7 +12483,7 @@
                 <a:spcPts val="0"/>
               </a:spcBef>
               <a:spcAft>
-                <a:spcPts val="300"/>
+                <a:spcPts val="359"/>
               </a:spcAft>
               <a:buClr>
                 <a:schemeClr val="lt1"/>
@@ -12084,8 +12493,8 @@
               <a:buNone/>
             </a:pPr>
             <a:r>
-              <a:rPr sz="2000"/>
-              <a:t>Измерим время поиска ответа и долю обращений, закрытых ИИ без участия специалиста</a:t>
+              <a:rPr sz="2400"/>
+              <a:t>Успех измеряется временем поиска ответа и долей обращений, закрытых без специалиста</a:t>
             </a:r>
             <a:endParaRPr/>
           </a:p>
@@ -12093,15 +12502,15 @@
       </p:sp>
       <p:graphicFrame>
         <p:nvGraphicFramePr>
-          <p:cNvPr id="704" name="BrandDeck Table"/>
+          <p:cNvPr id="505" name="BrandDeck Table"/>
           <p:cNvGraphicFramePr>
             <a:graphicFrameLocks noGrp="1"/>
           </p:cNvGraphicFramePr>
           <p:nvPr/>
         </p:nvGraphicFramePr>
         <p:xfrm>
-          <a:off x="429768" y="1729423"/>
-          <a:ext cx="7827263" cy="4351337"/>
+          <a:off x="437111" y="2883834"/>
+          <a:ext cx="11303118" cy="2889804"/>
         </p:xfrm>
         <a:graphic>
           <a:graphicData uri="http://schemas.openxmlformats.org/drawingml/2006/table">
@@ -12110,11 +12519,10 @@
                 <a:tableStyleId>{5C22544A-7EE6-4342-B048-85BDC9FD1C3A}</a:tableStyleId>
               </a:tblPr>
               <a:tblGrid>
-                <a:gridCol w="2609087"/>
-                <a:gridCol w="2609087"/>
-                <a:gridCol w="2609089"/>
+                <a:gridCol w="5651559"/>
+                <a:gridCol w="5651559"/>
               </a:tblGrid>
-              <a:tr h="1307359">
+              <a:tr h="963268">
                 <a:tc>
                   <a:txBody>
                     <a:bodyPr/>
@@ -12128,7 +12536,7 @@
                           </a:solidFill>
                           <a:latin typeface="Play"/>
                         </a:rPr>
-                        <a:t>Показатель</a:t>
+                        <a:t>Метрика</a:t>
                       </a:r>
                     </a:p>
                   </a:txBody>
@@ -12151,30 +12559,7 @@
                           </a:solidFill>
                           <a:latin typeface="Play"/>
                         </a:rPr>
-                        <a:t>Метод измерения</a:t>
-                      </a:r>
-                    </a:p>
-                  </a:txBody>
-                  <a:tcPr marL="54864" marR="54864" anchor="ctr">
-                    <a:solidFill>
-                      <a:srgbClr val="006DEB"/>
-                    </a:solidFill>
-                  </a:tcPr>
-                </a:tc>
-                <a:tc>
-                  <a:txBody>
-                    <a:bodyPr/>
-                    <a:lstStyle/>
-                    <a:p>
-                      <a:pPr algn="l"/>
-                      <a:r>
-                        <a:rPr sz="1300" b="1">
-                          <a:solidFill>
-                            <a:srgbClr val="FFFFFF"/>
-                          </a:solidFill>
-                          <a:latin typeface="Play"/>
-                        </a:rPr>
-                        <a:t>Период сбора</a:t>
+                        <a:t>Что измеряется</a:t>
                       </a:r>
                     </a:p>
                   </a:txBody>
@@ -12185,7 +12570,7 @@
                   </a:tcPr>
                 </a:tc>
               </a:tr>
-              <a:tr h="1521989">
+              <a:tr h="963268">
                 <a:tc>
                   <a:txBody>
                     <a:bodyPr/>
@@ -12222,30 +12607,7 @@
                           </a:solidFill>
                           <a:latin typeface="Play"/>
                         </a:rPr>
-                        <a:t>Среднее время до получения инструкции</a:t>
-                      </a:r>
-                    </a:p>
-                  </a:txBody>
-                  <a:tcPr marL="54864" marR="54864" anchor="ctr">
-                    <a:solidFill>
-                      <a:srgbClr val="1A1A1A"/>
-                    </a:solidFill>
-                  </a:tcPr>
-                </a:tc>
-                <a:tc>
-                  <a:txBody>
-                    <a:bodyPr/>
-                    <a:lstStyle/>
-                    <a:p>
-                      <a:pPr algn="l"/>
-                      <a:r>
-                        <a:rPr sz="1300" b="0">
-                          <a:solidFill>
-                            <a:srgbClr val="FFFFFF"/>
-                          </a:solidFill>
-                          <a:latin typeface="Play"/>
-                        </a:rPr>
-                        <a:t>6 недель пилота</a:t>
+                        <a:t>Сколько времени сотрудник тратит на поиск инструкции</a:t>
                       </a:r>
                     </a:p>
                   </a:txBody>
@@ -12256,7 +12618,7 @@
                   </a:tcPr>
                 </a:tc>
               </a:tr>
-              <a:tr h="1521989">
+              <a:tr h="963268">
                 <a:tc>
                   <a:txBody>
                     <a:bodyPr/>
@@ -12293,30 +12655,7 @@
                           </a:solidFill>
                           <a:latin typeface="Play"/>
                         </a:rPr>
-                        <a:t>Процент закрытых ИИ вопросов</a:t>
-                      </a:r>
-                    </a:p>
-                  </a:txBody>
-                  <a:tcPr marL="54864" marR="54864" anchor="ctr">
-                    <a:solidFill>
-                      <a:srgbClr val="1A1A1A"/>
-                    </a:solidFill>
-                  </a:tcPr>
-                </a:tc>
-                <a:tc>
-                  <a:txBody>
-                    <a:bodyPr/>
-                    <a:lstStyle/>
-                    <a:p>
-                      <a:pPr algn="l"/>
-                      <a:r>
-                        <a:rPr sz="1300" b="0">
-                          <a:solidFill>
-                            <a:srgbClr val="FFFFFF"/>
-                          </a:solidFill>
-                          <a:latin typeface="Play"/>
-                        </a:rPr>
-                        <a:t>6 недель пилота</a:t>
+                        <a:t>Процент вопросов, закрытых ИИ-помощником самостоятельно</a:t>
                       </a:r>
                     </a:p>
                   </a:txBody>
